--- a/docs/Lectures/Week07/Lecture07_GEOG2475_Thursday.pptx
+++ b/docs/Lectures/Week07/Lecture07_GEOG2475_Thursday.pptx
@@ -9,7 +9,7 @@
     <p:sldMasterId id="2147483709" r:id="rId5"/>
   </p:sldMasterIdLst>
   <p:notesMasterIdLst>
-    <p:notesMasterId r:id="rId35"/>
+    <p:notesMasterId r:id="rId36"/>
   </p:notesMasterIdLst>
   <p:sldIdLst>
     <p:sldId id="914" r:id="rId6"/>
@@ -28,19 +28,20 @@
     <p:sldId id="556" r:id="rId19"/>
     <p:sldId id="656" r:id="rId20"/>
     <p:sldId id="666" r:id="rId21"/>
-    <p:sldId id="533" r:id="rId22"/>
-    <p:sldId id="535" r:id="rId23"/>
-    <p:sldId id="537" r:id="rId24"/>
-    <p:sldId id="538" r:id="rId25"/>
-    <p:sldId id="539" r:id="rId26"/>
-    <p:sldId id="536" r:id="rId27"/>
-    <p:sldId id="541" r:id="rId28"/>
-    <p:sldId id="667" r:id="rId29"/>
-    <p:sldId id="540" r:id="rId30"/>
-    <p:sldId id="665" r:id="rId31"/>
-    <p:sldId id="553" r:id="rId32"/>
-    <p:sldId id="668" r:id="rId33"/>
-    <p:sldId id="270" r:id="rId34"/>
+    <p:sldId id="1648" r:id="rId22"/>
+    <p:sldId id="533" r:id="rId23"/>
+    <p:sldId id="535" r:id="rId24"/>
+    <p:sldId id="537" r:id="rId25"/>
+    <p:sldId id="538" r:id="rId26"/>
+    <p:sldId id="539" r:id="rId27"/>
+    <p:sldId id="536" r:id="rId28"/>
+    <p:sldId id="541" r:id="rId29"/>
+    <p:sldId id="667" r:id="rId30"/>
+    <p:sldId id="540" r:id="rId31"/>
+    <p:sldId id="665" r:id="rId32"/>
+    <p:sldId id="553" r:id="rId33"/>
+    <p:sldId id="668" r:id="rId34"/>
+    <p:sldId id="270" r:id="rId35"/>
   </p:sldIdLst>
   <p:sldSz cx="8229600" cy="5143500"/>
   <p:notesSz cx="7010400" cy="9296400"/>
@@ -241,7 +242,7 @@
             <a:fld id="{66C520B4-85AA-9542-8CF7-3D2DDCE6041D}" type="datetimeFigureOut">
               <a:rPr lang="en-US" smtClean="0"/>
               <a:pPr/>
-              <a:t>9/29/2025</a:t>
+              <a:t>10/1/2025</a:t>
             </a:fld>
             <a:endParaRPr lang="en-US"/>
           </a:p>
@@ -1202,7 +1203,7 @@
             <a:fld id="{56507943-197E-CE46-82F0-5A323A24AE7A}" type="slidenum">
               <a:rPr lang="en-US" smtClean="0"/>
               <a:pPr/>
-              <a:t>28</a:t>
+              <a:t>29</a:t>
             </a:fld>
             <a:endParaRPr lang="en-US"/>
           </a:p>
@@ -1287,7 +1288,7 @@
             <a:fld id="{56507943-197E-CE46-82F0-5A323A24AE7A}" type="slidenum">
               <a:rPr lang="en-US" smtClean="0"/>
               <a:pPr/>
-              <a:t>29</a:t>
+              <a:t>30</a:t>
             </a:fld>
             <a:endParaRPr lang="en-US"/>
           </a:p>
@@ -1544,7 +1545,7 @@
           <a:p>
             <a:fld id="{06A0FD2F-556E-43A6-BD1A-AE05D71D5ACE}" type="datetime1">
               <a:rPr lang="en-US" smtClean="0"/>
-              <a:t>9/29/2025</a:t>
+              <a:t>10/1/2025</a:t>
             </a:fld>
             <a:endParaRPr lang="en-US"/>
           </a:p>
@@ -1748,7 +1749,7 @@
           <a:p>
             <a:fld id="{A0F15864-78C5-4237-8A12-0D1FD4E5F0BD}" type="datetime1">
               <a:rPr lang="en-US" smtClean="0"/>
-              <a:t>9/29/2025</a:t>
+              <a:t>10/1/2025</a:t>
             </a:fld>
             <a:endParaRPr lang="en-US"/>
           </a:p>
@@ -2111,7 +2112,7 @@
           <a:p>
             <a:fld id="{AB9BBA17-EAD5-43A8-9481-F99B1E8564DB}" type="datetime1">
               <a:rPr lang="en-US" smtClean="0"/>
-              <a:t>9/29/2025</a:t>
+              <a:t>10/1/2025</a:t>
             </a:fld>
             <a:endParaRPr lang="en-US"/>
           </a:p>
@@ -2423,7 +2424,7 @@
           <a:p>
             <a:fld id="{C6B0FEA4-C6CA-4262-94C7-989766AA3A47}" type="datetime1">
               <a:rPr lang="en-US" smtClean="0"/>
-              <a:t>9/29/2025</a:t>
+              <a:t>10/1/2025</a:t>
             </a:fld>
             <a:endParaRPr lang="en-US"/>
           </a:p>
@@ -2622,7 +2623,7 @@
           <a:p>
             <a:fld id="{6F65A5F7-BE7B-4360-B821-FCDB8E9197AC}" type="datetime1">
               <a:rPr lang="en-US" smtClean="0"/>
-              <a:t>9/29/2025</a:t>
+              <a:t>10/1/2025</a:t>
             </a:fld>
             <a:endParaRPr lang="en-US"/>
           </a:p>
@@ -2935,7 +2936,7 @@
           <a:p>
             <a:fld id="{6145D492-0F60-495A-BAAC-3C877C1D64A2}" type="datetime1">
               <a:rPr lang="en-US" smtClean="0"/>
-              <a:t>9/29/2025</a:t>
+              <a:t>10/1/2025</a:t>
             </a:fld>
             <a:endParaRPr lang="en-US"/>
           </a:p>
@@ -3189,7 +3190,7 @@
           <a:p>
             <a:fld id="{4A322FED-C97B-4E3C-B05B-1278829CCA0F}" type="datetime1">
               <a:rPr lang="en-US" smtClean="0"/>
-              <a:t>9/29/2025</a:t>
+              <a:t>10/1/2025</a:t>
             </a:fld>
             <a:endParaRPr lang="en-US"/>
           </a:p>
@@ -3612,7 +3613,7 @@
           <a:p>
             <a:fld id="{1BBF91E7-DD27-45EE-9FAC-A58839C2E3FB}" type="datetime1">
               <a:rPr lang="en-US" smtClean="0"/>
-              <a:t>9/29/2025</a:t>
+              <a:t>10/1/2025</a:t>
             </a:fld>
             <a:endParaRPr lang="en-US"/>
           </a:p>
@@ -3736,7 +3737,7 @@
           <a:p>
             <a:fld id="{470DB943-D34E-498D-BB5B-1BC0D01A4C3C}" type="datetime1">
               <a:rPr lang="en-US" smtClean="0"/>
-              <a:t>9/29/2025</a:t>
+              <a:t>10/1/2025</a:t>
             </a:fld>
             <a:endParaRPr lang="en-US"/>
           </a:p>
@@ -3832,7 +3833,7 @@
           <a:p>
             <a:fld id="{0EF88AC7-A362-47DE-B037-3A7E785BA73D}" type="datetime1">
               <a:rPr lang="en-US" smtClean="0"/>
-              <a:t>9/29/2025</a:t>
+              <a:t>10/1/2025</a:t>
             </a:fld>
             <a:endParaRPr lang="en-US"/>
           </a:p>
@@ -4210,7 +4211,7 @@
           <a:p>
             <a:fld id="{1E09BAED-B7FC-4220-8037-60663F890984}" type="datetime1">
               <a:rPr lang="en-US" smtClean="0"/>
-              <a:t>9/29/2025</a:t>
+              <a:t>10/1/2025</a:t>
             </a:fld>
             <a:endParaRPr lang="en-US"/>
           </a:p>
@@ -4419,7 +4420,7 @@
           <a:p>
             <a:fld id="{C4CA2D96-DD5E-4EE6-BA39-19B5C56AF1F2}" type="datetime1">
               <a:rPr lang="en-US" smtClean="0"/>
-              <a:t>9/29/2025</a:t>
+              <a:t>10/1/2025</a:t>
             </a:fld>
             <a:endParaRPr lang="en-US"/>
           </a:p>
@@ -4702,7 +4703,7 @@
           <a:p>
             <a:fld id="{BB3C0B96-D43B-410F-A514-3967CACDF6C4}" type="datetime1">
               <a:rPr lang="en-US" smtClean="0"/>
-              <a:t>9/29/2025</a:t>
+              <a:t>10/1/2025</a:t>
             </a:fld>
             <a:endParaRPr lang="en-US"/>
           </a:p>
@@ -4894,7 +4895,7 @@
           <a:p>
             <a:fld id="{C63DFB46-027F-4778-8182-714012A6E051}" type="datetime1">
               <a:rPr lang="en-US" smtClean="0"/>
-              <a:t>9/29/2025</a:t>
+              <a:t>10/1/2025</a:t>
             </a:fld>
             <a:endParaRPr lang="en-US"/>
           </a:p>
@@ -5257,7 +5258,7 @@
           <a:p>
             <a:fld id="{770FD05A-9631-4BEE-9AA4-5575ADA850E9}" type="datetime1">
               <a:rPr lang="en-US" smtClean="0"/>
-              <a:t>9/29/2025</a:t>
+              <a:t>10/1/2025</a:t>
             </a:fld>
             <a:endParaRPr lang="en-US"/>
           </a:p>
@@ -5569,7 +5570,7 @@
           <a:p>
             <a:fld id="{ED291B17-9318-49DB-B28B-6E5994AE9581}" type="datetime1">
               <a:rPr lang="en-US" smtClean="0"/>
-              <a:t>9/29/2025</a:t>
+              <a:t>10/1/2025</a:t>
             </a:fld>
             <a:endParaRPr lang="en-US" dirty="0"/>
           </a:p>
@@ -5767,7 +5768,7 @@
           <a:p>
             <a:fld id="{78DD82B9-B8EE-4375-B6FF-88FA6ABB15D9}" type="datetime1">
               <a:rPr lang="en-US" smtClean="0"/>
-              <a:t>9/29/2025</a:t>
+              <a:t>10/1/2025</a:t>
             </a:fld>
             <a:endParaRPr lang="en-US" dirty="0"/>
           </a:p>
@@ -6079,7 +6080,7 @@
           <a:p>
             <a:fld id="{B2497495-0637-405E-AE64-5CC7506D51F5}" type="datetime1">
               <a:rPr lang="en-US" smtClean="0"/>
-              <a:t>9/29/2025</a:t>
+              <a:t>10/1/2025</a:t>
             </a:fld>
             <a:endParaRPr lang="en-US" dirty="0"/>
           </a:p>
@@ -6332,7 +6333,7 @@
           <a:p>
             <a:fld id="{7BFFD690-9426-415D-8B65-26881E07B2D4}" type="datetime1">
               <a:rPr lang="en-US" smtClean="0"/>
-              <a:t>9/29/2025</a:t>
+              <a:t>10/1/2025</a:t>
             </a:fld>
             <a:endParaRPr lang="en-US" dirty="0"/>
           </a:p>
@@ -6754,7 +6755,7 @@
           <a:p>
             <a:fld id="{04C4989A-474C-40DE-95B9-011C28B71673}" type="datetime1">
               <a:rPr lang="en-US" smtClean="0"/>
-              <a:t>9/29/2025</a:t>
+              <a:t>10/1/2025</a:t>
             </a:fld>
             <a:endParaRPr lang="en-US" dirty="0"/>
           </a:p>
@@ -6877,7 +6878,7 @@
           <a:p>
             <a:fld id="{5DB4ED54-5B5E-4A04-93D3-5772E3CE3818}" type="datetime1">
               <a:rPr lang="en-US" smtClean="0"/>
-              <a:t>9/29/2025</a:t>
+              <a:t>10/1/2025</a:t>
             </a:fld>
             <a:endParaRPr lang="en-US" dirty="0"/>
           </a:p>
@@ -6972,7 +6973,7 @@
           <a:p>
             <a:fld id="{4EDE50D6-574B-40AF-946F-D52A04ADE379}" type="datetime1">
               <a:rPr lang="en-US" smtClean="0"/>
-              <a:t>9/29/2025</a:t>
+              <a:t>10/1/2025</a:t>
             </a:fld>
             <a:endParaRPr lang="en-US" dirty="0"/>
           </a:p>
@@ -7272,7 +7273,7 @@
           <a:p>
             <a:fld id="{2C2D4BC3-0B93-4E0B-AE53-3E432262C0E4}" type="datetime1">
               <a:rPr lang="en-US" smtClean="0"/>
-              <a:t>9/29/2025</a:t>
+              <a:t>10/1/2025</a:t>
             </a:fld>
             <a:endParaRPr lang="en-US"/>
           </a:p>
@@ -7662,7 +7663,7 @@
           <a:p>
             <a:fld id="{D82884F1-FFEA-405F-9602-3DCA865EDA4E}" type="datetime1">
               <a:rPr lang="en-US" smtClean="0"/>
-              <a:t>9/29/2025</a:t>
+              <a:t>10/1/2025</a:t>
             </a:fld>
             <a:endParaRPr lang="en-US" dirty="0"/>
           </a:p>
@@ -7955,7 +7956,7 @@
           <a:p>
             <a:fld id="{7E18DB4A-8810-4A10-AD5C-D5E2C667F5B3}" type="datetime1">
               <a:rPr lang="en-US" smtClean="0"/>
-              <a:t>9/29/2025</a:t>
+              <a:t>10/1/2025</a:t>
             </a:fld>
             <a:endParaRPr lang="en-US" dirty="0"/>
           </a:p>
@@ -8147,7 +8148,7 @@
           <a:p>
             <a:fld id="{2CED4963-E985-44C4-B8C4-FDD613B7C2F8}" type="datetime1">
               <a:rPr lang="en-US" smtClean="0"/>
-              <a:t>9/29/2025</a:t>
+              <a:t>10/1/2025</a:t>
             </a:fld>
             <a:endParaRPr lang="en-US" dirty="0"/>
           </a:p>
@@ -8509,7 +8510,7 @@
           <a:p>
             <a:fld id="{ED291B17-9318-49DB-B28B-6E5994AE9581}" type="datetime1">
               <a:rPr lang="en-US" smtClean="0"/>
-              <a:t>9/29/2025</a:t>
+              <a:t>10/1/2025</a:t>
             </a:fld>
             <a:endParaRPr lang="en-US" dirty="0"/>
           </a:p>
@@ -8996,7 +8997,7 @@
           <a:p>
             <a:fld id="{ED291B17-9318-49DB-B28B-6E5994AE9581}" type="datetime1">
               <a:rPr lang="en-US" smtClean="0"/>
-              <a:t>9/29/2025</a:t>
+              <a:t>10/1/2025</a:t>
             </a:fld>
             <a:endParaRPr lang="en-US" dirty="0"/>
           </a:p>
@@ -9192,7 +9193,7 @@
           <a:p>
             <a:fld id="{78DD82B9-B8EE-4375-B6FF-88FA6ABB15D9}" type="datetime1">
               <a:rPr lang="en-US" smtClean="0"/>
-              <a:t>9/29/2025</a:t>
+              <a:t>10/1/2025</a:t>
             </a:fld>
             <a:endParaRPr lang="en-US" dirty="0"/>
           </a:p>
@@ -9503,7 +9504,7 @@
           <a:p>
             <a:fld id="{B2497495-0637-405E-AE64-5CC7506D51F5}" type="datetime1">
               <a:rPr lang="en-US" smtClean="0"/>
-              <a:t>9/29/2025</a:t>
+              <a:t>10/1/2025</a:t>
             </a:fld>
             <a:endParaRPr lang="en-US" dirty="0"/>
           </a:p>
@@ -9754,7 +9755,7 @@
           <a:p>
             <a:fld id="{7BFFD690-9426-415D-8B65-26881E07B2D4}" type="datetime1">
               <a:rPr lang="en-US" smtClean="0"/>
-              <a:t>9/29/2025</a:t>
+              <a:t>10/1/2025</a:t>
             </a:fld>
             <a:endParaRPr lang="en-US" dirty="0"/>
           </a:p>
@@ -10174,7 +10175,7 @@
           <a:p>
             <a:fld id="{04C4989A-474C-40DE-95B9-011C28B71673}" type="datetime1">
               <a:rPr lang="en-US" smtClean="0"/>
-              <a:t>9/29/2025</a:t>
+              <a:t>10/1/2025</a:t>
             </a:fld>
             <a:endParaRPr lang="en-US" dirty="0"/>
           </a:p>
@@ -10415,7 +10416,7 @@
           <a:p>
             <a:fld id="{A5CEA080-6A29-4A4D-90B1-4C73660CABD5}" type="datetime1">
               <a:rPr lang="en-US" smtClean="0"/>
-              <a:t>9/29/2025</a:t>
+              <a:t>10/1/2025</a:t>
             </a:fld>
             <a:endParaRPr lang="en-US"/>
           </a:p>
@@ -10539,7 +10540,7 @@
           <a:p>
             <a:fld id="{5DB4ED54-5B5E-4A04-93D3-5772E3CE3818}" type="datetime1">
               <a:rPr lang="en-US" smtClean="0"/>
-              <a:t>9/29/2025</a:t>
+              <a:t>10/1/2025</a:t>
             </a:fld>
             <a:endParaRPr lang="en-US" dirty="0"/>
           </a:p>
@@ -10634,7 +10635,7 @@
           <a:p>
             <a:fld id="{4EDE50D6-574B-40AF-946F-D52A04ADE379}" type="datetime1">
               <a:rPr lang="en-US" smtClean="0"/>
-              <a:t>9/29/2025</a:t>
+              <a:t>10/1/2025</a:t>
             </a:fld>
             <a:endParaRPr lang="en-US" dirty="0"/>
           </a:p>
@@ -11010,7 +11011,7 @@
           <a:p>
             <a:fld id="{D82884F1-FFEA-405F-9602-3DCA865EDA4E}" type="datetime1">
               <a:rPr lang="en-US" smtClean="0"/>
-              <a:t>9/29/2025</a:t>
+              <a:t>10/1/2025</a:t>
             </a:fld>
             <a:endParaRPr lang="en-US" dirty="0"/>
           </a:p>
@@ -11303,7 +11304,7 @@
           <a:p>
             <a:fld id="{7E18DB4A-8810-4A10-AD5C-D5E2C667F5B3}" type="datetime1">
               <a:rPr lang="en-US" smtClean="0"/>
-              <a:t>9/29/2025</a:t>
+              <a:t>10/1/2025</a:t>
             </a:fld>
             <a:endParaRPr lang="en-US" dirty="0"/>
           </a:p>
@@ -11495,7 +11496,7 @@
           <a:p>
             <a:fld id="{2CED4963-E985-44C4-B8C4-FDD613B7C2F8}" type="datetime1">
               <a:rPr lang="en-US" smtClean="0"/>
-              <a:t>9/29/2025</a:t>
+              <a:t>10/1/2025</a:t>
             </a:fld>
             <a:endParaRPr lang="en-US" dirty="0"/>
           </a:p>
@@ -11857,7 +11858,7 @@
           <a:p>
             <a:fld id="{ED291B17-9318-49DB-B28B-6E5994AE9581}" type="datetime1">
               <a:rPr lang="en-US" smtClean="0"/>
-              <a:t>9/29/2025</a:t>
+              <a:t>10/1/2025</a:t>
             </a:fld>
             <a:endParaRPr lang="en-US" dirty="0"/>
           </a:p>
@@ -12168,7 +12169,7 @@
           <a:p>
             <a:fld id="{ED291B17-9318-49DB-B28B-6E5994AE9581}" type="datetime1">
               <a:rPr lang="en-US" smtClean="0"/>
-              <a:t>9/29/2025</a:t>
+              <a:t>10/1/2025</a:t>
             </a:fld>
             <a:endParaRPr lang="en-US" dirty="0"/>
           </a:p>
@@ -12366,7 +12367,7 @@
           <a:p>
             <a:fld id="{78DD82B9-B8EE-4375-B6FF-88FA6ABB15D9}" type="datetime1">
               <a:rPr lang="en-US" smtClean="0"/>
-              <a:t>9/29/2025</a:t>
+              <a:t>10/1/2025</a:t>
             </a:fld>
             <a:endParaRPr lang="en-US" dirty="0"/>
           </a:p>
@@ -12678,7 +12679,7 @@
           <a:p>
             <a:fld id="{B2497495-0637-405E-AE64-5CC7506D51F5}" type="datetime1">
               <a:rPr lang="en-US" smtClean="0"/>
-              <a:t>9/29/2025</a:t>
+              <a:t>10/1/2025</a:t>
             </a:fld>
             <a:endParaRPr lang="en-US" dirty="0"/>
           </a:p>
@@ -12931,7 +12932,7 @@
           <a:p>
             <a:fld id="{7BFFD690-9426-415D-8B65-26881E07B2D4}" type="datetime1">
               <a:rPr lang="en-US" smtClean="0"/>
-              <a:t>9/29/2025</a:t>
+              <a:t>10/1/2025</a:t>
             </a:fld>
             <a:endParaRPr lang="en-US" dirty="0"/>
           </a:p>
@@ -13353,7 +13354,7 @@
           <a:p>
             <a:fld id="{4EFF1D62-0785-460A-9888-5F5908AD45F7}" type="datetime1">
               <a:rPr lang="en-US" smtClean="0"/>
-              <a:t>9/29/2025</a:t>
+              <a:t>10/1/2025</a:t>
             </a:fld>
             <a:endParaRPr lang="en-US"/>
           </a:p>
@@ -13776,7 +13777,7 @@
           <a:p>
             <a:fld id="{04C4989A-474C-40DE-95B9-011C28B71673}" type="datetime1">
               <a:rPr lang="en-US" smtClean="0"/>
-              <a:t>9/29/2025</a:t>
+              <a:t>10/1/2025</a:t>
             </a:fld>
             <a:endParaRPr lang="en-US" dirty="0"/>
           </a:p>
@@ -13899,7 +13900,7 @@
           <a:p>
             <a:fld id="{5DB4ED54-5B5E-4A04-93D3-5772E3CE3818}" type="datetime1">
               <a:rPr lang="en-US" smtClean="0"/>
-              <a:t>9/29/2025</a:t>
+              <a:t>10/1/2025</a:t>
             </a:fld>
             <a:endParaRPr lang="en-US" dirty="0"/>
           </a:p>
@@ -13994,7 +13995,7 @@
           <a:p>
             <a:fld id="{4EDE50D6-574B-40AF-946F-D52A04ADE379}" type="datetime1">
               <a:rPr lang="en-US" smtClean="0"/>
-              <a:t>9/29/2025</a:t>
+              <a:t>10/1/2025</a:t>
             </a:fld>
             <a:endParaRPr lang="en-US" dirty="0"/>
           </a:p>
@@ -14371,7 +14372,7 @@
           <a:p>
             <a:fld id="{D82884F1-FFEA-405F-9602-3DCA865EDA4E}" type="datetime1">
               <a:rPr lang="en-US" smtClean="0"/>
-              <a:t>9/29/2025</a:t>
+              <a:t>10/1/2025</a:t>
             </a:fld>
             <a:endParaRPr lang="en-US" dirty="0"/>
           </a:p>
@@ -14664,7 +14665,7 @@
           <a:p>
             <a:fld id="{7E18DB4A-8810-4A10-AD5C-D5E2C667F5B3}" type="datetime1">
               <a:rPr lang="en-US" smtClean="0"/>
-              <a:t>9/29/2025</a:t>
+              <a:t>10/1/2025</a:t>
             </a:fld>
             <a:endParaRPr lang="en-US" dirty="0"/>
           </a:p>
@@ -14856,7 +14857,7 @@
           <a:p>
             <a:fld id="{2CED4963-E985-44C4-B8C4-FDD613B7C2F8}" type="datetime1">
               <a:rPr lang="en-US" smtClean="0"/>
-              <a:t>9/29/2025</a:t>
+              <a:t>10/1/2025</a:t>
             </a:fld>
             <a:endParaRPr lang="en-US" dirty="0"/>
           </a:p>
@@ -15218,7 +15219,7 @@
           <a:p>
             <a:fld id="{ED291B17-9318-49DB-B28B-6E5994AE9581}" type="datetime1">
               <a:rPr lang="en-US" smtClean="0"/>
-              <a:t>9/29/2025</a:t>
+              <a:t>10/1/2025</a:t>
             </a:fld>
             <a:endParaRPr lang="en-US" dirty="0"/>
           </a:p>
@@ -15522,7 +15523,7 @@
           <a:p>
             <a:fld id="{4603F5A6-4790-4338-AC59-416730A16F3C}" type="datetime1">
               <a:rPr lang="en-US" smtClean="0"/>
-              <a:t>9/29/2025</a:t>
+              <a:t>10/1/2025</a:t>
             </a:fld>
             <a:endParaRPr lang="en-US"/>
           </a:p>
@@ -15618,7 +15619,7 @@
           <a:p>
             <a:fld id="{FAF331C8-E8D8-438B-B699-9ACE625F3A09}" type="datetime1">
               <a:rPr lang="en-US" smtClean="0"/>
-              <a:t>9/29/2025</a:t>
+              <a:t>10/1/2025</a:t>
             </a:fld>
             <a:endParaRPr lang="en-US"/>
           </a:p>
@@ -15996,7 +15997,7 @@
           <a:p>
             <a:fld id="{610C12D3-F429-42CB-9467-4C3AFEEA173C}" type="datetime1">
               <a:rPr lang="en-US" smtClean="0"/>
-              <a:t>9/29/2025</a:t>
+              <a:t>10/1/2025</a:t>
             </a:fld>
             <a:endParaRPr lang="en-US"/>
           </a:p>
@@ -16289,7 +16290,7 @@
           <a:p>
             <a:fld id="{283F426E-E29E-4D2E-B32D-412D98F7FC2F}" type="datetime1">
               <a:rPr lang="en-US" smtClean="0"/>
-              <a:t>9/29/2025</a:t>
+              <a:t>10/1/2025</a:t>
             </a:fld>
             <a:endParaRPr lang="en-US"/>
           </a:p>
@@ -16504,7 +16505,7 @@
           <a:p>
             <a:fld id="{3E7733A4-5D18-4D09-8F94-45F71EE3C7C2}" type="datetime1">
               <a:rPr lang="en-US" smtClean="0"/>
-              <a:t>9/29/2025</a:t>
+              <a:t>10/1/2025</a:t>
             </a:fld>
             <a:endParaRPr lang="en-US"/>
           </a:p>
@@ -17306,7 +17307,7 @@
           <a:p>
             <a:fld id="{8234BEC2-5A9D-42E1-9C16-1E9F257755B7}" type="datetime1">
               <a:rPr lang="en-US" smtClean="0"/>
-              <a:t>9/29/2025</a:t>
+              <a:t>10/1/2025</a:t>
             </a:fld>
             <a:endParaRPr lang="en-US"/>
           </a:p>
@@ -18108,7 +18109,7 @@
           <a:p>
             <a:fld id="{ED291B17-9318-49DB-B28B-6E5994AE9581}" type="datetime1">
               <a:rPr lang="en-US" smtClean="0"/>
-              <a:t>9/29/2025</a:t>
+              <a:t>10/1/2025</a:t>
             </a:fld>
             <a:endParaRPr lang="en-US" dirty="0"/>
           </a:p>
@@ -18910,7 +18911,7 @@
           <a:p>
             <a:fld id="{ED291B17-9318-49DB-B28B-6E5994AE9581}" type="datetime1">
               <a:rPr lang="en-US" smtClean="0"/>
-              <a:t>9/29/2025</a:t>
+              <a:t>10/1/2025</a:t>
             </a:fld>
             <a:endParaRPr lang="en-US" dirty="0"/>
           </a:p>
@@ -19711,7 +19712,7 @@
           <a:p>
             <a:fld id="{ED291B17-9318-49DB-B28B-6E5994AE9581}" type="datetime1">
               <a:rPr lang="en-US" smtClean="0"/>
-              <a:t>9/29/2025</a:t>
+              <a:t>10/1/2025</a:t>
             </a:fld>
             <a:endParaRPr lang="en-US" dirty="0"/>
           </a:p>
@@ -20881,35 +20882,6 @@
           <a:chExt cx="0" cy="0"/>
         </a:xfrm>
       </p:grpSpPr>
-      <p:pic>
-        <p:nvPicPr>
-          <p:cNvPr id="7" name="Picture 6" descr="Image showing scale"/>
-          <p:cNvPicPr>
-            <a:picLocks noChangeAspect="1"/>
-          </p:cNvPicPr>
-          <p:nvPr/>
-        </p:nvPicPr>
-        <p:blipFill>
-          <a:blip r:embed="rId2"/>
-          <a:stretch>
-            <a:fillRect/>
-          </a:stretch>
-        </p:blipFill>
-        <p:spPr>
-          <a:xfrm>
-            <a:off x="1727533" y="1106965"/>
-            <a:ext cx="5093171" cy="3910195"/>
-          </a:xfrm>
-          <a:prstGeom prst="rect">
-            <a:avLst/>
-          </a:prstGeom>
-          <a:ln>
-            <a:solidFill>
-              <a:schemeClr val="tx1"/>
-            </a:solidFill>
-          </a:ln>
-        </p:spPr>
-      </p:pic>
       <p:cxnSp>
         <p:nvCxnSpPr>
           <p:cNvPr id="5" name="Straight Connector 4">
@@ -20968,7 +20940,7 @@
         </p:nvSpPr>
         <p:spPr>
           <a:xfrm>
-            <a:off x="118533" y="6987"/>
+            <a:off x="235518" y="173613"/>
             <a:ext cx="8077200" cy="857250"/>
           </a:xfrm>
           <a:prstGeom prst="rect">
@@ -21043,6 +21015,53 @@
           </a:p>
         </p:txBody>
       </p:sp>
+      <p:pic>
+        <p:nvPicPr>
+          <p:cNvPr id="1026" name="Picture 2" descr="Information 15 00107 g006">
+            <a:extLst>
+              <a:ext uri="{FF2B5EF4-FFF2-40B4-BE49-F238E27FC236}">
+                <a16:creationId xmlns:a16="http://schemas.microsoft.com/office/drawing/2014/main" id="{7CB9B25E-18DF-7DFC-54B5-94EDEFCE6314}"/>
+              </a:ext>
+            </a:extLst>
+          </p:cNvPr>
+          <p:cNvPicPr>
+            <a:picLocks noChangeAspect="1" noChangeArrowheads="1"/>
+          </p:cNvPicPr>
+          <p:nvPr/>
+        </p:nvPicPr>
+        <p:blipFill>
+          <a:blip r:embed="rId2">
+            <a:extLst>
+              <a:ext uri="{28A0092B-C50C-407E-A947-70E740481C1C}">
+                <a14:useLocalDpi xmlns:a14="http://schemas.microsoft.com/office/drawing/2010/main" val="0"/>
+              </a:ext>
+            </a:extLst>
+          </a:blip>
+          <a:srcRect/>
+          <a:stretch>
+            <a:fillRect/>
+          </a:stretch>
+        </p:blipFill>
+        <p:spPr bwMode="auto">
+          <a:xfrm>
+            <a:off x="1268727" y="1030863"/>
+            <a:ext cx="5416888" cy="3965368"/>
+          </a:xfrm>
+          <a:prstGeom prst="rect">
+            <a:avLst/>
+          </a:prstGeom>
+          <a:noFill/>
+          <a:extLst>
+            <a:ext uri="{909E8E84-426E-40DD-AFC4-6F175D3DCCD1}">
+              <a14:hiddenFill xmlns:a14="http://schemas.microsoft.com/office/drawing/2010/main">
+                <a:solidFill>
+                  <a:srgbClr val="FFFFFF"/>
+                </a:solidFill>
+              </a14:hiddenFill>
+            </a:ext>
+          </a:extLst>
+        </p:spPr>
+      </p:pic>
     </p:spTree>
     <p:extLst>
       <p:ext uri="{BB962C8B-B14F-4D97-AF65-F5344CB8AC3E}">
@@ -21086,11 +21105,13 @@
         <p:spPr>
           <a:xfrm>
             <a:off x="236278" y="1000978"/>
-            <a:ext cx="7917122" cy="3741896"/>
-          </a:xfrm>
-        </p:spPr>
-        <p:txBody>
-          <a:bodyPr/>
+            <a:ext cx="7917122" cy="974981"/>
+          </a:xfrm>
+        </p:spPr>
+        <p:txBody>
+          <a:bodyPr>
+            <a:normAutofit/>
+          </a:bodyPr>
           <a:lstStyle/>
           <a:p>
             <a:pPr>
@@ -21098,7 +21119,7 @@
               <a:buChar char="o"/>
             </a:pPr>
             <a:r>
-              <a:rPr lang="en-US" dirty="0"/>
+              <a:rPr lang="en-US" sz="2000" dirty="0"/>
               <a:t>Use caution when employing bar scales on smaller scale maps</a:t>
             </a:r>
           </a:p>
@@ -21108,7 +21129,7 @@
               <a:buChar char="ü"/>
             </a:pPr>
             <a:r>
-              <a:rPr lang="en-US" dirty="0"/>
+              <a:rPr lang="en-US" sz="2000" dirty="0"/>
               <a:t>Scale is only accurate along standard lines</a:t>
             </a:r>
           </a:p>
@@ -21161,8 +21182,8 @@
         </p:blipFill>
         <p:spPr bwMode="auto">
           <a:xfrm>
-            <a:off x="4194839" y="2947711"/>
-            <a:ext cx="3164704" cy="1795163"/>
+            <a:off x="2008596" y="2364484"/>
+            <a:ext cx="4602066" cy="2610500"/>
           </a:xfrm>
           <a:prstGeom prst="rect">
             <a:avLst/>
@@ -21188,7 +21209,7 @@
         </p:nvSpPr>
         <p:spPr bwMode="auto">
           <a:xfrm>
-            <a:off x="589547" y="3454333"/>
+            <a:off x="432150" y="1976852"/>
             <a:ext cx="3525253" cy="300082"/>
           </a:xfrm>
           <a:prstGeom prst="rect">
@@ -21277,7 +21298,7 @@
         </p:nvSpPr>
         <p:spPr>
           <a:xfrm>
-            <a:off x="118533" y="6987"/>
+            <a:off x="236278" y="168516"/>
             <a:ext cx="8077200" cy="857250"/>
           </a:xfrm>
           <a:prstGeom prst="rect">
@@ -21657,7 +21678,7 @@
         </p:nvSpPr>
         <p:spPr>
           <a:xfrm>
-            <a:off x="118533" y="6987"/>
+            <a:off x="237884" y="156106"/>
             <a:ext cx="8077200" cy="857250"/>
           </a:xfrm>
           <a:prstGeom prst="rect">
@@ -22012,7 +22033,7 @@
         </p:nvSpPr>
         <p:spPr>
           <a:xfrm>
-            <a:off x="152400" y="1019646"/>
+            <a:off x="161535" y="922910"/>
             <a:ext cx="7906530" cy="3741896"/>
           </a:xfrm>
         </p:spPr>
@@ -22027,7 +22048,7 @@
               <a:buChar char="o"/>
             </a:pPr>
             <a:r>
-              <a:rPr lang="en-US" dirty="0"/>
+              <a:rPr lang="en-US" sz="2000" dirty="0"/>
               <a:t>The style of the bar scale should be simple and subtle; it should not attract attention</a:t>
             </a:r>
           </a:p>
@@ -22037,7 +22058,7 @@
               <a:buChar char="ü"/>
             </a:pPr>
             <a:r>
-              <a:rPr lang="en-US" dirty="0"/>
+              <a:rPr lang="en-US" sz="2000" dirty="0"/>
               <a:t>Bulky and complex designs should be avoided</a:t>
             </a:r>
           </a:p>
@@ -22047,7 +22068,7 @@
               <a:buChar char="ü"/>
             </a:pPr>
             <a:r>
-              <a:rPr lang="en-US" dirty="0"/>
+              <a:rPr lang="en-US" sz="2000" dirty="0"/>
               <a:t>Line weights should be thin and type should be among the smallest on a map</a:t>
             </a:r>
           </a:p>
@@ -22057,7 +22078,7 @@
               <a:buChar char="ü"/>
             </a:pPr>
             <a:r>
-              <a:rPr lang="en-US" dirty="0"/>
+              <a:rPr lang="en-US" sz="2000" dirty="0"/>
               <a:t>Avoid the use of bold and italic type styles </a:t>
             </a:r>
           </a:p>
@@ -22151,7 +22172,7 @@
         </p:nvSpPr>
         <p:spPr>
           <a:xfrm>
-            <a:off x="118533" y="6987"/>
+            <a:off x="170670" y="162396"/>
             <a:ext cx="8077200" cy="857250"/>
           </a:xfrm>
           <a:prstGeom prst="rect">
@@ -22238,8 +22259,8 @@
         </p:blipFill>
         <p:spPr bwMode="auto">
           <a:xfrm>
-            <a:off x="2787944" y="2279317"/>
-            <a:ext cx="2175987" cy="848444"/>
+            <a:off x="2533111" y="1870098"/>
+            <a:ext cx="2827200" cy="1102360"/>
           </a:xfrm>
           <a:prstGeom prst="rect">
             <a:avLst/>
@@ -22272,8 +22293,8 @@
         </p:blipFill>
         <p:spPr bwMode="auto">
           <a:xfrm>
-            <a:off x="2786094" y="3320306"/>
-            <a:ext cx="2177837" cy="1170310"/>
+            <a:off x="2533111" y="3186147"/>
+            <a:ext cx="2827200" cy="1519260"/>
           </a:xfrm>
           <a:prstGeom prst="rect">
             <a:avLst/>
@@ -22299,8 +22320,8 @@
         </p:nvSpPr>
         <p:spPr bwMode="auto">
           <a:xfrm>
-            <a:off x="5326878" y="2464627"/>
-            <a:ext cx="926752" cy="507831"/>
+            <a:off x="5581711" y="2247879"/>
+            <a:ext cx="1545142" cy="300082"/>
           </a:xfrm>
           <a:prstGeom prst="rect">
             <a:avLst/>
@@ -22341,8 +22362,8 @@
         </p:nvSpPr>
         <p:spPr bwMode="auto">
           <a:xfrm>
-            <a:off x="5325014" y="3563928"/>
-            <a:ext cx="926752" cy="507831"/>
+            <a:off x="5669787" y="3626302"/>
+            <a:ext cx="1545141" cy="300082"/>
           </a:xfrm>
           <a:prstGeom prst="rect">
             <a:avLst/>
@@ -22431,7 +22452,7 @@
         </p:nvSpPr>
         <p:spPr>
           <a:xfrm>
-            <a:off x="118533" y="6987"/>
+            <a:off x="152400" y="145648"/>
             <a:ext cx="8077200" cy="857250"/>
           </a:xfrm>
           <a:prstGeom prst="rect">
@@ -22490,7 +22511,7 @@
         </p:nvSpPr>
         <p:spPr>
           <a:xfrm>
-            <a:off x="1476412" y="1539714"/>
+            <a:off x="1476412" y="1133189"/>
             <a:ext cx="5671148" cy="523220"/>
           </a:xfrm>
           <a:prstGeom prst="rect">
@@ -22735,7 +22756,7 @@
         </p:nvSpPr>
         <p:spPr>
           <a:xfrm>
-            <a:off x="118533" y="6987"/>
+            <a:off x="310896" y="120918"/>
             <a:ext cx="8077200" cy="857250"/>
           </a:xfrm>
           <a:prstGeom prst="rect">
@@ -22832,8 +22853,8 @@
         </p:blipFill>
         <p:spPr>
           <a:xfrm>
-            <a:off x="1746346" y="2580784"/>
-            <a:ext cx="4736908" cy="1380218"/>
+            <a:off x="981847" y="2457529"/>
+            <a:ext cx="5962214" cy="1737242"/>
           </a:xfrm>
           <a:prstGeom prst="rect">
             <a:avLst/>
@@ -22954,75 +22975,39 @@
       </p:grpSpPr>
       <p:sp>
         <p:nvSpPr>
-          <p:cNvPr id="101379" name="Rectangle 3"/>
-          <p:cNvSpPr>
-            <a:spLocks noGrp="1" noChangeArrowheads="1"/>
-          </p:cNvSpPr>
-          <p:nvPr>
-            <p:ph idx="1"/>
-          </p:nvPr>
-        </p:nvSpPr>
-        <p:spPr>
-          <a:xfrm>
-            <a:off x="264695" y="1028700"/>
-            <a:ext cx="7483642" cy="3741896"/>
-          </a:xfrm>
-        </p:spPr>
-        <p:txBody>
-          <a:bodyPr/>
-          <a:lstStyle/>
-          <a:p>
-            <a:pPr>
-              <a:buFont typeface="Courier New" panose="02070309020205020404" pitchFamily="49" charset="0"/>
-              <a:buChar char="o"/>
-            </a:pPr>
-            <a:r>
-              <a:rPr lang="en-US" dirty="0"/>
-              <a:t>The indication of north on a map</a:t>
-            </a:r>
-          </a:p>
-          <a:p>
-            <a:pPr>
-              <a:buFont typeface="Courier New" panose="02070309020205020404" pitchFamily="49" charset="0"/>
-              <a:buChar char="o"/>
-            </a:pPr>
-            <a:r>
-              <a:rPr lang="en-US" dirty="0"/>
-              <a:t>Orientation can be indicated by a </a:t>
-            </a:r>
-          </a:p>
-          <a:p>
-            <a:pPr marL="765810" lvl="1" indent="-457200">
-              <a:buFont typeface="Wingdings" panose="05000000000000000000" pitchFamily="2" charset="2"/>
-              <a:buChar char="ü"/>
-            </a:pPr>
-            <a:r>
-              <a:rPr lang="en-US" dirty="0"/>
-              <a:t>North Arrow</a:t>
-            </a:r>
-          </a:p>
-          <a:p>
-            <a:pPr marL="765810" lvl="1" indent="-457200">
-              <a:buFont typeface="Wingdings" panose="05000000000000000000" pitchFamily="2" charset="2"/>
-              <a:buChar char="ü"/>
-            </a:pPr>
-            <a:r>
-              <a:rPr lang="en-US" dirty="0"/>
-              <a:t>Graticule (a system of grid lines, normally representing longitude and latitude) </a:t>
-            </a:r>
-          </a:p>
-          <a:p>
-            <a:pPr marL="411480" indent="-411480"/>
-            <a:endParaRPr lang="en-US" dirty="0"/>
-          </a:p>
-        </p:txBody>
-      </p:sp>
-      <p:sp>
-        <p:nvSpPr>
-          <p:cNvPr id="3" name="Slide Number Placeholder 2">
+          <p:cNvPr id="3" name="Content Placeholder 2">
             <a:extLst>
               <a:ext uri="{FF2B5EF4-FFF2-40B4-BE49-F238E27FC236}">
-                <a16:creationId xmlns:a16="http://schemas.microsoft.com/office/drawing/2014/main" id="{1C9DA414-9F56-4B34-AB97-967FEE794762}"/>
+                <a16:creationId xmlns:a16="http://schemas.microsoft.com/office/drawing/2014/main" id="{E9546651-FD7B-4AE3-1E90-4BFCCE95FAAB}"/>
+              </a:ext>
+            </a:extLst>
+          </p:cNvPr>
+          <p:cNvSpPr>
+            <a:spLocks noGrp="1"/>
+          </p:cNvSpPr>
+          <p:nvPr>
+            <p:ph idx="1"/>
+          </p:nvPr>
+        </p:nvSpPr>
+        <p:spPr/>
+        <p:txBody>
+          <a:bodyPr/>
+          <a:lstStyle/>
+          <a:p>
+            <a:r>
+              <a:rPr lang="en-US" altLang="zh-CN" dirty="0"/>
+              <a:t>Explore S</a:t>
+            </a:r>
+            <a:endParaRPr lang="zh-CN" altLang="en-US" dirty="0"/>
+          </a:p>
+        </p:txBody>
+      </p:sp>
+      <p:sp>
+        <p:nvSpPr>
+          <p:cNvPr id="4" name="Slide Number Placeholder 3">
+            <a:extLst>
+              <a:ext uri="{FF2B5EF4-FFF2-40B4-BE49-F238E27FC236}">
+                <a16:creationId xmlns:a16="http://schemas.microsoft.com/office/drawing/2014/main" id="{A9F3507B-B38F-EB06-3C57-6F5287F46E03}"/>
               </a:ext>
             </a:extLst>
           </p:cNvPr>
@@ -23047,88 +23032,12 @@
           </a:p>
         </p:txBody>
       </p:sp>
-      <p:pic>
-        <p:nvPicPr>
-          <p:cNvPr id="101380" name="Picture 4" descr="Image north arrow"/>
-          <p:cNvPicPr>
-            <a:picLocks noChangeAspect="1" noChangeArrowheads="1"/>
-          </p:cNvPicPr>
-          <p:nvPr/>
-        </p:nvPicPr>
-        <p:blipFill>
-          <a:blip r:embed="rId2" cstate="print"/>
-          <a:srcRect t="43307"/>
-          <a:stretch>
-            <a:fillRect/>
-          </a:stretch>
-        </p:blipFill>
-        <p:spPr bwMode="auto">
-          <a:xfrm>
-            <a:off x="946103" y="3339376"/>
-            <a:ext cx="2567464" cy="1813084"/>
-          </a:xfrm>
-          <a:prstGeom prst="rect">
-            <a:avLst/>
-          </a:prstGeom>
-          <a:noFill/>
-          <a:ln w="9525" algn="ctr">
-            <a:solidFill>
-              <a:schemeClr val="tx1"/>
-            </a:solidFill>
-            <a:miter lim="800000"/>
-            <a:headEnd/>
-            <a:tailEnd/>
-          </a:ln>
-        </p:spPr>
-      </p:pic>
-      <p:cxnSp>
-        <p:nvCxnSpPr>
-          <p:cNvPr id="5" name="Straight Connector 4">
+      <p:sp>
+        <p:nvSpPr>
+          <p:cNvPr id="5" name="Title 1">
             <a:extLst>
               <a:ext uri="{FF2B5EF4-FFF2-40B4-BE49-F238E27FC236}">
-                <a16:creationId xmlns:a16="http://schemas.microsoft.com/office/drawing/2014/main" id="{4FC04BC5-0C8E-4D54-8121-733EF7DAE27E}"/>
-              </a:ext>
-            </a:extLst>
-          </p:cNvPr>
-          <p:cNvCxnSpPr/>
-          <p:nvPr/>
-        </p:nvCxnSpPr>
-        <p:spPr>
-          <a:xfrm>
-            <a:off x="152400" y="922910"/>
-            <a:ext cx="8001000" cy="0"/>
-          </a:xfrm>
-          <a:prstGeom prst="line">
-            <a:avLst/>
-          </a:prstGeom>
-          <a:ln>
-            <a:solidFill>
-              <a:schemeClr val="tx1"/>
-            </a:solidFill>
-          </a:ln>
-          <a:effectLst/>
-        </p:spPr>
-        <p:style>
-          <a:lnRef idx="2">
-            <a:schemeClr val="accent1"/>
-          </a:lnRef>
-          <a:fillRef idx="0">
-            <a:schemeClr val="accent1"/>
-          </a:fillRef>
-          <a:effectRef idx="1">
-            <a:schemeClr val="accent1"/>
-          </a:effectRef>
-          <a:fontRef idx="minor">
-            <a:schemeClr val="tx1"/>
-          </a:fontRef>
-        </p:style>
-      </p:cxnSp>
-      <p:sp>
-        <p:nvSpPr>
-          <p:cNvPr id="6" name="Title 1">
-            <a:extLst>
-              <a:ext uri="{FF2B5EF4-FFF2-40B4-BE49-F238E27FC236}">
-                <a16:creationId xmlns:a16="http://schemas.microsoft.com/office/drawing/2014/main" id="{6E0DB97C-737D-46F0-B786-40C88C6FF285}"/>
+                <a16:creationId xmlns:a16="http://schemas.microsoft.com/office/drawing/2014/main" id="{25723FA5-4FB2-F35F-5A4B-37235F724902}"/>
               </a:ext>
             </a:extLst>
           </p:cNvPr>
@@ -23139,7 +23048,7 @@
         </p:nvSpPr>
         <p:spPr>
           <a:xfrm>
-            <a:off x="118533" y="6987"/>
+            <a:off x="310896" y="120918"/>
             <a:ext cx="8077200" cy="857250"/>
           </a:xfrm>
           <a:prstGeom prst="rect">
@@ -23174,7 +23083,7 @@
                   <a:srgbClr val="7030A0"/>
                 </a:solidFill>
               </a:rPr>
-              <a:t>Orientation</a:t>
+              <a:t>Scale</a:t>
             </a:r>
             <a:endParaRPr lang="en-US" sz="2600" dirty="0">
               <a:solidFill>
@@ -23184,47 +23093,12 @@
           </a:p>
         </p:txBody>
       </p:sp>
-      <p:pic>
-        <p:nvPicPr>
-          <p:cNvPr id="2" name="Picture 5" descr="image showing graticule">
-            <a:extLst>
-              <a:ext uri="{FF2B5EF4-FFF2-40B4-BE49-F238E27FC236}">
-                <a16:creationId xmlns:a16="http://schemas.microsoft.com/office/drawing/2014/main" id="{38458325-8C7D-4D95-8795-CBE3D70F05FB}"/>
-              </a:ext>
-            </a:extLst>
-          </p:cNvPr>
-          <p:cNvPicPr>
-            <a:picLocks noChangeAspect="1" noChangeArrowheads="1"/>
-          </p:cNvPicPr>
-          <p:nvPr/>
-        </p:nvPicPr>
-        <p:blipFill>
-          <a:blip r:embed="rId3" cstate="print"/>
-          <a:srcRect t="6451" b="16319"/>
-          <a:stretch>
-            <a:fillRect/>
-          </a:stretch>
-        </p:blipFill>
-        <p:spPr bwMode="auto">
-          <a:xfrm>
-            <a:off x="4194975" y="3357297"/>
-            <a:ext cx="3164704" cy="1795163"/>
-          </a:xfrm>
-          <a:prstGeom prst="rect">
-            <a:avLst/>
-          </a:prstGeom>
-          <a:noFill/>
-          <a:ln w="9525" algn="ctr">
-            <a:solidFill>
-              <a:schemeClr val="tx1"/>
-            </a:solidFill>
-            <a:miter lim="800000"/>
-            <a:headEnd/>
-            <a:tailEnd/>
-          </a:ln>
-        </p:spPr>
-      </p:pic>
     </p:spTree>
+    <p:extLst>
+      <p:ext uri="{BB962C8B-B14F-4D97-AF65-F5344CB8AC3E}">
+        <p14:creationId xmlns:p14="http://schemas.microsoft.com/office/powerpoint/2010/main" val="3929847443"/>
+      </p:ext>
+    </p:extLst>
   </p:cSld>
   <p:clrMapOvr>
     <a:masterClrMapping/>
@@ -23251,7 +23125,7 @@
       </p:grpSpPr>
       <p:sp>
         <p:nvSpPr>
-          <p:cNvPr id="103427" name="Rectangle 3"/>
+          <p:cNvPr id="101379" name="Rectangle 3"/>
           <p:cNvSpPr>
             <a:spLocks noGrp="1" noChangeArrowheads="1"/>
           </p:cNvSpPr>
@@ -23261,8 +23135,8 @@
         </p:nvSpPr>
         <p:spPr>
           <a:xfrm>
-            <a:off x="152400" y="1009843"/>
-            <a:ext cx="8001000" cy="3741896"/>
+            <a:off x="264695" y="1028700"/>
+            <a:ext cx="7483642" cy="3741896"/>
           </a:xfrm>
         </p:spPr>
         <p:txBody>
@@ -23275,29 +23149,18 @@
             </a:pPr>
             <a:r>
               <a:rPr lang="en-US" dirty="0"/>
-              <a:t>A north arrow is </a:t>
-            </a:r>
-            <a:r>
-              <a:rPr lang="en-US" i="1" dirty="0"/>
-              <a:t>not required </a:t>
-            </a:r>
+              <a:t>The indication of north on a map</a:t>
+            </a:r>
+          </a:p>
+          <a:p>
+            <a:pPr>
+              <a:buFont typeface="Courier New" panose="02070309020205020404" pitchFamily="49" charset="0"/>
+              <a:buChar char="o"/>
+            </a:pPr>
             <a:r>
               <a:rPr lang="en-US" dirty="0"/>
-              <a:t>on </a:t>
-            </a:r>
-            <a:r>
-              <a:rPr lang="en-US" i="1" dirty="0"/>
-              <a:t>every</a:t>
-            </a:r>
-            <a:r>
-              <a:rPr lang="en-US" dirty="0"/>
-              <a:t> </a:t>
-            </a:r>
-            <a:r>
-              <a:rPr lang="en-US" i="1" dirty="0"/>
-              <a:t>map!</a:t>
-            </a:r>
-            <a:endParaRPr lang="en-US" dirty="0"/>
+              <a:t>Orientation can be indicated by a </a:t>
+            </a:r>
           </a:p>
           <a:p>
             <a:pPr marL="765810" lvl="1" indent="-457200">
@@ -23306,7 +23169,7 @@
             </a:pPr>
             <a:r>
               <a:rPr lang="en-US" dirty="0"/>
-              <a:t>The orientation of maps with north at the top is a long-standing tradition</a:t>
+              <a:t>North Arrow</a:t>
             </a:r>
           </a:p>
           <a:p>
@@ -23316,17 +23179,21 @@
             </a:pPr>
             <a:r>
               <a:rPr lang="en-US" dirty="0"/>
-              <a:t>It is assumed that “north is at the top” of most modern maps </a:t>
-            </a:r>
-          </a:p>
-        </p:txBody>
-      </p:sp>
-      <p:sp>
-        <p:nvSpPr>
-          <p:cNvPr id="2" name="Slide Number Placeholder 1">
+              <a:t>Graticule (a system of grid lines, normally representing longitude and latitude) </a:t>
+            </a:r>
+          </a:p>
+          <a:p>
+            <a:pPr marL="411480" indent="-411480"/>
+            <a:endParaRPr lang="en-US" dirty="0"/>
+          </a:p>
+        </p:txBody>
+      </p:sp>
+      <p:sp>
+        <p:nvSpPr>
+          <p:cNvPr id="3" name="Slide Number Placeholder 2">
             <a:extLst>
               <a:ext uri="{FF2B5EF4-FFF2-40B4-BE49-F238E27FC236}">
-                <a16:creationId xmlns:a16="http://schemas.microsoft.com/office/drawing/2014/main" id="{8A26050B-0F09-4AAB-9635-AA143F2B632D}"/>
+                <a16:creationId xmlns:a16="http://schemas.microsoft.com/office/drawing/2014/main" id="{1C9DA414-9F56-4B34-AB97-967FEE794762}"/>
               </a:ext>
             </a:extLst>
           </p:cNvPr>
@@ -23353,30 +23220,32 @@
       </p:sp>
       <p:pic>
         <p:nvPicPr>
-          <p:cNvPr id="4" name="Picture 3" descr="Image showing map"/>
-          <p:cNvPicPr preferRelativeResize="0">
+          <p:cNvPr id="101380" name="Picture 4" descr="Image north arrow"/>
+          <p:cNvPicPr>
             <a:picLocks noChangeAspect="1" noChangeArrowheads="1"/>
           </p:cNvPicPr>
           <p:nvPr/>
         </p:nvPicPr>
         <p:blipFill>
           <a:blip r:embed="rId2" cstate="print"/>
-          <a:srcRect/>
+          <a:srcRect t="43307"/>
           <a:stretch>
             <a:fillRect/>
           </a:stretch>
         </p:blipFill>
         <p:spPr bwMode="auto">
           <a:xfrm>
-            <a:off x="2876442" y="2880791"/>
-            <a:ext cx="2874653" cy="2113152"/>
+            <a:off x="946103" y="3339376"/>
+            <a:ext cx="2567464" cy="1813084"/>
           </a:xfrm>
           <a:prstGeom prst="rect">
             <a:avLst/>
           </a:prstGeom>
           <a:noFill/>
-          <a:ln w="9525">
-            <a:noFill/>
+          <a:ln w="9525" algn="ctr">
+            <a:solidFill>
+              <a:schemeClr val="tx1"/>
+            </a:solidFill>
             <a:miter lim="800000"/>
             <a:headEnd/>
             <a:tailEnd/>
@@ -23385,10 +23254,10 @@
       </p:pic>
       <p:cxnSp>
         <p:nvCxnSpPr>
-          <p:cNvPr id="7" name="Straight Connector 6">
+          <p:cNvPr id="5" name="Straight Connector 4">
             <a:extLst>
               <a:ext uri="{FF2B5EF4-FFF2-40B4-BE49-F238E27FC236}">
-                <a16:creationId xmlns:a16="http://schemas.microsoft.com/office/drawing/2014/main" id="{ECE201F0-833C-49A0-946A-0C4D0EB22CFE}"/>
+                <a16:creationId xmlns:a16="http://schemas.microsoft.com/office/drawing/2014/main" id="{4FC04BC5-0C8E-4D54-8121-733EF7DAE27E}"/>
               </a:ext>
             </a:extLst>
           </p:cNvPr>
@@ -23427,10 +23296,10 @@
       </p:cxnSp>
       <p:sp>
         <p:nvSpPr>
-          <p:cNvPr id="8" name="Title 1">
+          <p:cNvPr id="6" name="Title 1">
             <a:extLst>
               <a:ext uri="{FF2B5EF4-FFF2-40B4-BE49-F238E27FC236}">
-                <a16:creationId xmlns:a16="http://schemas.microsoft.com/office/drawing/2014/main" id="{0B114705-C7B4-48CF-9EE1-1B9F18DEC45B}"/>
+                <a16:creationId xmlns:a16="http://schemas.microsoft.com/office/drawing/2014/main" id="{6E0DB97C-737D-46F0-B786-40C88C6FF285}"/>
               </a:ext>
             </a:extLst>
           </p:cNvPr>
@@ -23441,7 +23310,7 @@
         </p:nvSpPr>
         <p:spPr>
           <a:xfrm>
-            <a:off x="118533" y="6987"/>
+            <a:off x="264695" y="153262"/>
             <a:ext cx="8077200" cy="857250"/>
           </a:xfrm>
           <a:prstGeom prst="rect">
@@ -23486,6 +23355,46 @@
           </a:p>
         </p:txBody>
       </p:sp>
+      <p:pic>
+        <p:nvPicPr>
+          <p:cNvPr id="2" name="Picture 5" descr="image showing graticule">
+            <a:extLst>
+              <a:ext uri="{FF2B5EF4-FFF2-40B4-BE49-F238E27FC236}">
+                <a16:creationId xmlns:a16="http://schemas.microsoft.com/office/drawing/2014/main" id="{38458325-8C7D-4D95-8795-CBE3D70F05FB}"/>
+              </a:ext>
+            </a:extLst>
+          </p:cNvPr>
+          <p:cNvPicPr>
+            <a:picLocks noChangeAspect="1" noChangeArrowheads="1"/>
+          </p:cNvPicPr>
+          <p:nvPr/>
+        </p:nvPicPr>
+        <p:blipFill>
+          <a:blip r:embed="rId3" cstate="print"/>
+          <a:srcRect t="6451" b="16319"/>
+          <a:stretch>
+            <a:fillRect/>
+          </a:stretch>
+        </p:blipFill>
+        <p:spPr bwMode="auto">
+          <a:xfrm>
+            <a:off x="4194975" y="3357297"/>
+            <a:ext cx="3164704" cy="1795163"/>
+          </a:xfrm>
+          <a:prstGeom prst="rect">
+            <a:avLst/>
+          </a:prstGeom>
+          <a:noFill/>
+          <a:ln w="9525" algn="ctr">
+            <a:solidFill>
+              <a:schemeClr val="tx1"/>
+            </a:solidFill>
+            <a:miter lim="800000"/>
+            <a:headEnd/>
+            <a:tailEnd/>
+          </a:ln>
+        </p:spPr>
+      </p:pic>
     </p:spTree>
   </p:cSld>
   <p:clrMapOvr>
@@ -23513,7 +23422,7 @@
       </p:grpSpPr>
       <p:sp>
         <p:nvSpPr>
-          <p:cNvPr id="104451" name="Rectangle 3"/>
+          <p:cNvPr id="103427" name="Rectangle 3"/>
           <p:cNvSpPr>
             <a:spLocks noGrp="1" noChangeArrowheads="1"/>
           </p:cNvSpPr>
@@ -23523,8 +23432,8 @@
         </p:nvSpPr>
         <p:spPr>
           <a:xfrm>
-            <a:off x="118533" y="1028700"/>
-            <a:ext cx="6701963" cy="3741896"/>
+            <a:off x="152400" y="1009843"/>
+            <a:ext cx="8001000" cy="3741896"/>
           </a:xfrm>
         </p:spPr>
         <p:txBody>
@@ -23537,8 +23446,29 @@
             </a:pPr>
             <a:r>
               <a:rPr lang="en-US" dirty="0"/>
-              <a:t>Include an indication of orientation if</a:t>
-            </a:r>
+              <a:t>A north arrow is </a:t>
+            </a:r>
+            <a:r>
+              <a:rPr lang="en-US" i="1" dirty="0"/>
+              <a:t>not required </a:t>
+            </a:r>
+            <a:r>
+              <a:rPr lang="en-US" dirty="0"/>
+              <a:t>on </a:t>
+            </a:r>
+            <a:r>
+              <a:rPr lang="en-US" i="1" dirty="0"/>
+              <a:t>every</a:t>
+            </a:r>
+            <a:r>
+              <a:rPr lang="en-US" dirty="0"/>
+              <a:t> </a:t>
+            </a:r>
+            <a:r>
+              <a:rPr lang="en-US" i="1" dirty="0"/>
+              <a:t>map!</a:t>
+            </a:r>
+            <a:endParaRPr lang="en-US" dirty="0"/>
           </a:p>
           <a:p>
             <a:pPr marL="765810" lvl="1" indent="-457200">
@@ -23547,15 +23477,17 @@
             </a:pPr>
             <a:r>
               <a:rPr lang="en-US" dirty="0"/>
-              <a:t>The map is </a:t>
-            </a:r>
-            <a:r>
-              <a:rPr lang="en-US" i="1" dirty="0"/>
-              <a:t>not</a:t>
-            </a:r>
+              <a:t>The orientation of maps with north at the top is a long-standing tradition</a:t>
+            </a:r>
+          </a:p>
+          <a:p>
+            <a:pPr marL="765810" lvl="1" indent="-457200">
+              <a:buFont typeface="Wingdings" panose="05000000000000000000" pitchFamily="2" charset="2"/>
+              <a:buChar char="ü"/>
+            </a:pPr>
             <a:r>
               <a:rPr lang="en-US" dirty="0"/>
-              <a:t> oriented with geographic or “true” north at the top </a:t>
+              <a:t>It is assumed that “north is at the top” of most modern maps </a:t>
             </a:r>
           </a:p>
         </p:txBody>
@@ -23565,7 +23497,7 @@
           <p:cNvPr id="2" name="Slide Number Placeholder 1">
             <a:extLst>
               <a:ext uri="{FF2B5EF4-FFF2-40B4-BE49-F238E27FC236}">
-                <a16:creationId xmlns:a16="http://schemas.microsoft.com/office/drawing/2014/main" id="{3335CE27-3B5A-4E49-88A9-85E7529FABA6}"/>
+                <a16:creationId xmlns:a16="http://schemas.microsoft.com/office/drawing/2014/main" id="{8A26050B-0F09-4AAB-9635-AA143F2B632D}"/>
               </a:ext>
             </a:extLst>
           </p:cNvPr>
@@ -23592,8 +23524,8 @@
       </p:sp>
       <p:pic>
         <p:nvPicPr>
-          <p:cNvPr id="104452" name="Picture 4" descr="Image showing north arrow"/>
-          <p:cNvPicPr>
+          <p:cNvPr id="4" name="Picture 3" descr="Image showing map"/>
+          <p:cNvPicPr preferRelativeResize="0">
             <a:picLocks noChangeAspect="1" noChangeArrowheads="1"/>
           </p:cNvPicPr>
           <p:nvPr/>
@@ -23607,17 +23539,15 @@
         </p:blipFill>
         <p:spPr bwMode="auto">
           <a:xfrm>
-            <a:off x="1778794" y="2899648"/>
-            <a:ext cx="4642009" cy="1914882"/>
+            <a:off x="2876442" y="2880791"/>
+            <a:ext cx="2874653" cy="2113152"/>
           </a:xfrm>
           <a:prstGeom prst="rect">
             <a:avLst/>
           </a:prstGeom>
           <a:noFill/>
-          <a:ln w="9525" algn="ctr">
-            <a:solidFill>
-              <a:schemeClr val="tx1"/>
-            </a:solidFill>
+          <a:ln w="9525">
+            <a:noFill/>
             <a:miter lim="800000"/>
             <a:headEnd/>
             <a:tailEnd/>
@@ -23626,10 +23556,10 @@
       </p:pic>
       <p:cxnSp>
         <p:nvCxnSpPr>
-          <p:cNvPr id="9" name="Straight Connector 8">
+          <p:cNvPr id="7" name="Straight Connector 6">
             <a:extLst>
               <a:ext uri="{FF2B5EF4-FFF2-40B4-BE49-F238E27FC236}">
-                <a16:creationId xmlns:a16="http://schemas.microsoft.com/office/drawing/2014/main" id="{5268EBF0-8402-40DC-936B-2C76407507E0}"/>
+                <a16:creationId xmlns:a16="http://schemas.microsoft.com/office/drawing/2014/main" id="{ECE201F0-833C-49A0-946A-0C4D0EB22CFE}"/>
               </a:ext>
             </a:extLst>
           </p:cNvPr>
@@ -23668,10 +23598,10 @@
       </p:cxnSp>
       <p:sp>
         <p:nvSpPr>
-          <p:cNvPr id="10" name="Title 1">
+          <p:cNvPr id="8" name="Title 1">
             <a:extLst>
               <a:ext uri="{FF2B5EF4-FFF2-40B4-BE49-F238E27FC236}">
-                <a16:creationId xmlns:a16="http://schemas.microsoft.com/office/drawing/2014/main" id="{DF8E4202-E36F-4F6C-8DF9-AF284F37FDBA}"/>
+                <a16:creationId xmlns:a16="http://schemas.microsoft.com/office/drawing/2014/main" id="{0B114705-C7B4-48CF-9EE1-1B9F18DEC45B}"/>
               </a:ext>
             </a:extLst>
           </p:cNvPr>
@@ -24666,7 +24596,7 @@
       </p:grpSpPr>
       <p:sp>
         <p:nvSpPr>
-          <p:cNvPr id="105475" name="Rectangle 3"/>
+          <p:cNvPr id="104451" name="Rectangle 3"/>
           <p:cNvSpPr>
             <a:spLocks noGrp="1" noChangeArrowheads="1"/>
           </p:cNvSpPr>
@@ -24676,8 +24606,8 @@
         </p:nvSpPr>
         <p:spPr>
           <a:xfrm>
-            <a:off x="76200" y="869908"/>
-            <a:ext cx="7876674" cy="3741896"/>
+            <a:off x="118533" y="1028700"/>
+            <a:ext cx="6701963" cy="3741896"/>
           </a:xfrm>
         </p:spPr>
         <p:txBody>
@@ -24700,7 +24630,15 @@
             </a:pPr>
             <a:r>
               <a:rPr lang="en-US" dirty="0"/>
-              <a:t>The map is intended for use in navigation, surveying, orienteering, etc. </a:t>
+              <a:t>The map is </a:t>
+            </a:r>
+            <a:r>
+              <a:rPr lang="en-US" i="1" dirty="0"/>
+              <a:t>not</a:t>
+            </a:r>
+            <a:r>
+              <a:rPr lang="en-US" dirty="0"/>
+              <a:t> oriented with geographic or “true” north at the top </a:t>
             </a:r>
           </a:p>
         </p:txBody>
@@ -24710,7 +24648,7 @@
           <p:cNvPr id="2" name="Slide Number Placeholder 1">
             <a:extLst>
               <a:ext uri="{FF2B5EF4-FFF2-40B4-BE49-F238E27FC236}">
-                <a16:creationId xmlns:a16="http://schemas.microsoft.com/office/drawing/2014/main" id="{EF8F552F-6A33-4ABF-A550-E28E9371F70E}"/>
+                <a16:creationId xmlns:a16="http://schemas.microsoft.com/office/drawing/2014/main" id="{3335CE27-3B5A-4E49-88A9-85E7529FABA6}"/>
               </a:ext>
             </a:extLst>
           </p:cNvPr>
@@ -24737,7 +24675,7 @@
       </p:sp>
       <p:pic>
         <p:nvPicPr>
-          <p:cNvPr id="105476" name="Picture 6" descr="Image showing north arrow"/>
+          <p:cNvPr id="104452" name="Picture 4" descr="Image showing north arrow"/>
           <p:cNvPicPr>
             <a:picLocks noChangeAspect="1" noChangeArrowheads="1"/>
           </p:cNvPicPr>
@@ -24752,14 +24690,14 @@
         </p:blipFill>
         <p:spPr bwMode="auto">
           <a:xfrm>
-            <a:off x="1332271" y="2246617"/>
-            <a:ext cx="5364532" cy="2806422"/>
+            <a:off x="1778794" y="2899648"/>
+            <a:ext cx="4642009" cy="1914882"/>
           </a:xfrm>
           <a:prstGeom prst="rect">
             <a:avLst/>
           </a:prstGeom>
           <a:noFill/>
-          <a:ln w="9525">
+          <a:ln w="9525" algn="ctr">
             <a:solidFill>
               <a:schemeClr val="tx1"/>
             </a:solidFill>
@@ -24771,10 +24709,10 @@
       </p:pic>
       <p:cxnSp>
         <p:nvCxnSpPr>
-          <p:cNvPr id="4" name="Straight Connector 3">
+          <p:cNvPr id="9" name="Straight Connector 8">
             <a:extLst>
               <a:ext uri="{FF2B5EF4-FFF2-40B4-BE49-F238E27FC236}">
-                <a16:creationId xmlns:a16="http://schemas.microsoft.com/office/drawing/2014/main" id="{03EE6621-3FA1-47CF-B9BD-3174DD1282D8}"/>
+                <a16:creationId xmlns:a16="http://schemas.microsoft.com/office/drawing/2014/main" id="{5268EBF0-8402-40DC-936B-2C76407507E0}"/>
               </a:ext>
             </a:extLst>
           </p:cNvPr>
@@ -24813,10 +24751,10 @@
       </p:cxnSp>
       <p:sp>
         <p:nvSpPr>
-          <p:cNvPr id="5" name="Title 1">
+          <p:cNvPr id="10" name="Title 1">
             <a:extLst>
               <a:ext uri="{FF2B5EF4-FFF2-40B4-BE49-F238E27FC236}">
-                <a16:creationId xmlns:a16="http://schemas.microsoft.com/office/drawing/2014/main" id="{C2AC22B7-0723-4ACE-B108-1A4F1C619968}"/>
+                <a16:creationId xmlns:a16="http://schemas.microsoft.com/office/drawing/2014/main" id="{DF8E4202-E36F-4F6C-8DF9-AF284F37FDBA}"/>
               </a:ext>
             </a:extLst>
           </p:cNvPr>
@@ -24899,7 +24837,7 @@
       </p:grpSpPr>
       <p:sp>
         <p:nvSpPr>
-          <p:cNvPr id="106499" name="Rectangle 4"/>
+          <p:cNvPr id="105475" name="Rectangle 3"/>
           <p:cNvSpPr>
             <a:spLocks noGrp="1" noChangeArrowheads="1"/>
           </p:cNvSpPr>
@@ -24909,8 +24847,8 @@
         </p:nvSpPr>
         <p:spPr>
           <a:xfrm>
-            <a:off x="0" y="1028700"/>
-            <a:ext cx="7603957" cy="3741896"/>
+            <a:off x="76200" y="869908"/>
+            <a:ext cx="7876674" cy="3741896"/>
           </a:xfrm>
         </p:spPr>
         <p:txBody>
@@ -24933,7 +24871,7 @@
             </a:pPr>
             <a:r>
               <a:rPr lang="en-US" dirty="0"/>
-              <a:t>Geographic features are oriented in a manner that might confuse the map user </a:t>
+              <a:t>The map is intended for use in navigation, surveying, orienteering, etc. </a:t>
             </a:r>
           </a:p>
         </p:txBody>
@@ -24943,7 +24881,7 @@
           <p:cNvPr id="2" name="Slide Number Placeholder 1">
             <a:extLst>
               <a:ext uri="{FF2B5EF4-FFF2-40B4-BE49-F238E27FC236}">
-                <a16:creationId xmlns:a16="http://schemas.microsoft.com/office/drawing/2014/main" id="{61772D49-202B-410D-9143-C6CD7390D4A7}"/>
+                <a16:creationId xmlns:a16="http://schemas.microsoft.com/office/drawing/2014/main" id="{EF8F552F-6A33-4ABF-A550-E28E9371F70E}"/>
               </a:ext>
             </a:extLst>
           </p:cNvPr>
@@ -24970,7 +24908,7 @@
       </p:sp>
       <p:pic>
         <p:nvPicPr>
-          <p:cNvPr id="106500" name="Picture 5" descr="Image showing north arrow"/>
+          <p:cNvPr id="105476" name="Picture 6" descr="Image showing north arrow"/>
           <p:cNvPicPr>
             <a:picLocks noChangeAspect="1" noChangeArrowheads="1"/>
           </p:cNvPicPr>
@@ -24985,14 +24923,14 @@
         </p:blipFill>
         <p:spPr bwMode="auto">
           <a:xfrm>
-            <a:off x="1582829" y="2721901"/>
-            <a:ext cx="4620578" cy="1906309"/>
+            <a:off x="1332271" y="2246617"/>
+            <a:ext cx="5364532" cy="2806422"/>
           </a:xfrm>
           <a:prstGeom prst="rect">
             <a:avLst/>
           </a:prstGeom>
           <a:noFill/>
-          <a:ln w="9525" algn="ctr">
+          <a:ln w="9525">
             <a:solidFill>
               <a:schemeClr val="tx1"/>
             </a:solidFill>
@@ -25004,10 +24942,10 @@
       </p:pic>
       <p:cxnSp>
         <p:nvCxnSpPr>
-          <p:cNvPr id="5" name="Straight Connector 4">
+          <p:cNvPr id="4" name="Straight Connector 3">
             <a:extLst>
               <a:ext uri="{FF2B5EF4-FFF2-40B4-BE49-F238E27FC236}">
-                <a16:creationId xmlns:a16="http://schemas.microsoft.com/office/drawing/2014/main" id="{EDC45D47-D9A4-425E-98E6-7A8DF523C3DA}"/>
+                <a16:creationId xmlns:a16="http://schemas.microsoft.com/office/drawing/2014/main" id="{03EE6621-3FA1-47CF-B9BD-3174DD1282D8}"/>
               </a:ext>
             </a:extLst>
           </p:cNvPr>
@@ -25046,10 +24984,10 @@
       </p:cxnSp>
       <p:sp>
         <p:nvSpPr>
-          <p:cNvPr id="6" name="Title 1">
+          <p:cNvPr id="5" name="Title 1">
             <a:extLst>
               <a:ext uri="{FF2B5EF4-FFF2-40B4-BE49-F238E27FC236}">
-                <a16:creationId xmlns:a16="http://schemas.microsoft.com/office/drawing/2014/main" id="{C7AC46E4-4C2B-435A-A5F0-6BC6436863E1}"/>
+                <a16:creationId xmlns:a16="http://schemas.microsoft.com/office/drawing/2014/main" id="{C2AC22B7-0723-4ACE-B108-1A4F1C619968}"/>
               </a:ext>
             </a:extLst>
           </p:cNvPr>
@@ -25132,7 +25070,7 @@
       </p:grpSpPr>
       <p:sp>
         <p:nvSpPr>
-          <p:cNvPr id="107523" name="Rectangle 3"/>
+          <p:cNvPr id="106499" name="Rectangle 4"/>
           <p:cNvSpPr>
             <a:spLocks noGrp="1" noChangeArrowheads="1"/>
           </p:cNvSpPr>
@@ -25142,8 +25080,8 @@
         </p:nvSpPr>
         <p:spPr>
           <a:xfrm>
-            <a:off x="152400" y="1004236"/>
-            <a:ext cx="8119532" cy="3741896"/>
+            <a:off x="0" y="1028700"/>
+            <a:ext cx="7603957" cy="3741896"/>
           </a:xfrm>
         </p:spPr>
         <p:txBody>
@@ -25156,7 +25094,7 @@
             </a:pPr>
             <a:r>
               <a:rPr lang="en-US" dirty="0"/>
-              <a:t>A graticule indicates direction through the orientation of grid lines</a:t>
+              <a:t>Include an indication of orientation if</a:t>
             </a:r>
           </a:p>
           <a:p>
@@ -25166,17 +25104,7 @@
             </a:pPr>
             <a:r>
               <a:rPr lang="en-US" dirty="0"/>
-              <a:t>Typically meridians that run north–south</a:t>
-            </a:r>
-          </a:p>
-          <a:p>
-            <a:pPr marL="765810" lvl="1" indent="-457200">
-              <a:buFont typeface="Wingdings" panose="05000000000000000000" pitchFamily="2" charset="2"/>
-              <a:buChar char="ü"/>
-            </a:pPr>
-            <a:r>
-              <a:rPr lang="en-US" dirty="0"/>
-              <a:t>The graticule can also provide positional information, such as latitude and longitude </a:t>
+              <a:t>Geographic features are oriented in a manner that might confuse the map user </a:t>
             </a:r>
           </a:p>
         </p:txBody>
@@ -25186,7 +25114,7 @@
           <p:cNvPr id="2" name="Slide Number Placeholder 1">
             <a:extLst>
               <a:ext uri="{FF2B5EF4-FFF2-40B4-BE49-F238E27FC236}">
-                <a16:creationId xmlns:a16="http://schemas.microsoft.com/office/drawing/2014/main" id="{199C320A-A619-44DE-BE54-77BF6DE99E05}"/>
+                <a16:creationId xmlns:a16="http://schemas.microsoft.com/office/drawing/2014/main" id="{61772D49-202B-410D-9143-C6CD7390D4A7}"/>
               </a:ext>
             </a:extLst>
           </p:cNvPr>
@@ -25213,7 +25141,7 @@
       </p:sp>
       <p:pic>
         <p:nvPicPr>
-          <p:cNvPr id="107524" name="Picture 6" descr="Image showing north arrow"/>
+          <p:cNvPr id="106500" name="Picture 5" descr="Image showing north arrow"/>
           <p:cNvPicPr>
             <a:picLocks noChangeAspect="1" noChangeArrowheads="1"/>
           </p:cNvPicPr>
@@ -25228,8 +25156,8 @@
         </p:blipFill>
         <p:spPr bwMode="auto">
           <a:xfrm>
-            <a:off x="1925690" y="3324084"/>
-            <a:ext cx="3957754" cy="1630359"/>
+            <a:off x="1582829" y="2721901"/>
+            <a:ext cx="4620578" cy="1906309"/>
           </a:xfrm>
           <a:prstGeom prst="rect">
             <a:avLst/>
@@ -25247,10 +25175,10 @@
       </p:pic>
       <p:cxnSp>
         <p:nvCxnSpPr>
-          <p:cNvPr id="4" name="Straight Connector 3">
+          <p:cNvPr id="5" name="Straight Connector 4">
             <a:extLst>
               <a:ext uri="{FF2B5EF4-FFF2-40B4-BE49-F238E27FC236}">
-                <a16:creationId xmlns:a16="http://schemas.microsoft.com/office/drawing/2014/main" id="{E12DB62C-9360-4AA9-A343-48B4125FB8A2}"/>
+                <a16:creationId xmlns:a16="http://schemas.microsoft.com/office/drawing/2014/main" id="{EDC45D47-D9A4-425E-98E6-7A8DF523C3DA}"/>
               </a:ext>
             </a:extLst>
           </p:cNvPr>
@@ -25289,10 +25217,10 @@
       </p:cxnSp>
       <p:sp>
         <p:nvSpPr>
-          <p:cNvPr id="5" name="Title 1">
+          <p:cNvPr id="6" name="Title 1">
             <a:extLst>
               <a:ext uri="{FF2B5EF4-FFF2-40B4-BE49-F238E27FC236}">
-                <a16:creationId xmlns:a16="http://schemas.microsoft.com/office/drawing/2014/main" id="{D8FAA60D-9ABF-4EF0-8A7F-015F34F11C64}"/>
+                <a16:creationId xmlns:a16="http://schemas.microsoft.com/office/drawing/2014/main" id="{C7AC46E4-4C2B-435A-A5F0-6BC6436863E1}"/>
               </a:ext>
             </a:extLst>
           </p:cNvPr>
@@ -25375,6 +25303,249 @@
       </p:grpSpPr>
       <p:sp>
         <p:nvSpPr>
+          <p:cNvPr id="107523" name="Rectangle 3"/>
+          <p:cNvSpPr>
+            <a:spLocks noGrp="1" noChangeArrowheads="1"/>
+          </p:cNvSpPr>
+          <p:nvPr>
+            <p:ph idx="1"/>
+          </p:nvPr>
+        </p:nvSpPr>
+        <p:spPr>
+          <a:xfrm>
+            <a:off x="152400" y="1004236"/>
+            <a:ext cx="8119532" cy="3741896"/>
+          </a:xfrm>
+        </p:spPr>
+        <p:txBody>
+          <a:bodyPr/>
+          <a:lstStyle/>
+          <a:p>
+            <a:pPr>
+              <a:buFont typeface="Courier New" panose="02070309020205020404" pitchFamily="49" charset="0"/>
+              <a:buChar char="o"/>
+            </a:pPr>
+            <a:r>
+              <a:rPr lang="en-US" dirty="0"/>
+              <a:t>A graticule indicates direction through the orientation of grid lines</a:t>
+            </a:r>
+          </a:p>
+          <a:p>
+            <a:pPr marL="765810" lvl="1" indent="-457200">
+              <a:buFont typeface="Wingdings" panose="05000000000000000000" pitchFamily="2" charset="2"/>
+              <a:buChar char="ü"/>
+            </a:pPr>
+            <a:r>
+              <a:rPr lang="en-US" dirty="0"/>
+              <a:t>Typically meridians that run north–south</a:t>
+            </a:r>
+          </a:p>
+          <a:p>
+            <a:pPr marL="765810" lvl="1" indent="-457200">
+              <a:buFont typeface="Wingdings" panose="05000000000000000000" pitchFamily="2" charset="2"/>
+              <a:buChar char="ü"/>
+            </a:pPr>
+            <a:r>
+              <a:rPr lang="en-US" dirty="0"/>
+              <a:t>The graticule can also provide positional information, such as latitude and longitude </a:t>
+            </a:r>
+          </a:p>
+        </p:txBody>
+      </p:sp>
+      <p:sp>
+        <p:nvSpPr>
+          <p:cNvPr id="2" name="Slide Number Placeholder 1">
+            <a:extLst>
+              <a:ext uri="{FF2B5EF4-FFF2-40B4-BE49-F238E27FC236}">
+                <a16:creationId xmlns:a16="http://schemas.microsoft.com/office/drawing/2014/main" id="{199C320A-A619-44DE-BE54-77BF6DE99E05}"/>
+              </a:ext>
+            </a:extLst>
+          </p:cNvPr>
+          <p:cNvSpPr>
+            <a:spLocks noGrp="1"/>
+          </p:cNvSpPr>
+          <p:nvPr>
+            <p:ph type="sldNum" sz="quarter" idx="12"/>
+          </p:nvPr>
+        </p:nvSpPr>
+        <p:spPr/>
+        <p:txBody>
+          <a:bodyPr/>
+          <a:lstStyle/>
+          <a:p>
+            <a:fld id="{127DDC20-79C9-9647-820E-6D40A3D210C3}" type="slidenum">
+              <a:rPr lang="en-US" smtClean="0"/>
+              <a:pPr/>
+              <a:t>23</a:t>
+            </a:fld>
+            <a:endParaRPr lang="en-US"/>
+          </a:p>
+        </p:txBody>
+      </p:sp>
+      <p:pic>
+        <p:nvPicPr>
+          <p:cNvPr id="107524" name="Picture 6" descr="Image showing north arrow"/>
+          <p:cNvPicPr>
+            <a:picLocks noChangeAspect="1" noChangeArrowheads="1"/>
+          </p:cNvPicPr>
+          <p:nvPr/>
+        </p:nvPicPr>
+        <p:blipFill>
+          <a:blip r:embed="rId2" cstate="print"/>
+          <a:srcRect/>
+          <a:stretch>
+            <a:fillRect/>
+          </a:stretch>
+        </p:blipFill>
+        <p:spPr bwMode="auto">
+          <a:xfrm>
+            <a:off x="1925690" y="3324084"/>
+            <a:ext cx="3957754" cy="1630359"/>
+          </a:xfrm>
+          <a:prstGeom prst="rect">
+            <a:avLst/>
+          </a:prstGeom>
+          <a:noFill/>
+          <a:ln w="9525" algn="ctr">
+            <a:solidFill>
+              <a:schemeClr val="tx1"/>
+            </a:solidFill>
+            <a:miter lim="800000"/>
+            <a:headEnd/>
+            <a:tailEnd/>
+          </a:ln>
+        </p:spPr>
+      </p:pic>
+      <p:cxnSp>
+        <p:nvCxnSpPr>
+          <p:cNvPr id="4" name="Straight Connector 3">
+            <a:extLst>
+              <a:ext uri="{FF2B5EF4-FFF2-40B4-BE49-F238E27FC236}">
+                <a16:creationId xmlns:a16="http://schemas.microsoft.com/office/drawing/2014/main" id="{E12DB62C-9360-4AA9-A343-48B4125FB8A2}"/>
+              </a:ext>
+            </a:extLst>
+          </p:cNvPr>
+          <p:cNvCxnSpPr/>
+          <p:nvPr/>
+        </p:nvCxnSpPr>
+        <p:spPr>
+          <a:xfrm>
+            <a:off x="152400" y="922910"/>
+            <a:ext cx="8001000" cy="0"/>
+          </a:xfrm>
+          <a:prstGeom prst="line">
+            <a:avLst/>
+          </a:prstGeom>
+          <a:ln>
+            <a:solidFill>
+              <a:schemeClr val="tx1"/>
+            </a:solidFill>
+          </a:ln>
+          <a:effectLst/>
+        </p:spPr>
+        <p:style>
+          <a:lnRef idx="2">
+            <a:schemeClr val="accent1"/>
+          </a:lnRef>
+          <a:fillRef idx="0">
+            <a:schemeClr val="accent1"/>
+          </a:fillRef>
+          <a:effectRef idx="1">
+            <a:schemeClr val="accent1"/>
+          </a:effectRef>
+          <a:fontRef idx="minor">
+            <a:schemeClr val="tx1"/>
+          </a:fontRef>
+        </p:style>
+      </p:cxnSp>
+      <p:sp>
+        <p:nvSpPr>
+          <p:cNvPr id="5" name="Title 1">
+            <a:extLst>
+              <a:ext uri="{FF2B5EF4-FFF2-40B4-BE49-F238E27FC236}">
+                <a16:creationId xmlns:a16="http://schemas.microsoft.com/office/drawing/2014/main" id="{D8FAA60D-9ABF-4EF0-8A7F-015F34F11C64}"/>
+              </a:ext>
+            </a:extLst>
+          </p:cNvPr>
+          <p:cNvSpPr txBox="1">
+            <a:spLocks/>
+          </p:cNvSpPr>
+          <p:nvPr/>
+        </p:nvSpPr>
+        <p:spPr>
+          <a:xfrm>
+            <a:off x="118533" y="6987"/>
+            <a:ext cx="8077200" cy="857250"/>
+          </a:xfrm>
+          <a:prstGeom prst="rect">
+            <a:avLst/>
+          </a:prstGeom>
+        </p:spPr>
+        <p:txBody>
+          <a:bodyPr vert="horz" lIns="91440" tIns="45720" rIns="91440" bIns="45720" rtlCol="0" anchor="ctr">
+            <a:normAutofit/>
+          </a:bodyPr>
+          <a:lstStyle>
+            <a:lvl1pPr algn="ctr" defTabSz="411480" rtl="0" eaLnBrk="1" latinLnBrk="0" hangingPunct="1">
+              <a:spcBef>
+                <a:spcPct val="0"/>
+              </a:spcBef>
+              <a:buNone/>
+              <a:defRPr sz="3960" kern="1200">
+                <a:solidFill>
+                  <a:schemeClr val="tx1"/>
+                </a:solidFill>
+                <a:latin typeface="+mj-lt"/>
+                <a:ea typeface="+mj-ea"/>
+                <a:cs typeface="+mj-cs"/>
+              </a:defRPr>
+            </a:lvl1pPr>
+          </a:lstStyle>
+          <a:p>
+            <a:pPr algn="l"/>
+            <a:r>
+              <a:rPr lang="en-US" sz="3200" dirty="0">
+                <a:solidFill>
+                  <a:srgbClr val="7030A0"/>
+                </a:solidFill>
+              </a:rPr>
+              <a:t>Orientation</a:t>
+            </a:r>
+            <a:endParaRPr lang="en-US" sz="2600" dirty="0">
+              <a:solidFill>
+                <a:srgbClr val="7030A0"/>
+              </a:solidFill>
+            </a:endParaRPr>
+          </a:p>
+        </p:txBody>
+      </p:sp>
+    </p:spTree>
+  </p:cSld>
+  <p:clrMapOvr>
+    <a:masterClrMapping/>
+  </p:clrMapOvr>
+</p:sld>
+</file>
+
+<file path=ppt/slides/slide24.xml><?xml version="1.0" encoding="utf-8"?>
+<p:sld xmlns:a="http://schemas.openxmlformats.org/drawingml/2006/main" xmlns:r="http://schemas.openxmlformats.org/officeDocument/2006/relationships" xmlns:p="http://schemas.openxmlformats.org/presentationml/2006/main">
+  <p:cSld>
+    <p:spTree>
+      <p:nvGrpSpPr>
+        <p:cNvPr id="1" name=""/>
+        <p:cNvGrpSpPr/>
+        <p:nvPr/>
+      </p:nvGrpSpPr>
+      <p:grpSpPr>
+        <a:xfrm>
+          <a:off x="0" y="0"/>
+          <a:ext cx="0" cy="0"/>
+          <a:chOff x="0" y="0"/>
+          <a:chExt cx="0" cy="0"/>
+        </a:xfrm>
+      </p:grpSpPr>
+      <p:sp>
+        <p:nvSpPr>
           <p:cNvPr id="108547" name="Rectangle 3"/>
           <p:cNvSpPr>
             <a:spLocks noGrp="1" noChangeArrowheads="1"/>
@@ -25447,7 +25618,7 @@
             <a:fld id="{127DDC20-79C9-9647-820E-6D40A3D210C3}" type="slidenum">
               <a:rPr lang="en-US" smtClean="0"/>
               <a:pPr/>
-              <a:t>23</a:t>
+              <a:t>24</a:t>
             </a:fld>
             <a:endParaRPr lang="en-US"/>
           </a:p>
@@ -26147,7 +26318,7 @@
 </p:sld>
 </file>
 
-<file path=ppt/slides/slide24.xml><?xml version="1.0" encoding="utf-8"?>
+<file path=ppt/slides/slide25.xml><?xml version="1.0" encoding="utf-8"?>
 <p:sld xmlns:a="http://schemas.openxmlformats.org/drawingml/2006/main" xmlns:r="http://schemas.openxmlformats.org/officeDocument/2006/relationships" xmlns:p="http://schemas.openxmlformats.org/presentationml/2006/main">
   <p:cSld>
     <p:spTree>
@@ -26236,7 +26407,7 @@
             <a:fld id="{127DDC20-79C9-9647-820E-6D40A3D210C3}" type="slidenum">
               <a:rPr lang="en-US" smtClean="0"/>
               <a:pPr/>
-              <a:t>24</a:t>
+              <a:t>25</a:t>
             </a:fld>
             <a:endParaRPr lang="en-US"/>
           </a:p>
@@ -26435,7 +26606,7 @@
 </p:sld>
 </file>
 
-<file path=ppt/slides/slide25.xml><?xml version="1.0" encoding="utf-8"?>
+<file path=ppt/slides/slide26.xml><?xml version="1.0" encoding="utf-8"?>
 <p:sld xmlns:a="http://schemas.openxmlformats.org/drawingml/2006/main" xmlns:r="http://schemas.openxmlformats.org/officeDocument/2006/relationships" xmlns:p="http://schemas.openxmlformats.org/presentationml/2006/main">
   <p:cSld>
     <p:spTree>
@@ -26537,7 +26708,7 @@
             <a:fld id="{127DDC20-79C9-9647-820E-6D40A3D210C3}" type="slidenum">
               <a:rPr lang="en-US" smtClean="0"/>
               <a:pPr/>
-              <a:t>25</a:t>
+              <a:t>26</a:t>
             </a:fld>
             <a:endParaRPr lang="en-US"/>
           </a:p>
@@ -26654,7 +26825,7 @@
 </p:sld>
 </file>
 
-<file path=ppt/slides/slide26.xml><?xml version="1.0" encoding="utf-8"?>
+<file path=ppt/slides/slide27.xml><?xml version="1.0" encoding="utf-8"?>
 <p:sld xmlns:a="http://schemas.openxmlformats.org/drawingml/2006/main" xmlns:r="http://schemas.openxmlformats.org/officeDocument/2006/relationships" xmlns:p="http://schemas.openxmlformats.org/presentationml/2006/main">
   <p:cSld>
     <p:spTree>
@@ -26985,7 +27156,7 @@
             <a:fld id="{127DDC20-79C9-9647-820E-6D40A3D210C3}" type="slidenum">
               <a:rPr lang="en-US" smtClean="0"/>
               <a:pPr/>
-              <a:t>26</a:t>
+              <a:t>27</a:t>
             </a:fld>
             <a:endParaRPr lang="en-US"/>
           </a:p>
@@ -27110,7 +27281,7 @@
 </p:sld>
 </file>
 
-<file path=ppt/slides/slide27.xml><?xml version="1.0" encoding="utf-8"?>
+<file path=ppt/slides/slide28.xml><?xml version="1.0" encoding="utf-8"?>
 <p:sld xmlns:a="http://schemas.openxmlformats.org/drawingml/2006/main" xmlns:r="http://schemas.openxmlformats.org/officeDocument/2006/relationships" xmlns:p="http://schemas.openxmlformats.org/presentationml/2006/main">
   <p:cSld>
     <p:spTree>
@@ -27259,7 +27430,7 @@
             <a:fld id="{127DDC20-79C9-9647-820E-6D40A3D210C3}" type="slidenum">
               <a:rPr lang="en-US" smtClean="0"/>
               <a:pPr/>
-              <a:t>27</a:t>
+              <a:t>28</a:t>
             </a:fld>
             <a:endParaRPr lang="en-US"/>
           </a:p>
@@ -27650,7 +27821,7 @@
 </p:sld>
 </file>
 
-<file path=ppt/slides/slide28.xml><?xml version="1.0" encoding="utf-8"?>
+<file path=ppt/slides/slide29.xml><?xml version="1.0" encoding="utf-8"?>
 <p:sld xmlns:a="http://schemas.openxmlformats.org/drawingml/2006/main" xmlns:r="http://schemas.openxmlformats.org/officeDocument/2006/relationships" xmlns:p="http://schemas.openxmlformats.org/presentationml/2006/main">
   <p:cSld>
     <p:spTree>
@@ -27874,7 +28045,7 @@
             <a:fld id="{127DDC20-79C9-9647-820E-6D40A3D210C3}" type="slidenum">
               <a:rPr lang="en-US" smtClean="0"/>
               <a:pPr/>
-              <a:t>28</a:t>
+              <a:t>29</a:t>
             </a:fld>
             <a:endParaRPr lang="en-US"/>
           </a:p>
@@ -27893,7 +28064,226 @@
 </p:sld>
 </file>
 
-<file path=ppt/slides/slide29.xml><?xml version="1.0" encoding="utf-8"?>
+<file path=ppt/slides/slide3.xml><?xml version="1.0" encoding="utf-8"?>
+<p:sld xmlns:a="http://schemas.openxmlformats.org/drawingml/2006/main" xmlns:r="http://schemas.openxmlformats.org/officeDocument/2006/relationships" xmlns:p="http://schemas.openxmlformats.org/presentationml/2006/main">
+  <p:cSld>
+    <p:spTree>
+      <p:nvGrpSpPr>
+        <p:cNvPr id="1" name=""/>
+        <p:cNvGrpSpPr/>
+        <p:nvPr/>
+      </p:nvGrpSpPr>
+      <p:grpSpPr>
+        <a:xfrm>
+          <a:off x="0" y="0"/>
+          <a:ext cx="0" cy="0"/>
+          <a:chOff x="0" y="0"/>
+          <a:chExt cx="0" cy="0"/>
+        </a:xfrm>
+      </p:grpSpPr>
+      <p:sp>
+        <p:nvSpPr>
+          <p:cNvPr id="81923" name="Rectangle 3"/>
+          <p:cNvSpPr>
+            <a:spLocks noGrp="1" noChangeArrowheads="1"/>
+          </p:cNvSpPr>
+          <p:nvPr>
+            <p:ph idx="1"/>
+          </p:nvPr>
+        </p:nvSpPr>
+        <p:spPr>
+          <a:xfrm>
+            <a:off x="76200" y="876300"/>
+            <a:ext cx="8077200" cy="2399049"/>
+          </a:xfrm>
+        </p:spPr>
+        <p:txBody>
+          <a:bodyPr>
+            <a:normAutofit/>
+          </a:bodyPr>
+          <a:lstStyle/>
+          <a:p>
+            <a:pPr>
+              <a:buFont typeface="Courier New" panose="02070309020205020404" pitchFamily="49" charset="0"/>
+              <a:buChar char="o"/>
+            </a:pPr>
+            <a:r>
+              <a:rPr lang="en-US" sz="2000" dirty="0"/>
+              <a:t>Allows the map user to determine where data were obtained</a:t>
+            </a:r>
+          </a:p>
+          <a:p>
+            <a:pPr marL="765810" lvl="1" indent="-457200">
+              <a:buFont typeface="Wingdings" panose="05000000000000000000" pitchFamily="2" charset="2"/>
+              <a:buChar char="ü"/>
+            </a:pPr>
+            <a:r>
+              <a:rPr lang="en-US" sz="2000" dirty="0"/>
+              <a:t>Sources of base information are normally omitted from thematic maps </a:t>
+            </a:r>
+          </a:p>
+          <a:p>
+            <a:pPr>
+              <a:buFont typeface="Courier New" panose="02070309020205020404" pitchFamily="49" charset="0"/>
+              <a:buChar char="o"/>
+            </a:pPr>
+            <a:r>
+              <a:rPr lang="en-US" sz="2000" dirty="0"/>
+              <a:t>Should be formatted similar to a standard bibliographic reference, but is often more concise and less formal  </a:t>
+            </a:r>
+          </a:p>
+        </p:txBody>
+      </p:sp>
+      <p:sp>
+        <p:nvSpPr>
+          <p:cNvPr id="2" name="Slide Number Placeholder 1">
+            <a:extLst>
+              <a:ext uri="{FF2B5EF4-FFF2-40B4-BE49-F238E27FC236}">
+                <a16:creationId xmlns:a16="http://schemas.microsoft.com/office/drawing/2014/main" id="{F4413EBF-9B5B-45E1-B6EC-28D2CD8E0310}"/>
+              </a:ext>
+            </a:extLst>
+          </p:cNvPr>
+          <p:cNvSpPr>
+            <a:spLocks noGrp="1"/>
+          </p:cNvSpPr>
+          <p:nvPr>
+            <p:ph type="sldNum" sz="quarter" idx="12"/>
+          </p:nvPr>
+        </p:nvSpPr>
+        <p:spPr/>
+        <p:txBody>
+          <a:bodyPr/>
+          <a:lstStyle/>
+          <a:p>
+            <a:fld id="{127DDC20-79C9-9647-820E-6D40A3D210C3}" type="slidenum">
+              <a:rPr lang="en-US" smtClean="0"/>
+              <a:pPr/>
+              <a:t>3</a:t>
+            </a:fld>
+            <a:endParaRPr lang="en-US"/>
+          </a:p>
+        </p:txBody>
+      </p:sp>
+      <p:cxnSp>
+        <p:nvCxnSpPr>
+          <p:cNvPr id="6" name="Straight Connector 5">
+            <a:extLst>
+              <a:ext uri="{FF2B5EF4-FFF2-40B4-BE49-F238E27FC236}">
+                <a16:creationId xmlns:a16="http://schemas.microsoft.com/office/drawing/2014/main" id="{DC8B6E33-BB32-407B-B3A2-4DB83E80B91D}"/>
+              </a:ext>
+            </a:extLst>
+          </p:cNvPr>
+          <p:cNvCxnSpPr/>
+          <p:nvPr/>
+        </p:nvCxnSpPr>
+        <p:spPr>
+          <a:xfrm>
+            <a:off x="152400" y="922910"/>
+            <a:ext cx="8001000" cy="0"/>
+          </a:xfrm>
+          <a:prstGeom prst="line">
+            <a:avLst/>
+          </a:prstGeom>
+          <a:ln>
+            <a:solidFill>
+              <a:schemeClr val="tx1"/>
+            </a:solidFill>
+          </a:ln>
+          <a:effectLst/>
+        </p:spPr>
+        <p:style>
+          <a:lnRef idx="2">
+            <a:schemeClr val="accent1"/>
+          </a:lnRef>
+          <a:fillRef idx="0">
+            <a:schemeClr val="accent1"/>
+          </a:fillRef>
+          <a:effectRef idx="1">
+            <a:schemeClr val="accent1"/>
+          </a:effectRef>
+          <a:fontRef idx="minor">
+            <a:schemeClr val="tx1"/>
+          </a:fontRef>
+        </p:style>
+      </p:cxnSp>
+      <p:sp>
+        <p:nvSpPr>
+          <p:cNvPr id="7" name="Title 1">
+            <a:extLst>
+              <a:ext uri="{FF2B5EF4-FFF2-40B4-BE49-F238E27FC236}">
+                <a16:creationId xmlns:a16="http://schemas.microsoft.com/office/drawing/2014/main" id="{6D9AF380-D92B-4FD3-A5AF-A2B8A746E2D9}"/>
+              </a:ext>
+            </a:extLst>
+          </p:cNvPr>
+          <p:cNvSpPr txBox="1">
+            <a:spLocks/>
+          </p:cNvSpPr>
+          <p:nvPr/>
+        </p:nvSpPr>
+        <p:spPr>
+          <a:xfrm>
+            <a:off x="238454" y="164384"/>
+            <a:ext cx="8077200" cy="857250"/>
+          </a:xfrm>
+          <a:prstGeom prst="rect">
+            <a:avLst/>
+          </a:prstGeom>
+        </p:spPr>
+        <p:txBody>
+          <a:bodyPr vert="horz" lIns="91440" tIns="45720" rIns="91440" bIns="45720" rtlCol="0" anchor="ctr">
+            <a:normAutofit/>
+          </a:bodyPr>
+          <a:lstStyle>
+            <a:lvl1pPr algn="ctr" defTabSz="411480" rtl="0" eaLnBrk="1" latinLnBrk="0" hangingPunct="1">
+              <a:spcBef>
+                <a:spcPct val="0"/>
+              </a:spcBef>
+              <a:buNone/>
+              <a:defRPr sz="3960" kern="1200">
+                <a:solidFill>
+                  <a:schemeClr val="tx1"/>
+                </a:solidFill>
+                <a:latin typeface="+mj-lt"/>
+                <a:ea typeface="+mj-ea"/>
+                <a:cs typeface="+mj-cs"/>
+              </a:defRPr>
+            </a:lvl1pPr>
+          </a:lstStyle>
+          <a:p>
+            <a:pPr algn="l"/>
+            <a:r>
+              <a:rPr lang="en-US" sz="3200" dirty="0">
+                <a:solidFill>
+                  <a:srgbClr val="7030A0"/>
+                </a:solidFill>
+              </a:rPr>
+              <a:t>D</a:t>
+            </a:r>
+            <a:r>
+              <a:rPr lang="en-US" altLang="zh-CN" sz="3200" dirty="0">
+                <a:solidFill>
+                  <a:srgbClr val="7030A0"/>
+                </a:solidFill>
+              </a:rPr>
+              <a:t>ata source</a:t>
+            </a:r>
+            <a:endParaRPr lang="en-US" sz="2600" i="1" dirty="0">
+              <a:solidFill>
+                <a:srgbClr val="7030A0"/>
+              </a:solidFill>
+            </a:endParaRPr>
+          </a:p>
+        </p:txBody>
+      </p:sp>
+    </p:spTree>
+  </p:cSld>
+  <p:clrMapOvr>
+    <a:masterClrMapping/>
+  </p:clrMapOvr>
+</p:sld>
+</file>
+
+<file path=ppt/slides/slide30.xml><?xml version="1.0" encoding="utf-8"?>
 <p:sld xmlns:a="http://schemas.openxmlformats.org/drawingml/2006/main" xmlns:r="http://schemas.openxmlformats.org/officeDocument/2006/relationships" xmlns:p="http://schemas.openxmlformats.org/presentationml/2006/main">
   <p:cSld>
     <p:spTree>
@@ -27984,7 +28374,7 @@
             <a:fld id="{127DDC20-79C9-9647-820E-6D40A3D210C3}" type="slidenum">
               <a:rPr lang="en-US" smtClean="0"/>
               <a:pPr/>
-              <a:t>29</a:t>
+              <a:t>30</a:t>
             </a:fld>
             <a:endParaRPr lang="en-US"/>
           </a:p>
@@ -28073,225 +28463,6 @@
 </p:sld>
 </file>
 
-<file path=ppt/slides/slide3.xml><?xml version="1.0" encoding="utf-8"?>
-<p:sld xmlns:a="http://schemas.openxmlformats.org/drawingml/2006/main" xmlns:r="http://schemas.openxmlformats.org/officeDocument/2006/relationships" xmlns:p="http://schemas.openxmlformats.org/presentationml/2006/main">
-  <p:cSld>
-    <p:spTree>
-      <p:nvGrpSpPr>
-        <p:cNvPr id="1" name=""/>
-        <p:cNvGrpSpPr/>
-        <p:nvPr/>
-      </p:nvGrpSpPr>
-      <p:grpSpPr>
-        <a:xfrm>
-          <a:off x="0" y="0"/>
-          <a:ext cx="0" cy="0"/>
-          <a:chOff x="0" y="0"/>
-          <a:chExt cx="0" cy="0"/>
-        </a:xfrm>
-      </p:grpSpPr>
-      <p:sp>
-        <p:nvSpPr>
-          <p:cNvPr id="81923" name="Rectangle 3"/>
-          <p:cNvSpPr>
-            <a:spLocks noGrp="1" noChangeArrowheads="1"/>
-          </p:cNvSpPr>
-          <p:nvPr>
-            <p:ph idx="1"/>
-          </p:nvPr>
-        </p:nvSpPr>
-        <p:spPr>
-          <a:xfrm>
-            <a:off x="76200" y="876300"/>
-            <a:ext cx="7491663" cy="3741896"/>
-          </a:xfrm>
-        </p:spPr>
-        <p:txBody>
-          <a:bodyPr>
-            <a:normAutofit/>
-          </a:bodyPr>
-          <a:lstStyle/>
-          <a:p>
-            <a:pPr>
-              <a:buFont typeface="Courier New" panose="02070309020205020404" pitchFamily="49" charset="0"/>
-              <a:buChar char="o"/>
-            </a:pPr>
-            <a:r>
-              <a:rPr lang="en-US" dirty="0"/>
-              <a:t>Allows the map user to determine where data were obtained</a:t>
-            </a:r>
-          </a:p>
-          <a:p>
-            <a:pPr marL="765810" lvl="1" indent="-457200">
-              <a:buFont typeface="Wingdings" panose="05000000000000000000" pitchFamily="2" charset="2"/>
-              <a:buChar char="ü"/>
-            </a:pPr>
-            <a:r>
-              <a:rPr lang="en-US" dirty="0"/>
-              <a:t>Sources of base information are normally omitted from thematic maps </a:t>
-            </a:r>
-          </a:p>
-          <a:p>
-            <a:pPr>
-              <a:buFont typeface="Courier New" panose="02070309020205020404" pitchFamily="49" charset="0"/>
-              <a:buChar char="o"/>
-            </a:pPr>
-            <a:r>
-              <a:rPr lang="en-US" dirty="0"/>
-              <a:t>Should be formatted similar to a standard bibliographic reference, but is often more concise and less formal  </a:t>
-            </a:r>
-          </a:p>
-        </p:txBody>
-      </p:sp>
-      <p:sp>
-        <p:nvSpPr>
-          <p:cNvPr id="2" name="Slide Number Placeholder 1">
-            <a:extLst>
-              <a:ext uri="{FF2B5EF4-FFF2-40B4-BE49-F238E27FC236}">
-                <a16:creationId xmlns:a16="http://schemas.microsoft.com/office/drawing/2014/main" id="{F4413EBF-9B5B-45E1-B6EC-28D2CD8E0310}"/>
-              </a:ext>
-            </a:extLst>
-          </p:cNvPr>
-          <p:cNvSpPr>
-            <a:spLocks noGrp="1"/>
-          </p:cNvSpPr>
-          <p:nvPr>
-            <p:ph type="sldNum" sz="quarter" idx="12"/>
-          </p:nvPr>
-        </p:nvSpPr>
-        <p:spPr/>
-        <p:txBody>
-          <a:bodyPr/>
-          <a:lstStyle/>
-          <a:p>
-            <a:fld id="{127DDC20-79C9-9647-820E-6D40A3D210C3}" type="slidenum">
-              <a:rPr lang="en-US" smtClean="0"/>
-              <a:pPr/>
-              <a:t>3</a:t>
-            </a:fld>
-            <a:endParaRPr lang="en-US"/>
-          </a:p>
-        </p:txBody>
-      </p:sp>
-      <p:cxnSp>
-        <p:nvCxnSpPr>
-          <p:cNvPr id="6" name="Straight Connector 5">
-            <a:extLst>
-              <a:ext uri="{FF2B5EF4-FFF2-40B4-BE49-F238E27FC236}">
-                <a16:creationId xmlns:a16="http://schemas.microsoft.com/office/drawing/2014/main" id="{DC8B6E33-BB32-407B-B3A2-4DB83E80B91D}"/>
-              </a:ext>
-            </a:extLst>
-          </p:cNvPr>
-          <p:cNvCxnSpPr/>
-          <p:nvPr/>
-        </p:nvCxnSpPr>
-        <p:spPr>
-          <a:xfrm>
-            <a:off x="152400" y="922910"/>
-            <a:ext cx="8001000" cy="0"/>
-          </a:xfrm>
-          <a:prstGeom prst="line">
-            <a:avLst/>
-          </a:prstGeom>
-          <a:ln>
-            <a:solidFill>
-              <a:schemeClr val="tx1"/>
-            </a:solidFill>
-          </a:ln>
-          <a:effectLst/>
-        </p:spPr>
-        <p:style>
-          <a:lnRef idx="2">
-            <a:schemeClr val="accent1"/>
-          </a:lnRef>
-          <a:fillRef idx="0">
-            <a:schemeClr val="accent1"/>
-          </a:fillRef>
-          <a:effectRef idx="1">
-            <a:schemeClr val="accent1"/>
-          </a:effectRef>
-          <a:fontRef idx="minor">
-            <a:schemeClr val="tx1"/>
-          </a:fontRef>
-        </p:style>
-      </p:cxnSp>
-      <p:sp>
-        <p:nvSpPr>
-          <p:cNvPr id="7" name="Title 1">
-            <a:extLst>
-              <a:ext uri="{FF2B5EF4-FFF2-40B4-BE49-F238E27FC236}">
-                <a16:creationId xmlns:a16="http://schemas.microsoft.com/office/drawing/2014/main" id="{6D9AF380-D92B-4FD3-A5AF-A2B8A746E2D9}"/>
-              </a:ext>
-            </a:extLst>
-          </p:cNvPr>
-          <p:cNvSpPr txBox="1">
-            <a:spLocks/>
-          </p:cNvSpPr>
-          <p:nvPr/>
-        </p:nvSpPr>
-        <p:spPr>
-          <a:xfrm>
-            <a:off x="118533" y="6987"/>
-            <a:ext cx="8077200" cy="857250"/>
-          </a:xfrm>
-          <a:prstGeom prst="rect">
-            <a:avLst/>
-          </a:prstGeom>
-        </p:spPr>
-        <p:txBody>
-          <a:bodyPr vert="horz" lIns="91440" tIns="45720" rIns="91440" bIns="45720" rtlCol="0" anchor="ctr">
-            <a:normAutofit/>
-          </a:bodyPr>
-          <a:lstStyle>
-            <a:lvl1pPr algn="ctr" defTabSz="411480" rtl="0" eaLnBrk="1" latinLnBrk="0" hangingPunct="1">
-              <a:spcBef>
-                <a:spcPct val="0"/>
-              </a:spcBef>
-              <a:buNone/>
-              <a:defRPr sz="3960" kern="1200">
-                <a:solidFill>
-                  <a:schemeClr val="tx1"/>
-                </a:solidFill>
-                <a:latin typeface="+mj-lt"/>
-                <a:ea typeface="+mj-ea"/>
-                <a:cs typeface="+mj-cs"/>
-              </a:defRPr>
-            </a:lvl1pPr>
-          </a:lstStyle>
-          <a:p>
-            <a:pPr algn="l"/>
-            <a:r>
-              <a:rPr lang="en-US" sz="3200" dirty="0">
-                <a:solidFill>
-                  <a:srgbClr val="7030A0"/>
-                </a:solidFill>
-              </a:rPr>
-              <a:t>D</a:t>
-            </a:r>
-            <a:r>
-              <a:rPr lang="en-US" altLang="zh-CN" sz="3200" dirty="0">
-                <a:solidFill>
-                  <a:srgbClr val="7030A0"/>
-                </a:solidFill>
-              </a:rPr>
-              <a:t>ata source</a:t>
-            </a:r>
-            <a:endParaRPr lang="en-US" sz="2600" i="1" dirty="0">
-              <a:solidFill>
-                <a:srgbClr val="7030A0"/>
-              </a:solidFill>
-            </a:endParaRPr>
-          </a:p>
-        </p:txBody>
-      </p:sp>
-    </p:spTree>
-  </p:cSld>
-  <p:clrMapOvr>
-    <a:masterClrMapping/>
-  </p:clrMapOvr>
-</p:sld>
-</file>
-
 <file path=ppt/slides/slide4.xml><?xml version="1.0" encoding="utf-8"?>
 <p:sld xmlns:a="http://schemas.openxmlformats.org/drawingml/2006/main" xmlns:r="http://schemas.openxmlformats.org/officeDocument/2006/relationships" xmlns:p="http://schemas.openxmlformats.org/presentationml/2006/main">
   <p:cSld>
@@ -28494,7 +28665,7 @@
         </p:nvSpPr>
         <p:spPr>
           <a:xfrm>
-            <a:off x="118533" y="6987"/>
+            <a:off x="152400" y="166618"/>
             <a:ext cx="8077200" cy="857250"/>
           </a:xfrm>
           <a:prstGeom prst="rect">
@@ -28664,7 +28835,7 @@
         </p:nvSpPr>
         <p:spPr>
           <a:xfrm>
-            <a:off x="118533" y="6987"/>
+            <a:off x="230959" y="201859"/>
             <a:ext cx="8077200" cy="857250"/>
           </a:xfrm>
           <a:prstGeom prst="rect">
@@ -28789,13 +28960,13 @@
         </p:nvSpPr>
         <p:spPr>
           <a:xfrm>
-            <a:off x="288758" y="1028700"/>
-            <a:ext cx="7700209" cy="3741896"/>
+            <a:off x="288758" y="985840"/>
+            <a:ext cx="7700209" cy="1543050"/>
           </a:xfrm>
         </p:spPr>
         <p:txBody>
           <a:bodyPr>
-            <a:normAutofit/>
+            <a:noAutofit/>
           </a:bodyPr>
           <a:lstStyle/>
           <a:p>
@@ -28804,7 +28975,7 @@
               <a:buChar char="o"/>
             </a:pPr>
             <a:r>
-              <a:rPr lang="en-US" dirty="0"/>
+              <a:rPr lang="en-US" sz="1600" dirty="0"/>
               <a:t>The data source should be among the smallest type on a map</a:t>
             </a:r>
           </a:p>
@@ -28814,7 +28985,7 @@
               <a:buChar char="ü"/>
             </a:pPr>
             <a:r>
-              <a:rPr lang="en-US" dirty="0"/>
+              <a:rPr lang="en-US" sz="1600" dirty="0"/>
               <a:t>Its purpose is to inform the curious, not to attract attention</a:t>
             </a:r>
           </a:p>
@@ -28824,7 +28995,7 @@
               <a:buChar char="o"/>
             </a:pPr>
             <a:r>
-              <a:rPr lang="en-US" dirty="0"/>
+              <a:rPr lang="en-US" sz="1600" dirty="0"/>
               <a:t>Center it below the legend</a:t>
             </a:r>
           </a:p>
@@ -28834,15 +29005,8 @@
               <a:buChar char="ü"/>
             </a:pPr>
             <a:r>
-              <a:rPr lang="en-US" dirty="0"/>
-              <a:t>Or tuck it into a lower </a:t>
-            </a:r>
-            <a:br>
-              <a:rPr lang="en-US" dirty="0"/>
-            </a:br>
-            <a:r>
-              <a:rPr lang="en-US" dirty="0"/>
-              <a:t>corner</a:t>
+              <a:rPr lang="en-US" sz="1600" dirty="0"/>
+              <a:t>Or tuck it into a lower corner</a:t>
             </a:r>
           </a:p>
         </p:txBody>
@@ -28927,7 +29091,7 @@
         </p:blipFill>
         <p:spPr>
           <a:xfrm>
-            <a:off x="1508979" y="4114800"/>
+            <a:off x="1217903" y="3440243"/>
             <a:ext cx="3109455" cy="982478"/>
           </a:xfrm>
           <a:prstGeom prst="rect">
@@ -28993,7 +29157,7 @@
         </p:nvSpPr>
         <p:spPr>
           <a:xfrm>
-            <a:off x="118533" y="6987"/>
+            <a:off x="288758" y="128590"/>
             <a:ext cx="8077200" cy="857250"/>
           </a:xfrm>
           <a:prstGeom prst="rect">
@@ -29084,7 +29248,7 @@
         <p:spPr>
           <a:xfrm>
             <a:off x="118533" y="1028700"/>
-            <a:ext cx="7870435" cy="3741896"/>
+            <a:ext cx="7870435" cy="2628895"/>
           </a:xfrm>
         </p:spPr>
         <p:txBody>
@@ -29098,7 +29262,7 @@
               <a:buChar char="o"/>
             </a:pPr>
             <a:r>
-              <a:rPr lang="en-US" dirty="0"/>
+              <a:rPr lang="en-US" sz="2000" dirty="0"/>
               <a:t>Indicates the amount of reduction that has taken place on a map, or allows the map user to measure distances</a:t>
             </a:r>
           </a:p>
@@ -29108,7 +29272,7 @@
               <a:buChar char="o"/>
             </a:pPr>
             <a:r>
-              <a:rPr lang="en-US" dirty="0"/>
+              <a:rPr lang="en-US" sz="2000" dirty="0"/>
               <a:t>Can take three forms</a:t>
             </a:r>
           </a:p>
@@ -29118,7 +29282,7 @@
               <a:buChar char="ü"/>
             </a:pPr>
             <a:r>
-              <a:rPr lang="en-US" dirty="0"/>
+              <a:rPr lang="en-US" sz="2000" dirty="0"/>
               <a:t>Representative Fraction (1:24,000) </a:t>
             </a:r>
           </a:p>
@@ -29128,7 +29292,7 @@
               <a:buChar char="ü"/>
             </a:pPr>
             <a:r>
-              <a:rPr lang="en-US" dirty="0"/>
+              <a:rPr lang="en-US" sz="2000" dirty="0"/>
               <a:t>Verbal Scale (“One Inch to the Mile”)</a:t>
             </a:r>
           </a:p>
@@ -29138,7 +29302,7 @@
               <a:buChar char="ü"/>
             </a:pPr>
             <a:r>
-              <a:rPr lang="en-US" dirty="0"/>
+              <a:rPr lang="en-US" sz="2000" dirty="0"/>
               <a:t>Bar Scale or Scale Bar</a:t>
             </a:r>
           </a:p>
@@ -29191,8 +29355,8 @@
         </p:blipFill>
         <p:spPr bwMode="auto">
           <a:xfrm>
-            <a:off x="6175943" y="3331488"/>
-            <a:ext cx="1141214" cy="1439108"/>
+            <a:off x="6028025" y="3121254"/>
+            <a:ext cx="1454050" cy="1833604"/>
           </a:xfrm>
           <a:prstGeom prst="rect">
             <a:avLst/>
@@ -29266,7 +29430,7 @@
         </p:nvSpPr>
         <p:spPr>
           <a:xfrm>
-            <a:off x="118533" y="6987"/>
+            <a:off x="260940" y="171450"/>
             <a:ext cx="8077200" cy="857250"/>
           </a:xfrm>
           <a:prstGeom prst="rect">
@@ -29460,7 +29624,7 @@
         </p:nvSpPr>
         <p:spPr>
           <a:xfrm>
-            <a:off x="118533" y="6987"/>
+            <a:off x="268434" y="185381"/>
             <a:ext cx="8077200" cy="857250"/>
           </a:xfrm>
           <a:prstGeom prst="rect">
@@ -29651,11 +29815,13 @@
         <p:spPr>
           <a:xfrm>
             <a:off x="118533" y="957714"/>
-            <a:ext cx="7818120" cy="3741896"/>
-          </a:xfrm>
-        </p:spPr>
-        <p:txBody>
-          <a:bodyPr/>
+            <a:ext cx="7818120" cy="3202056"/>
+          </a:xfrm>
+        </p:spPr>
+        <p:txBody>
+          <a:bodyPr>
+            <a:normAutofit/>
+          </a:bodyPr>
           <a:lstStyle/>
           <a:p>
             <a:pPr>
@@ -29663,7 +29829,7 @@
               <a:buChar char="o"/>
             </a:pPr>
             <a:r>
-              <a:rPr lang="en-US" dirty="0"/>
+              <a:rPr lang="en-US" sz="2400" dirty="0"/>
               <a:t>The bar scale is preferred format for inclusion on a thematic map </a:t>
             </a:r>
           </a:p>
@@ -29673,7 +29839,7 @@
               <a:buChar char="ü"/>
             </a:pPr>
             <a:r>
-              <a:rPr lang="en-US" dirty="0"/>
+              <a:rPr lang="en-US" sz="2400" dirty="0"/>
               <a:t>Resembles a ruler </a:t>
             </a:r>
           </a:p>
@@ -29683,7 +29849,7 @@
               <a:buChar char="ü"/>
             </a:pPr>
             <a:r>
-              <a:rPr lang="en-US" dirty="0"/>
+              <a:rPr lang="en-US" sz="2400" dirty="0"/>
               <a:t>Remains true when a map is enlarged or reduced (representative fractions and verbal scales don’t)</a:t>
             </a:r>
           </a:p>
@@ -29693,7 +29859,7 @@
               <a:buChar char="ü"/>
             </a:pPr>
             <a:r>
-              <a:rPr lang="en-US" dirty="0"/>
+              <a:rPr lang="en-US" sz="2400" dirty="0"/>
               <a:t>Include if distance information can enhance the map user’s understanding of the theme</a:t>
             </a:r>
           </a:p>
@@ -29787,7 +29953,7 @@
         </p:nvSpPr>
         <p:spPr>
           <a:xfrm>
-            <a:off x="118533" y="6987"/>
+            <a:off x="292947" y="200006"/>
             <a:ext cx="8077200" cy="857250"/>
           </a:xfrm>
           <a:prstGeom prst="rect">

--- a/docs/Lectures/Week07/Lecture07_GEOG2475_Thursday.pptx
+++ b/docs/Lectures/Week07/Lecture07_GEOG2475_Thursday.pptx
@@ -9,7 +9,7 @@
     <p:sldMasterId id="2147483709" r:id="rId5"/>
   </p:sldMasterIdLst>
   <p:notesMasterIdLst>
-    <p:notesMasterId r:id="rId36"/>
+    <p:notesMasterId r:id="rId33"/>
   </p:notesMasterIdLst>
   <p:sldIdLst>
     <p:sldId id="914" r:id="rId6"/>
@@ -24,24 +24,21 @@
     <p:sldId id="655" r:id="rId15"/>
     <p:sldId id="524" r:id="rId16"/>
     <p:sldId id="526" r:id="rId17"/>
-    <p:sldId id="527" r:id="rId18"/>
-    <p:sldId id="556" r:id="rId19"/>
-    <p:sldId id="656" r:id="rId20"/>
-    <p:sldId id="666" r:id="rId21"/>
-    <p:sldId id="1648" r:id="rId22"/>
-    <p:sldId id="533" r:id="rId23"/>
-    <p:sldId id="535" r:id="rId24"/>
-    <p:sldId id="537" r:id="rId25"/>
-    <p:sldId id="538" r:id="rId26"/>
-    <p:sldId id="539" r:id="rId27"/>
-    <p:sldId id="536" r:id="rId28"/>
-    <p:sldId id="541" r:id="rId29"/>
-    <p:sldId id="667" r:id="rId30"/>
-    <p:sldId id="540" r:id="rId31"/>
-    <p:sldId id="665" r:id="rId32"/>
-    <p:sldId id="553" r:id="rId33"/>
-    <p:sldId id="668" r:id="rId34"/>
-    <p:sldId id="270" r:id="rId35"/>
+    <p:sldId id="556" r:id="rId18"/>
+    <p:sldId id="656" r:id="rId19"/>
+    <p:sldId id="666" r:id="rId20"/>
+    <p:sldId id="1648" r:id="rId21"/>
+    <p:sldId id="533" r:id="rId22"/>
+    <p:sldId id="535" r:id="rId23"/>
+    <p:sldId id="537" r:id="rId24"/>
+    <p:sldId id="539" r:id="rId25"/>
+    <p:sldId id="536" r:id="rId26"/>
+    <p:sldId id="541" r:id="rId27"/>
+    <p:sldId id="667" r:id="rId28"/>
+    <p:sldId id="540" r:id="rId29"/>
+    <p:sldId id="665" r:id="rId30"/>
+    <p:sldId id="553" r:id="rId31"/>
+    <p:sldId id="270" r:id="rId32"/>
   </p:sldIdLst>
   <p:sldSz cx="8229600" cy="5143500"/>
   <p:notesSz cx="7010400" cy="9296400"/>
@@ -972,28 +969,6 @@
           <a:bodyPr/>
           <a:lstStyle/>
           <a:p>
-            <a:r>
-              <a:rPr lang="en-US" b="0" i="1" dirty="0">
-                <a:solidFill>
-                  <a:srgbClr val="4C4C4C"/>
-                </a:solidFill>
-                <a:effectLst/>
-                <a:latin typeface="Avenir Next W01"/>
-              </a:rPr>
-              <a:t>An extension scale which shows finer subdivisions of the scale bar allows for smaller distance measurements.</a:t>
-            </a:r>
-          </a:p>
-          <a:p>
-            <a:r>
-              <a:rPr lang="en-US" b="0" i="0" dirty="0">
-                <a:solidFill>
-                  <a:srgbClr val="4C4C4C"/>
-                </a:solidFill>
-                <a:effectLst/>
-                <a:latin typeface="Avenir Next W01"/>
-              </a:rPr>
-              <a:t>If you have decided to use a scale bar and you have more than one mapped area (e.g., the coterminous U.S., Alaska and Hawaii), each mapped area requires its own scale bar if they are shown at different scales.</a:t>
-            </a:r>
             <a:endParaRPr lang="en-US" dirty="0"/>
           </a:p>
         </p:txBody>
@@ -1016,279 +991,7 @@
             <a:fld id="{56507943-197E-CE46-82F0-5A323A24AE7A}" type="slidenum">
               <a:rPr lang="en-US" smtClean="0"/>
               <a:pPr/>
-              <a:t>13</a:t>
-            </a:fld>
-            <a:endParaRPr lang="en-US"/>
-          </a:p>
-        </p:txBody>
-      </p:sp>
-    </p:spTree>
-    <p:extLst>
-      <p:ext uri="{BB962C8B-B14F-4D97-AF65-F5344CB8AC3E}">
-        <p14:creationId xmlns:p14="http://schemas.microsoft.com/office/powerpoint/2010/main" val="1306626104"/>
-      </p:ext>
-    </p:extLst>
-  </p:cSld>
-  <p:clrMapOvr>
-    <a:masterClrMapping/>
-  </p:clrMapOvr>
-</p:notes>
-</file>
-
-<file path=ppt/notesSlides/notesSlide6.xml><?xml version="1.0" encoding="utf-8"?>
-<p:notes xmlns:a="http://schemas.openxmlformats.org/drawingml/2006/main" xmlns:r="http://schemas.openxmlformats.org/officeDocument/2006/relationships" xmlns:p="http://schemas.openxmlformats.org/presentationml/2006/main">
-  <p:cSld>
-    <p:spTree>
-      <p:nvGrpSpPr>
-        <p:cNvPr id="1" name=""/>
-        <p:cNvGrpSpPr/>
-        <p:nvPr/>
-      </p:nvGrpSpPr>
-      <p:grpSpPr>
-        <a:xfrm>
-          <a:off x="0" y="0"/>
-          <a:ext cx="0" cy="0"/>
-          <a:chOff x="0" y="0"/>
-          <a:chExt cx="0" cy="0"/>
-        </a:xfrm>
-      </p:grpSpPr>
-      <p:sp>
-        <p:nvSpPr>
-          <p:cNvPr id="2" name="Slide Image Placeholder 1"/>
-          <p:cNvSpPr>
-            <a:spLocks noGrp="1" noRot="1" noChangeAspect="1"/>
-          </p:cNvSpPr>
-          <p:nvPr>
-            <p:ph type="sldImg"/>
-          </p:nvPr>
-        </p:nvSpPr>
-        <p:spPr/>
-      </p:sp>
-      <p:sp>
-        <p:nvSpPr>
-          <p:cNvPr id="3" name="Notes Placeholder 2"/>
-          <p:cNvSpPr>
-            <a:spLocks noGrp="1"/>
-          </p:cNvSpPr>
-          <p:nvPr>
-            <p:ph type="body" idx="1"/>
-          </p:nvPr>
-        </p:nvSpPr>
-        <p:spPr/>
-        <p:txBody>
-          <a:bodyPr/>
-          <a:lstStyle/>
-          <a:p>
-            <a:pPr marL="0" marR="0" lvl="0" indent="0" algn="l" defTabSz="457200" rtl="0" eaLnBrk="1" fontAlgn="auto" latinLnBrk="0" hangingPunct="1">
-              <a:lnSpc>
-                <a:spcPct val="100000"/>
-              </a:lnSpc>
-              <a:spcBef>
-                <a:spcPts val="0"/>
-              </a:spcBef>
-              <a:spcAft>
-                <a:spcPts val="0"/>
-              </a:spcAft>
-              <a:buClrTx/>
-              <a:buSzTx/>
-              <a:buFontTx/>
-              <a:buNone/>
-              <a:tabLst/>
-              <a:defRPr/>
-            </a:pPr>
-            <a:r>
-              <a:rPr lang="en-US" dirty="0">
-                <a:solidFill>
-                  <a:srgbClr val="000000"/>
-                </a:solidFill>
-              </a:rPr>
-              <a:t>A noisy, inefficient communicator</a:t>
-            </a:r>
-          </a:p>
-          <a:p>
-            <a:pPr marL="0" marR="0" lvl="0" indent="0" algn="l" defTabSz="457200" rtl="0" eaLnBrk="1" fontAlgn="auto" latinLnBrk="0" hangingPunct="1">
-              <a:lnSpc>
-                <a:spcPct val="100000"/>
-              </a:lnSpc>
-              <a:spcBef>
-                <a:spcPts val="0"/>
-              </a:spcBef>
-              <a:spcAft>
-                <a:spcPts val="0"/>
-              </a:spcAft>
-              <a:buClrTx/>
-              <a:buSzTx/>
-              <a:buFontTx/>
-              <a:buNone/>
-              <a:tabLst/>
-              <a:defRPr/>
-            </a:pPr>
-            <a:endParaRPr lang="en-US" dirty="0">
-              <a:solidFill>
-                <a:srgbClr val="000000"/>
-              </a:solidFill>
-            </a:endParaRPr>
-          </a:p>
-          <a:p>
-            <a:pPr marL="0" marR="0" lvl="0" indent="0" algn="l" defTabSz="457200" rtl="0" eaLnBrk="1" fontAlgn="auto" latinLnBrk="0" hangingPunct="1">
-              <a:lnSpc>
-                <a:spcPct val="100000"/>
-              </a:lnSpc>
-              <a:spcBef>
-                <a:spcPts val="0"/>
-              </a:spcBef>
-              <a:spcAft>
-                <a:spcPts val="0"/>
-              </a:spcAft>
-              <a:buClrTx/>
-              <a:buSzTx/>
-              <a:buFontTx/>
-              <a:buNone/>
-              <a:tabLst/>
-              <a:defRPr/>
-            </a:pPr>
-            <a:r>
-              <a:rPr lang="en-US" dirty="0">
-                <a:solidFill>
-                  <a:srgbClr val="000000"/>
-                </a:solidFill>
-              </a:rPr>
-              <a:t>A simple, efficient communicator</a:t>
-            </a:r>
-          </a:p>
-          <a:p>
-            <a:pPr marL="0" marR="0" lvl="0" indent="0" algn="l" defTabSz="457200" rtl="0" eaLnBrk="1" fontAlgn="auto" latinLnBrk="0" hangingPunct="1">
-              <a:lnSpc>
-                <a:spcPct val="100000"/>
-              </a:lnSpc>
-              <a:spcBef>
-                <a:spcPts val="0"/>
-              </a:spcBef>
-              <a:spcAft>
-                <a:spcPts val="0"/>
-              </a:spcAft>
-              <a:buClrTx/>
-              <a:buSzTx/>
-              <a:buFontTx/>
-              <a:buNone/>
-              <a:tabLst/>
-              <a:defRPr/>
-            </a:pPr>
-            <a:endParaRPr lang="en-US" dirty="0">
-              <a:solidFill>
-                <a:srgbClr val="000000"/>
-              </a:solidFill>
-            </a:endParaRPr>
-          </a:p>
-          <a:p>
-            <a:endParaRPr lang="en-US" dirty="0"/>
-          </a:p>
-        </p:txBody>
-      </p:sp>
-      <p:sp>
-        <p:nvSpPr>
-          <p:cNvPr id="4" name="Slide Number Placeholder 3"/>
-          <p:cNvSpPr>
-            <a:spLocks noGrp="1"/>
-          </p:cNvSpPr>
-          <p:nvPr>
-            <p:ph type="sldNum" sz="quarter" idx="5"/>
-          </p:nvPr>
-        </p:nvSpPr>
-        <p:spPr/>
-        <p:txBody>
-          <a:bodyPr/>
-          <a:lstStyle/>
-          <a:p>
-            <a:fld id="{56507943-197E-CE46-82F0-5A323A24AE7A}" type="slidenum">
-              <a:rPr lang="en-US" smtClean="0"/>
-              <a:pPr/>
-              <a:t>29</a:t>
-            </a:fld>
-            <a:endParaRPr lang="en-US"/>
-          </a:p>
-        </p:txBody>
-      </p:sp>
-    </p:spTree>
-    <p:extLst>
-      <p:ext uri="{BB962C8B-B14F-4D97-AF65-F5344CB8AC3E}">
-        <p14:creationId xmlns:p14="http://schemas.microsoft.com/office/powerpoint/2010/main" val="3802608119"/>
-      </p:ext>
-    </p:extLst>
-  </p:cSld>
-  <p:clrMapOvr>
-    <a:masterClrMapping/>
-  </p:clrMapOvr>
-</p:notes>
-</file>
-
-<file path=ppt/notesSlides/notesSlide7.xml><?xml version="1.0" encoding="utf-8"?>
-<p:notes xmlns:a="http://schemas.openxmlformats.org/drawingml/2006/main" xmlns:r="http://schemas.openxmlformats.org/officeDocument/2006/relationships" xmlns:p="http://schemas.openxmlformats.org/presentationml/2006/main">
-  <p:cSld>
-    <p:spTree>
-      <p:nvGrpSpPr>
-        <p:cNvPr id="1" name=""/>
-        <p:cNvGrpSpPr/>
-        <p:nvPr/>
-      </p:nvGrpSpPr>
-      <p:grpSpPr>
-        <a:xfrm>
-          <a:off x="0" y="0"/>
-          <a:ext cx="0" cy="0"/>
-          <a:chOff x="0" y="0"/>
-          <a:chExt cx="0" cy="0"/>
-        </a:xfrm>
-      </p:grpSpPr>
-      <p:sp>
-        <p:nvSpPr>
-          <p:cNvPr id="2" name="Slide Image Placeholder 1"/>
-          <p:cNvSpPr>
-            <a:spLocks noGrp="1" noRot="1" noChangeAspect="1"/>
-          </p:cNvSpPr>
-          <p:nvPr>
-            <p:ph type="sldImg"/>
-          </p:nvPr>
-        </p:nvSpPr>
-        <p:spPr/>
-      </p:sp>
-      <p:sp>
-        <p:nvSpPr>
-          <p:cNvPr id="3" name="Notes Placeholder 2"/>
-          <p:cNvSpPr>
-            <a:spLocks noGrp="1"/>
-          </p:cNvSpPr>
-          <p:nvPr>
-            <p:ph type="body" idx="1"/>
-          </p:nvPr>
-        </p:nvSpPr>
-        <p:spPr/>
-        <p:txBody>
-          <a:bodyPr/>
-          <a:lstStyle/>
-          <a:p>
-            <a:endParaRPr lang="en-US" dirty="0"/>
-          </a:p>
-        </p:txBody>
-      </p:sp>
-      <p:sp>
-        <p:nvSpPr>
-          <p:cNvPr id="4" name="Slide Number Placeholder 3"/>
-          <p:cNvSpPr>
-            <a:spLocks noGrp="1"/>
-          </p:cNvSpPr>
-          <p:nvPr>
-            <p:ph type="sldNum" sz="quarter" idx="5"/>
-          </p:nvPr>
-        </p:nvSpPr>
-        <p:spPr/>
-        <p:txBody>
-          <a:bodyPr/>
-          <a:lstStyle/>
-          <a:p>
-            <a:fld id="{56507943-197E-CE46-82F0-5A323A24AE7A}" type="slidenum">
-              <a:rPr lang="en-US" smtClean="0"/>
-              <a:pPr/>
-              <a:t>30</a:t>
+              <a:t>27</a:t>
             </a:fld>
             <a:endParaRPr lang="en-US"/>
           </a:p>
@@ -21750,7 +21453,7 @@
       </p:grpSpPr>
       <p:sp>
         <p:nvSpPr>
-          <p:cNvPr id="96259" name="Rectangle 3"/>
+          <p:cNvPr id="97283" name="Rectangle 3"/>
           <p:cNvSpPr>
             <a:spLocks noGrp="1" noChangeArrowheads="1"/>
           </p:cNvSpPr>
@@ -21760,8 +21463,8 @@
         </p:nvSpPr>
         <p:spPr>
           <a:xfrm>
-            <a:off x="252663" y="1028700"/>
-            <a:ext cx="7565457" cy="2433636"/>
+            <a:off x="161535" y="922910"/>
+            <a:ext cx="7906530" cy="2880990"/>
           </a:xfrm>
         </p:spPr>
         <p:txBody>
@@ -21775,8 +21478,8 @@
               <a:buChar char="o"/>
             </a:pPr>
             <a:r>
-              <a:rPr lang="en-US" dirty="0"/>
-              <a:t>Don’t use an “extension scale” unless the map user requires it</a:t>
+              <a:rPr lang="en-US" sz="2000" dirty="0"/>
+              <a:t>The style of the bar scale should be simple and subtle; it should not attract attention</a:t>
             </a:r>
           </a:p>
           <a:p>
@@ -21785,8 +21488,8 @@
               <a:buChar char="ü"/>
             </a:pPr>
             <a:r>
-              <a:rPr lang="en-US" sz="2500" dirty="0"/>
-              <a:t>Shows finer subdivisions of the scale bar allows for smaller distance measurements</a:t>
+              <a:rPr lang="en-US" sz="2000" dirty="0"/>
+              <a:t>Bulky and complex designs should be avoided</a:t>
             </a:r>
           </a:p>
           <a:p>
@@ -21795,18 +21498,28 @@
               <a:buChar char="ü"/>
             </a:pPr>
             <a:r>
-              <a:rPr lang="en-US" dirty="0"/>
-              <a:t>The extension scale can be useful when employing a specific method of map measurement, but it can also be a source of confusion</a:t>
-            </a:r>
-          </a:p>
-        </p:txBody>
-      </p:sp>
-      <p:sp>
-        <p:nvSpPr>
-          <p:cNvPr id="3" name="Slide Number Placeholder 2">
+              <a:rPr lang="en-US" sz="2000" dirty="0"/>
+              <a:t>Line weights should be thin and type should be among the smallest on a map</a:t>
+            </a:r>
+          </a:p>
+          <a:p>
+            <a:pPr marL="765810" lvl="1" indent="-457200">
+              <a:buFont typeface="Wingdings" panose="05000000000000000000" pitchFamily="2" charset="2"/>
+              <a:buChar char="ü"/>
+            </a:pPr>
+            <a:r>
+              <a:rPr lang="en-US" sz="2000" dirty="0"/>
+              <a:t>Avoid the use of bold and italic type styles </a:t>
+            </a:r>
+          </a:p>
+        </p:txBody>
+      </p:sp>
+      <p:sp>
+        <p:nvSpPr>
+          <p:cNvPr id="2" name="Slide Number Placeholder 1">
             <a:extLst>
               <a:ext uri="{FF2B5EF4-FFF2-40B4-BE49-F238E27FC236}">
-                <a16:creationId xmlns:a16="http://schemas.microsoft.com/office/drawing/2014/main" id="{6C0C2230-506C-4457-81EC-2D715FB999D4}"/>
+                <a16:creationId xmlns:a16="http://schemas.microsoft.com/office/drawing/2014/main" id="{80A0C38B-1D13-420D-B7B4-DEFB2F948EB6}"/>
               </a:ext>
             </a:extLst>
           </p:cNvPr>
@@ -21831,74 +21544,12 @@
           </a:p>
         </p:txBody>
       </p:sp>
-      <p:pic>
-        <p:nvPicPr>
-          <p:cNvPr id="96260" name="Picture 9" descr="Image showing scale"/>
-          <p:cNvPicPr>
-            <a:picLocks noChangeAspect="1" noChangeArrowheads="1"/>
-          </p:cNvPicPr>
-          <p:nvPr/>
-        </p:nvPicPr>
-        <p:blipFill>
-          <a:blip r:embed="rId3" cstate="print"/>
-          <a:srcRect/>
-          <a:stretch>
-            <a:fillRect/>
-          </a:stretch>
-        </p:blipFill>
-        <p:spPr bwMode="auto">
-          <a:xfrm>
-            <a:off x="1316951" y="3661529"/>
-            <a:ext cx="5503545" cy="906542"/>
-          </a:xfrm>
-          <a:prstGeom prst="rect">
-            <a:avLst/>
-          </a:prstGeom>
-          <a:noFill/>
-          <a:ln w="9525" algn="ctr">
-            <a:solidFill>
-              <a:schemeClr val="tx1"/>
-            </a:solidFill>
-            <a:miter lim="800000"/>
-            <a:headEnd/>
-            <a:tailEnd/>
-          </a:ln>
-        </p:spPr>
-      </p:pic>
-      <p:sp>
-        <p:nvSpPr>
-          <p:cNvPr id="2" name="Rectangle 1"/>
-          <p:cNvSpPr/>
-          <p:nvPr/>
-        </p:nvSpPr>
-        <p:spPr>
-          <a:xfrm>
-            <a:off x="1767143" y="4620155"/>
-            <a:ext cx="4928785" cy="279307"/>
-          </a:xfrm>
-          <a:prstGeom prst="rect">
-            <a:avLst/>
-          </a:prstGeom>
-        </p:spPr>
-        <p:txBody>
-          <a:bodyPr wrap="none">
-            <a:spAutoFit/>
-          </a:bodyPr>
-          <a:lstStyle/>
-          <a:p>
-            <a:r>
-              <a:rPr lang="en-US" sz="1215" dirty="0"/>
-              <a:t>And the “checkerboard” serves no purpose, other than to attract attention.</a:t>
-            </a:r>
-          </a:p>
-        </p:txBody>
-      </p:sp>
       <p:cxnSp>
         <p:nvCxnSpPr>
-          <p:cNvPr id="6" name="Straight Connector 5">
+          <p:cNvPr id="9" name="Straight Connector 8">
             <a:extLst>
               <a:ext uri="{FF2B5EF4-FFF2-40B4-BE49-F238E27FC236}">
-                <a16:creationId xmlns:a16="http://schemas.microsoft.com/office/drawing/2014/main" id="{D61EA20C-904A-42E1-8861-AC788B1D445F}"/>
+                <a16:creationId xmlns:a16="http://schemas.microsoft.com/office/drawing/2014/main" id="{1453C7D2-E673-4F0B-BC5D-966FD27C3E10}"/>
               </a:ext>
             </a:extLst>
           </p:cNvPr>
@@ -21937,10 +21588,10 @@
       </p:cxnSp>
       <p:sp>
         <p:nvSpPr>
-          <p:cNvPr id="7" name="Title 1">
+          <p:cNvPr id="10" name="Title 1">
             <a:extLst>
               <a:ext uri="{FF2B5EF4-FFF2-40B4-BE49-F238E27FC236}">
-                <a16:creationId xmlns:a16="http://schemas.microsoft.com/office/drawing/2014/main" id="{0A25F008-83DE-4C8C-A8D5-AAAAA91B3266}"/>
+                <a16:creationId xmlns:a16="http://schemas.microsoft.com/office/drawing/2014/main" id="{DB846AD2-ABA7-41FC-8500-DFD9254A2CEC}"/>
               </a:ext>
             </a:extLst>
           </p:cNvPr>
@@ -21951,7 +21602,7 @@
         </p:nvSpPr>
         <p:spPr>
           <a:xfrm>
-            <a:off x="118533" y="6987"/>
+            <a:off x="170670" y="162396"/>
             <a:ext cx="8077200" cy="857250"/>
           </a:xfrm>
           <a:prstGeom prst="rect">
@@ -22005,227 +21656,6 @@
 </file>
 
 <file path=ppt/slides/slide14.xml><?xml version="1.0" encoding="utf-8"?>
-<p:sld xmlns:a="http://schemas.openxmlformats.org/drawingml/2006/main" xmlns:r="http://schemas.openxmlformats.org/officeDocument/2006/relationships" xmlns:p="http://schemas.openxmlformats.org/presentationml/2006/main">
-  <p:cSld>
-    <p:spTree>
-      <p:nvGrpSpPr>
-        <p:cNvPr id="1" name=""/>
-        <p:cNvGrpSpPr/>
-        <p:nvPr/>
-      </p:nvGrpSpPr>
-      <p:grpSpPr>
-        <a:xfrm>
-          <a:off x="0" y="0"/>
-          <a:ext cx="0" cy="0"/>
-          <a:chOff x="0" y="0"/>
-          <a:chExt cx="0" cy="0"/>
-        </a:xfrm>
-      </p:grpSpPr>
-      <p:sp>
-        <p:nvSpPr>
-          <p:cNvPr id="97283" name="Rectangle 3"/>
-          <p:cNvSpPr>
-            <a:spLocks noGrp="1" noChangeArrowheads="1"/>
-          </p:cNvSpPr>
-          <p:nvPr>
-            <p:ph idx="1"/>
-          </p:nvPr>
-        </p:nvSpPr>
-        <p:spPr>
-          <a:xfrm>
-            <a:off x="161535" y="922910"/>
-            <a:ext cx="7906530" cy="3741896"/>
-          </a:xfrm>
-        </p:spPr>
-        <p:txBody>
-          <a:bodyPr>
-            <a:normAutofit/>
-          </a:bodyPr>
-          <a:lstStyle/>
-          <a:p>
-            <a:pPr>
-              <a:buFont typeface="Courier New" panose="02070309020205020404" pitchFamily="49" charset="0"/>
-              <a:buChar char="o"/>
-            </a:pPr>
-            <a:r>
-              <a:rPr lang="en-US" sz="2000" dirty="0"/>
-              <a:t>The style of the bar scale should be simple and subtle; it should not attract attention</a:t>
-            </a:r>
-          </a:p>
-          <a:p>
-            <a:pPr marL="765810" lvl="1" indent="-457200">
-              <a:buFont typeface="Wingdings" panose="05000000000000000000" pitchFamily="2" charset="2"/>
-              <a:buChar char="ü"/>
-            </a:pPr>
-            <a:r>
-              <a:rPr lang="en-US" sz="2000" dirty="0"/>
-              <a:t>Bulky and complex designs should be avoided</a:t>
-            </a:r>
-          </a:p>
-          <a:p>
-            <a:pPr marL="765810" lvl="1" indent="-457200">
-              <a:buFont typeface="Wingdings" panose="05000000000000000000" pitchFamily="2" charset="2"/>
-              <a:buChar char="ü"/>
-            </a:pPr>
-            <a:r>
-              <a:rPr lang="en-US" sz="2000" dirty="0"/>
-              <a:t>Line weights should be thin and type should be among the smallest on a map</a:t>
-            </a:r>
-          </a:p>
-          <a:p>
-            <a:pPr marL="765810" lvl="1" indent="-457200">
-              <a:buFont typeface="Wingdings" panose="05000000000000000000" pitchFamily="2" charset="2"/>
-              <a:buChar char="ü"/>
-            </a:pPr>
-            <a:r>
-              <a:rPr lang="en-US" sz="2000" dirty="0"/>
-              <a:t>Avoid the use of bold and italic type styles </a:t>
-            </a:r>
-          </a:p>
-        </p:txBody>
-      </p:sp>
-      <p:sp>
-        <p:nvSpPr>
-          <p:cNvPr id="2" name="Slide Number Placeholder 1">
-            <a:extLst>
-              <a:ext uri="{FF2B5EF4-FFF2-40B4-BE49-F238E27FC236}">
-                <a16:creationId xmlns:a16="http://schemas.microsoft.com/office/drawing/2014/main" id="{80A0C38B-1D13-420D-B7B4-DEFB2F948EB6}"/>
-              </a:ext>
-            </a:extLst>
-          </p:cNvPr>
-          <p:cNvSpPr>
-            <a:spLocks noGrp="1"/>
-          </p:cNvSpPr>
-          <p:nvPr>
-            <p:ph type="sldNum" sz="quarter" idx="12"/>
-          </p:nvPr>
-        </p:nvSpPr>
-        <p:spPr/>
-        <p:txBody>
-          <a:bodyPr/>
-          <a:lstStyle/>
-          <a:p>
-            <a:fld id="{127DDC20-79C9-9647-820E-6D40A3D210C3}" type="slidenum">
-              <a:rPr lang="en-US" smtClean="0"/>
-              <a:pPr/>
-              <a:t>14</a:t>
-            </a:fld>
-            <a:endParaRPr lang="en-US"/>
-          </a:p>
-        </p:txBody>
-      </p:sp>
-      <p:cxnSp>
-        <p:nvCxnSpPr>
-          <p:cNvPr id="9" name="Straight Connector 8">
-            <a:extLst>
-              <a:ext uri="{FF2B5EF4-FFF2-40B4-BE49-F238E27FC236}">
-                <a16:creationId xmlns:a16="http://schemas.microsoft.com/office/drawing/2014/main" id="{1453C7D2-E673-4F0B-BC5D-966FD27C3E10}"/>
-              </a:ext>
-            </a:extLst>
-          </p:cNvPr>
-          <p:cNvCxnSpPr/>
-          <p:nvPr/>
-        </p:nvCxnSpPr>
-        <p:spPr>
-          <a:xfrm>
-            <a:off x="152400" y="922910"/>
-            <a:ext cx="8001000" cy="0"/>
-          </a:xfrm>
-          <a:prstGeom prst="line">
-            <a:avLst/>
-          </a:prstGeom>
-          <a:ln>
-            <a:solidFill>
-              <a:schemeClr val="tx1"/>
-            </a:solidFill>
-          </a:ln>
-          <a:effectLst/>
-        </p:spPr>
-        <p:style>
-          <a:lnRef idx="2">
-            <a:schemeClr val="accent1"/>
-          </a:lnRef>
-          <a:fillRef idx="0">
-            <a:schemeClr val="accent1"/>
-          </a:fillRef>
-          <a:effectRef idx="1">
-            <a:schemeClr val="accent1"/>
-          </a:effectRef>
-          <a:fontRef idx="minor">
-            <a:schemeClr val="tx1"/>
-          </a:fontRef>
-        </p:style>
-      </p:cxnSp>
-      <p:sp>
-        <p:nvSpPr>
-          <p:cNvPr id="10" name="Title 1">
-            <a:extLst>
-              <a:ext uri="{FF2B5EF4-FFF2-40B4-BE49-F238E27FC236}">
-                <a16:creationId xmlns:a16="http://schemas.microsoft.com/office/drawing/2014/main" id="{DB846AD2-ABA7-41FC-8500-DFD9254A2CEC}"/>
-              </a:ext>
-            </a:extLst>
-          </p:cNvPr>
-          <p:cNvSpPr txBox="1">
-            <a:spLocks/>
-          </p:cNvSpPr>
-          <p:nvPr/>
-        </p:nvSpPr>
-        <p:spPr>
-          <a:xfrm>
-            <a:off x="170670" y="162396"/>
-            <a:ext cx="8077200" cy="857250"/>
-          </a:xfrm>
-          <a:prstGeom prst="rect">
-            <a:avLst/>
-          </a:prstGeom>
-        </p:spPr>
-        <p:txBody>
-          <a:bodyPr vert="horz" lIns="91440" tIns="45720" rIns="91440" bIns="45720" rtlCol="0" anchor="ctr">
-            <a:normAutofit/>
-          </a:bodyPr>
-          <a:lstStyle>
-            <a:lvl1pPr algn="ctr" defTabSz="411480" rtl="0" eaLnBrk="1" latinLnBrk="0" hangingPunct="1">
-              <a:spcBef>
-                <a:spcPct val="0"/>
-              </a:spcBef>
-              <a:buNone/>
-              <a:defRPr sz="3960" kern="1200">
-                <a:solidFill>
-                  <a:schemeClr val="tx1"/>
-                </a:solidFill>
-                <a:latin typeface="+mj-lt"/>
-                <a:ea typeface="+mj-ea"/>
-                <a:cs typeface="+mj-cs"/>
-              </a:defRPr>
-            </a:lvl1pPr>
-          </a:lstStyle>
-          <a:p>
-            <a:pPr algn="l"/>
-            <a:r>
-              <a:rPr lang="en-US" sz="3200" dirty="0">
-                <a:solidFill>
-                  <a:srgbClr val="7030A0"/>
-                </a:solidFill>
-              </a:rPr>
-              <a:t>Scale</a:t>
-            </a:r>
-            <a:endParaRPr lang="en-US" sz="2600" dirty="0">
-              <a:solidFill>
-                <a:srgbClr val="7030A0"/>
-              </a:solidFill>
-            </a:endParaRPr>
-          </a:p>
-        </p:txBody>
-      </p:sp>
-    </p:spTree>
-  </p:cSld>
-  <p:clrMapOvr>
-    <a:masterClrMapping/>
-  </p:clrMapOvr>
-</p:sld>
-</file>
-
-<file path=ppt/slides/slide15.xml><?xml version="1.0" encoding="utf-8"?>
 <p:sld xmlns:a="http://schemas.openxmlformats.org/drawingml/2006/main" xmlns:r="http://schemas.openxmlformats.org/officeDocument/2006/relationships" xmlns:p="http://schemas.openxmlformats.org/presentationml/2006/main">
   <p:cSld>
     <p:spTree>
@@ -22556,7 +21986,7 @@
             <a:fld id="{127DDC20-79C9-9647-820E-6D40A3D210C3}" type="slidenum">
               <a:rPr lang="en-US" smtClean="0"/>
               <a:pPr/>
-              <a:t>15</a:t>
+              <a:t>14</a:t>
             </a:fld>
             <a:endParaRPr lang="en-US"/>
           </a:p>
@@ -22681,7 +22111,7 @@
 </p:sld>
 </file>
 
-<file path=ppt/slides/slide16.xml><?xml version="1.0" encoding="utf-8"?>
+<file path=ppt/slides/slide15.xml><?xml version="1.0" encoding="utf-8"?>
 <p:sld xmlns:a="http://schemas.openxmlformats.org/drawingml/2006/main" xmlns:r="http://schemas.openxmlformats.org/officeDocument/2006/relationships" xmlns:p="http://schemas.openxmlformats.org/presentationml/2006/main">
   <p:cSld>
     <p:spTree>
@@ -22825,7 +22255,7 @@
             <a:fld id="{127DDC20-79C9-9647-820E-6D40A3D210C3}" type="slidenum">
               <a:rPr lang="en-US" smtClean="0"/>
               <a:pPr/>
-              <a:t>16</a:t>
+              <a:t>15</a:t>
             </a:fld>
             <a:endParaRPr lang="en-US"/>
           </a:p>
@@ -22947,6 +22377,163 @@
     <p:extLst>
       <p:ext uri="{BB962C8B-B14F-4D97-AF65-F5344CB8AC3E}">
         <p14:creationId xmlns:p14="http://schemas.microsoft.com/office/powerpoint/2010/main" val="252260300"/>
+      </p:ext>
+    </p:extLst>
+  </p:cSld>
+  <p:clrMapOvr>
+    <a:masterClrMapping/>
+  </p:clrMapOvr>
+</p:sld>
+</file>
+
+<file path=ppt/slides/slide16.xml><?xml version="1.0" encoding="utf-8"?>
+<p:sld xmlns:a="http://schemas.openxmlformats.org/drawingml/2006/main" xmlns:r="http://schemas.openxmlformats.org/officeDocument/2006/relationships" xmlns:p="http://schemas.openxmlformats.org/presentationml/2006/main">
+  <p:cSld>
+    <p:spTree>
+      <p:nvGrpSpPr>
+        <p:cNvPr id="1" name=""/>
+        <p:cNvGrpSpPr/>
+        <p:nvPr/>
+      </p:nvGrpSpPr>
+      <p:grpSpPr>
+        <a:xfrm>
+          <a:off x="0" y="0"/>
+          <a:ext cx="0" cy="0"/>
+          <a:chOff x="0" y="0"/>
+          <a:chExt cx="0" cy="0"/>
+        </a:xfrm>
+      </p:grpSpPr>
+      <p:sp>
+        <p:nvSpPr>
+          <p:cNvPr id="3" name="Content Placeholder 2">
+            <a:extLst>
+              <a:ext uri="{FF2B5EF4-FFF2-40B4-BE49-F238E27FC236}">
+                <a16:creationId xmlns:a16="http://schemas.microsoft.com/office/drawing/2014/main" id="{E9546651-FD7B-4AE3-1E90-4BFCCE95FAAB}"/>
+              </a:ext>
+            </a:extLst>
+          </p:cNvPr>
+          <p:cNvSpPr>
+            <a:spLocks noGrp="1"/>
+          </p:cNvSpPr>
+          <p:nvPr>
+            <p:ph idx="1"/>
+          </p:nvPr>
+        </p:nvSpPr>
+        <p:spPr>
+          <a:xfrm>
+            <a:off x="310896" y="978168"/>
+            <a:ext cx="7444990" cy="597408"/>
+          </a:xfrm>
+        </p:spPr>
+        <p:txBody>
+          <a:bodyPr>
+            <a:normAutofit/>
+          </a:bodyPr>
+          <a:lstStyle/>
+          <a:p>
+            <a:r>
+              <a:rPr lang="en-US" altLang="zh-CN" sz="2400" dirty="0"/>
+              <a:t>Explore Scale in ArcGIS Pro</a:t>
+            </a:r>
+            <a:endParaRPr lang="zh-CN" altLang="en-US" sz="2400" dirty="0"/>
+          </a:p>
+        </p:txBody>
+      </p:sp>
+      <p:sp>
+        <p:nvSpPr>
+          <p:cNvPr id="4" name="Slide Number Placeholder 3">
+            <a:extLst>
+              <a:ext uri="{FF2B5EF4-FFF2-40B4-BE49-F238E27FC236}">
+                <a16:creationId xmlns:a16="http://schemas.microsoft.com/office/drawing/2014/main" id="{A9F3507B-B38F-EB06-3C57-6F5287F46E03}"/>
+              </a:ext>
+            </a:extLst>
+          </p:cNvPr>
+          <p:cNvSpPr>
+            <a:spLocks noGrp="1"/>
+          </p:cNvSpPr>
+          <p:nvPr>
+            <p:ph type="sldNum" sz="quarter" idx="12"/>
+          </p:nvPr>
+        </p:nvSpPr>
+        <p:spPr/>
+        <p:txBody>
+          <a:bodyPr/>
+          <a:lstStyle/>
+          <a:p>
+            <a:fld id="{127DDC20-79C9-9647-820E-6D40A3D210C3}" type="slidenum">
+              <a:rPr lang="en-US" smtClean="0"/>
+              <a:pPr/>
+              <a:t>16</a:t>
+            </a:fld>
+            <a:endParaRPr lang="en-US"/>
+          </a:p>
+        </p:txBody>
+      </p:sp>
+      <p:sp>
+        <p:nvSpPr>
+          <p:cNvPr id="5" name="Title 1">
+            <a:extLst>
+              <a:ext uri="{FF2B5EF4-FFF2-40B4-BE49-F238E27FC236}">
+                <a16:creationId xmlns:a16="http://schemas.microsoft.com/office/drawing/2014/main" id="{25723FA5-4FB2-F35F-5A4B-37235F724902}"/>
+              </a:ext>
+            </a:extLst>
+          </p:cNvPr>
+          <p:cNvSpPr txBox="1">
+            <a:spLocks/>
+          </p:cNvSpPr>
+          <p:nvPr/>
+        </p:nvSpPr>
+        <p:spPr>
+          <a:xfrm>
+            <a:off x="310896" y="120918"/>
+            <a:ext cx="8077200" cy="857250"/>
+          </a:xfrm>
+          <a:prstGeom prst="rect">
+            <a:avLst/>
+          </a:prstGeom>
+        </p:spPr>
+        <p:txBody>
+          <a:bodyPr vert="horz" lIns="91440" tIns="45720" rIns="91440" bIns="45720" rtlCol="0" anchor="ctr">
+            <a:normAutofit/>
+          </a:bodyPr>
+          <a:lstStyle>
+            <a:lvl1pPr algn="ctr" defTabSz="411480" rtl="0" eaLnBrk="1" latinLnBrk="0" hangingPunct="1">
+              <a:spcBef>
+                <a:spcPct val="0"/>
+              </a:spcBef>
+              <a:buNone/>
+              <a:defRPr sz="3960" kern="1200">
+                <a:solidFill>
+                  <a:schemeClr val="tx1"/>
+                </a:solidFill>
+                <a:latin typeface="+mj-lt"/>
+                <a:ea typeface="+mj-ea"/>
+                <a:cs typeface="+mj-cs"/>
+              </a:defRPr>
+            </a:lvl1pPr>
+          </a:lstStyle>
+          <a:p>
+            <a:pPr algn="l"/>
+            <a:r>
+              <a:rPr lang="en-US" sz="3200" dirty="0">
+                <a:solidFill>
+                  <a:srgbClr val="7030A0"/>
+                </a:solidFill>
+              </a:rPr>
+              <a:t>Scale</a:t>
+            </a:r>
+            <a:endParaRPr lang="en-US" sz="2600" dirty="0">
+              <a:solidFill>
+                <a:srgbClr val="7030A0"/>
+              </a:solidFill>
+            </a:endParaRPr>
+          </a:p>
+        </p:txBody>
+      </p:sp>
+    </p:spTree>
+    <p:extLst>
+      <p:ext uri="{BB962C8B-B14F-4D97-AF65-F5344CB8AC3E}">
+        <p14:creationId xmlns:p14="http://schemas.microsoft.com/office/powerpoint/2010/main" val="3929847443"/>
       </p:ext>
     </p:extLst>
   </p:cSld>
@@ -22975,39 +22562,73 @@
       </p:grpSpPr>
       <p:sp>
         <p:nvSpPr>
-          <p:cNvPr id="3" name="Content Placeholder 2">
+          <p:cNvPr id="101379" name="Rectangle 3"/>
+          <p:cNvSpPr>
+            <a:spLocks noGrp="1" noChangeArrowheads="1"/>
+          </p:cNvSpPr>
+          <p:nvPr>
+            <p:ph idx="1"/>
+          </p:nvPr>
+        </p:nvSpPr>
+        <p:spPr>
+          <a:xfrm>
+            <a:off x="229883" y="1002892"/>
+            <a:ext cx="7769833" cy="1795163"/>
+          </a:xfrm>
+        </p:spPr>
+        <p:txBody>
+          <a:bodyPr>
+            <a:noAutofit/>
+          </a:bodyPr>
+          <a:lstStyle/>
+          <a:p>
+            <a:pPr>
+              <a:buFont typeface="Courier New" panose="02070309020205020404" pitchFamily="49" charset="0"/>
+              <a:buChar char="o"/>
+            </a:pPr>
+            <a:r>
+              <a:rPr lang="en-US" sz="1800" dirty="0"/>
+              <a:t>The indication of north on a map</a:t>
+            </a:r>
+          </a:p>
+          <a:p>
+            <a:pPr>
+              <a:buFont typeface="Courier New" panose="02070309020205020404" pitchFamily="49" charset="0"/>
+              <a:buChar char="o"/>
+            </a:pPr>
+            <a:r>
+              <a:rPr lang="en-US" sz="1800" dirty="0"/>
+              <a:t>Orientation can be indicated by a </a:t>
+            </a:r>
+          </a:p>
+          <a:p>
+            <a:pPr marL="765810" lvl="1" indent="-457200">
+              <a:buFont typeface="Wingdings" panose="05000000000000000000" pitchFamily="2" charset="2"/>
+              <a:buChar char="ü"/>
+            </a:pPr>
+            <a:r>
+              <a:rPr lang="en-US" sz="1800" dirty="0"/>
+              <a:t>North Arrow</a:t>
+            </a:r>
+          </a:p>
+          <a:p>
+            <a:pPr marL="765810" lvl="1" indent="-457200">
+              <a:buFont typeface="Wingdings" panose="05000000000000000000" pitchFamily="2" charset="2"/>
+              <a:buChar char="ü"/>
+            </a:pPr>
+            <a:r>
+              <a:rPr lang="en-US" sz="1800" dirty="0"/>
+              <a:t>Graticule (a system of grid lines, normally representing longitude and latitude) </a:t>
+            </a:r>
+          </a:p>
+        </p:txBody>
+      </p:sp>
+      <p:sp>
+        <p:nvSpPr>
+          <p:cNvPr id="3" name="Slide Number Placeholder 2">
             <a:extLst>
               <a:ext uri="{FF2B5EF4-FFF2-40B4-BE49-F238E27FC236}">
-                <a16:creationId xmlns:a16="http://schemas.microsoft.com/office/drawing/2014/main" id="{E9546651-FD7B-4AE3-1E90-4BFCCE95FAAB}"/>
-              </a:ext>
-            </a:extLst>
-          </p:cNvPr>
-          <p:cNvSpPr>
-            <a:spLocks noGrp="1"/>
-          </p:cNvSpPr>
-          <p:nvPr>
-            <p:ph idx="1"/>
-          </p:nvPr>
-        </p:nvSpPr>
-        <p:spPr/>
-        <p:txBody>
-          <a:bodyPr/>
-          <a:lstStyle/>
-          <a:p>
-            <a:r>
-              <a:rPr lang="en-US" altLang="zh-CN" dirty="0"/>
-              <a:t>Explore S</a:t>
-            </a:r>
-            <a:endParaRPr lang="zh-CN" altLang="en-US" dirty="0"/>
-          </a:p>
-        </p:txBody>
-      </p:sp>
-      <p:sp>
-        <p:nvSpPr>
-          <p:cNvPr id="4" name="Slide Number Placeholder 3">
-            <a:extLst>
-              <a:ext uri="{FF2B5EF4-FFF2-40B4-BE49-F238E27FC236}">
-                <a16:creationId xmlns:a16="http://schemas.microsoft.com/office/drawing/2014/main" id="{A9F3507B-B38F-EB06-3C57-6F5287F46E03}"/>
+                <a16:creationId xmlns:a16="http://schemas.microsoft.com/office/drawing/2014/main" id="{1C9DA414-9F56-4B34-AB97-967FEE794762}"/>
               </a:ext>
             </a:extLst>
           </p:cNvPr>
@@ -23032,12 +22653,88 @@
           </a:p>
         </p:txBody>
       </p:sp>
-      <p:sp>
-        <p:nvSpPr>
-          <p:cNvPr id="5" name="Title 1">
+      <p:pic>
+        <p:nvPicPr>
+          <p:cNvPr id="101380" name="Picture 4" descr="Image north arrow"/>
+          <p:cNvPicPr>
+            <a:picLocks noChangeAspect="1" noChangeArrowheads="1"/>
+          </p:cNvPicPr>
+          <p:nvPr/>
+        </p:nvPicPr>
+        <p:blipFill>
+          <a:blip r:embed="rId2" cstate="print"/>
+          <a:srcRect t="43307"/>
+          <a:stretch>
+            <a:fillRect/>
+          </a:stretch>
+        </p:blipFill>
+        <p:spPr bwMode="auto">
+          <a:xfrm>
+            <a:off x="755610" y="2894529"/>
+            <a:ext cx="2995882" cy="2115623"/>
+          </a:xfrm>
+          <a:prstGeom prst="rect">
+            <a:avLst/>
+          </a:prstGeom>
+          <a:noFill/>
+          <a:ln w="9525" algn="ctr">
+            <a:solidFill>
+              <a:schemeClr val="tx1"/>
+            </a:solidFill>
+            <a:miter lim="800000"/>
+            <a:headEnd/>
+            <a:tailEnd/>
+          </a:ln>
+        </p:spPr>
+      </p:pic>
+      <p:cxnSp>
+        <p:nvCxnSpPr>
+          <p:cNvPr id="5" name="Straight Connector 4">
             <a:extLst>
               <a:ext uri="{FF2B5EF4-FFF2-40B4-BE49-F238E27FC236}">
-                <a16:creationId xmlns:a16="http://schemas.microsoft.com/office/drawing/2014/main" id="{25723FA5-4FB2-F35F-5A4B-37235F724902}"/>
+                <a16:creationId xmlns:a16="http://schemas.microsoft.com/office/drawing/2014/main" id="{4FC04BC5-0C8E-4D54-8121-733EF7DAE27E}"/>
+              </a:ext>
+            </a:extLst>
+          </p:cNvPr>
+          <p:cNvCxnSpPr/>
+          <p:nvPr/>
+        </p:nvCxnSpPr>
+        <p:spPr>
+          <a:xfrm>
+            <a:off x="152400" y="922910"/>
+            <a:ext cx="8001000" cy="0"/>
+          </a:xfrm>
+          <a:prstGeom prst="line">
+            <a:avLst/>
+          </a:prstGeom>
+          <a:ln>
+            <a:solidFill>
+              <a:schemeClr val="tx1"/>
+            </a:solidFill>
+          </a:ln>
+          <a:effectLst/>
+        </p:spPr>
+        <p:style>
+          <a:lnRef idx="2">
+            <a:schemeClr val="accent1"/>
+          </a:lnRef>
+          <a:fillRef idx="0">
+            <a:schemeClr val="accent1"/>
+          </a:fillRef>
+          <a:effectRef idx="1">
+            <a:schemeClr val="accent1"/>
+          </a:effectRef>
+          <a:fontRef idx="minor">
+            <a:schemeClr val="tx1"/>
+          </a:fontRef>
+        </p:style>
+      </p:cxnSp>
+      <p:sp>
+        <p:nvSpPr>
+          <p:cNvPr id="6" name="Title 1">
+            <a:extLst>
+              <a:ext uri="{FF2B5EF4-FFF2-40B4-BE49-F238E27FC236}">
+                <a16:creationId xmlns:a16="http://schemas.microsoft.com/office/drawing/2014/main" id="{6E0DB97C-737D-46F0-B786-40C88C6FF285}"/>
               </a:ext>
             </a:extLst>
           </p:cNvPr>
@@ -23048,7 +22745,7 @@
         </p:nvSpPr>
         <p:spPr>
           <a:xfrm>
-            <a:off x="310896" y="120918"/>
+            <a:off x="264695" y="153262"/>
             <a:ext cx="8077200" cy="857250"/>
           </a:xfrm>
           <a:prstGeom prst="rect">
@@ -23083,7 +22780,7 @@
                   <a:srgbClr val="7030A0"/>
                 </a:solidFill>
               </a:rPr>
-              <a:t>Scale</a:t>
+              <a:t>Orientation</a:t>
             </a:r>
             <a:endParaRPr lang="en-US" sz="2600" dirty="0">
               <a:solidFill>
@@ -23093,12 +22790,47 @@
           </a:p>
         </p:txBody>
       </p:sp>
+      <p:pic>
+        <p:nvPicPr>
+          <p:cNvPr id="2" name="Picture 5" descr="image showing graticule">
+            <a:extLst>
+              <a:ext uri="{FF2B5EF4-FFF2-40B4-BE49-F238E27FC236}">
+                <a16:creationId xmlns:a16="http://schemas.microsoft.com/office/drawing/2014/main" id="{38458325-8C7D-4D95-8795-CBE3D70F05FB}"/>
+              </a:ext>
+            </a:extLst>
+          </p:cNvPr>
+          <p:cNvPicPr>
+            <a:picLocks noChangeAspect="1" noChangeArrowheads="1"/>
+          </p:cNvPicPr>
+          <p:nvPr/>
+        </p:nvPicPr>
+        <p:blipFill>
+          <a:blip r:embed="rId3" cstate="print"/>
+          <a:srcRect t="6451" b="16319"/>
+          <a:stretch>
+            <a:fillRect/>
+          </a:stretch>
+        </p:blipFill>
+        <p:spPr bwMode="auto">
+          <a:xfrm>
+            <a:off x="3968495" y="2894529"/>
+            <a:ext cx="3694538" cy="2095709"/>
+          </a:xfrm>
+          <a:prstGeom prst="rect">
+            <a:avLst/>
+          </a:prstGeom>
+          <a:noFill/>
+          <a:ln w="9525" algn="ctr">
+            <a:solidFill>
+              <a:schemeClr val="tx1"/>
+            </a:solidFill>
+            <a:miter lim="800000"/>
+            <a:headEnd/>
+            <a:tailEnd/>
+          </a:ln>
+        </p:spPr>
+      </p:pic>
     </p:spTree>
-    <p:extLst>
-      <p:ext uri="{BB962C8B-B14F-4D97-AF65-F5344CB8AC3E}">
-        <p14:creationId xmlns:p14="http://schemas.microsoft.com/office/powerpoint/2010/main" val="3929847443"/>
-      </p:ext>
-    </p:extLst>
   </p:cSld>
   <p:clrMapOvr>
     <a:masterClrMapping/>
@@ -23125,7 +22857,7 @@
       </p:grpSpPr>
       <p:sp>
         <p:nvSpPr>
-          <p:cNvPr id="101379" name="Rectangle 3"/>
+          <p:cNvPr id="103427" name="Rectangle 3"/>
           <p:cNvSpPr>
             <a:spLocks noGrp="1" noChangeArrowheads="1"/>
           </p:cNvSpPr>
@@ -23135,12 +22867,14 @@
         </p:nvSpPr>
         <p:spPr>
           <a:xfrm>
-            <a:off x="264695" y="1028700"/>
-            <a:ext cx="7483642" cy="3741896"/>
-          </a:xfrm>
-        </p:spPr>
-        <p:txBody>
-          <a:bodyPr/>
+            <a:off x="152400" y="950058"/>
+            <a:ext cx="8001000" cy="1660204"/>
+          </a:xfrm>
+        </p:spPr>
+        <p:txBody>
+          <a:bodyPr>
+            <a:normAutofit/>
+          </a:bodyPr>
           <a:lstStyle/>
           <a:p>
             <a:pPr>
@@ -23148,19 +22882,30 @@
               <a:buChar char="o"/>
             </a:pPr>
             <a:r>
-              <a:rPr lang="en-US" dirty="0"/>
-              <a:t>The indication of north on a map</a:t>
-            </a:r>
-          </a:p>
-          <a:p>
-            <a:pPr>
-              <a:buFont typeface="Courier New" panose="02070309020205020404" pitchFamily="49" charset="0"/>
-              <a:buChar char="o"/>
-            </a:pPr>
-            <a:r>
-              <a:rPr lang="en-US" dirty="0"/>
-              <a:t>Orientation can be indicated by a </a:t>
-            </a:r>
+              <a:rPr lang="en-US" sz="2000" dirty="0"/>
+              <a:t>A north arrow is </a:t>
+            </a:r>
+            <a:r>
+              <a:rPr lang="en-US" sz="2000" i="1" dirty="0"/>
+              <a:t>not required </a:t>
+            </a:r>
+            <a:r>
+              <a:rPr lang="en-US" sz="2000" dirty="0"/>
+              <a:t>on </a:t>
+            </a:r>
+            <a:r>
+              <a:rPr lang="en-US" sz="2000" i="1" dirty="0"/>
+              <a:t>every</a:t>
+            </a:r>
+            <a:r>
+              <a:rPr lang="en-US" sz="2000" dirty="0"/>
+              <a:t> </a:t>
+            </a:r>
+            <a:r>
+              <a:rPr lang="en-US" sz="2000" i="1" dirty="0"/>
+              <a:t>map!</a:t>
+            </a:r>
+            <a:endParaRPr lang="en-US" sz="2000" dirty="0"/>
           </a:p>
           <a:p>
             <a:pPr marL="765810" lvl="1" indent="-457200">
@@ -23168,8 +22913,8 @@
               <a:buChar char="ü"/>
             </a:pPr>
             <a:r>
-              <a:rPr lang="en-US" dirty="0"/>
-              <a:t>North Arrow</a:t>
+              <a:rPr lang="en-US" sz="2000" dirty="0"/>
+              <a:t>The orientation of maps with north at the top is a long-standing tradition</a:t>
             </a:r>
           </a:p>
           <a:p>
@@ -23178,22 +22923,18 @@
               <a:buChar char="ü"/>
             </a:pPr>
             <a:r>
-              <a:rPr lang="en-US" dirty="0"/>
-              <a:t>Graticule (a system of grid lines, normally representing longitude and latitude) </a:t>
-            </a:r>
-          </a:p>
-          <a:p>
-            <a:pPr marL="411480" indent="-411480"/>
-            <a:endParaRPr lang="en-US" dirty="0"/>
-          </a:p>
-        </p:txBody>
-      </p:sp>
-      <p:sp>
-        <p:nvSpPr>
-          <p:cNvPr id="3" name="Slide Number Placeholder 2">
+              <a:rPr lang="en-US" sz="2000" dirty="0"/>
+              <a:t>It is assumed that “north is at the top” of most modern maps </a:t>
+            </a:r>
+          </a:p>
+        </p:txBody>
+      </p:sp>
+      <p:sp>
+        <p:nvSpPr>
+          <p:cNvPr id="2" name="Slide Number Placeholder 1">
             <a:extLst>
               <a:ext uri="{FF2B5EF4-FFF2-40B4-BE49-F238E27FC236}">
-                <a16:creationId xmlns:a16="http://schemas.microsoft.com/office/drawing/2014/main" id="{1C9DA414-9F56-4B34-AB97-967FEE794762}"/>
+                <a16:creationId xmlns:a16="http://schemas.microsoft.com/office/drawing/2014/main" id="{8A26050B-0F09-4AAB-9635-AA143F2B632D}"/>
               </a:ext>
             </a:extLst>
           </p:cNvPr>
@@ -23220,32 +22961,30 @@
       </p:sp>
       <p:pic>
         <p:nvPicPr>
-          <p:cNvPr id="101380" name="Picture 4" descr="Image north arrow"/>
-          <p:cNvPicPr>
+          <p:cNvPr id="4" name="Picture 3" descr="Image showing map"/>
+          <p:cNvPicPr preferRelativeResize="0">
             <a:picLocks noChangeAspect="1" noChangeArrowheads="1"/>
           </p:cNvPicPr>
           <p:nvPr/>
         </p:nvPicPr>
         <p:blipFill>
           <a:blip r:embed="rId2" cstate="print"/>
-          <a:srcRect t="43307"/>
+          <a:srcRect/>
           <a:stretch>
             <a:fillRect/>
           </a:stretch>
         </p:blipFill>
         <p:spPr bwMode="auto">
           <a:xfrm>
-            <a:off x="946103" y="3339376"/>
-            <a:ext cx="2567464" cy="1813084"/>
+            <a:off x="2462349" y="2637409"/>
+            <a:ext cx="3304902" cy="2429427"/>
           </a:xfrm>
           <a:prstGeom prst="rect">
             <a:avLst/>
           </a:prstGeom>
           <a:noFill/>
-          <a:ln w="9525" algn="ctr">
-            <a:solidFill>
-              <a:schemeClr val="tx1"/>
-            </a:solidFill>
+          <a:ln w="9525">
+            <a:noFill/>
             <a:miter lim="800000"/>
             <a:headEnd/>
             <a:tailEnd/>
@@ -23254,10 +22993,10 @@
       </p:pic>
       <p:cxnSp>
         <p:nvCxnSpPr>
-          <p:cNvPr id="5" name="Straight Connector 4">
+          <p:cNvPr id="7" name="Straight Connector 6">
             <a:extLst>
               <a:ext uri="{FF2B5EF4-FFF2-40B4-BE49-F238E27FC236}">
-                <a16:creationId xmlns:a16="http://schemas.microsoft.com/office/drawing/2014/main" id="{4FC04BC5-0C8E-4D54-8121-733EF7DAE27E}"/>
+                <a16:creationId xmlns:a16="http://schemas.microsoft.com/office/drawing/2014/main" id="{ECE201F0-833C-49A0-946A-0C4D0EB22CFE}"/>
               </a:ext>
             </a:extLst>
           </p:cNvPr>
@@ -23296,10 +23035,10 @@
       </p:cxnSp>
       <p:sp>
         <p:nvSpPr>
-          <p:cNvPr id="6" name="Title 1">
+          <p:cNvPr id="8" name="Title 1">
             <a:extLst>
               <a:ext uri="{FF2B5EF4-FFF2-40B4-BE49-F238E27FC236}">
-                <a16:creationId xmlns:a16="http://schemas.microsoft.com/office/drawing/2014/main" id="{6E0DB97C-737D-46F0-B786-40C88C6FF285}"/>
+                <a16:creationId xmlns:a16="http://schemas.microsoft.com/office/drawing/2014/main" id="{0B114705-C7B4-48CF-9EE1-1B9F18DEC45B}"/>
               </a:ext>
             </a:extLst>
           </p:cNvPr>
@@ -23310,7 +23049,7 @@
         </p:nvSpPr>
         <p:spPr>
           <a:xfrm>
-            <a:off x="264695" y="153262"/>
+            <a:off x="275168" y="184738"/>
             <a:ext cx="8077200" cy="857250"/>
           </a:xfrm>
           <a:prstGeom prst="rect">
@@ -23355,46 +23094,6 @@
           </a:p>
         </p:txBody>
       </p:sp>
-      <p:pic>
-        <p:nvPicPr>
-          <p:cNvPr id="2" name="Picture 5" descr="image showing graticule">
-            <a:extLst>
-              <a:ext uri="{FF2B5EF4-FFF2-40B4-BE49-F238E27FC236}">
-                <a16:creationId xmlns:a16="http://schemas.microsoft.com/office/drawing/2014/main" id="{38458325-8C7D-4D95-8795-CBE3D70F05FB}"/>
-              </a:ext>
-            </a:extLst>
-          </p:cNvPr>
-          <p:cNvPicPr>
-            <a:picLocks noChangeAspect="1" noChangeArrowheads="1"/>
-          </p:cNvPicPr>
-          <p:nvPr/>
-        </p:nvPicPr>
-        <p:blipFill>
-          <a:blip r:embed="rId3" cstate="print"/>
-          <a:srcRect t="6451" b="16319"/>
-          <a:stretch>
-            <a:fillRect/>
-          </a:stretch>
-        </p:blipFill>
-        <p:spPr bwMode="auto">
-          <a:xfrm>
-            <a:off x="4194975" y="3357297"/>
-            <a:ext cx="3164704" cy="1795163"/>
-          </a:xfrm>
-          <a:prstGeom prst="rect">
-            <a:avLst/>
-          </a:prstGeom>
-          <a:noFill/>
-          <a:ln w="9525" algn="ctr">
-            <a:solidFill>
-              <a:schemeClr val="tx1"/>
-            </a:solidFill>
-            <a:miter lim="800000"/>
-            <a:headEnd/>
-            <a:tailEnd/>
-          </a:ln>
-        </p:spPr>
-      </p:pic>
     </p:spTree>
   </p:cSld>
   <p:clrMapOvr>
@@ -23422,7 +23121,7 @@
       </p:grpSpPr>
       <p:sp>
         <p:nvSpPr>
-          <p:cNvPr id="103427" name="Rectangle 3"/>
+          <p:cNvPr id="104451" name="Rectangle 3"/>
           <p:cNvSpPr>
             <a:spLocks noGrp="1" noChangeArrowheads="1"/>
           </p:cNvSpPr>
@@ -23432,12 +23131,14 @@
         </p:nvSpPr>
         <p:spPr>
           <a:xfrm>
-            <a:off x="152400" y="1009843"/>
-            <a:ext cx="8001000" cy="3741896"/>
-          </a:xfrm>
-        </p:spPr>
-        <p:txBody>
-          <a:bodyPr/>
+            <a:off x="118533" y="922907"/>
+            <a:ext cx="7870614" cy="1129282"/>
+          </a:xfrm>
+        </p:spPr>
+        <p:txBody>
+          <a:bodyPr>
+            <a:normAutofit/>
+          </a:bodyPr>
           <a:lstStyle/>
           <a:p>
             <a:pPr>
@@ -23445,30 +23146,9 @@
               <a:buChar char="o"/>
             </a:pPr>
             <a:r>
-              <a:rPr lang="en-US" dirty="0"/>
-              <a:t>A north arrow is </a:t>
-            </a:r>
-            <a:r>
-              <a:rPr lang="en-US" i="1" dirty="0"/>
-              <a:t>not required </a:t>
-            </a:r>
-            <a:r>
-              <a:rPr lang="en-US" dirty="0"/>
-              <a:t>on </a:t>
-            </a:r>
-            <a:r>
-              <a:rPr lang="en-US" i="1" dirty="0"/>
-              <a:t>every</a:t>
-            </a:r>
-            <a:r>
-              <a:rPr lang="en-US" dirty="0"/>
-              <a:t> </a:t>
-            </a:r>
-            <a:r>
-              <a:rPr lang="en-US" i="1" dirty="0"/>
-              <a:t>map!</a:t>
-            </a:r>
-            <a:endParaRPr lang="en-US" dirty="0"/>
+              <a:rPr lang="en-US" sz="2000" dirty="0"/>
+              <a:t>Include an indication of orientation if</a:t>
+            </a:r>
           </a:p>
           <a:p>
             <a:pPr marL="765810" lvl="1" indent="-457200">
@@ -23476,18 +23156,16 @@
               <a:buChar char="ü"/>
             </a:pPr>
             <a:r>
-              <a:rPr lang="en-US" dirty="0"/>
-              <a:t>The orientation of maps with north at the top is a long-standing tradition</a:t>
-            </a:r>
-          </a:p>
-          <a:p>
-            <a:pPr marL="765810" lvl="1" indent="-457200">
-              <a:buFont typeface="Wingdings" panose="05000000000000000000" pitchFamily="2" charset="2"/>
-              <a:buChar char="ü"/>
-            </a:pPr>
-            <a:r>
-              <a:rPr lang="en-US" dirty="0"/>
-              <a:t>It is assumed that “north is at the top” of most modern maps </a:t>
+              <a:rPr lang="en-US" sz="2000" dirty="0"/>
+              <a:t>The map is </a:t>
+            </a:r>
+            <a:r>
+              <a:rPr lang="en-US" sz="2000" i="1" dirty="0"/>
+              <a:t>not</a:t>
+            </a:r>
+            <a:r>
+              <a:rPr lang="en-US" sz="2000" dirty="0"/>
+              <a:t> oriented with geographic or “true” north at the top </a:t>
             </a:r>
           </a:p>
         </p:txBody>
@@ -23497,7 +23175,7 @@
           <p:cNvPr id="2" name="Slide Number Placeholder 1">
             <a:extLst>
               <a:ext uri="{FF2B5EF4-FFF2-40B4-BE49-F238E27FC236}">
-                <a16:creationId xmlns:a16="http://schemas.microsoft.com/office/drawing/2014/main" id="{8A26050B-0F09-4AAB-9635-AA143F2B632D}"/>
+                <a16:creationId xmlns:a16="http://schemas.microsoft.com/office/drawing/2014/main" id="{3335CE27-3B5A-4E49-88A9-85E7529FABA6}"/>
               </a:ext>
             </a:extLst>
           </p:cNvPr>
@@ -23524,8 +23202,8 @@
       </p:sp>
       <p:pic>
         <p:nvPicPr>
-          <p:cNvPr id="4" name="Picture 3" descr="Image showing map"/>
-          <p:cNvPicPr preferRelativeResize="0">
+          <p:cNvPr id="104452" name="Picture 4" descr="Image showing north arrow"/>
+          <p:cNvPicPr>
             <a:picLocks noChangeAspect="1" noChangeArrowheads="1"/>
           </p:cNvPicPr>
           <p:nvPr/>
@@ -23539,15 +23217,17 @@
         </p:blipFill>
         <p:spPr bwMode="auto">
           <a:xfrm>
-            <a:off x="2876442" y="2880791"/>
-            <a:ext cx="2874653" cy="2113152"/>
+            <a:off x="1018928" y="2052189"/>
+            <a:ext cx="6191743" cy="2554165"/>
           </a:xfrm>
           <a:prstGeom prst="rect">
             <a:avLst/>
           </a:prstGeom>
           <a:noFill/>
-          <a:ln w="9525">
-            <a:noFill/>
+          <a:ln w="9525" algn="ctr">
+            <a:solidFill>
+              <a:schemeClr val="tx1"/>
+            </a:solidFill>
             <a:miter lim="800000"/>
             <a:headEnd/>
             <a:tailEnd/>
@@ -23556,10 +23236,10 @@
       </p:pic>
       <p:cxnSp>
         <p:nvCxnSpPr>
-          <p:cNvPr id="7" name="Straight Connector 6">
+          <p:cNvPr id="9" name="Straight Connector 8">
             <a:extLst>
               <a:ext uri="{FF2B5EF4-FFF2-40B4-BE49-F238E27FC236}">
-                <a16:creationId xmlns:a16="http://schemas.microsoft.com/office/drawing/2014/main" id="{ECE201F0-833C-49A0-946A-0C4D0EB22CFE}"/>
+                <a16:creationId xmlns:a16="http://schemas.microsoft.com/office/drawing/2014/main" id="{5268EBF0-8402-40DC-936B-2C76407507E0}"/>
               </a:ext>
             </a:extLst>
           </p:cNvPr>
@@ -23598,10 +23278,10 @@
       </p:cxnSp>
       <p:sp>
         <p:nvSpPr>
-          <p:cNvPr id="8" name="Title 1">
+          <p:cNvPr id="10" name="Title 1">
             <a:extLst>
               <a:ext uri="{FF2B5EF4-FFF2-40B4-BE49-F238E27FC236}">
-                <a16:creationId xmlns:a16="http://schemas.microsoft.com/office/drawing/2014/main" id="{0B114705-C7B4-48CF-9EE1-1B9F18DEC45B}"/>
+                <a16:creationId xmlns:a16="http://schemas.microsoft.com/office/drawing/2014/main" id="{DF8E4202-E36F-4F6C-8DF9-AF284F37FDBA}"/>
               </a:ext>
             </a:extLst>
           </p:cNvPr>
@@ -23612,7 +23292,7 @@
         </p:nvSpPr>
         <p:spPr>
           <a:xfrm>
-            <a:off x="118533" y="6987"/>
+            <a:off x="240453" y="171450"/>
             <a:ext cx="8077200" cy="857250"/>
           </a:xfrm>
           <a:prstGeom prst="rect">
@@ -24596,7 +24276,7 @@
       </p:grpSpPr>
       <p:sp>
         <p:nvSpPr>
-          <p:cNvPr id="104451" name="Rectangle 3"/>
+          <p:cNvPr id="106499" name="Rectangle 4"/>
           <p:cNvSpPr>
             <a:spLocks noGrp="1" noChangeArrowheads="1"/>
           </p:cNvSpPr>
@@ -24606,12 +24286,14 @@
         </p:nvSpPr>
         <p:spPr>
           <a:xfrm>
-            <a:off x="118533" y="1028700"/>
-            <a:ext cx="6701963" cy="3741896"/>
-          </a:xfrm>
-        </p:spPr>
-        <p:txBody>
-          <a:bodyPr/>
+            <a:off x="0" y="1028700"/>
+            <a:ext cx="8077200" cy="1299972"/>
+          </a:xfrm>
+        </p:spPr>
+        <p:txBody>
+          <a:bodyPr>
+            <a:normAutofit/>
+          </a:bodyPr>
           <a:lstStyle/>
           <a:p>
             <a:pPr>
@@ -24619,7 +24301,7 @@
               <a:buChar char="o"/>
             </a:pPr>
             <a:r>
-              <a:rPr lang="en-US" dirty="0"/>
+              <a:rPr lang="en-US" sz="2000" dirty="0"/>
               <a:t>Include an indication of orientation if</a:t>
             </a:r>
           </a:p>
@@ -24629,16 +24311,8 @@
               <a:buChar char="ü"/>
             </a:pPr>
             <a:r>
-              <a:rPr lang="en-US" dirty="0"/>
-              <a:t>The map is </a:t>
-            </a:r>
-            <a:r>
-              <a:rPr lang="en-US" i="1" dirty="0"/>
-              <a:t>not</a:t>
-            </a:r>
-            <a:r>
-              <a:rPr lang="en-US" dirty="0"/>
-              <a:t> oriented with geographic or “true” north at the top </a:t>
+              <a:rPr lang="en-US" sz="2000" dirty="0"/>
+              <a:t>Geographic features are oriented in a manner that might confuse the map user </a:t>
             </a:r>
           </a:p>
         </p:txBody>
@@ -24648,7 +24322,7 @@
           <p:cNvPr id="2" name="Slide Number Placeholder 1">
             <a:extLst>
               <a:ext uri="{FF2B5EF4-FFF2-40B4-BE49-F238E27FC236}">
-                <a16:creationId xmlns:a16="http://schemas.microsoft.com/office/drawing/2014/main" id="{3335CE27-3B5A-4E49-88A9-85E7529FABA6}"/>
+                <a16:creationId xmlns:a16="http://schemas.microsoft.com/office/drawing/2014/main" id="{61772D49-202B-410D-9143-C6CD7390D4A7}"/>
               </a:ext>
             </a:extLst>
           </p:cNvPr>
@@ -24675,7 +24349,7 @@
       </p:sp>
       <p:pic>
         <p:nvPicPr>
-          <p:cNvPr id="104452" name="Picture 4" descr="Image showing north arrow"/>
+          <p:cNvPr id="106500" name="Picture 5" descr="Image showing north arrow"/>
           <p:cNvPicPr>
             <a:picLocks noChangeAspect="1" noChangeArrowheads="1"/>
           </p:cNvPicPr>
@@ -24690,8 +24364,8 @@
         </p:blipFill>
         <p:spPr bwMode="auto">
           <a:xfrm>
-            <a:off x="1778794" y="2899648"/>
-            <a:ext cx="4642009" cy="1914882"/>
+            <a:off x="1264325" y="2434461"/>
+            <a:ext cx="5777150" cy="2383475"/>
           </a:xfrm>
           <a:prstGeom prst="rect">
             <a:avLst/>
@@ -24709,10 +24383,10 @@
       </p:pic>
       <p:cxnSp>
         <p:nvCxnSpPr>
-          <p:cNvPr id="9" name="Straight Connector 8">
+          <p:cNvPr id="5" name="Straight Connector 4">
             <a:extLst>
               <a:ext uri="{FF2B5EF4-FFF2-40B4-BE49-F238E27FC236}">
-                <a16:creationId xmlns:a16="http://schemas.microsoft.com/office/drawing/2014/main" id="{5268EBF0-8402-40DC-936B-2C76407507E0}"/>
+                <a16:creationId xmlns:a16="http://schemas.microsoft.com/office/drawing/2014/main" id="{EDC45D47-D9A4-425E-98E6-7A8DF523C3DA}"/>
               </a:ext>
             </a:extLst>
           </p:cNvPr>
@@ -24751,10 +24425,10 @@
       </p:cxnSp>
       <p:sp>
         <p:nvSpPr>
-          <p:cNvPr id="10" name="Title 1">
+          <p:cNvPr id="6" name="Title 1">
             <a:extLst>
               <a:ext uri="{FF2B5EF4-FFF2-40B4-BE49-F238E27FC236}">
-                <a16:creationId xmlns:a16="http://schemas.microsoft.com/office/drawing/2014/main" id="{DF8E4202-E36F-4F6C-8DF9-AF284F37FDBA}"/>
+                <a16:creationId xmlns:a16="http://schemas.microsoft.com/office/drawing/2014/main" id="{C7AC46E4-4C2B-435A-A5F0-6BC6436863E1}"/>
               </a:ext>
             </a:extLst>
           </p:cNvPr>
@@ -24765,7 +24439,7 @@
         </p:nvSpPr>
         <p:spPr>
           <a:xfrm>
-            <a:off x="118533" y="6987"/>
+            <a:off x="289221" y="183675"/>
             <a:ext cx="8077200" cy="857250"/>
           </a:xfrm>
           <a:prstGeom prst="rect">
@@ -24837,7 +24511,7 @@
       </p:grpSpPr>
       <p:sp>
         <p:nvSpPr>
-          <p:cNvPr id="105475" name="Rectangle 3"/>
+          <p:cNvPr id="107523" name="Rectangle 3"/>
           <p:cNvSpPr>
             <a:spLocks noGrp="1" noChangeArrowheads="1"/>
           </p:cNvSpPr>
@@ -24847,12 +24521,14 @@
         </p:nvSpPr>
         <p:spPr>
           <a:xfrm>
-            <a:off x="76200" y="869908"/>
-            <a:ext cx="7876674" cy="3741896"/>
-          </a:xfrm>
-        </p:spPr>
-        <p:txBody>
-          <a:bodyPr/>
+            <a:off x="152400" y="1004237"/>
+            <a:ext cx="8119532" cy="1775540"/>
+          </a:xfrm>
+        </p:spPr>
+        <p:txBody>
+          <a:bodyPr>
+            <a:normAutofit/>
+          </a:bodyPr>
           <a:lstStyle/>
           <a:p>
             <a:pPr>
@@ -24860,8 +24536,8 @@
               <a:buChar char="o"/>
             </a:pPr>
             <a:r>
-              <a:rPr lang="en-US" dirty="0"/>
-              <a:t>Include an indication of orientation if</a:t>
+              <a:rPr lang="en-US" sz="2000" dirty="0"/>
+              <a:t>A graticule indicates direction through the orientation of grid lines</a:t>
             </a:r>
           </a:p>
           <a:p>
@@ -24870,8 +24546,18 @@
               <a:buChar char="ü"/>
             </a:pPr>
             <a:r>
-              <a:rPr lang="en-US" dirty="0"/>
-              <a:t>The map is intended for use in navigation, surveying, orienteering, etc. </a:t>
+              <a:rPr lang="en-US" sz="2000" dirty="0"/>
+              <a:t>Typically meridians that run north–south</a:t>
+            </a:r>
+          </a:p>
+          <a:p>
+            <a:pPr marL="765810" lvl="1" indent="-457200">
+              <a:buFont typeface="Wingdings" panose="05000000000000000000" pitchFamily="2" charset="2"/>
+              <a:buChar char="ü"/>
+            </a:pPr>
+            <a:r>
+              <a:rPr lang="en-US" sz="2000" dirty="0"/>
+              <a:t>The graticule can also provide positional information, such as latitude and longitude </a:t>
             </a:r>
           </a:p>
         </p:txBody>
@@ -24881,7 +24567,7 @@
           <p:cNvPr id="2" name="Slide Number Placeholder 1">
             <a:extLst>
               <a:ext uri="{FF2B5EF4-FFF2-40B4-BE49-F238E27FC236}">
-                <a16:creationId xmlns:a16="http://schemas.microsoft.com/office/drawing/2014/main" id="{EF8F552F-6A33-4ABF-A550-E28E9371F70E}"/>
+                <a16:creationId xmlns:a16="http://schemas.microsoft.com/office/drawing/2014/main" id="{199C320A-A619-44DE-BE54-77BF6DE99E05}"/>
               </a:ext>
             </a:extLst>
           </p:cNvPr>
@@ -24908,7 +24594,7 @@
       </p:sp>
       <p:pic>
         <p:nvPicPr>
-          <p:cNvPr id="105476" name="Picture 6" descr="Image showing north arrow"/>
+          <p:cNvPr id="107524" name="Picture 6" descr="Image showing north arrow"/>
           <p:cNvPicPr>
             <a:picLocks noChangeAspect="1" noChangeArrowheads="1"/>
           </p:cNvPicPr>
@@ -24923,14 +24609,14 @@
         </p:blipFill>
         <p:spPr bwMode="auto">
           <a:xfrm>
-            <a:off x="1332271" y="2246617"/>
-            <a:ext cx="5364532" cy="2806422"/>
+            <a:off x="1425818" y="2779777"/>
+            <a:ext cx="5109094" cy="2104643"/>
           </a:xfrm>
           <a:prstGeom prst="rect">
             <a:avLst/>
           </a:prstGeom>
           <a:noFill/>
-          <a:ln w="9525">
+          <a:ln w="9525" algn="ctr">
             <a:solidFill>
               <a:schemeClr val="tx1"/>
             </a:solidFill>
@@ -24945,7 +24631,7 @@
           <p:cNvPr id="4" name="Straight Connector 3">
             <a:extLst>
               <a:ext uri="{FF2B5EF4-FFF2-40B4-BE49-F238E27FC236}">
-                <a16:creationId xmlns:a16="http://schemas.microsoft.com/office/drawing/2014/main" id="{03EE6621-3FA1-47CF-B9BD-3174DD1282D8}"/>
+                <a16:creationId xmlns:a16="http://schemas.microsoft.com/office/drawing/2014/main" id="{E12DB62C-9360-4AA9-A343-48B4125FB8A2}"/>
               </a:ext>
             </a:extLst>
           </p:cNvPr>
@@ -24987,7 +24673,7 @@
           <p:cNvPr id="5" name="Title 1">
             <a:extLst>
               <a:ext uri="{FF2B5EF4-FFF2-40B4-BE49-F238E27FC236}">
-                <a16:creationId xmlns:a16="http://schemas.microsoft.com/office/drawing/2014/main" id="{C2AC22B7-0723-4ACE-B108-1A4F1C619968}"/>
+                <a16:creationId xmlns:a16="http://schemas.microsoft.com/office/drawing/2014/main" id="{D8FAA60D-9ABF-4EF0-8A7F-015F34F11C64}"/>
               </a:ext>
             </a:extLst>
           </p:cNvPr>
@@ -24998,7 +24684,7 @@
         </p:nvSpPr>
         <p:spPr>
           <a:xfrm>
-            <a:off x="118533" y="6987"/>
+            <a:off x="194732" y="146986"/>
             <a:ext cx="8077200" cy="857250"/>
           </a:xfrm>
           <a:prstGeom prst="rect">
@@ -25070,7 +24756,7 @@
       </p:grpSpPr>
       <p:sp>
         <p:nvSpPr>
-          <p:cNvPr id="106499" name="Rectangle 4"/>
+          <p:cNvPr id="108547" name="Rectangle 3"/>
           <p:cNvSpPr>
             <a:spLocks noGrp="1" noChangeArrowheads="1"/>
           </p:cNvSpPr>
@@ -25080,12 +24766,14 @@
         </p:nvSpPr>
         <p:spPr>
           <a:xfrm>
-            <a:off x="0" y="1028700"/>
-            <a:ext cx="7603957" cy="3741896"/>
-          </a:xfrm>
-        </p:spPr>
-        <p:txBody>
-          <a:bodyPr/>
+            <a:off x="152401" y="1028701"/>
+            <a:ext cx="8043332" cy="1177016"/>
+          </a:xfrm>
+        </p:spPr>
+        <p:txBody>
+          <a:bodyPr>
+            <a:normAutofit/>
+          </a:bodyPr>
           <a:lstStyle/>
           <a:p>
             <a:pPr>
@@ -25093,8 +24781,8 @@
               <a:buChar char="o"/>
             </a:pPr>
             <a:r>
-              <a:rPr lang="en-US" dirty="0"/>
-              <a:t>Include an indication of orientation if</a:t>
+              <a:rPr lang="en-US" sz="2000" dirty="0"/>
+              <a:t>Use caution when using north arrows on smaller scale map</a:t>
             </a:r>
           </a:p>
           <a:p>
@@ -25103,494 +24791,9 @@
               <a:buChar char="ü"/>
             </a:pPr>
             <a:r>
-              <a:rPr lang="en-US" dirty="0"/>
-              <a:t>Geographic features are oriented in a manner that might confuse the map user </a:t>
-            </a:r>
-          </a:p>
-        </p:txBody>
-      </p:sp>
-      <p:sp>
-        <p:nvSpPr>
-          <p:cNvPr id="2" name="Slide Number Placeholder 1">
-            <a:extLst>
-              <a:ext uri="{FF2B5EF4-FFF2-40B4-BE49-F238E27FC236}">
-                <a16:creationId xmlns:a16="http://schemas.microsoft.com/office/drawing/2014/main" id="{61772D49-202B-410D-9143-C6CD7390D4A7}"/>
-              </a:ext>
-            </a:extLst>
-          </p:cNvPr>
-          <p:cNvSpPr>
-            <a:spLocks noGrp="1"/>
-          </p:cNvSpPr>
-          <p:nvPr>
-            <p:ph type="sldNum" sz="quarter" idx="12"/>
-          </p:nvPr>
-        </p:nvSpPr>
-        <p:spPr/>
-        <p:txBody>
-          <a:bodyPr/>
-          <a:lstStyle/>
-          <a:p>
-            <a:fld id="{127DDC20-79C9-9647-820E-6D40A3D210C3}" type="slidenum">
-              <a:rPr lang="en-US" smtClean="0"/>
-              <a:pPr/>
-              <a:t>22</a:t>
-            </a:fld>
-            <a:endParaRPr lang="en-US"/>
-          </a:p>
-        </p:txBody>
-      </p:sp>
-      <p:pic>
-        <p:nvPicPr>
-          <p:cNvPr id="106500" name="Picture 5" descr="Image showing north arrow"/>
-          <p:cNvPicPr>
-            <a:picLocks noChangeAspect="1" noChangeArrowheads="1"/>
-          </p:cNvPicPr>
-          <p:nvPr/>
-        </p:nvPicPr>
-        <p:blipFill>
-          <a:blip r:embed="rId2" cstate="print"/>
-          <a:srcRect/>
-          <a:stretch>
-            <a:fillRect/>
-          </a:stretch>
-        </p:blipFill>
-        <p:spPr bwMode="auto">
-          <a:xfrm>
-            <a:off x="1582829" y="2721901"/>
-            <a:ext cx="4620578" cy="1906309"/>
-          </a:xfrm>
-          <a:prstGeom prst="rect">
-            <a:avLst/>
-          </a:prstGeom>
-          <a:noFill/>
-          <a:ln w="9525" algn="ctr">
-            <a:solidFill>
-              <a:schemeClr val="tx1"/>
-            </a:solidFill>
-            <a:miter lim="800000"/>
-            <a:headEnd/>
-            <a:tailEnd/>
-          </a:ln>
-        </p:spPr>
-      </p:pic>
-      <p:cxnSp>
-        <p:nvCxnSpPr>
-          <p:cNvPr id="5" name="Straight Connector 4">
-            <a:extLst>
-              <a:ext uri="{FF2B5EF4-FFF2-40B4-BE49-F238E27FC236}">
-                <a16:creationId xmlns:a16="http://schemas.microsoft.com/office/drawing/2014/main" id="{EDC45D47-D9A4-425E-98E6-7A8DF523C3DA}"/>
-              </a:ext>
-            </a:extLst>
-          </p:cNvPr>
-          <p:cNvCxnSpPr/>
-          <p:nvPr/>
-        </p:nvCxnSpPr>
-        <p:spPr>
-          <a:xfrm>
-            <a:off x="152400" y="922910"/>
-            <a:ext cx="8001000" cy="0"/>
-          </a:xfrm>
-          <a:prstGeom prst="line">
-            <a:avLst/>
-          </a:prstGeom>
-          <a:ln>
-            <a:solidFill>
-              <a:schemeClr val="tx1"/>
-            </a:solidFill>
-          </a:ln>
-          <a:effectLst/>
-        </p:spPr>
-        <p:style>
-          <a:lnRef idx="2">
-            <a:schemeClr val="accent1"/>
-          </a:lnRef>
-          <a:fillRef idx="0">
-            <a:schemeClr val="accent1"/>
-          </a:fillRef>
-          <a:effectRef idx="1">
-            <a:schemeClr val="accent1"/>
-          </a:effectRef>
-          <a:fontRef idx="minor">
-            <a:schemeClr val="tx1"/>
-          </a:fontRef>
-        </p:style>
-      </p:cxnSp>
-      <p:sp>
-        <p:nvSpPr>
-          <p:cNvPr id="6" name="Title 1">
-            <a:extLst>
-              <a:ext uri="{FF2B5EF4-FFF2-40B4-BE49-F238E27FC236}">
-                <a16:creationId xmlns:a16="http://schemas.microsoft.com/office/drawing/2014/main" id="{C7AC46E4-4C2B-435A-A5F0-6BC6436863E1}"/>
-              </a:ext>
-            </a:extLst>
-          </p:cNvPr>
-          <p:cNvSpPr txBox="1">
-            <a:spLocks/>
-          </p:cNvSpPr>
-          <p:nvPr/>
-        </p:nvSpPr>
-        <p:spPr>
-          <a:xfrm>
-            <a:off x="118533" y="6987"/>
-            <a:ext cx="8077200" cy="857250"/>
-          </a:xfrm>
-          <a:prstGeom prst="rect">
-            <a:avLst/>
-          </a:prstGeom>
-        </p:spPr>
-        <p:txBody>
-          <a:bodyPr vert="horz" lIns="91440" tIns="45720" rIns="91440" bIns="45720" rtlCol="0" anchor="ctr">
-            <a:normAutofit/>
-          </a:bodyPr>
-          <a:lstStyle>
-            <a:lvl1pPr algn="ctr" defTabSz="411480" rtl="0" eaLnBrk="1" latinLnBrk="0" hangingPunct="1">
-              <a:spcBef>
-                <a:spcPct val="0"/>
-              </a:spcBef>
-              <a:buNone/>
-              <a:defRPr sz="3960" kern="1200">
-                <a:solidFill>
-                  <a:schemeClr val="tx1"/>
-                </a:solidFill>
-                <a:latin typeface="+mj-lt"/>
-                <a:ea typeface="+mj-ea"/>
-                <a:cs typeface="+mj-cs"/>
-              </a:defRPr>
-            </a:lvl1pPr>
-          </a:lstStyle>
-          <a:p>
-            <a:pPr algn="l"/>
-            <a:r>
-              <a:rPr lang="en-US" sz="3200" dirty="0">
-                <a:solidFill>
-                  <a:srgbClr val="7030A0"/>
-                </a:solidFill>
-              </a:rPr>
-              <a:t>Orientation</a:t>
-            </a:r>
-            <a:endParaRPr lang="en-US" sz="2600" dirty="0">
-              <a:solidFill>
-                <a:srgbClr val="7030A0"/>
-              </a:solidFill>
-            </a:endParaRPr>
-          </a:p>
-        </p:txBody>
-      </p:sp>
-    </p:spTree>
-  </p:cSld>
-  <p:clrMapOvr>
-    <a:masterClrMapping/>
-  </p:clrMapOvr>
-</p:sld>
-</file>
-
-<file path=ppt/slides/slide23.xml><?xml version="1.0" encoding="utf-8"?>
-<p:sld xmlns:a="http://schemas.openxmlformats.org/drawingml/2006/main" xmlns:r="http://schemas.openxmlformats.org/officeDocument/2006/relationships" xmlns:p="http://schemas.openxmlformats.org/presentationml/2006/main">
-  <p:cSld>
-    <p:spTree>
-      <p:nvGrpSpPr>
-        <p:cNvPr id="1" name=""/>
-        <p:cNvGrpSpPr/>
-        <p:nvPr/>
-      </p:nvGrpSpPr>
-      <p:grpSpPr>
-        <a:xfrm>
-          <a:off x="0" y="0"/>
-          <a:ext cx="0" cy="0"/>
-          <a:chOff x="0" y="0"/>
-          <a:chExt cx="0" cy="0"/>
-        </a:xfrm>
-      </p:grpSpPr>
-      <p:sp>
-        <p:nvSpPr>
-          <p:cNvPr id="107523" name="Rectangle 3"/>
-          <p:cNvSpPr>
-            <a:spLocks noGrp="1" noChangeArrowheads="1"/>
-          </p:cNvSpPr>
-          <p:nvPr>
-            <p:ph idx="1"/>
-          </p:nvPr>
-        </p:nvSpPr>
-        <p:spPr>
-          <a:xfrm>
-            <a:off x="152400" y="1004236"/>
-            <a:ext cx="8119532" cy="3741896"/>
-          </a:xfrm>
-        </p:spPr>
-        <p:txBody>
-          <a:bodyPr/>
-          <a:lstStyle/>
-          <a:p>
-            <a:pPr>
-              <a:buFont typeface="Courier New" panose="02070309020205020404" pitchFamily="49" charset="0"/>
-              <a:buChar char="o"/>
-            </a:pPr>
-            <a:r>
-              <a:rPr lang="en-US" dirty="0"/>
-              <a:t>A graticule indicates direction through the orientation of grid lines</a:t>
-            </a:r>
-          </a:p>
-          <a:p>
-            <a:pPr marL="765810" lvl="1" indent="-457200">
-              <a:buFont typeface="Wingdings" panose="05000000000000000000" pitchFamily="2" charset="2"/>
-              <a:buChar char="ü"/>
-            </a:pPr>
-            <a:r>
-              <a:rPr lang="en-US" dirty="0"/>
-              <a:t>Typically meridians that run north–south</a:t>
-            </a:r>
-          </a:p>
-          <a:p>
-            <a:pPr marL="765810" lvl="1" indent="-457200">
-              <a:buFont typeface="Wingdings" panose="05000000000000000000" pitchFamily="2" charset="2"/>
-              <a:buChar char="ü"/>
-            </a:pPr>
-            <a:r>
-              <a:rPr lang="en-US" dirty="0"/>
-              <a:t>The graticule can also provide positional information, such as latitude and longitude </a:t>
-            </a:r>
-          </a:p>
-        </p:txBody>
-      </p:sp>
-      <p:sp>
-        <p:nvSpPr>
-          <p:cNvPr id="2" name="Slide Number Placeholder 1">
-            <a:extLst>
-              <a:ext uri="{FF2B5EF4-FFF2-40B4-BE49-F238E27FC236}">
-                <a16:creationId xmlns:a16="http://schemas.microsoft.com/office/drawing/2014/main" id="{199C320A-A619-44DE-BE54-77BF6DE99E05}"/>
-              </a:ext>
-            </a:extLst>
-          </p:cNvPr>
-          <p:cNvSpPr>
-            <a:spLocks noGrp="1"/>
-          </p:cNvSpPr>
-          <p:nvPr>
-            <p:ph type="sldNum" sz="quarter" idx="12"/>
-          </p:nvPr>
-        </p:nvSpPr>
-        <p:spPr/>
-        <p:txBody>
-          <a:bodyPr/>
-          <a:lstStyle/>
-          <a:p>
-            <a:fld id="{127DDC20-79C9-9647-820E-6D40A3D210C3}" type="slidenum">
-              <a:rPr lang="en-US" smtClean="0"/>
-              <a:pPr/>
-              <a:t>23</a:t>
-            </a:fld>
-            <a:endParaRPr lang="en-US"/>
-          </a:p>
-        </p:txBody>
-      </p:sp>
-      <p:pic>
-        <p:nvPicPr>
-          <p:cNvPr id="107524" name="Picture 6" descr="Image showing north arrow"/>
-          <p:cNvPicPr>
-            <a:picLocks noChangeAspect="1" noChangeArrowheads="1"/>
-          </p:cNvPicPr>
-          <p:nvPr/>
-        </p:nvPicPr>
-        <p:blipFill>
-          <a:blip r:embed="rId2" cstate="print"/>
-          <a:srcRect/>
-          <a:stretch>
-            <a:fillRect/>
-          </a:stretch>
-        </p:blipFill>
-        <p:spPr bwMode="auto">
-          <a:xfrm>
-            <a:off x="1925690" y="3324084"/>
-            <a:ext cx="3957754" cy="1630359"/>
-          </a:xfrm>
-          <a:prstGeom prst="rect">
-            <a:avLst/>
-          </a:prstGeom>
-          <a:noFill/>
-          <a:ln w="9525" algn="ctr">
-            <a:solidFill>
-              <a:schemeClr val="tx1"/>
-            </a:solidFill>
-            <a:miter lim="800000"/>
-            <a:headEnd/>
-            <a:tailEnd/>
-          </a:ln>
-        </p:spPr>
-      </p:pic>
-      <p:cxnSp>
-        <p:nvCxnSpPr>
-          <p:cNvPr id="4" name="Straight Connector 3">
-            <a:extLst>
-              <a:ext uri="{FF2B5EF4-FFF2-40B4-BE49-F238E27FC236}">
-                <a16:creationId xmlns:a16="http://schemas.microsoft.com/office/drawing/2014/main" id="{E12DB62C-9360-4AA9-A343-48B4125FB8A2}"/>
-              </a:ext>
-            </a:extLst>
-          </p:cNvPr>
-          <p:cNvCxnSpPr/>
-          <p:nvPr/>
-        </p:nvCxnSpPr>
-        <p:spPr>
-          <a:xfrm>
-            <a:off x="152400" y="922910"/>
-            <a:ext cx="8001000" cy="0"/>
-          </a:xfrm>
-          <a:prstGeom prst="line">
-            <a:avLst/>
-          </a:prstGeom>
-          <a:ln>
-            <a:solidFill>
-              <a:schemeClr val="tx1"/>
-            </a:solidFill>
-          </a:ln>
-          <a:effectLst/>
-        </p:spPr>
-        <p:style>
-          <a:lnRef idx="2">
-            <a:schemeClr val="accent1"/>
-          </a:lnRef>
-          <a:fillRef idx="0">
-            <a:schemeClr val="accent1"/>
-          </a:fillRef>
-          <a:effectRef idx="1">
-            <a:schemeClr val="accent1"/>
-          </a:effectRef>
-          <a:fontRef idx="minor">
-            <a:schemeClr val="tx1"/>
-          </a:fontRef>
-        </p:style>
-      </p:cxnSp>
-      <p:sp>
-        <p:nvSpPr>
-          <p:cNvPr id="5" name="Title 1">
-            <a:extLst>
-              <a:ext uri="{FF2B5EF4-FFF2-40B4-BE49-F238E27FC236}">
-                <a16:creationId xmlns:a16="http://schemas.microsoft.com/office/drawing/2014/main" id="{D8FAA60D-9ABF-4EF0-8A7F-015F34F11C64}"/>
-              </a:ext>
-            </a:extLst>
-          </p:cNvPr>
-          <p:cNvSpPr txBox="1">
-            <a:spLocks/>
-          </p:cNvSpPr>
-          <p:nvPr/>
-        </p:nvSpPr>
-        <p:spPr>
-          <a:xfrm>
-            <a:off x="118533" y="6987"/>
-            <a:ext cx="8077200" cy="857250"/>
-          </a:xfrm>
-          <a:prstGeom prst="rect">
-            <a:avLst/>
-          </a:prstGeom>
-        </p:spPr>
-        <p:txBody>
-          <a:bodyPr vert="horz" lIns="91440" tIns="45720" rIns="91440" bIns="45720" rtlCol="0" anchor="ctr">
-            <a:normAutofit/>
-          </a:bodyPr>
-          <a:lstStyle>
-            <a:lvl1pPr algn="ctr" defTabSz="411480" rtl="0" eaLnBrk="1" latinLnBrk="0" hangingPunct="1">
-              <a:spcBef>
-                <a:spcPct val="0"/>
-              </a:spcBef>
-              <a:buNone/>
-              <a:defRPr sz="3960" kern="1200">
-                <a:solidFill>
-                  <a:schemeClr val="tx1"/>
-                </a:solidFill>
-                <a:latin typeface="+mj-lt"/>
-                <a:ea typeface="+mj-ea"/>
-                <a:cs typeface="+mj-cs"/>
-              </a:defRPr>
-            </a:lvl1pPr>
-          </a:lstStyle>
-          <a:p>
-            <a:pPr algn="l"/>
-            <a:r>
-              <a:rPr lang="en-US" sz="3200" dirty="0">
-                <a:solidFill>
-                  <a:srgbClr val="7030A0"/>
-                </a:solidFill>
-              </a:rPr>
-              <a:t>Orientation</a:t>
-            </a:r>
-            <a:endParaRPr lang="en-US" sz="2600" dirty="0">
-              <a:solidFill>
-                <a:srgbClr val="7030A0"/>
-              </a:solidFill>
-            </a:endParaRPr>
-          </a:p>
-        </p:txBody>
-      </p:sp>
-    </p:spTree>
-  </p:cSld>
-  <p:clrMapOvr>
-    <a:masterClrMapping/>
-  </p:clrMapOvr>
-</p:sld>
-</file>
-
-<file path=ppt/slides/slide24.xml><?xml version="1.0" encoding="utf-8"?>
-<p:sld xmlns:a="http://schemas.openxmlformats.org/drawingml/2006/main" xmlns:r="http://schemas.openxmlformats.org/officeDocument/2006/relationships" xmlns:p="http://schemas.openxmlformats.org/presentationml/2006/main">
-  <p:cSld>
-    <p:spTree>
-      <p:nvGrpSpPr>
-        <p:cNvPr id="1" name=""/>
-        <p:cNvGrpSpPr/>
-        <p:nvPr/>
-      </p:nvGrpSpPr>
-      <p:grpSpPr>
-        <a:xfrm>
-          <a:off x="0" y="0"/>
-          <a:ext cx="0" cy="0"/>
-          <a:chOff x="0" y="0"/>
-          <a:chExt cx="0" cy="0"/>
-        </a:xfrm>
-      </p:grpSpPr>
-      <p:sp>
-        <p:nvSpPr>
-          <p:cNvPr id="108547" name="Rectangle 3"/>
-          <p:cNvSpPr>
-            <a:spLocks noGrp="1" noChangeArrowheads="1"/>
-          </p:cNvSpPr>
-          <p:nvPr>
-            <p:ph idx="1"/>
-          </p:nvPr>
-        </p:nvSpPr>
-        <p:spPr>
-          <a:xfrm>
-            <a:off x="152401" y="1028700"/>
-            <a:ext cx="8043332" cy="1609191"/>
-          </a:xfrm>
-        </p:spPr>
-        <p:txBody>
-          <a:bodyPr>
-            <a:normAutofit/>
-          </a:bodyPr>
-          <a:lstStyle/>
-          <a:p>
-            <a:pPr>
-              <a:buFont typeface="Courier New" panose="02070309020205020404" pitchFamily="49" charset="0"/>
-              <a:buChar char="o"/>
-            </a:pPr>
-            <a:r>
-              <a:rPr lang="en-US" dirty="0"/>
-              <a:t>Use caution when using north arrows on smaller scale map</a:t>
-            </a:r>
-          </a:p>
-          <a:p>
-            <a:pPr marL="765810" lvl="1" indent="-457200">
-              <a:buFont typeface="Wingdings" panose="05000000000000000000" pitchFamily="2" charset="2"/>
-              <a:buChar char="ü"/>
-            </a:pPr>
-            <a:r>
-              <a:rPr lang="en-US" dirty="0"/>
+              <a:rPr lang="en-US" sz="2000" dirty="0"/>
               <a:t>The direction of north can differ greatly in the maps with azimuthal and conic projection</a:t>
             </a:r>
-          </a:p>
-          <a:p>
-            <a:pPr marL="765810" lvl="1" indent="-457200">
-              <a:buFont typeface="Wingdings" panose="05000000000000000000" pitchFamily="2" charset="2"/>
-              <a:buChar char="ü"/>
-            </a:pPr>
-            <a:endParaRPr lang="en-US" dirty="0"/>
           </a:p>
         </p:txBody>
       </p:sp>
@@ -25618,7 +24821,7 @@
             <a:fld id="{127DDC20-79C9-9647-820E-6D40A3D210C3}" type="slidenum">
               <a:rPr lang="en-US" smtClean="0"/>
               <a:pPr/>
-              <a:t>24</a:t>
+              <a:t>22</a:t>
             </a:fld>
             <a:endParaRPr lang="en-US"/>
           </a:p>
@@ -26100,7 +25303,7 @@
         </p:nvSpPr>
         <p:spPr>
           <a:xfrm>
-            <a:off x="118533" y="6987"/>
+            <a:off x="238518" y="162131"/>
             <a:ext cx="8077200" cy="857250"/>
           </a:xfrm>
           <a:prstGeom prst="rect">
@@ -26318,7 +25521,7 @@
 </p:sld>
 </file>
 
-<file path=ppt/slides/slide25.xml><?xml version="1.0" encoding="utf-8"?>
+<file path=ppt/slides/slide23.xml><?xml version="1.0" encoding="utf-8"?>
 <p:sld xmlns:a="http://schemas.openxmlformats.org/drawingml/2006/main" xmlns:r="http://schemas.openxmlformats.org/officeDocument/2006/relationships" xmlns:p="http://schemas.openxmlformats.org/presentationml/2006/main">
   <p:cSld>
     <p:spTree>
@@ -26348,11 +25551,13 @@
         <p:spPr>
           <a:xfrm>
             <a:off x="152400" y="1028700"/>
-            <a:ext cx="7808975" cy="3741896"/>
-          </a:xfrm>
-        </p:spPr>
-        <p:txBody>
-          <a:bodyPr/>
+            <a:ext cx="7808975" cy="934211"/>
+          </a:xfrm>
+        </p:spPr>
+        <p:txBody>
+          <a:bodyPr>
+            <a:normAutofit/>
+          </a:bodyPr>
           <a:lstStyle/>
           <a:p>
             <a:pPr>
@@ -26360,7 +25565,11 @@
               <a:buChar char="o"/>
             </a:pPr>
             <a:r>
-              <a:rPr lang="en-US" dirty="0"/>
+              <a:rPr lang="en-US" sz="1800" dirty="0">
+                <a:solidFill>
+                  <a:schemeClr val="tx1"/>
+                </a:solidFill>
+              </a:rPr>
               <a:t>Use caution when using north arrows on smaller scale maps</a:t>
             </a:r>
           </a:p>
@@ -26370,16 +25579,20 @@
               <a:buChar char="ü"/>
             </a:pPr>
             <a:r>
-              <a:rPr lang="en-US" b="0" i="0" dirty="0">
+              <a:rPr lang="en-US" sz="1800" b="0" i="0" dirty="0">
                 <a:solidFill>
-                  <a:srgbClr val="000000"/>
+                  <a:schemeClr val="tx1"/>
                 </a:solidFill>
                 <a:effectLst/>
                 <a:latin typeface="TimesLTStd-Roman"/>
               </a:rPr>
               <a:t> Place the graticules beneath land masses</a:t>
             </a:r>
-            <a:endParaRPr lang="en-US" dirty="0"/>
+            <a:endParaRPr lang="en-US" sz="1800" dirty="0">
+              <a:solidFill>
+                <a:schemeClr val="tx1"/>
+              </a:solidFill>
+            </a:endParaRPr>
           </a:p>
         </p:txBody>
       </p:sp>
@@ -26407,7 +25620,7 @@
             <a:fld id="{127DDC20-79C9-9647-820E-6D40A3D210C3}" type="slidenum">
               <a:rPr lang="en-US" smtClean="0"/>
               <a:pPr/>
-              <a:t>25</a:t>
+              <a:t>23</a:t>
             </a:fld>
             <a:endParaRPr lang="en-US"/>
           </a:p>
@@ -26471,7 +25684,7 @@
         </p:nvSpPr>
         <p:spPr>
           <a:xfrm>
-            <a:off x="118533" y="6987"/>
+            <a:off x="268225" y="230746"/>
             <a:ext cx="8077200" cy="857250"/>
           </a:xfrm>
           <a:prstGeom prst="rect">
@@ -26538,8 +25751,8 @@
         </p:blipFill>
         <p:spPr>
           <a:xfrm>
-            <a:off x="2426208" y="2323849"/>
-            <a:ext cx="2804050" cy="2717258"/>
+            <a:off x="2468880" y="1785732"/>
+            <a:ext cx="3291840" cy="3189950"/>
           </a:xfrm>
           <a:prstGeom prst="rect">
             <a:avLst/>
@@ -26562,7 +25775,7 @@
         </p:nvSpPr>
         <p:spPr bwMode="auto">
           <a:xfrm>
-            <a:off x="6259049" y="4434618"/>
+            <a:off x="6259049" y="4789643"/>
             <a:ext cx="974947" cy="246221"/>
           </a:xfrm>
           <a:prstGeom prst="rect">
@@ -26606,7 +25819,7 @@
 </p:sld>
 </file>
 
-<file path=ppt/slides/slide26.xml><?xml version="1.0" encoding="utf-8"?>
+<file path=ppt/slides/slide24.xml><?xml version="1.0" encoding="utf-8"?>
 <p:sld xmlns:a="http://schemas.openxmlformats.org/drawingml/2006/main" xmlns:r="http://schemas.openxmlformats.org/officeDocument/2006/relationships" xmlns:p="http://schemas.openxmlformats.org/presentationml/2006/main">
   <p:cSld>
     <p:spTree>
@@ -26635,12 +25848,14 @@
         </p:nvSpPr>
         <p:spPr>
           <a:xfrm>
-            <a:off x="118533" y="1077768"/>
-            <a:ext cx="7216140" cy="3741896"/>
-          </a:xfrm>
-        </p:spPr>
-        <p:txBody>
-          <a:bodyPr/>
+            <a:off x="118533" y="1077767"/>
+            <a:ext cx="7216140" cy="1958039"/>
+          </a:xfrm>
+        </p:spPr>
+        <p:txBody>
+          <a:bodyPr>
+            <a:noAutofit/>
+          </a:bodyPr>
           <a:lstStyle/>
           <a:p>
             <a:pPr>
@@ -26648,7 +25863,7 @@
               <a:buChar char="o"/>
             </a:pPr>
             <a:r>
-              <a:rPr lang="en-US" dirty="0"/>
+              <a:rPr lang="en-US" sz="1600" dirty="0"/>
               <a:t>The style of the north arrow and graticule should be simple and subtle; they should not attract attention</a:t>
             </a:r>
           </a:p>
@@ -26658,7 +25873,7 @@
               <a:buChar char="ü"/>
             </a:pPr>
             <a:r>
-              <a:rPr lang="en-US" dirty="0"/>
+              <a:rPr lang="en-US" sz="1600" dirty="0"/>
               <a:t>Bulky and complex designs should be avoided</a:t>
             </a:r>
           </a:p>
@@ -26668,7 +25883,7 @@
               <a:buChar char="ü"/>
             </a:pPr>
             <a:r>
-              <a:rPr lang="en-US" dirty="0"/>
+              <a:rPr lang="en-US" sz="1600" dirty="0"/>
               <a:t>Line weights should be thin and type should be among the smallest on a map</a:t>
             </a:r>
           </a:p>
@@ -26678,7 +25893,7 @@
               <a:buChar char="ü"/>
             </a:pPr>
             <a:r>
-              <a:rPr lang="en-US" dirty="0"/>
+              <a:rPr lang="en-US" sz="1600" dirty="0"/>
               <a:t>Only north should be indicated</a:t>
             </a:r>
           </a:p>
@@ -26708,7 +25923,7 @@
             <a:fld id="{127DDC20-79C9-9647-820E-6D40A3D210C3}" type="slidenum">
               <a:rPr lang="en-US" smtClean="0"/>
               <a:pPr/>
-              <a:t>26</a:t>
+              <a:t>24</a:t>
             </a:fld>
             <a:endParaRPr lang="en-US"/>
           </a:p>
@@ -26772,7 +25987,7 @@
         </p:nvSpPr>
         <p:spPr>
           <a:xfrm>
-            <a:off x="118533" y="6987"/>
+            <a:off x="386757" y="143090"/>
             <a:ext cx="8077200" cy="857250"/>
           </a:xfrm>
           <a:prstGeom prst="rect">
@@ -26825,7 +26040,7 @@
 </p:sld>
 </file>
 
-<file path=ppt/slides/slide27.xml><?xml version="1.0" encoding="utf-8"?>
+<file path=ppt/slides/slide25.xml><?xml version="1.0" encoding="utf-8"?>
 <p:sld xmlns:a="http://schemas.openxmlformats.org/drawingml/2006/main" xmlns:r="http://schemas.openxmlformats.org/officeDocument/2006/relationships" xmlns:p="http://schemas.openxmlformats.org/presentationml/2006/main">
   <p:cSld>
     <p:spTree>
@@ -26859,8 +26074,8 @@
         </p:blipFill>
         <p:spPr bwMode="auto">
           <a:xfrm>
-            <a:off x="2666173" y="2373547"/>
-            <a:ext cx="1717715" cy="907754"/>
+            <a:off x="2155238" y="1763190"/>
+            <a:ext cx="2522687" cy="1333154"/>
           </a:xfrm>
           <a:prstGeom prst="rect">
             <a:avLst/>
@@ -26893,8 +26108,8 @@
         </p:blipFill>
         <p:spPr bwMode="auto">
           <a:xfrm>
-            <a:off x="2665621" y="3506068"/>
-            <a:ext cx="1718267" cy="921566"/>
+            <a:off x="2155238" y="3299024"/>
+            <a:ext cx="2522687" cy="1353004"/>
           </a:xfrm>
           <a:prstGeom prst="rect">
             <a:avLst/>
@@ -26920,8 +26135,8 @@
         </p:nvSpPr>
         <p:spPr bwMode="auto">
           <a:xfrm>
-            <a:off x="4715535" y="2588513"/>
-            <a:ext cx="1272959" cy="507831"/>
+            <a:off x="5032527" y="2292876"/>
+            <a:ext cx="2094326" cy="400110"/>
           </a:xfrm>
           <a:prstGeom prst="rect">
             <a:avLst/>
@@ -26946,7 +26161,7 @@
               </a:spcBef>
             </a:pPr>
             <a:r>
-              <a:rPr lang="en-US" sz="1350" dirty="0"/>
+              <a:rPr lang="en-US" sz="2000" dirty="0"/>
               <a:t>Poorly Designed</a:t>
             </a:r>
           </a:p>
@@ -26962,8 +26177,8 @@
         </p:nvSpPr>
         <p:spPr bwMode="auto">
           <a:xfrm>
-            <a:off x="4715535" y="3656073"/>
-            <a:ext cx="1166280" cy="507831"/>
+            <a:off x="5032527" y="3825485"/>
+            <a:ext cx="1701073" cy="400110"/>
           </a:xfrm>
           <a:prstGeom prst="rect">
             <a:avLst/>
@@ -26988,7 +26203,7 @@
               </a:spcBef>
             </a:pPr>
             <a:r>
-              <a:rPr lang="en-US" sz="1350" dirty="0"/>
+              <a:rPr lang="en-US" sz="2000" dirty="0"/>
               <a:t>Well Designed</a:t>
             </a:r>
           </a:p>
@@ -27052,7 +26267,7 @@
         </p:nvSpPr>
         <p:spPr>
           <a:xfrm>
-            <a:off x="118533" y="6987"/>
+            <a:off x="345288" y="186597"/>
             <a:ext cx="8077200" cy="857250"/>
           </a:xfrm>
           <a:prstGeom prst="rect">
@@ -27111,7 +26326,7 @@
         </p:nvSpPr>
         <p:spPr>
           <a:xfrm>
-            <a:off x="1319389" y="1544465"/>
+            <a:off x="1319389" y="1080356"/>
             <a:ext cx="5414211" cy="523220"/>
           </a:xfrm>
           <a:prstGeom prst="rect">
@@ -27156,7 +26371,7 @@
             <a:fld id="{127DDC20-79C9-9647-820E-6D40A3D210C3}" type="slidenum">
               <a:rPr lang="en-US" smtClean="0"/>
               <a:pPr/>
-              <a:t>27</a:t>
+              <a:t>25</a:t>
             </a:fld>
             <a:endParaRPr lang="en-US"/>
           </a:p>
@@ -27281,7 +26496,7 @@
 </p:sld>
 </file>
 
-<file path=ppt/slides/slide28.xml><?xml version="1.0" encoding="utf-8"?>
+<file path=ppt/slides/slide26.xml><?xml version="1.0" encoding="utf-8"?>
 <p:sld xmlns:a="http://schemas.openxmlformats.org/drawingml/2006/main" xmlns:r="http://schemas.openxmlformats.org/officeDocument/2006/relationships" xmlns:p="http://schemas.openxmlformats.org/presentationml/2006/main">
   <p:cSld>
     <p:spTree>
@@ -27310,7 +26525,7 @@
         </p:nvSpPr>
         <p:spPr>
           <a:xfrm>
-            <a:off x="-344904" y="182000"/>
+            <a:off x="152400" y="182000"/>
             <a:ext cx="8422104" cy="771525"/>
           </a:xfrm>
         </p:spPr>
@@ -27352,51 +26567,100 @@
           <a:bodyPr/>
           <a:lstStyle/>
           <a:p>
-            <a:pPr marL="411480" indent="-411480"/>
-            <a:r>
-              <a:rPr lang="en-US" dirty="0"/>
-              <a:t>Sizes should decrease as follows</a:t>
-            </a:r>
-          </a:p>
-          <a:p>
-            <a:pPr lvl="1" indent="-360045"/>
-            <a:r>
-              <a:rPr lang="en-US" dirty="0"/>
+            <a:pPr marL="0" indent="0">
+              <a:buNone/>
+            </a:pPr>
+            <a:r>
+              <a:rPr lang="en-US" sz="2400" dirty="0">
+                <a:solidFill>
+                  <a:schemeClr val="tx1"/>
+                </a:solidFill>
+              </a:rPr>
+              <a:t> Sizes should decrease as follows</a:t>
+            </a:r>
+          </a:p>
+          <a:p>
+            <a:pPr marL="408105" lvl="1" indent="-342900">
+              <a:buFont typeface="Wingdings" panose="05000000000000000000" pitchFamily="2" charset="2"/>
+              <a:buChar char="ü"/>
+            </a:pPr>
+            <a:r>
+              <a:rPr lang="en-US" sz="2400" dirty="0">
+                <a:solidFill>
+                  <a:schemeClr val="tx1"/>
+                </a:solidFill>
+              </a:rPr>
               <a:t>Title</a:t>
             </a:r>
           </a:p>
           <a:p>
-            <a:pPr lvl="1" indent="-360045"/>
-            <a:r>
-              <a:rPr lang="en-US" dirty="0"/>
+            <a:pPr marL="408105" lvl="1" indent="-342900">
+              <a:buFont typeface="Wingdings" panose="05000000000000000000" pitchFamily="2" charset="2"/>
+              <a:buChar char="ü"/>
+            </a:pPr>
+            <a:r>
+              <a:rPr lang="en-US" sz="2400" dirty="0">
+                <a:solidFill>
+                  <a:schemeClr val="tx1"/>
+                </a:solidFill>
+              </a:rPr>
               <a:t>Subtitle</a:t>
             </a:r>
           </a:p>
           <a:p>
-            <a:pPr lvl="1" indent="-360045"/>
-            <a:r>
-              <a:rPr lang="en-US" dirty="0"/>
+            <a:pPr marL="408105" lvl="1" indent="-342900">
+              <a:buFont typeface="Wingdings" panose="05000000000000000000" pitchFamily="2" charset="2"/>
+              <a:buChar char="ü"/>
+            </a:pPr>
+            <a:r>
+              <a:rPr lang="en-US" sz="2400" dirty="0">
+                <a:solidFill>
+                  <a:schemeClr val="tx1"/>
+                </a:solidFill>
+              </a:rPr>
               <a:t>Legend Heading</a:t>
             </a:r>
           </a:p>
           <a:p>
-            <a:pPr lvl="1" indent="-360045"/>
-            <a:r>
-              <a:rPr lang="en-US" dirty="0"/>
+            <a:pPr marL="408105" lvl="1" indent="-342900">
+              <a:buFont typeface="Wingdings" panose="05000000000000000000" pitchFamily="2" charset="2"/>
+              <a:buChar char="ü"/>
+            </a:pPr>
+            <a:r>
+              <a:rPr lang="en-US" sz="2400" dirty="0">
+                <a:solidFill>
+                  <a:schemeClr val="tx1"/>
+                </a:solidFill>
+              </a:rPr>
               <a:t>Legend Definitions</a:t>
             </a:r>
           </a:p>
           <a:p>
-            <a:pPr lvl="1" indent="-360045"/>
-            <a:r>
-              <a:rPr lang="en-US" dirty="0"/>
+            <a:pPr marL="408105" lvl="1" indent="-342900">
+              <a:buFont typeface="Wingdings" panose="05000000000000000000" pitchFamily="2" charset="2"/>
+              <a:buChar char="ü"/>
+            </a:pPr>
+            <a:r>
+              <a:rPr lang="en-US" sz="2400" dirty="0">
+                <a:solidFill>
+                  <a:schemeClr val="tx1"/>
+                </a:solidFill>
+              </a:rPr>
               <a:t>Source, scale,</a:t>
             </a:r>
             <a:br>
-              <a:rPr lang="en-US" dirty="0"/>
+              <a:rPr lang="en-US" sz="2400" dirty="0">
+                <a:solidFill>
+                  <a:schemeClr val="tx1"/>
+                </a:solidFill>
+              </a:rPr>
             </a:br>
             <a:r>
-              <a:rPr lang="en-US" dirty="0"/>
+              <a:rPr lang="en-US" sz="2400" dirty="0">
+                <a:solidFill>
+                  <a:schemeClr val="tx1"/>
+                </a:solidFill>
+              </a:rPr>
               <a:t>north arrow</a:t>
             </a:r>
           </a:p>
@@ -27430,9 +26694,9 @@
             <a:fld id="{127DDC20-79C9-9647-820E-6D40A3D210C3}" type="slidenum">
               <a:rPr lang="en-US" smtClean="0"/>
               <a:pPr/>
-              <a:t>28</a:t>
+              <a:t>26</a:t>
             </a:fld>
-            <a:endParaRPr lang="en-US"/>
+            <a:endParaRPr lang="en-US" dirty="0"/>
           </a:p>
         </p:txBody>
       </p:sp>
@@ -27453,7 +26717,7 @@
         </p:blipFill>
         <p:spPr bwMode="auto">
           <a:xfrm>
-            <a:off x="5773561" y="1417554"/>
+            <a:off x="5773561" y="1276495"/>
             <a:ext cx="2314575" cy="3218470"/>
           </a:xfrm>
           <a:prstGeom prst="rect">
@@ -27673,7 +26937,7 @@
         </p:nvSpPr>
         <p:spPr>
           <a:xfrm>
-            <a:off x="2128626" y="4726618"/>
+            <a:off x="2062936" y="4605711"/>
             <a:ext cx="5018133" cy="383182"/>
           </a:xfrm>
           <a:prstGeom prst="rect">
@@ -27821,7 +27085,7 @@
 </p:sld>
 </file>
 
-<file path=ppt/slides/slide29.xml><?xml version="1.0" encoding="utf-8"?>
+<file path=ppt/slides/slide27.xml><?xml version="1.0" encoding="utf-8"?>
 <p:sld xmlns:a="http://schemas.openxmlformats.org/drawingml/2006/main" xmlns:r="http://schemas.openxmlformats.org/officeDocument/2006/relationships" xmlns:p="http://schemas.openxmlformats.org/presentationml/2006/main">
   <p:cSld>
     <p:spTree>
@@ -27838,12 +27102,96 @@
           <a:chExt cx="0" cy="0"/>
         </a:xfrm>
       </p:grpSpPr>
+      <p:sp>
+        <p:nvSpPr>
+          <p:cNvPr id="2" name="Rectangle 1"/>
+          <p:cNvSpPr/>
+          <p:nvPr/>
+        </p:nvSpPr>
+        <p:spPr>
+          <a:xfrm>
+            <a:off x="2471305" y="1325254"/>
+            <a:ext cx="3286989" cy="830997"/>
+          </a:xfrm>
+          <a:prstGeom prst="rect">
+            <a:avLst/>
+          </a:prstGeom>
+          <a:noFill/>
+        </p:spPr>
+        <p:txBody>
+          <a:bodyPr wrap="none" lIns="82296" tIns="41148" rIns="82296" bIns="41148">
+            <a:spAutoFit/>
+          </a:bodyPr>
+          <a:lstStyle/>
+          <a:p>
+            <a:pPr algn="ctr"/>
+            <a:r>
+              <a:rPr lang="en-US" sz="4860" b="1" spc="180" dirty="0">
+                <a:ln w="29210">
+                  <a:solidFill>
+                    <a:schemeClr val="accent3">
+                      <a:tint val="10000"/>
+                    </a:schemeClr>
+                  </a:solidFill>
+                </a:ln>
+                <a:solidFill>
+                  <a:srgbClr val="008000">
+                    <a:alpha val="50000"/>
+                  </a:srgbClr>
+                </a:solidFill>
+                <a:effectLst>
+                  <a:innerShdw blurRad="50800" dist="50800" dir="8100000">
+                    <a:srgbClr val="7D7D7D">
+                      <a:alpha val="73000"/>
+                    </a:srgbClr>
+                  </a:innerShdw>
+                </a:effectLst>
+              </a:rPr>
+              <a:t>Thank you!</a:t>
+            </a:r>
+          </a:p>
+        </p:txBody>
+      </p:sp>
+      <p:sp>
+        <p:nvSpPr>
+          <p:cNvPr id="3" name="Slide Number Placeholder 2">
+            <a:extLst>
+              <a:ext uri="{FF2B5EF4-FFF2-40B4-BE49-F238E27FC236}">
+                <a16:creationId xmlns:a16="http://schemas.microsoft.com/office/drawing/2014/main" id="{863C9EAE-E5B7-4784-94CD-D062E17813E3}"/>
+              </a:ext>
+            </a:extLst>
+          </p:cNvPr>
+          <p:cNvSpPr>
+            <a:spLocks noGrp="1"/>
+          </p:cNvSpPr>
+          <p:nvPr>
+            <p:ph type="sldNum" sz="quarter" idx="12"/>
+          </p:nvPr>
+        </p:nvSpPr>
+        <p:spPr/>
+        <p:txBody>
+          <a:bodyPr/>
+          <a:lstStyle/>
+          <a:p>
+            <a:fld id="{127DDC20-79C9-9647-820E-6D40A3D210C3}" type="slidenum">
+              <a:rPr lang="en-US" smtClean="0"/>
+              <a:pPr/>
+              <a:t>27</a:t>
+            </a:fld>
+            <a:endParaRPr lang="en-US"/>
+          </a:p>
+        </p:txBody>
+      </p:sp>
       <p:pic>
         <p:nvPicPr>
-          <p:cNvPr id="3" name="Picture 2" descr="Map 1"/>
-          <p:cNvPicPr>
-            <a:picLocks noChangeAspect="1"/>
-          </p:cNvPicPr>
+          <p:cNvPr id="6" name="Picture 5">
+            <a:extLst>
+              <a:ext uri="{FF2B5EF4-FFF2-40B4-BE49-F238E27FC236}">
+                <a16:creationId xmlns:a16="http://schemas.microsoft.com/office/drawing/2014/main" id="{32DE135F-68C6-4911-85BA-92ABB3F9F85C}"/>
+              </a:ext>
+            </a:extLst>
+          </p:cNvPr>
+          <p:cNvPicPr/>
           <p:nvPr/>
         </p:nvPicPr>
         <p:blipFill>
@@ -27854,102 +27202,20 @@
         </p:blipFill>
         <p:spPr>
           <a:xfrm>
-            <a:off x="1576951" y="1227083"/>
-            <a:ext cx="2537849" cy="3189357"/>
+            <a:off x="152400" y="4275667"/>
+            <a:ext cx="5915025" cy="758190"/>
           </a:xfrm>
           <a:prstGeom prst="rect">
             <a:avLst/>
           </a:prstGeom>
         </p:spPr>
       </p:pic>
-      <p:pic>
-        <p:nvPicPr>
-          <p:cNvPr id="2" name="Picture 1" descr="Map 2"/>
-          <p:cNvPicPr>
-            <a:picLocks noChangeAspect="1"/>
-          </p:cNvPicPr>
-          <p:nvPr/>
-        </p:nvPicPr>
-        <p:blipFill>
-          <a:blip r:embed="rId4"/>
-          <a:stretch>
-            <a:fillRect/>
-          </a:stretch>
-        </p:blipFill>
-        <p:spPr>
-          <a:xfrm>
-            <a:off x="4603922" y="1227083"/>
-            <a:ext cx="2525765" cy="3188635"/>
-          </a:xfrm>
-          <a:prstGeom prst="rect">
-            <a:avLst/>
-          </a:prstGeom>
-          <a:ln>
-            <a:solidFill>
-              <a:schemeClr val="tx1"/>
-            </a:solidFill>
-          </a:ln>
-        </p:spPr>
-      </p:pic>
-      <p:sp>
-        <p:nvSpPr>
-          <p:cNvPr id="7" name="Title 1">
+      <p:cxnSp>
+        <p:nvCxnSpPr>
+          <p:cNvPr id="7" name="Straight Connector 6">
             <a:extLst>
               <a:ext uri="{FF2B5EF4-FFF2-40B4-BE49-F238E27FC236}">
-                <a16:creationId xmlns:a16="http://schemas.microsoft.com/office/drawing/2014/main" id="{5935AEE5-6193-47F9-BAB9-FB3F627C7F5C}"/>
-              </a:ext>
-            </a:extLst>
-          </p:cNvPr>
-          <p:cNvSpPr txBox="1">
-            <a:spLocks/>
-          </p:cNvSpPr>
-          <p:nvPr/>
-        </p:nvSpPr>
-        <p:spPr>
-          <a:xfrm>
-            <a:off x="118533" y="43082"/>
-            <a:ext cx="8077200" cy="857250"/>
-          </a:xfrm>
-          <a:prstGeom prst="rect">
-            <a:avLst/>
-          </a:prstGeom>
-        </p:spPr>
-        <p:txBody>
-          <a:bodyPr vert="horz" lIns="91440" tIns="45720" rIns="91440" bIns="45720" rtlCol="0" anchor="ctr">
-            <a:normAutofit/>
-          </a:bodyPr>
-          <a:lstStyle>
-            <a:lvl1pPr algn="ctr" defTabSz="411480" rtl="0" eaLnBrk="1" latinLnBrk="0" hangingPunct="1">
-              <a:spcBef>
-                <a:spcPct val="0"/>
-              </a:spcBef>
-              <a:buNone/>
-              <a:defRPr sz="3960" kern="1200">
-                <a:solidFill>
-                  <a:schemeClr val="tx1"/>
-                </a:solidFill>
-                <a:latin typeface="+mj-lt"/>
-                <a:ea typeface="+mj-ea"/>
-                <a:cs typeface="+mj-cs"/>
-              </a:defRPr>
-            </a:lvl1pPr>
-          </a:lstStyle>
-          <a:p>
-            <a:pPr algn="l"/>
-            <a:endParaRPr lang="en-US" sz="2600" dirty="0">
-              <a:solidFill>
-                <a:srgbClr val="7030A0"/>
-              </a:solidFill>
-            </a:endParaRPr>
-          </a:p>
-        </p:txBody>
-      </p:sp>
-      <p:cxnSp>
-        <p:nvCxnSpPr>
-          <p:cNvPr id="8" name="Straight Connector 7">
-            <a:extLst>
-              <a:ext uri="{FF2B5EF4-FFF2-40B4-BE49-F238E27FC236}">
-                <a16:creationId xmlns:a16="http://schemas.microsoft.com/office/drawing/2014/main" id="{E03287F7-8994-477D-9FAD-D17D4F823720}"/>
+                <a16:creationId xmlns:a16="http://schemas.microsoft.com/office/drawing/2014/main" id="{5ADF13BC-3A5F-4415-94E6-85FAF42998C9}"/>
               </a:ext>
             </a:extLst>
           </p:cNvPr>
@@ -27958,7 +27224,7 @@
         </p:nvCxnSpPr>
         <p:spPr>
           <a:xfrm>
-            <a:off x="152400" y="922910"/>
+            <a:off x="152400" y="4182575"/>
             <a:ext cx="8001000" cy="0"/>
           </a:xfrm>
           <a:prstGeom prst="line">
@@ -27986,75 +27252,10 @@
           </a:fontRef>
         </p:style>
       </p:cxnSp>
-      <p:sp>
-        <p:nvSpPr>
-          <p:cNvPr id="4" name="TextBox 3">
-            <a:extLst>
-              <a:ext uri="{FF2B5EF4-FFF2-40B4-BE49-F238E27FC236}">
-                <a16:creationId xmlns:a16="http://schemas.microsoft.com/office/drawing/2014/main" id="{3D7A37AF-67E9-4E2D-8501-F4FE1F453639}"/>
-              </a:ext>
-            </a:extLst>
-          </p:cNvPr>
-          <p:cNvSpPr txBox="1"/>
-          <p:nvPr/>
-        </p:nvSpPr>
-        <p:spPr>
-          <a:xfrm>
-            <a:off x="81215" y="1925419"/>
-            <a:ext cx="1495735" cy="646331"/>
-          </a:xfrm>
-          <a:prstGeom prst="rect">
-            <a:avLst/>
-          </a:prstGeom>
-          <a:noFill/>
-        </p:spPr>
-        <p:txBody>
-          <a:bodyPr wrap="square" rtlCol="0">
-            <a:spAutoFit/>
-          </a:bodyPr>
-          <a:lstStyle/>
-          <a:p>
-            <a:r>
-              <a:rPr lang="en-US" dirty="0"/>
-              <a:t>Which one is better?</a:t>
-            </a:r>
-          </a:p>
-        </p:txBody>
-      </p:sp>
-      <p:sp>
-        <p:nvSpPr>
-          <p:cNvPr id="5" name="Slide Number Placeholder 4">
-            <a:extLst>
-              <a:ext uri="{FF2B5EF4-FFF2-40B4-BE49-F238E27FC236}">
-                <a16:creationId xmlns:a16="http://schemas.microsoft.com/office/drawing/2014/main" id="{3AD9DBFD-D16F-48AD-AAC0-C33A38AA7E83}"/>
-              </a:ext>
-            </a:extLst>
-          </p:cNvPr>
-          <p:cNvSpPr>
-            <a:spLocks noGrp="1"/>
-          </p:cNvSpPr>
-          <p:nvPr>
-            <p:ph type="sldNum" sz="quarter" idx="12"/>
-          </p:nvPr>
-        </p:nvSpPr>
-        <p:spPr/>
-        <p:txBody>
-          <a:bodyPr/>
-          <a:lstStyle/>
-          <a:p>
-            <a:fld id="{127DDC20-79C9-9647-820E-6D40A3D210C3}" type="slidenum">
-              <a:rPr lang="en-US" smtClean="0"/>
-              <a:pPr/>
-              <a:t>29</a:t>
-            </a:fld>
-            <a:endParaRPr lang="en-US"/>
-          </a:p>
-        </p:txBody>
-      </p:sp>
     </p:spTree>
     <p:extLst>
       <p:ext uri="{BB962C8B-B14F-4D97-AF65-F5344CB8AC3E}">
-        <p14:creationId xmlns:p14="http://schemas.microsoft.com/office/powerpoint/2010/main" val="2080504768"/>
+        <p14:creationId xmlns:p14="http://schemas.microsoft.com/office/powerpoint/2010/main" val="2635223018"/>
       </p:ext>
     </p:extLst>
   </p:cSld>
@@ -28276,186 +27477,6 @@
         </p:txBody>
       </p:sp>
     </p:spTree>
-  </p:cSld>
-  <p:clrMapOvr>
-    <a:masterClrMapping/>
-  </p:clrMapOvr>
-</p:sld>
-</file>
-
-<file path=ppt/slides/slide30.xml><?xml version="1.0" encoding="utf-8"?>
-<p:sld xmlns:a="http://schemas.openxmlformats.org/drawingml/2006/main" xmlns:r="http://schemas.openxmlformats.org/officeDocument/2006/relationships" xmlns:p="http://schemas.openxmlformats.org/presentationml/2006/main">
-  <p:cSld>
-    <p:spTree>
-      <p:nvGrpSpPr>
-        <p:cNvPr id="1" name=""/>
-        <p:cNvGrpSpPr/>
-        <p:nvPr/>
-      </p:nvGrpSpPr>
-      <p:grpSpPr>
-        <a:xfrm>
-          <a:off x="0" y="0"/>
-          <a:ext cx="0" cy="0"/>
-          <a:chOff x="0" y="0"/>
-          <a:chExt cx="0" cy="0"/>
-        </a:xfrm>
-      </p:grpSpPr>
-      <p:sp>
-        <p:nvSpPr>
-          <p:cNvPr id="2" name="Rectangle 1"/>
-          <p:cNvSpPr/>
-          <p:nvPr/>
-        </p:nvSpPr>
-        <p:spPr>
-          <a:xfrm>
-            <a:off x="2471305" y="1325254"/>
-            <a:ext cx="3286989" cy="830997"/>
-          </a:xfrm>
-          <a:prstGeom prst="rect">
-            <a:avLst/>
-          </a:prstGeom>
-          <a:noFill/>
-        </p:spPr>
-        <p:txBody>
-          <a:bodyPr wrap="none" lIns="82296" tIns="41148" rIns="82296" bIns="41148">
-            <a:spAutoFit/>
-          </a:bodyPr>
-          <a:lstStyle/>
-          <a:p>
-            <a:pPr algn="ctr"/>
-            <a:r>
-              <a:rPr lang="en-US" sz="4860" b="1" spc="180" dirty="0">
-                <a:ln w="29210">
-                  <a:solidFill>
-                    <a:schemeClr val="accent3">
-                      <a:tint val="10000"/>
-                    </a:schemeClr>
-                  </a:solidFill>
-                </a:ln>
-                <a:solidFill>
-                  <a:srgbClr val="008000">
-                    <a:alpha val="50000"/>
-                  </a:srgbClr>
-                </a:solidFill>
-                <a:effectLst>
-                  <a:innerShdw blurRad="50800" dist="50800" dir="8100000">
-                    <a:srgbClr val="7D7D7D">
-                      <a:alpha val="73000"/>
-                    </a:srgbClr>
-                  </a:innerShdw>
-                </a:effectLst>
-              </a:rPr>
-              <a:t>Thank you!</a:t>
-            </a:r>
-          </a:p>
-        </p:txBody>
-      </p:sp>
-      <p:sp>
-        <p:nvSpPr>
-          <p:cNvPr id="3" name="Slide Number Placeholder 2">
-            <a:extLst>
-              <a:ext uri="{FF2B5EF4-FFF2-40B4-BE49-F238E27FC236}">
-                <a16:creationId xmlns:a16="http://schemas.microsoft.com/office/drawing/2014/main" id="{863C9EAE-E5B7-4784-94CD-D062E17813E3}"/>
-              </a:ext>
-            </a:extLst>
-          </p:cNvPr>
-          <p:cNvSpPr>
-            <a:spLocks noGrp="1"/>
-          </p:cNvSpPr>
-          <p:nvPr>
-            <p:ph type="sldNum" sz="quarter" idx="12"/>
-          </p:nvPr>
-        </p:nvSpPr>
-        <p:spPr/>
-        <p:txBody>
-          <a:bodyPr/>
-          <a:lstStyle/>
-          <a:p>
-            <a:fld id="{127DDC20-79C9-9647-820E-6D40A3D210C3}" type="slidenum">
-              <a:rPr lang="en-US" smtClean="0"/>
-              <a:pPr/>
-              <a:t>30</a:t>
-            </a:fld>
-            <a:endParaRPr lang="en-US"/>
-          </a:p>
-        </p:txBody>
-      </p:sp>
-      <p:pic>
-        <p:nvPicPr>
-          <p:cNvPr id="6" name="Picture 5">
-            <a:extLst>
-              <a:ext uri="{FF2B5EF4-FFF2-40B4-BE49-F238E27FC236}">
-                <a16:creationId xmlns:a16="http://schemas.microsoft.com/office/drawing/2014/main" id="{32DE135F-68C6-4911-85BA-92ABB3F9F85C}"/>
-              </a:ext>
-            </a:extLst>
-          </p:cNvPr>
-          <p:cNvPicPr/>
-          <p:nvPr/>
-        </p:nvPicPr>
-        <p:blipFill>
-          <a:blip r:embed="rId3"/>
-          <a:stretch>
-            <a:fillRect/>
-          </a:stretch>
-        </p:blipFill>
-        <p:spPr>
-          <a:xfrm>
-            <a:off x="152400" y="4275667"/>
-            <a:ext cx="5915025" cy="758190"/>
-          </a:xfrm>
-          <a:prstGeom prst="rect">
-            <a:avLst/>
-          </a:prstGeom>
-        </p:spPr>
-      </p:pic>
-      <p:cxnSp>
-        <p:nvCxnSpPr>
-          <p:cNvPr id="7" name="Straight Connector 6">
-            <a:extLst>
-              <a:ext uri="{FF2B5EF4-FFF2-40B4-BE49-F238E27FC236}">
-                <a16:creationId xmlns:a16="http://schemas.microsoft.com/office/drawing/2014/main" id="{5ADF13BC-3A5F-4415-94E6-85FAF42998C9}"/>
-              </a:ext>
-            </a:extLst>
-          </p:cNvPr>
-          <p:cNvCxnSpPr/>
-          <p:nvPr/>
-        </p:nvCxnSpPr>
-        <p:spPr>
-          <a:xfrm>
-            <a:off x="152400" y="4182575"/>
-            <a:ext cx="8001000" cy="0"/>
-          </a:xfrm>
-          <a:prstGeom prst="line">
-            <a:avLst/>
-          </a:prstGeom>
-          <a:ln>
-            <a:solidFill>
-              <a:schemeClr val="tx1"/>
-            </a:solidFill>
-          </a:ln>
-          <a:effectLst/>
-        </p:spPr>
-        <p:style>
-          <a:lnRef idx="2">
-            <a:schemeClr val="accent1"/>
-          </a:lnRef>
-          <a:fillRef idx="0">
-            <a:schemeClr val="accent1"/>
-          </a:fillRef>
-          <a:effectRef idx="1">
-            <a:schemeClr val="accent1"/>
-          </a:effectRef>
-          <a:fontRef idx="minor">
-            <a:schemeClr val="tx1"/>
-          </a:fontRef>
-        </p:style>
-      </p:cxnSp>
-    </p:spTree>
-    <p:extLst>
-      <p:ext uri="{BB962C8B-B14F-4D97-AF65-F5344CB8AC3E}">
-        <p14:creationId xmlns:p14="http://schemas.microsoft.com/office/powerpoint/2010/main" val="2635223018"/>
-      </p:ext>
-    </p:extLst>
   </p:cSld>
   <p:clrMapOvr>
     <a:masterClrMapping/>

--- a/docs/Lectures/Week07/Lecture07_GEOG2475_Thursday.pptx
+++ b/docs/Lectures/Week07/Lecture07_GEOG2475_Thursday.pptx
@@ -9,7 +9,7 @@
     <p:sldMasterId id="2147483709" r:id="rId5"/>
   </p:sldMasterIdLst>
   <p:notesMasterIdLst>
-    <p:notesMasterId r:id="rId33"/>
+    <p:notesMasterId r:id="rId34"/>
   </p:notesMasterIdLst>
   <p:sldIdLst>
     <p:sldId id="914" r:id="rId6"/>
@@ -38,7 +38,8 @@
     <p:sldId id="540" r:id="rId29"/>
     <p:sldId id="665" r:id="rId30"/>
     <p:sldId id="553" r:id="rId31"/>
-    <p:sldId id="270" r:id="rId32"/>
+    <p:sldId id="1658" r:id="rId32"/>
+    <p:sldId id="1659" r:id="rId33"/>
   </p:sldIdLst>
   <p:sldSz cx="8229600" cy="5143500"/>
   <p:notesSz cx="7010400" cy="9296400"/>
@@ -156,6 +157,2782 @@
 </p:presentation>
 </file>
 
+<file path=ppt/diagrams/colors1.xml><?xml version="1.0" encoding="utf-8"?>
+<dgm:colorsDef xmlns:dgm="http://schemas.openxmlformats.org/drawingml/2006/diagram" xmlns:a="http://schemas.openxmlformats.org/drawingml/2006/main" uniqueId="urn:microsoft.com/office/officeart/2018/5/colors/Iconchunking_neutralicon_colorful1">
+  <dgm:title val=""/>
+  <dgm:desc val=""/>
+  <dgm:catLst>
+    <dgm:cat type="colorful" pri="10100"/>
+  </dgm:catLst>
+  <dgm:styleLbl name="node0">
+    <dgm:fillClrLst meth="repeat">
+      <a:schemeClr val="accent1"/>
+    </dgm:fillClrLst>
+    <dgm:linClrLst meth="repeat">
+      <a:schemeClr val="lt1"/>
+    </dgm:linClrLst>
+    <dgm:effectClrLst/>
+    <dgm:txLinClrLst/>
+    <dgm:txFillClrLst/>
+    <dgm:txEffectClrLst/>
+  </dgm:styleLbl>
+  <dgm:styleLbl name="node1">
+    <dgm:fillClrLst meth="repeat">
+      <a:schemeClr val="bg1"/>
+    </dgm:fillClrLst>
+    <dgm:linClrLst meth="repeat">
+      <a:schemeClr val="lt1">
+        <a:alpha val="0"/>
+      </a:schemeClr>
+    </dgm:linClrLst>
+    <dgm:effectClrLst/>
+    <dgm:txLinClrLst/>
+    <dgm:txFillClrLst meth="repeat">
+      <a:schemeClr val="dk1"/>
+    </dgm:txFillClrLst>
+    <dgm:txEffectClrLst/>
+  </dgm:styleLbl>
+  <dgm:styleLbl name="alignNode1">
+    <dgm:fillClrLst meth="repeat">
+      <a:schemeClr val="accent2"/>
+      <a:schemeClr val="accent3"/>
+      <a:schemeClr val="accent4"/>
+      <a:schemeClr val="accent5"/>
+      <a:schemeClr val="accent6"/>
+    </dgm:fillClrLst>
+    <dgm:linClrLst meth="repeat">
+      <a:schemeClr val="accent2"/>
+      <a:schemeClr val="accent3"/>
+      <a:schemeClr val="accent4"/>
+      <a:schemeClr val="accent5"/>
+      <a:schemeClr val="accent6"/>
+    </dgm:linClrLst>
+    <dgm:effectClrLst/>
+    <dgm:txLinClrLst/>
+    <dgm:txFillClrLst/>
+    <dgm:txEffectClrLst/>
+  </dgm:styleLbl>
+  <dgm:styleLbl name="lnNode1">
+    <dgm:fillClrLst meth="repeat">
+      <a:schemeClr val="accent2"/>
+      <a:schemeClr val="accent3"/>
+      <a:schemeClr val="accent4"/>
+      <a:schemeClr val="accent5"/>
+      <a:schemeClr val="accent6"/>
+    </dgm:fillClrLst>
+    <dgm:linClrLst meth="repeat">
+      <a:schemeClr val="lt1"/>
+    </dgm:linClrLst>
+    <dgm:effectClrLst/>
+    <dgm:txLinClrLst/>
+    <dgm:txFillClrLst/>
+    <dgm:txEffectClrLst/>
+  </dgm:styleLbl>
+  <dgm:styleLbl name="vennNode1">
+    <dgm:fillClrLst meth="repeat">
+      <a:schemeClr val="accent2">
+        <a:alpha val="50000"/>
+      </a:schemeClr>
+      <a:schemeClr val="accent3">
+        <a:alpha val="50000"/>
+      </a:schemeClr>
+      <a:schemeClr val="accent4">
+        <a:alpha val="50000"/>
+      </a:schemeClr>
+      <a:schemeClr val="accent5">
+        <a:alpha val="50000"/>
+      </a:schemeClr>
+      <a:schemeClr val="accent6">
+        <a:alpha val="50000"/>
+      </a:schemeClr>
+    </dgm:fillClrLst>
+    <dgm:linClrLst meth="repeat">
+      <a:schemeClr val="lt1"/>
+    </dgm:linClrLst>
+    <dgm:effectClrLst/>
+    <dgm:txLinClrLst/>
+    <dgm:txFillClrLst/>
+    <dgm:txEffectClrLst/>
+  </dgm:styleLbl>
+  <dgm:styleLbl name="node2">
+    <dgm:fillClrLst>
+      <a:schemeClr val="accent2"/>
+    </dgm:fillClrLst>
+    <dgm:linClrLst meth="repeat">
+      <a:schemeClr val="lt1"/>
+    </dgm:linClrLst>
+    <dgm:effectClrLst/>
+    <dgm:txLinClrLst/>
+    <dgm:txFillClrLst/>
+    <dgm:txEffectClrLst/>
+  </dgm:styleLbl>
+  <dgm:styleLbl name="node3">
+    <dgm:fillClrLst>
+      <a:schemeClr val="accent3"/>
+    </dgm:fillClrLst>
+    <dgm:linClrLst meth="repeat">
+      <a:schemeClr val="lt1"/>
+    </dgm:linClrLst>
+    <dgm:effectClrLst/>
+    <dgm:txLinClrLst/>
+    <dgm:txFillClrLst/>
+    <dgm:txEffectClrLst/>
+  </dgm:styleLbl>
+  <dgm:styleLbl name="node4">
+    <dgm:fillClrLst>
+      <a:schemeClr val="accent4"/>
+    </dgm:fillClrLst>
+    <dgm:linClrLst meth="repeat">
+      <a:schemeClr val="lt1"/>
+    </dgm:linClrLst>
+    <dgm:effectClrLst/>
+    <dgm:txLinClrLst/>
+    <dgm:txFillClrLst/>
+    <dgm:txEffectClrLst/>
+  </dgm:styleLbl>
+  <dgm:styleLbl name="fgImgPlace1">
+    <dgm:fillClrLst meth="repeat">
+      <a:schemeClr val="accent2">
+        <a:tint val="50000"/>
+      </a:schemeClr>
+      <a:schemeClr val="accent3">
+        <a:tint val="50000"/>
+      </a:schemeClr>
+      <a:schemeClr val="accent4">
+        <a:tint val="50000"/>
+      </a:schemeClr>
+      <a:schemeClr val="accent5">
+        <a:tint val="50000"/>
+      </a:schemeClr>
+      <a:schemeClr val="accent6">
+        <a:tint val="50000"/>
+      </a:schemeClr>
+    </dgm:fillClrLst>
+    <dgm:linClrLst meth="repeat">
+      <a:schemeClr val="lt1"/>
+    </dgm:linClrLst>
+    <dgm:effectClrLst/>
+    <dgm:txLinClrLst/>
+    <dgm:txFillClrLst meth="repeat">
+      <a:schemeClr val="lt1"/>
+    </dgm:txFillClrLst>
+    <dgm:txEffectClrLst/>
+  </dgm:styleLbl>
+  <dgm:styleLbl name="alignImgPlace1">
+    <dgm:fillClrLst>
+      <a:schemeClr val="accent1">
+        <a:tint val="50000"/>
+      </a:schemeClr>
+      <a:schemeClr val="accent2">
+        <a:tint val="20000"/>
+      </a:schemeClr>
+    </dgm:fillClrLst>
+    <dgm:linClrLst meth="repeat">
+      <a:schemeClr val="lt1"/>
+    </dgm:linClrLst>
+    <dgm:effectClrLst/>
+    <dgm:txLinClrLst/>
+    <dgm:txFillClrLst meth="repeat">
+      <a:schemeClr val="lt1"/>
+    </dgm:txFillClrLst>
+    <dgm:txEffectClrLst/>
+  </dgm:styleLbl>
+  <dgm:styleLbl name="bgImgPlace1">
+    <dgm:fillClrLst>
+      <a:schemeClr val="accent1">
+        <a:tint val="50000"/>
+      </a:schemeClr>
+      <a:schemeClr val="accent2">
+        <a:tint val="20000"/>
+      </a:schemeClr>
+    </dgm:fillClrLst>
+    <dgm:linClrLst meth="repeat">
+      <a:schemeClr val="lt1"/>
+    </dgm:linClrLst>
+    <dgm:effectClrLst/>
+    <dgm:txLinClrLst/>
+    <dgm:txFillClrLst meth="repeat">
+      <a:schemeClr val="lt1"/>
+    </dgm:txFillClrLst>
+    <dgm:txEffectClrLst/>
+  </dgm:styleLbl>
+  <dgm:styleLbl name="sibTrans2D1">
+    <dgm:fillClrLst meth="repeat">
+      <a:schemeClr val="accent2"/>
+      <a:schemeClr val="accent3"/>
+      <a:schemeClr val="accent4"/>
+      <a:schemeClr val="accent5"/>
+      <a:schemeClr val="accent6"/>
+    </dgm:fillClrLst>
+    <dgm:linClrLst meth="cycle">
+      <a:schemeClr val="lt1"/>
+    </dgm:linClrLst>
+    <dgm:effectClrLst/>
+    <dgm:txLinClrLst/>
+    <dgm:txFillClrLst/>
+    <dgm:txEffectClrLst/>
+  </dgm:styleLbl>
+  <dgm:styleLbl name="fgSibTrans2D1">
+    <dgm:fillClrLst meth="repeat">
+      <a:schemeClr val="accent2"/>
+      <a:schemeClr val="accent3"/>
+      <a:schemeClr val="accent4"/>
+      <a:schemeClr val="accent5"/>
+      <a:schemeClr val="accent6"/>
+    </dgm:fillClrLst>
+    <dgm:linClrLst meth="cycle">
+      <a:schemeClr val="lt1"/>
+    </dgm:linClrLst>
+    <dgm:effectClrLst/>
+    <dgm:txLinClrLst/>
+    <dgm:txFillClrLst meth="repeat">
+      <a:schemeClr val="lt1"/>
+    </dgm:txFillClrLst>
+    <dgm:txEffectClrLst/>
+  </dgm:styleLbl>
+  <dgm:styleLbl name="bgSibTrans2D1">
+    <dgm:fillClrLst meth="repeat">
+      <a:schemeClr val="accent2"/>
+      <a:schemeClr val="accent3"/>
+      <a:schemeClr val="accent4"/>
+      <a:schemeClr val="accent5"/>
+      <a:schemeClr val="accent6"/>
+    </dgm:fillClrLst>
+    <dgm:linClrLst meth="cycle">
+      <a:schemeClr val="lt1"/>
+    </dgm:linClrLst>
+    <dgm:effectClrLst/>
+    <dgm:txLinClrLst/>
+    <dgm:txFillClrLst meth="repeat">
+      <a:schemeClr val="lt1"/>
+    </dgm:txFillClrLst>
+    <dgm:txEffectClrLst/>
+  </dgm:styleLbl>
+  <dgm:styleLbl name="sibTrans1D1">
+    <dgm:fillClrLst meth="repeat">
+      <a:schemeClr val="accent2"/>
+      <a:schemeClr val="accent3"/>
+      <a:schemeClr val="accent4"/>
+      <a:schemeClr val="accent5"/>
+      <a:schemeClr val="accent6"/>
+    </dgm:fillClrLst>
+    <dgm:linClrLst meth="repeat">
+      <a:schemeClr val="accent2"/>
+      <a:schemeClr val="accent3"/>
+      <a:schemeClr val="accent4"/>
+      <a:schemeClr val="accent5"/>
+      <a:schemeClr val="accent6"/>
+    </dgm:linClrLst>
+    <dgm:effectClrLst/>
+    <dgm:txLinClrLst/>
+    <dgm:txFillClrLst meth="repeat">
+      <a:schemeClr val="tx1"/>
+    </dgm:txFillClrLst>
+    <dgm:txEffectClrLst/>
+  </dgm:styleLbl>
+  <dgm:styleLbl name="callout">
+    <dgm:fillClrLst meth="repeat">
+      <a:schemeClr val="accent2"/>
+    </dgm:fillClrLst>
+    <dgm:linClrLst meth="repeat">
+      <a:schemeClr val="accent2">
+        <a:tint val="50000"/>
+      </a:schemeClr>
+    </dgm:linClrLst>
+    <dgm:effectClrLst/>
+    <dgm:txLinClrLst/>
+    <dgm:txFillClrLst meth="repeat">
+      <a:schemeClr val="tx1"/>
+    </dgm:txFillClrLst>
+    <dgm:txEffectClrLst/>
+  </dgm:styleLbl>
+  <dgm:styleLbl name="asst0">
+    <dgm:fillClrLst meth="repeat">
+      <a:schemeClr val="accent1"/>
+    </dgm:fillClrLst>
+    <dgm:linClrLst meth="repeat">
+      <a:schemeClr val="lt1"/>
+    </dgm:linClrLst>
+    <dgm:effectClrLst/>
+    <dgm:txLinClrLst/>
+    <dgm:txFillClrLst/>
+    <dgm:txEffectClrLst/>
+  </dgm:styleLbl>
+  <dgm:styleLbl name="asst1">
+    <dgm:fillClrLst meth="repeat">
+      <a:schemeClr val="accent2"/>
+    </dgm:fillClrLst>
+    <dgm:linClrLst meth="repeat">
+      <a:schemeClr val="lt1"/>
+    </dgm:linClrLst>
+    <dgm:effectClrLst/>
+    <dgm:txLinClrLst/>
+    <dgm:txFillClrLst/>
+    <dgm:txEffectClrLst/>
+  </dgm:styleLbl>
+  <dgm:styleLbl name="asst2">
+    <dgm:fillClrLst>
+      <a:schemeClr val="accent3"/>
+    </dgm:fillClrLst>
+    <dgm:linClrLst meth="repeat">
+      <a:schemeClr val="lt1"/>
+    </dgm:linClrLst>
+    <dgm:effectClrLst/>
+    <dgm:txLinClrLst/>
+    <dgm:txFillClrLst/>
+    <dgm:txEffectClrLst/>
+  </dgm:styleLbl>
+  <dgm:styleLbl name="asst3">
+    <dgm:fillClrLst>
+      <a:schemeClr val="accent4"/>
+    </dgm:fillClrLst>
+    <dgm:linClrLst meth="repeat">
+      <a:schemeClr val="lt1"/>
+    </dgm:linClrLst>
+    <dgm:effectClrLst/>
+    <dgm:txLinClrLst/>
+    <dgm:txFillClrLst/>
+    <dgm:txEffectClrLst/>
+  </dgm:styleLbl>
+  <dgm:styleLbl name="asst4">
+    <dgm:fillClrLst>
+      <a:schemeClr val="accent5"/>
+    </dgm:fillClrLst>
+    <dgm:linClrLst meth="repeat">
+      <a:schemeClr val="lt1"/>
+    </dgm:linClrLst>
+    <dgm:effectClrLst/>
+    <dgm:txLinClrLst/>
+    <dgm:txFillClrLst/>
+    <dgm:txEffectClrLst/>
+  </dgm:styleLbl>
+  <dgm:styleLbl name="parChTrans2D1">
+    <dgm:fillClrLst meth="repeat">
+      <a:schemeClr val="accent2"/>
+    </dgm:fillClrLst>
+    <dgm:linClrLst meth="repeat">
+      <a:schemeClr val="lt1"/>
+    </dgm:linClrLst>
+    <dgm:effectClrLst/>
+    <dgm:txLinClrLst/>
+    <dgm:txFillClrLst meth="repeat">
+      <a:schemeClr val="lt1"/>
+    </dgm:txFillClrLst>
+    <dgm:txEffectClrLst/>
+  </dgm:styleLbl>
+  <dgm:styleLbl name="parChTrans2D2">
+    <dgm:fillClrLst meth="repeat">
+      <a:schemeClr val="accent3"/>
+    </dgm:fillClrLst>
+    <dgm:linClrLst meth="repeat">
+      <a:schemeClr val="lt1"/>
+    </dgm:linClrLst>
+    <dgm:effectClrLst/>
+    <dgm:txLinClrLst/>
+    <dgm:txFillClrLst/>
+    <dgm:txEffectClrLst/>
+  </dgm:styleLbl>
+  <dgm:styleLbl name="parChTrans2D3">
+    <dgm:fillClrLst meth="repeat">
+      <a:schemeClr val="accent4"/>
+    </dgm:fillClrLst>
+    <dgm:linClrLst meth="repeat">
+      <a:schemeClr val="lt1"/>
+    </dgm:linClrLst>
+    <dgm:effectClrLst/>
+    <dgm:txLinClrLst/>
+    <dgm:txFillClrLst/>
+    <dgm:txEffectClrLst/>
+  </dgm:styleLbl>
+  <dgm:styleLbl name="parChTrans2D4">
+    <dgm:fillClrLst meth="repeat">
+      <a:schemeClr val="accent5"/>
+    </dgm:fillClrLst>
+    <dgm:linClrLst meth="repeat">
+      <a:schemeClr val="lt1"/>
+    </dgm:linClrLst>
+    <dgm:effectClrLst/>
+    <dgm:txLinClrLst/>
+    <dgm:txFillClrLst meth="repeat">
+      <a:schemeClr val="lt1"/>
+    </dgm:txFillClrLst>
+    <dgm:txEffectClrLst/>
+  </dgm:styleLbl>
+  <dgm:styleLbl name="parChTrans1D1">
+    <dgm:fillClrLst meth="repeat">
+      <a:schemeClr val="accent2"/>
+    </dgm:fillClrLst>
+    <dgm:linClrLst meth="repeat">
+      <a:schemeClr val="accent1"/>
+    </dgm:linClrLst>
+    <dgm:effectClrLst/>
+    <dgm:txLinClrLst/>
+    <dgm:txFillClrLst meth="repeat">
+      <a:schemeClr val="tx1"/>
+    </dgm:txFillClrLst>
+    <dgm:txEffectClrLst/>
+  </dgm:styleLbl>
+  <dgm:styleLbl name="parChTrans1D2">
+    <dgm:fillClrLst meth="repeat">
+      <a:schemeClr val="accent3">
+        <a:tint val="90000"/>
+      </a:schemeClr>
+    </dgm:fillClrLst>
+    <dgm:linClrLst meth="repeat">
+      <a:schemeClr val="accent2"/>
+    </dgm:linClrLst>
+    <dgm:effectClrLst/>
+    <dgm:txLinClrLst/>
+    <dgm:txFillClrLst meth="repeat">
+      <a:schemeClr val="tx1"/>
+    </dgm:txFillClrLst>
+    <dgm:txEffectClrLst/>
+  </dgm:styleLbl>
+  <dgm:styleLbl name="parChTrans1D3">
+    <dgm:fillClrLst meth="repeat">
+      <a:schemeClr val="accent4">
+        <a:tint val="70000"/>
+      </a:schemeClr>
+    </dgm:fillClrLst>
+    <dgm:linClrLst meth="repeat">
+      <a:schemeClr val="accent3"/>
+    </dgm:linClrLst>
+    <dgm:effectClrLst/>
+    <dgm:txLinClrLst/>
+    <dgm:txFillClrLst meth="repeat">
+      <a:schemeClr val="tx1"/>
+    </dgm:txFillClrLst>
+    <dgm:txEffectClrLst/>
+  </dgm:styleLbl>
+  <dgm:styleLbl name="parChTrans1D4">
+    <dgm:fillClrLst meth="repeat">
+      <a:schemeClr val="accent5">
+        <a:tint val="50000"/>
+      </a:schemeClr>
+    </dgm:fillClrLst>
+    <dgm:linClrLst meth="repeat">
+      <a:schemeClr val="accent4"/>
+    </dgm:linClrLst>
+    <dgm:effectClrLst/>
+    <dgm:txLinClrLst/>
+    <dgm:txFillClrLst meth="repeat">
+      <a:schemeClr val="tx1"/>
+    </dgm:txFillClrLst>
+    <dgm:txEffectClrLst/>
+  </dgm:styleLbl>
+  <dgm:styleLbl name="fgAcc1">
+    <dgm:fillClrLst meth="repeat">
+      <a:schemeClr val="lt1">
+        <a:alpha val="90000"/>
+      </a:schemeClr>
+    </dgm:fillClrLst>
+    <dgm:linClrLst meth="repeat">
+      <a:schemeClr val="accent2"/>
+      <a:schemeClr val="accent3"/>
+      <a:schemeClr val="accent4"/>
+      <a:schemeClr val="accent5"/>
+      <a:schemeClr val="accent6"/>
+    </dgm:linClrLst>
+    <dgm:effectClrLst/>
+    <dgm:txLinClrLst/>
+    <dgm:txFillClrLst meth="repeat">
+      <a:schemeClr val="dk1"/>
+    </dgm:txFillClrLst>
+    <dgm:txEffectClrLst/>
+  </dgm:styleLbl>
+  <dgm:styleLbl name="conFgAcc1">
+    <dgm:fillClrLst meth="repeat">
+      <a:schemeClr val="lt1">
+        <a:alpha val="90000"/>
+      </a:schemeClr>
+    </dgm:fillClrLst>
+    <dgm:linClrLst meth="repeat">
+      <a:schemeClr val="accent2"/>
+      <a:schemeClr val="accent3"/>
+      <a:schemeClr val="accent4"/>
+      <a:schemeClr val="accent5"/>
+      <a:schemeClr val="accent6"/>
+    </dgm:linClrLst>
+    <dgm:effectClrLst/>
+    <dgm:txLinClrLst/>
+    <dgm:txFillClrLst meth="repeat">
+      <a:schemeClr val="dk1"/>
+    </dgm:txFillClrLst>
+    <dgm:txEffectClrLst/>
+  </dgm:styleLbl>
+  <dgm:styleLbl name="alignAcc1">
+    <dgm:fillClrLst meth="repeat">
+      <a:schemeClr val="lt1">
+        <a:alpha val="90000"/>
+      </a:schemeClr>
+    </dgm:fillClrLst>
+    <dgm:linClrLst meth="repeat">
+      <a:schemeClr val="accent2"/>
+      <a:schemeClr val="accent3"/>
+      <a:schemeClr val="accent4"/>
+      <a:schemeClr val="accent5"/>
+      <a:schemeClr val="accent6"/>
+    </dgm:linClrLst>
+    <dgm:effectClrLst/>
+    <dgm:txLinClrLst/>
+    <dgm:txFillClrLst meth="repeat">
+      <a:schemeClr val="dk1"/>
+    </dgm:txFillClrLst>
+    <dgm:txEffectClrLst/>
+  </dgm:styleLbl>
+  <dgm:styleLbl name="trAlignAcc1">
+    <dgm:fillClrLst meth="repeat">
+      <a:schemeClr val="lt1">
+        <a:alpha val="40000"/>
+      </a:schemeClr>
+    </dgm:fillClrLst>
+    <dgm:linClrLst meth="repeat">
+      <a:schemeClr val="accent1"/>
+    </dgm:linClrLst>
+    <dgm:effectClrLst/>
+    <dgm:txLinClrLst/>
+    <dgm:txFillClrLst meth="repeat">
+      <a:schemeClr val="dk1"/>
+    </dgm:txFillClrLst>
+    <dgm:txEffectClrLst/>
+  </dgm:styleLbl>
+  <dgm:styleLbl name="bgAcc1">
+    <dgm:fillClrLst meth="repeat">
+      <a:schemeClr val="lt1">
+        <a:alpha val="90000"/>
+      </a:schemeClr>
+    </dgm:fillClrLst>
+    <dgm:linClrLst meth="repeat">
+      <a:schemeClr val="accent2"/>
+      <a:schemeClr val="accent3"/>
+      <a:schemeClr val="accent4"/>
+      <a:schemeClr val="accent5"/>
+      <a:schemeClr val="accent6"/>
+    </dgm:linClrLst>
+    <dgm:effectClrLst/>
+    <dgm:txLinClrLst/>
+    <dgm:txFillClrLst meth="repeat">
+      <a:schemeClr val="dk1"/>
+    </dgm:txFillClrLst>
+    <dgm:txEffectClrLst/>
+  </dgm:styleLbl>
+  <dgm:styleLbl name="solidFgAcc1">
+    <dgm:fillClrLst meth="repeat">
+      <a:schemeClr val="lt1"/>
+    </dgm:fillClrLst>
+    <dgm:linClrLst meth="repeat">
+      <a:schemeClr val="accent2"/>
+      <a:schemeClr val="accent3"/>
+      <a:schemeClr val="accent4"/>
+      <a:schemeClr val="accent5"/>
+      <a:schemeClr val="accent6"/>
+    </dgm:linClrLst>
+    <dgm:effectClrLst/>
+    <dgm:txLinClrLst/>
+    <dgm:txFillClrLst meth="repeat">
+      <a:schemeClr val="dk1"/>
+    </dgm:txFillClrLst>
+    <dgm:txEffectClrLst/>
+  </dgm:styleLbl>
+  <dgm:styleLbl name="solidAlignAcc1">
+    <dgm:fillClrLst meth="repeat">
+      <a:schemeClr val="lt1"/>
+    </dgm:fillClrLst>
+    <dgm:linClrLst meth="repeat">
+      <a:schemeClr val="accent2"/>
+      <a:schemeClr val="accent3"/>
+      <a:schemeClr val="accent4"/>
+      <a:schemeClr val="accent5"/>
+      <a:schemeClr val="accent6"/>
+    </dgm:linClrLst>
+    <dgm:effectClrLst/>
+    <dgm:txLinClrLst/>
+    <dgm:txFillClrLst meth="repeat">
+      <a:schemeClr val="dk1"/>
+    </dgm:txFillClrLst>
+    <dgm:txEffectClrLst/>
+  </dgm:styleLbl>
+  <dgm:styleLbl name="solidBgAcc1">
+    <dgm:fillClrLst meth="repeat">
+      <a:schemeClr val="lt1"/>
+    </dgm:fillClrLst>
+    <dgm:linClrLst meth="repeat">
+      <a:schemeClr val="accent2"/>
+      <a:schemeClr val="accent3"/>
+      <a:schemeClr val="accent4"/>
+      <a:schemeClr val="accent5"/>
+      <a:schemeClr val="accent6"/>
+    </dgm:linClrLst>
+    <dgm:effectClrLst/>
+    <dgm:txLinClrLst/>
+    <dgm:txFillClrLst meth="repeat">
+      <a:schemeClr val="dk1"/>
+    </dgm:txFillClrLst>
+    <dgm:txEffectClrLst/>
+  </dgm:styleLbl>
+  <dgm:styleLbl name="fgAccFollowNode1">
+    <dgm:fillClrLst meth="repeat">
+      <a:schemeClr val="accent2">
+        <a:tint val="40000"/>
+        <a:alpha val="90000"/>
+      </a:schemeClr>
+      <a:schemeClr val="accent3">
+        <a:tint val="40000"/>
+        <a:alpha val="90000"/>
+      </a:schemeClr>
+      <a:schemeClr val="accent4">
+        <a:tint val="40000"/>
+        <a:alpha val="90000"/>
+      </a:schemeClr>
+      <a:schemeClr val="accent5">
+        <a:tint val="40000"/>
+        <a:alpha val="90000"/>
+      </a:schemeClr>
+      <a:schemeClr val="accent6">
+        <a:tint val="40000"/>
+        <a:alpha val="90000"/>
+      </a:schemeClr>
+    </dgm:fillClrLst>
+    <dgm:linClrLst meth="repeat">
+      <a:schemeClr val="accent2">
+        <a:tint val="40000"/>
+        <a:alpha val="90000"/>
+      </a:schemeClr>
+      <a:schemeClr val="accent3">
+        <a:tint val="40000"/>
+        <a:alpha val="90000"/>
+      </a:schemeClr>
+      <a:schemeClr val="accent4">
+        <a:tint val="40000"/>
+        <a:alpha val="90000"/>
+      </a:schemeClr>
+      <a:schemeClr val="accent5">
+        <a:tint val="40000"/>
+        <a:alpha val="90000"/>
+      </a:schemeClr>
+      <a:schemeClr val="accent6">
+        <a:tint val="40000"/>
+        <a:alpha val="90000"/>
+      </a:schemeClr>
+    </dgm:linClrLst>
+    <dgm:effectClrLst/>
+    <dgm:txLinClrLst/>
+    <dgm:txFillClrLst meth="repeat">
+      <a:schemeClr val="dk1"/>
+    </dgm:txFillClrLst>
+    <dgm:txEffectClrLst/>
+  </dgm:styleLbl>
+  <dgm:styleLbl name="alignAccFollowNode1">
+    <dgm:fillClrLst meth="repeat">
+      <a:schemeClr val="accent2">
+        <a:tint val="40000"/>
+        <a:alpha val="90000"/>
+      </a:schemeClr>
+      <a:schemeClr val="accent3">
+        <a:tint val="40000"/>
+        <a:alpha val="90000"/>
+      </a:schemeClr>
+      <a:schemeClr val="accent4">
+        <a:tint val="40000"/>
+        <a:alpha val="90000"/>
+      </a:schemeClr>
+      <a:schemeClr val="accent5">
+        <a:tint val="40000"/>
+        <a:alpha val="90000"/>
+      </a:schemeClr>
+      <a:schemeClr val="accent6">
+        <a:tint val="40000"/>
+        <a:alpha val="90000"/>
+      </a:schemeClr>
+    </dgm:fillClrLst>
+    <dgm:linClrLst meth="repeat">
+      <a:schemeClr val="accent2">
+        <a:tint val="40000"/>
+        <a:alpha val="90000"/>
+      </a:schemeClr>
+      <a:schemeClr val="accent3">
+        <a:tint val="40000"/>
+        <a:alpha val="90000"/>
+      </a:schemeClr>
+      <a:schemeClr val="accent4">
+        <a:tint val="40000"/>
+        <a:alpha val="90000"/>
+      </a:schemeClr>
+      <a:schemeClr val="accent5">
+        <a:tint val="40000"/>
+        <a:alpha val="90000"/>
+      </a:schemeClr>
+      <a:schemeClr val="accent6">
+        <a:tint val="40000"/>
+        <a:alpha val="90000"/>
+      </a:schemeClr>
+    </dgm:linClrLst>
+    <dgm:effectClrLst/>
+    <dgm:txLinClrLst/>
+    <dgm:txFillClrLst meth="repeat">
+      <a:schemeClr val="dk1"/>
+    </dgm:txFillClrLst>
+    <dgm:txEffectClrLst/>
+  </dgm:styleLbl>
+  <dgm:styleLbl name="bgAccFollowNode1">
+    <dgm:fillClrLst meth="repeat">
+      <a:schemeClr val="accent2">
+        <a:tint val="40000"/>
+        <a:alpha val="90000"/>
+      </a:schemeClr>
+      <a:schemeClr val="accent3">
+        <a:tint val="40000"/>
+        <a:alpha val="90000"/>
+      </a:schemeClr>
+      <a:schemeClr val="accent4">
+        <a:tint val="40000"/>
+        <a:alpha val="90000"/>
+      </a:schemeClr>
+      <a:schemeClr val="accent5">
+        <a:tint val="40000"/>
+        <a:alpha val="90000"/>
+      </a:schemeClr>
+      <a:schemeClr val="accent6">
+        <a:tint val="40000"/>
+        <a:alpha val="90000"/>
+      </a:schemeClr>
+    </dgm:fillClrLst>
+    <dgm:linClrLst meth="repeat">
+      <a:schemeClr val="accent2">
+        <a:tint val="40000"/>
+        <a:alpha val="90000"/>
+      </a:schemeClr>
+      <a:schemeClr val="accent3">
+        <a:tint val="40000"/>
+        <a:alpha val="90000"/>
+      </a:schemeClr>
+      <a:schemeClr val="accent4">
+        <a:tint val="40000"/>
+        <a:alpha val="90000"/>
+      </a:schemeClr>
+      <a:schemeClr val="accent5">
+        <a:tint val="40000"/>
+        <a:alpha val="90000"/>
+      </a:schemeClr>
+      <a:schemeClr val="accent6">
+        <a:tint val="40000"/>
+        <a:alpha val="90000"/>
+      </a:schemeClr>
+    </dgm:linClrLst>
+    <dgm:effectClrLst/>
+    <dgm:txLinClrLst/>
+    <dgm:txFillClrLst meth="repeat">
+      <a:schemeClr val="dk1"/>
+    </dgm:txFillClrLst>
+    <dgm:txEffectClrLst/>
+  </dgm:styleLbl>
+  <dgm:styleLbl name="fgAcc0">
+    <dgm:fillClrLst meth="repeat">
+      <a:schemeClr val="lt1">
+        <a:alpha val="90000"/>
+      </a:schemeClr>
+    </dgm:fillClrLst>
+    <dgm:linClrLst>
+      <a:schemeClr val="accent1"/>
+    </dgm:linClrLst>
+    <dgm:effectClrLst/>
+    <dgm:txLinClrLst/>
+    <dgm:txFillClrLst meth="repeat">
+      <a:schemeClr val="dk1"/>
+    </dgm:txFillClrLst>
+    <dgm:txEffectClrLst/>
+  </dgm:styleLbl>
+  <dgm:styleLbl name="fgAcc2">
+    <dgm:fillClrLst meth="repeat">
+      <a:schemeClr val="lt1">
+        <a:alpha val="90000"/>
+      </a:schemeClr>
+    </dgm:fillClrLst>
+    <dgm:linClrLst>
+      <a:schemeClr val="accent2"/>
+    </dgm:linClrLst>
+    <dgm:effectClrLst/>
+    <dgm:txLinClrLst/>
+    <dgm:txFillClrLst meth="repeat">
+      <a:schemeClr val="dk1"/>
+    </dgm:txFillClrLst>
+    <dgm:txEffectClrLst/>
+  </dgm:styleLbl>
+  <dgm:styleLbl name="fgAcc3">
+    <dgm:fillClrLst meth="repeat">
+      <a:schemeClr val="lt1">
+        <a:alpha val="90000"/>
+      </a:schemeClr>
+    </dgm:fillClrLst>
+    <dgm:linClrLst>
+      <a:schemeClr val="accent3"/>
+    </dgm:linClrLst>
+    <dgm:effectClrLst/>
+    <dgm:txLinClrLst/>
+    <dgm:txFillClrLst meth="repeat">
+      <a:schemeClr val="dk1"/>
+    </dgm:txFillClrLst>
+    <dgm:txEffectClrLst/>
+  </dgm:styleLbl>
+  <dgm:styleLbl name="fgAcc4">
+    <dgm:fillClrLst meth="repeat">
+      <a:schemeClr val="lt1">
+        <a:alpha val="90000"/>
+      </a:schemeClr>
+    </dgm:fillClrLst>
+    <dgm:linClrLst>
+      <a:schemeClr val="accent4"/>
+    </dgm:linClrLst>
+    <dgm:effectClrLst/>
+    <dgm:txLinClrLst/>
+    <dgm:txFillClrLst meth="repeat">
+      <a:schemeClr val="dk1"/>
+    </dgm:txFillClrLst>
+    <dgm:txEffectClrLst/>
+  </dgm:styleLbl>
+  <dgm:styleLbl name="bgShp">
+    <dgm:fillClrLst meth="repeat">
+      <a:schemeClr val="accent2"/>
+      <a:schemeClr val="accent3"/>
+      <a:schemeClr val="accent4"/>
+      <a:schemeClr val="accent5"/>
+      <a:schemeClr val="accent6"/>
+    </dgm:fillClrLst>
+    <dgm:linClrLst meth="repeat">
+      <a:schemeClr val="lt1">
+        <a:alpha val="0"/>
+      </a:schemeClr>
+    </dgm:linClrLst>
+    <dgm:effectClrLst/>
+    <dgm:txLinClrLst/>
+    <dgm:txFillClrLst/>
+    <dgm:txEffectClrLst/>
+  </dgm:styleLbl>
+  <dgm:styleLbl name="dkBgShp">
+    <dgm:fillClrLst meth="repeat">
+      <a:schemeClr val="accent2">
+        <a:shade val="90000"/>
+      </a:schemeClr>
+    </dgm:fillClrLst>
+    <dgm:linClrLst meth="repeat">
+      <a:schemeClr val="dk1"/>
+    </dgm:linClrLst>
+    <dgm:effectClrLst/>
+    <dgm:txLinClrLst/>
+    <dgm:txFillClrLst meth="repeat">
+      <a:schemeClr val="lt1"/>
+    </dgm:txFillClrLst>
+    <dgm:txEffectClrLst/>
+  </dgm:styleLbl>
+  <dgm:styleLbl name="trBgShp">
+    <dgm:fillClrLst meth="repeat">
+      <a:schemeClr val="accent1">
+        <a:tint val="50000"/>
+        <a:alpha val="40000"/>
+      </a:schemeClr>
+    </dgm:fillClrLst>
+    <dgm:linClrLst meth="repeat">
+      <a:schemeClr val="accent2"/>
+    </dgm:linClrLst>
+    <dgm:effectClrLst/>
+    <dgm:txLinClrLst/>
+    <dgm:txFillClrLst meth="repeat">
+      <a:schemeClr val="lt1"/>
+    </dgm:txFillClrLst>
+    <dgm:txEffectClrLst/>
+  </dgm:styleLbl>
+  <dgm:styleLbl name="fgShp">
+    <dgm:fillClrLst meth="repeat">
+      <a:schemeClr val="accent2">
+        <a:tint val="40000"/>
+      </a:schemeClr>
+    </dgm:fillClrLst>
+    <dgm:linClrLst meth="repeat">
+      <a:schemeClr val="lt1"/>
+    </dgm:linClrLst>
+    <dgm:effectClrLst/>
+    <dgm:txLinClrLst/>
+    <dgm:txFillClrLst meth="repeat">
+      <a:schemeClr val="dk1"/>
+    </dgm:txFillClrLst>
+    <dgm:txEffectClrLst/>
+  </dgm:styleLbl>
+  <dgm:styleLbl name="revTx">
+    <dgm:fillClrLst meth="repeat">
+      <a:schemeClr val="lt1">
+        <a:alpha val="0"/>
+      </a:schemeClr>
+    </dgm:fillClrLst>
+    <dgm:linClrLst meth="repeat">
+      <a:schemeClr val="dk1">
+        <a:alpha val="0"/>
+      </a:schemeClr>
+    </dgm:linClrLst>
+    <dgm:effectClrLst/>
+    <dgm:txLinClrLst/>
+    <dgm:txFillClrLst meth="repeat">
+      <a:schemeClr val="tx1"/>
+    </dgm:txFillClrLst>
+    <dgm:txEffectClrLst/>
+  </dgm:styleLbl>
+</dgm:colorsDef>
+</file>
+
+<file path=ppt/diagrams/data1.xml><?xml version="1.0" encoding="utf-8"?>
+<dgm:dataModel xmlns:dgm="http://schemas.openxmlformats.org/drawingml/2006/diagram" xmlns:a="http://schemas.openxmlformats.org/drawingml/2006/main">
+  <dgm:ptLst>
+    <dgm:pt modelId="{545DC5F4-D431-4A87-93B0-BBE05B35CCB1}" type="doc">
+      <dgm:prSet loTypeId="urn:microsoft.com/office/officeart/2018/5/layout/IconLeafLabelList" loCatId="icon" qsTypeId="urn:microsoft.com/office/officeart/2005/8/quickstyle/simple1" qsCatId="simple" csTypeId="urn:microsoft.com/office/officeart/2018/5/colors/Iconchunking_neutralicon_colorful1" csCatId="colorful" phldr="1"/>
+      <dgm:spPr/>
+      <dgm:t>
+        <a:bodyPr/>
+        <a:lstStyle/>
+        <a:p>
+          <a:endParaRPr lang="en-US"/>
+        </a:p>
+      </dgm:t>
+    </dgm:pt>
+    <dgm:pt modelId="{54983E92-0B7C-43A8-8C1F-984B0DFA982E}">
+      <dgm:prSet custT="1"/>
+      <dgm:spPr/>
+      <dgm:t>
+        <a:bodyPr/>
+        <a:lstStyle/>
+        <a:p>
+          <a:pPr>
+            <a:defRPr cap="all"/>
+          </a:pPr>
+          <a:r>
+            <a:rPr lang="en-US" sz="1800" dirty="0"/>
+            <a:t>Due by Midnight </a:t>
+          </a:r>
+          <a:r>
+            <a:rPr lang="en-US" sz="1800" dirty="0">
+              <a:solidFill>
+                <a:srgbClr val="C00000"/>
+              </a:solidFill>
+            </a:rPr>
+            <a:t>(11:59 pm) on Monday, OCT 06, 2025</a:t>
+          </a:r>
+        </a:p>
+      </dgm:t>
+    </dgm:pt>
+    <dgm:pt modelId="{47D3E5B5-E005-481D-9366-7FFA245A3F46}" type="parTrans" cxnId="{7E7C886D-A667-496F-8DDE-1B718561DB03}">
+      <dgm:prSet/>
+      <dgm:spPr/>
+      <dgm:t>
+        <a:bodyPr/>
+        <a:lstStyle/>
+        <a:p>
+          <a:endParaRPr lang="en-US"/>
+        </a:p>
+      </dgm:t>
+    </dgm:pt>
+    <dgm:pt modelId="{9E0C94DC-193A-41FC-B82A-2A43E45C8107}" type="sibTrans" cxnId="{7E7C886D-A667-496F-8DDE-1B718561DB03}">
+      <dgm:prSet/>
+      <dgm:spPr/>
+      <dgm:t>
+        <a:bodyPr/>
+        <a:lstStyle/>
+        <a:p>
+          <a:endParaRPr lang="en-US"/>
+        </a:p>
+      </dgm:t>
+    </dgm:pt>
+    <dgm:pt modelId="{A6242D37-AF81-4A91-9692-C3B78C4C080A}">
+      <dgm:prSet custT="1"/>
+      <dgm:spPr/>
+      <dgm:t>
+        <a:bodyPr/>
+        <a:lstStyle/>
+        <a:p>
+          <a:pPr>
+            <a:defRPr cap="all"/>
+          </a:pPr>
+          <a:r>
+            <a:rPr lang="en-US" sz="1800" dirty="0"/>
+            <a:t>Submit a word document only include </a:t>
+          </a:r>
+          <a:r>
+            <a:rPr lang="en-US" sz="1800" dirty="0">
+              <a:solidFill>
+                <a:srgbClr val="C00000"/>
+              </a:solidFill>
+            </a:rPr>
+            <a:t>question and answer</a:t>
+          </a:r>
+        </a:p>
+      </dgm:t>
+    </dgm:pt>
+    <dgm:pt modelId="{A1582085-1655-4316-B7FE-C167B01E3451}" type="parTrans" cxnId="{0F5369C5-3BD8-41EC-82BC-B46BD7C285F5}">
+      <dgm:prSet/>
+      <dgm:spPr/>
+      <dgm:t>
+        <a:bodyPr/>
+        <a:lstStyle/>
+        <a:p>
+          <a:endParaRPr lang="en-US"/>
+        </a:p>
+      </dgm:t>
+    </dgm:pt>
+    <dgm:pt modelId="{487527DA-4CA7-40A4-8E27-547430E84424}" type="sibTrans" cxnId="{0F5369C5-3BD8-41EC-82BC-B46BD7C285F5}">
+      <dgm:prSet/>
+      <dgm:spPr/>
+      <dgm:t>
+        <a:bodyPr/>
+        <a:lstStyle/>
+        <a:p>
+          <a:endParaRPr lang="en-US"/>
+        </a:p>
+      </dgm:t>
+    </dgm:pt>
+    <dgm:pt modelId="{1CF3E5B1-FB46-4446-95BF-0E7408D9C151}" type="pres">
+      <dgm:prSet presAssocID="{545DC5F4-D431-4A87-93B0-BBE05B35CCB1}" presName="root" presStyleCnt="0">
+        <dgm:presLayoutVars>
+          <dgm:dir/>
+          <dgm:resizeHandles val="exact"/>
+        </dgm:presLayoutVars>
+      </dgm:prSet>
+      <dgm:spPr/>
+    </dgm:pt>
+    <dgm:pt modelId="{BE3E81CB-7E93-484B-AE32-12C58B09BCE0}" type="pres">
+      <dgm:prSet presAssocID="{54983E92-0B7C-43A8-8C1F-984B0DFA982E}" presName="compNode" presStyleCnt="0"/>
+      <dgm:spPr/>
+    </dgm:pt>
+    <dgm:pt modelId="{D2D6216C-9B23-402E-A942-468E0F624F5B}" type="pres">
+      <dgm:prSet presAssocID="{54983E92-0B7C-43A8-8C1F-984B0DFA982E}" presName="iconBgRect" presStyleLbl="bgShp" presStyleIdx="0" presStyleCnt="2"/>
+      <dgm:spPr>
+        <a:prstGeom prst="round2DiagRect">
+          <a:avLst>
+            <a:gd name="adj1" fmla="val 29727"/>
+            <a:gd name="adj2" fmla="val 0"/>
+          </a:avLst>
+        </a:prstGeom>
+      </dgm:spPr>
+    </dgm:pt>
+    <dgm:pt modelId="{F943F739-4EBC-47A7-A14C-25327E72C0F2}" type="pres">
+      <dgm:prSet presAssocID="{54983E92-0B7C-43A8-8C1F-984B0DFA982E}" presName="iconRect" presStyleLbl="node1" presStyleIdx="0" presStyleCnt="2"/>
+      <dgm:spPr>
+        <a:blipFill>
+          <a:blip xmlns:r="http://schemas.openxmlformats.org/officeDocument/2006/relationships" r:embed="rId1">
+            <a:extLst>
+              <a:ext uri="{28A0092B-C50C-407E-A947-70E740481C1C}">
+                <a14:useLocalDpi xmlns:a14="http://schemas.microsoft.com/office/drawing/2010/main" val="0"/>
+              </a:ext>
+              <a:ext uri="{96DAC541-7B7A-43D3-8B79-37D633B846F1}">
+                <asvg:svgBlip xmlns:asvg="http://schemas.microsoft.com/office/drawing/2016/SVG/main" r:embed="rId2"/>
+              </a:ext>
+            </a:extLst>
+          </a:blip>
+          <a:stretch>
+            <a:fillRect/>
+          </a:stretch>
+        </a:blipFill>
+        <a:ln>
+          <a:noFill/>
+        </a:ln>
+      </dgm:spPr>
+      <dgm:extLst>
+        <a:ext uri="{E40237B7-FDA0-4F09-8148-C483321AD2D9}">
+          <dgm14:cNvPr xmlns:dgm14="http://schemas.microsoft.com/office/drawing/2010/diagram" id="0" name="" descr="Alarm Clock"/>
+        </a:ext>
+      </dgm:extLst>
+    </dgm:pt>
+    <dgm:pt modelId="{3085FCD0-B526-4BA1-831E-148271EBCA71}" type="pres">
+      <dgm:prSet presAssocID="{54983E92-0B7C-43A8-8C1F-984B0DFA982E}" presName="spaceRect" presStyleCnt="0"/>
+      <dgm:spPr/>
+    </dgm:pt>
+    <dgm:pt modelId="{4E513C3D-9C85-4581-9570-C87158EE7A8E}" type="pres">
+      <dgm:prSet presAssocID="{54983E92-0B7C-43A8-8C1F-984B0DFA982E}" presName="textRect" presStyleLbl="revTx" presStyleIdx="0" presStyleCnt="2" custScaleX="140708">
+        <dgm:presLayoutVars>
+          <dgm:chMax val="1"/>
+          <dgm:chPref val="1"/>
+        </dgm:presLayoutVars>
+      </dgm:prSet>
+      <dgm:spPr/>
+    </dgm:pt>
+    <dgm:pt modelId="{00D865C2-7AA1-4413-870A-557561F6A99D}" type="pres">
+      <dgm:prSet presAssocID="{9E0C94DC-193A-41FC-B82A-2A43E45C8107}" presName="sibTrans" presStyleCnt="0"/>
+      <dgm:spPr/>
+    </dgm:pt>
+    <dgm:pt modelId="{0444C821-AE95-419C-A2C2-10FD435B3E72}" type="pres">
+      <dgm:prSet presAssocID="{A6242D37-AF81-4A91-9692-C3B78C4C080A}" presName="compNode" presStyleCnt="0"/>
+      <dgm:spPr/>
+    </dgm:pt>
+    <dgm:pt modelId="{C1C41DF5-156F-4AFD-8177-5E65296E36DA}" type="pres">
+      <dgm:prSet presAssocID="{A6242D37-AF81-4A91-9692-C3B78C4C080A}" presName="iconBgRect" presStyleLbl="bgShp" presStyleIdx="1" presStyleCnt="2"/>
+      <dgm:spPr>
+        <a:prstGeom prst="round2DiagRect">
+          <a:avLst>
+            <a:gd name="adj1" fmla="val 29727"/>
+            <a:gd name="adj2" fmla="val 0"/>
+          </a:avLst>
+        </a:prstGeom>
+      </dgm:spPr>
+    </dgm:pt>
+    <dgm:pt modelId="{BCD05D74-D5AE-459F-A6DF-06E0D3F03A72}" type="pres">
+      <dgm:prSet presAssocID="{A6242D37-AF81-4A91-9692-C3B78C4C080A}" presName="iconRect" presStyleLbl="node1" presStyleIdx="1" presStyleCnt="2"/>
+      <dgm:spPr>
+        <a:blipFill>
+          <a:blip xmlns:r="http://schemas.openxmlformats.org/officeDocument/2006/relationships" r:embed="rId3">
+            <a:extLst>
+              <a:ext uri="{28A0092B-C50C-407E-A947-70E740481C1C}">
+                <a14:useLocalDpi xmlns:a14="http://schemas.microsoft.com/office/drawing/2010/main" val="0"/>
+              </a:ext>
+              <a:ext uri="{96DAC541-7B7A-43D3-8B79-37D633B846F1}">
+                <asvg:svgBlip xmlns:asvg="http://schemas.microsoft.com/office/drawing/2016/SVG/main" r:embed="rId4"/>
+              </a:ext>
+            </a:extLst>
+          </a:blip>
+          <a:stretch>
+            <a:fillRect/>
+          </a:stretch>
+        </a:blipFill>
+        <a:ln>
+          <a:noFill/>
+        </a:ln>
+      </dgm:spPr>
+      <dgm:extLst>
+        <a:ext uri="{E40237B7-FDA0-4F09-8148-C483321AD2D9}">
+          <dgm14:cNvPr xmlns:dgm14="http://schemas.microsoft.com/office/drawing/2010/diagram" id="0" name="" descr="Checkmark"/>
+        </a:ext>
+      </dgm:extLst>
+    </dgm:pt>
+    <dgm:pt modelId="{2AB5314E-660E-4ED1-846B-8434948EF46B}" type="pres">
+      <dgm:prSet presAssocID="{A6242D37-AF81-4A91-9692-C3B78C4C080A}" presName="spaceRect" presStyleCnt="0"/>
+      <dgm:spPr/>
+    </dgm:pt>
+    <dgm:pt modelId="{A3838D15-85D1-4048-B20D-9009920800B0}" type="pres">
+      <dgm:prSet presAssocID="{A6242D37-AF81-4A91-9692-C3B78C4C080A}" presName="textRect" presStyleLbl="revTx" presStyleIdx="1" presStyleCnt="2" custScaleX="147657">
+        <dgm:presLayoutVars>
+          <dgm:chMax val="1"/>
+          <dgm:chPref val="1"/>
+        </dgm:presLayoutVars>
+      </dgm:prSet>
+      <dgm:spPr/>
+    </dgm:pt>
+  </dgm:ptLst>
+  <dgm:cxnLst>
+    <dgm:cxn modelId="{34AD3E24-5AE2-4091-998E-71D41F9CDB89}" type="presOf" srcId="{A6242D37-AF81-4A91-9692-C3B78C4C080A}" destId="{A3838D15-85D1-4048-B20D-9009920800B0}" srcOrd="0" destOrd="0" presId="urn:microsoft.com/office/officeart/2018/5/layout/IconLeafLabelList"/>
+    <dgm:cxn modelId="{7E7C886D-A667-496F-8DDE-1B718561DB03}" srcId="{545DC5F4-D431-4A87-93B0-BBE05B35CCB1}" destId="{54983E92-0B7C-43A8-8C1F-984B0DFA982E}" srcOrd="0" destOrd="0" parTransId="{47D3E5B5-E005-481D-9366-7FFA245A3F46}" sibTransId="{9E0C94DC-193A-41FC-B82A-2A43E45C8107}"/>
+    <dgm:cxn modelId="{B47C2F55-9A4B-4FFB-AA38-9C2574693CD4}" type="presOf" srcId="{54983E92-0B7C-43A8-8C1F-984B0DFA982E}" destId="{4E513C3D-9C85-4581-9570-C87158EE7A8E}" srcOrd="0" destOrd="0" presId="urn:microsoft.com/office/officeart/2018/5/layout/IconLeafLabelList"/>
+    <dgm:cxn modelId="{53CEBE9C-EA76-48A8-8DF7-6953575A9C37}" type="presOf" srcId="{545DC5F4-D431-4A87-93B0-BBE05B35CCB1}" destId="{1CF3E5B1-FB46-4446-95BF-0E7408D9C151}" srcOrd="0" destOrd="0" presId="urn:microsoft.com/office/officeart/2018/5/layout/IconLeafLabelList"/>
+    <dgm:cxn modelId="{0F5369C5-3BD8-41EC-82BC-B46BD7C285F5}" srcId="{545DC5F4-D431-4A87-93B0-BBE05B35CCB1}" destId="{A6242D37-AF81-4A91-9692-C3B78C4C080A}" srcOrd="1" destOrd="0" parTransId="{A1582085-1655-4316-B7FE-C167B01E3451}" sibTransId="{487527DA-4CA7-40A4-8E27-547430E84424}"/>
+    <dgm:cxn modelId="{5C6FCB9C-3574-4EF1-979B-C82FE21FC231}" type="presParOf" srcId="{1CF3E5B1-FB46-4446-95BF-0E7408D9C151}" destId="{BE3E81CB-7E93-484B-AE32-12C58B09BCE0}" srcOrd="0" destOrd="0" presId="urn:microsoft.com/office/officeart/2018/5/layout/IconLeafLabelList"/>
+    <dgm:cxn modelId="{3BEBC4B0-3768-4D30-9883-ED03B1BB2AA3}" type="presParOf" srcId="{BE3E81CB-7E93-484B-AE32-12C58B09BCE0}" destId="{D2D6216C-9B23-402E-A942-468E0F624F5B}" srcOrd="0" destOrd="0" presId="urn:microsoft.com/office/officeart/2018/5/layout/IconLeafLabelList"/>
+    <dgm:cxn modelId="{9334B4F2-C5A7-478D-8C83-6B6B78937527}" type="presParOf" srcId="{BE3E81CB-7E93-484B-AE32-12C58B09BCE0}" destId="{F943F739-4EBC-47A7-A14C-25327E72C0F2}" srcOrd="1" destOrd="0" presId="urn:microsoft.com/office/officeart/2018/5/layout/IconLeafLabelList"/>
+    <dgm:cxn modelId="{722E4463-BB96-47A5-B05B-8394250686DE}" type="presParOf" srcId="{BE3E81CB-7E93-484B-AE32-12C58B09BCE0}" destId="{3085FCD0-B526-4BA1-831E-148271EBCA71}" srcOrd="2" destOrd="0" presId="urn:microsoft.com/office/officeart/2018/5/layout/IconLeafLabelList"/>
+    <dgm:cxn modelId="{4DDDB5E8-1F23-4A78-9605-45AAF5833E68}" type="presParOf" srcId="{BE3E81CB-7E93-484B-AE32-12C58B09BCE0}" destId="{4E513C3D-9C85-4581-9570-C87158EE7A8E}" srcOrd="3" destOrd="0" presId="urn:microsoft.com/office/officeart/2018/5/layout/IconLeafLabelList"/>
+    <dgm:cxn modelId="{123D8173-4B78-41DB-B068-2BA15E016A23}" type="presParOf" srcId="{1CF3E5B1-FB46-4446-95BF-0E7408D9C151}" destId="{00D865C2-7AA1-4413-870A-557561F6A99D}" srcOrd="1" destOrd="0" presId="urn:microsoft.com/office/officeart/2018/5/layout/IconLeafLabelList"/>
+    <dgm:cxn modelId="{E92967F1-54D1-402B-9BE3-03FB7BECA8E6}" type="presParOf" srcId="{1CF3E5B1-FB46-4446-95BF-0E7408D9C151}" destId="{0444C821-AE95-419C-A2C2-10FD435B3E72}" srcOrd="2" destOrd="0" presId="urn:microsoft.com/office/officeart/2018/5/layout/IconLeafLabelList"/>
+    <dgm:cxn modelId="{6A34589F-98DC-49A5-B284-AB8B04E10F1B}" type="presParOf" srcId="{0444C821-AE95-419C-A2C2-10FD435B3E72}" destId="{C1C41DF5-156F-4AFD-8177-5E65296E36DA}" srcOrd="0" destOrd="0" presId="urn:microsoft.com/office/officeart/2018/5/layout/IconLeafLabelList"/>
+    <dgm:cxn modelId="{E4BDC4E7-B33D-408F-A28A-9E646BDBCB86}" type="presParOf" srcId="{0444C821-AE95-419C-A2C2-10FD435B3E72}" destId="{BCD05D74-D5AE-459F-A6DF-06E0D3F03A72}" srcOrd="1" destOrd="0" presId="urn:microsoft.com/office/officeart/2018/5/layout/IconLeafLabelList"/>
+    <dgm:cxn modelId="{3D1E9DB2-C5D6-4774-8110-C1F4D3951E71}" type="presParOf" srcId="{0444C821-AE95-419C-A2C2-10FD435B3E72}" destId="{2AB5314E-660E-4ED1-846B-8434948EF46B}" srcOrd="2" destOrd="0" presId="urn:microsoft.com/office/officeart/2018/5/layout/IconLeafLabelList"/>
+    <dgm:cxn modelId="{2B9C7FC2-A255-4335-A004-2546E39B1238}" type="presParOf" srcId="{0444C821-AE95-419C-A2C2-10FD435B3E72}" destId="{A3838D15-85D1-4048-B20D-9009920800B0}" srcOrd="3" destOrd="0" presId="urn:microsoft.com/office/officeart/2018/5/layout/IconLeafLabelList"/>
+  </dgm:cxnLst>
+  <dgm:bg/>
+  <dgm:whole/>
+  <dgm:extLst>
+    <a:ext uri="http://schemas.microsoft.com/office/drawing/2008/diagram">
+      <dsp:dataModelExt xmlns:dsp="http://schemas.microsoft.com/office/drawing/2008/diagram" relId="rId7" minVer="http://schemas.openxmlformats.org/drawingml/2006/diagram"/>
+    </a:ext>
+  </dgm:extLst>
+</dgm:dataModel>
+</file>
+
+<file path=ppt/diagrams/drawing1.xml><?xml version="1.0" encoding="utf-8"?>
+<dsp:drawing xmlns:dgm="http://schemas.openxmlformats.org/drawingml/2006/diagram" xmlns:dsp="http://schemas.microsoft.com/office/drawing/2008/diagram" xmlns:a="http://schemas.openxmlformats.org/drawingml/2006/main">
+  <dsp:spTree>
+    <dsp:nvGrpSpPr>
+      <dsp:cNvPr id="0" name=""/>
+      <dsp:cNvGrpSpPr/>
+    </dsp:nvGrpSpPr>
+    <dsp:grpSpPr/>
+    <dsp:sp modelId="{D2D6216C-9B23-402E-A942-468E0F624F5B}">
+      <dsp:nvSpPr>
+        <dsp:cNvPr id="0" name=""/>
+        <dsp:cNvSpPr/>
+      </dsp:nvSpPr>
+      <dsp:spPr>
+        <a:xfrm>
+          <a:off x="1178341" y="15356"/>
+          <a:ext cx="1372500" cy="1372500"/>
+        </a:xfrm>
+        <a:prstGeom prst="round2DiagRect">
+          <a:avLst>
+            <a:gd name="adj1" fmla="val 29727"/>
+            <a:gd name="adj2" fmla="val 0"/>
+          </a:avLst>
+        </a:prstGeom>
+        <a:solidFill>
+          <a:schemeClr val="accent2">
+            <a:hueOff val="0"/>
+            <a:satOff val="0"/>
+            <a:lumOff val="0"/>
+            <a:alphaOff val="0"/>
+          </a:schemeClr>
+        </a:solidFill>
+        <a:ln>
+          <a:noFill/>
+        </a:ln>
+        <a:effectLst/>
+      </dsp:spPr>
+      <dsp:style>
+        <a:lnRef idx="0">
+          <a:scrgbClr r="0" g="0" b="0"/>
+        </a:lnRef>
+        <a:fillRef idx="1">
+          <a:scrgbClr r="0" g="0" b="0"/>
+        </a:fillRef>
+        <a:effectRef idx="0">
+          <a:scrgbClr r="0" g="0" b="0"/>
+        </a:effectRef>
+        <a:fontRef idx="minor"/>
+      </dsp:style>
+    </dsp:sp>
+    <dsp:sp modelId="{F943F739-4EBC-47A7-A14C-25327E72C0F2}">
+      <dsp:nvSpPr>
+        <dsp:cNvPr id="0" name=""/>
+        <dsp:cNvSpPr/>
+      </dsp:nvSpPr>
+      <dsp:spPr>
+        <a:xfrm>
+          <a:off x="1470841" y="307856"/>
+          <a:ext cx="787500" cy="787500"/>
+        </a:xfrm>
+        <a:prstGeom prst="rect">
+          <a:avLst/>
+        </a:prstGeom>
+        <a:blipFill>
+          <a:blip xmlns:r="http://schemas.openxmlformats.org/officeDocument/2006/relationships" r:embed="rId1">
+            <a:extLst>
+              <a:ext uri="{28A0092B-C50C-407E-A947-70E740481C1C}">
+                <a14:useLocalDpi xmlns:a14="http://schemas.microsoft.com/office/drawing/2010/main" val="0"/>
+              </a:ext>
+              <a:ext uri="{96DAC541-7B7A-43D3-8B79-37D633B846F1}">
+                <asvg:svgBlip xmlns:asvg="http://schemas.microsoft.com/office/drawing/2016/SVG/main" r:embed="rId2"/>
+              </a:ext>
+            </a:extLst>
+          </a:blip>
+          <a:stretch>
+            <a:fillRect/>
+          </a:stretch>
+        </a:blipFill>
+        <a:ln w="22225" cap="rnd" cmpd="sng" algn="ctr">
+          <a:noFill/>
+          <a:prstDash val="solid"/>
+        </a:ln>
+        <a:effectLst/>
+      </dsp:spPr>
+      <dsp:style>
+        <a:lnRef idx="2">
+          <a:scrgbClr r="0" g="0" b="0"/>
+        </a:lnRef>
+        <a:fillRef idx="1">
+          <a:scrgbClr r="0" g="0" b="0"/>
+        </a:fillRef>
+        <a:effectRef idx="0">
+          <a:scrgbClr r="0" g="0" b="0"/>
+        </a:effectRef>
+        <a:fontRef idx="minor">
+          <a:schemeClr val="lt1"/>
+        </a:fontRef>
+      </dsp:style>
+    </dsp:sp>
+    <dsp:sp modelId="{4E513C3D-9C85-4581-9570-C87158EE7A8E}">
+      <dsp:nvSpPr>
+        <dsp:cNvPr id="0" name=""/>
+        <dsp:cNvSpPr/>
+      </dsp:nvSpPr>
+      <dsp:spPr>
+        <a:xfrm>
+          <a:off x="281626" y="1815356"/>
+          <a:ext cx="3165930" cy="743927"/>
+        </a:xfrm>
+        <a:prstGeom prst="rect">
+          <a:avLst/>
+        </a:prstGeom>
+        <a:noFill/>
+        <a:ln>
+          <a:noFill/>
+        </a:ln>
+        <a:effectLst/>
+      </dsp:spPr>
+      <dsp:style>
+        <a:lnRef idx="0">
+          <a:scrgbClr r="0" g="0" b="0"/>
+        </a:lnRef>
+        <a:fillRef idx="0">
+          <a:scrgbClr r="0" g="0" b="0"/>
+        </a:fillRef>
+        <a:effectRef idx="0">
+          <a:scrgbClr r="0" g="0" b="0"/>
+        </a:effectRef>
+        <a:fontRef idx="minor"/>
+      </dsp:style>
+      <dsp:txBody>
+        <a:bodyPr spcFirstLastPara="0" vert="horz" wrap="square" lIns="0" tIns="0" rIns="0" bIns="0" numCol="1" spcCol="1270" anchor="t" anchorCtr="0">
+          <a:noAutofit/>
+        </a:bodyPr>
+        <a:lstStyle/>
+        <a:p>
+          <a:pPr marL="0" lvl="0" indent="0" algn="ctr" defTabSz="800100">
+            <a:lnSpc>
+              <a:spcPct val="90000"/>
+            </a:lnSpc>
+            <a:spcBef>
+              <a:spcPct val="0"/>
+            </a:spcBef>
+            <a:spcAft>
+              <a:spcPct val="35000"/>
+            </a:spcAft>
+            <a:buNone/>
+            <a:defRPr cap="all"/>
+          </a:pPr>
+          <a:r>
+            <a:rPr lang="en-US" sz="1800" kern="1200" dirty="0"/>
+            <a:t>Due by Midnight </a:t>
+          </a:r>
+          <a:r>
+            <a:rPr lang="en-US" sz="1800" kern="1200" dirty="0">
+              <a:solidFill>
+                <a:srgbClr val="C00000"/>
+              </a:solidFill>
+            </a:rPr>
+            <a:t>(11:59 pm) on Monday, OCT 06, 2025</a:t>
+          </a:r>
+        </a:p>
+      </dsp:txBody>
+      <dsp:txXfrm>
+        <a:off x="281626" y="1815356"/>
+        <a:ext cx="3165930" cy="743927"/>
+      </dsp:txXfrm>
+    </dsp:sp>
+    <dsp:sp modelId="{C1C41DF5-156F-4AFD-8177-5E65296E36DA}">
+      <dsp:nvSpPr>
+        <dsp:cNvPr id="0" name=""/>
+        <dsp:cNvSpPr/>
+      </dsp:nvSpPr>
+      <dsp:spPr>
+        <a:xfrm>
+          <a:off x="4816197" y="15356"/>
+          <a:ext cx="1372500" cy="1372500"/>
+        </a:xfrm>
+        <a:prstGeom prst="round2DiagRect">
+          <a:avLst>
+            <a:gd name="adj1" fmla="val 29727"/>
+            <a:gd name="adj2" fmla="val 0"/>
+          </a:avLst>
+        </a:prstGeom>
+        <a:solidFill>
+          <a:schemeClr val="accent3">
+            <a:hueOff val="0"/>
+            <a:satOff val="0"/>
+            <a:lumOff val="0"/>
+            <a:alphaOff val="0"/>
+          </a:schemeClr>
+        </a:solidFill>
+        <a:ln>
+          <a:noFill/>
+        </a:ln>
+        <a:effectLst/>
+      </dsp:spPr>
+      <dsp:style>
+        <a:lnRef idx="0">
+          <a:scrgbClr r="0" g="0" b="0"/>
+        </a:lnRef>
+        <a:fillRef idx="1">
+          <a:scrgbClr r="0" g="0" b="0"/>
+        </a:fillRef>
+        <a:effectRef idx="0">
+          <a:scrgbClr r="0" g="0" b="0"/>
+        </a:effectRef>
+        <a:fontRef idx="minor"/>
+      </dsp:style>
+    </dsp:sp>
+    <dsp:sp modelId="{BCD05D74-D5AE-459F-A6DF-06E0D3F03A72}">
+      <dsp:nvSpPr>
+        <dsp:cNvPr id="0" name=""/>
+        <dsp:cNvSpPr/>
+      </dsp:nvSpPr>
+      <dsp:spPr>
+        <a:xfrm>
+          <a:off x="5108697" y="307856"/>
+          <a:ext cx="787500" cy="787500"/>
+        </a:xfrm>
+        <a:prstGeom prst="rect">
+          <a:avLst/>
+        </a:prstGeom>
+        <a:blipFill>
+          <a:blip xmlns:r="http://schemas.openxmlformats.org/officeDocument/2006/relationships" r:embed="rId3">
+            <a:extLst>
+              <a:ext uri="{28A0092B-C50C-407E-A947-70E740481C1C}">
+                <a14:useLocalDpi xmlns:a14="http://schemas.microsoft.com/office/drawing/2010/main" val="0"/>
+              </a:ext>
+              <a:ext uri="{96DAC541-7B7A-43D3-8B79-37D633B846F1}">
+                <asvg:svgBlip xmlns:asvg="http://schemas.microsoft.com/office/drawing/2016/SVG/main" r:embed="rId4"/>
+              </a:ext>
+            </a:extLst>
+          </a:blip>
+          <a:stretch>
+            <a:fillRect/>
+          </a:stretch>
+        </a:blipFill>
+        <a:ln w="22225" cap="rnd" cmpd="sng" algn="ctr">
+          <a:noFill/>
+          <a:prstDash val="solid"/>
+        </a:ln>
+        <a:effectLst/>
+      </dsp:spPr>
+      <dsp:style>
+        <a:lnRef idx="2">
+          <a:scrgbClr r="0" g="0" b="0"/>
+        </a:lnRef>
+        <a:fillRef idx="1">
+          <a:scrgbClr r="0" g="0" b="0"/>
+        </a:fillRef>
+        <a:effectRef idx="0">
+          <a:scrgbClr r="0" g="0" b="0"/>
+        </a:effectRef>
+        <a:fontRef idx="minor">
+          <a:schemeClr val="lt1"/>
+        </a:fontRef>
+      </dsp:style>
+    </dsp:sp>
+    <dsp:sp modelId="{A3838D15-85D1-4048-B20D-9009920800B0}">
+      <dsp:nvSpPr>
+        <dsp:cNvPr id="0" name=""/>
+        <dsp:cNvSpPr/>
+      </dsp:nvSpPr>
+      <dsp:spPr>
+        <a:xfrm>
+          <a:off x="3841306" y="1815356"/>
+          <a:ext cx="3322282" cy="743927"/>
+        </a:xfrm>
+        <a:prstGeom prst="rect">
+          <a:avLst/>
+        </a:prstGeom>
+        <a:noFill/>
+        <a:ln>
+          <a:noFill/>
+        </a:ln>
+        <a:effectLst/>
+      </dsp:spPr>
+      <dsp:style>
+        <a:lnRef idx="0">
+          <a:scrgbClr r="0" g="0" b="0"/>
+        </a:lnRef>
+        <a:fillRef idx="0">
+          <a:scrgbClr r="0" g="0" b="0"/>
+        </a:fillRef>
+        <a:effectRef idx="0">
+          <a:scrgbClr r="0" g="0" b="0"/>
+        </a:effectRef>
+        <a:fontRef idx="minor"/>
+      </dsp:style>
+      <dsp:txBody>
+        <a:bodyPr spcFirstLastPara="0" vert="horz" wrap="square" lIns="0" tIns="0" rIns="0" bIns="0" numCol="1" spcCol="1270" anchor="t" anchorCtr="0">
+          <a:noAutofit/>
+        </a:bodyPr>
+        <a:lstStyle/>
+        <a:p>
+          <a:pPr marL="0" lvl="0" indent="0" algn="ctr" defTabSz="800100">
+            <a:lnSpc>
+              <a:spcPct val="90000"/>
+            </a:lnSpc>
+            <a:spcBef>
+              <a:spcPct val="0"/>
+            </a:spcBef>
+            <a:spcAft>
+              <a:spcPct val="35000"/>
+            </a:spcAft>
+            <a:buNone/>
+            <a:defRPr cap="all"/>
+          </a:pPr>
+          <a:r>
+            <a:rPr lang="en-US" sz="1800" kern="1200" dirty="0"/>
+            <a:t>Submit a word document only include </a:t>
+          </a:r>
+          <a:r>
+            <a:rPr lang="en-US" sz="1800" kern="1200" dirty="0">
+              <a:solidFill>
+                <a:srgbClr val="C00000"/>
+              </a:solidFill>
+            </a:rPr>
+            <a:t>question and answer</a:t>
+          </a:r>
+        </a:p>
+      </dsp:txBody>
+      <dsp:txXfrm>
+        <a:off x="3841306" y="1815356"/>
+        <a:ext cx="3322282" cy="743927"/>
+      </dsp:txXfrm>
+    </dsp:sp>
+  </dsp:spTree>
+</dsp:drawing>
+</file>
+
+<file path=ppt/diagrams/layout1.xml><?xml version="1.0" encoding="utf-8"?>
+<dgm:layoutDef xmlns:dgm="http://schemas.openxmlformats.org/drawingml/2006/diagram" xmlns:a="http://schemas.openxmlformats.org/drawingml/2006/main" uniqueId="urn:microsoft.com/office/officeart/2018/5/layout/IconLeafLabelList">
+  <dgm:title val="Icon Leaf Label List"/>
+  <dgm:desc val="Use to show non-sequential or grouped chunks of information accompanied by a related visuals. Works best with icons or small pictures with short text captions."/>
+  <dgm:catLst>
+    <dgm:cat type="icon" pri="500"/>
+  </dgm:catLst>
+  <dgm:sampData useDef="1">
+    <dgm:dataModel>
+      <dgm:ptLst/>
+      <dgm:bg/>
+      <dgm:whole/>
+    </dgm:dataModel>
+  </dgm:sampData>
+  <dgm:styleData useDef="1">
+    <dgm:dataModel>
+      <dgm:ptLst/>
+      <dgm:bg/>
+      <dgm:whole/>
+    </dgm:dataModel>
+  </dgm:styleData>
+  <dgm:clrData useDef="1">
+    <dgm:dataModel>
+      <dgm:ptLst/>
+      <dgm:bg/>
+      <dgm:whole/>
+    </dgm:dataModel>
+  </dgm:clrData>
+  <dgm:layoutNode name="root">
+    <dgm:varLst>
+      <dgm:dir/>
+      <dgm:resizeHandles val="exact"/>
+    </dgm:varLst>
+    <dgm:choose name="Name0">
+      <dgm:if name="Name1" axis="self" func="var" arg="dir" op="equ" val="norm">
+        <dgm:alg type="snake">
+          <dgm:param type="grDir" val="tL"/>
+          <dgm:param type="flowDir" val="row"/>
+          <dgm:param type="contDir" val="sameDir"/>
+          <dgm:param type="off" val="ctr"/>
+          <dgm:param type="vertAlign" val="mid"/>
+          <dgm:param type="horzAlign" val="ctr"/>
+        </dgm:alg>
+      </dgm:if>
+      <dgm:else name="Name2">
+        <dgm:alg type="snake">
+          <dgm:param type="grDir" val="tR"/>
+          <dgm:param type="flowDir" val="row"/>
+          <dgm:param type="contDir" val="sameDir"/>
+          <dgm:param type="off" val="ctr"/>
+          <dgm:param type="vertAlign" val="mid"/>
+          <dgm:param type="horzAlign" val="ctr"/>
+        </dgm:alg>
+      </dgm:else>
+    </dgm:choose>
+    <dgm:shape xmlns:r="http://schemas.openxmlformats.org/officeDocument/2006/relationships" r:blip="">
+      <dgm:adjLst/>
+    </dgm:shape>
+    <dgm:presOf/>
+    <dgm:choose name="Name3">
+      <dgm:if name="Name4" axis="ch" ptType="node" func="cnt" op="lte" val="2">
+        <dgm:constrLst>
+          <dgm:constr type="h" for="ch" forName="compNode" refType="h" fact="0.4"/>
+          <dgm:constr type="w" for="ch" forName="compNode" val="100"/>
+          <dgm:constr type="w" for="ch" forName="sibTrans" refType="w" refFor="ch" refForName="compNode" fact="0.175"/>
+          <dgm:constr type="sp" refType="w" refFor="ch" refForName="compNode" op="equ" fact="0.25"/>
+          <dgm:constr type="primFontSz" for="des" ptType="node" op="equ" val="44"/>
+          <dgm:constr type="h" for="des" forName="compNode" op="equ"/>
+          <dgm:constr type="h" for="des" forName="textRect" op="equ"/>
+        </dgm:constrLst>
+      </dgm:if>
+      <dgm:if name="Name5" axis="ch" ptType="node" func="cnt" op="lte" val="3">
+        <dgm:constrLst>
+          <dgm:constr type="h" for="ch" forName="compNode" refType="h" fact="0.4"/>
+          <dgm:constr type="w" for="ch" forName="compNode" val="100"/>
+          <dgm:constr type="w" for="ch" forName="sibTrans" refType="w" refFor="ch" refForName="compNode" fact="0.175"/>
+          <dgm:constr type="sp" refType="w" refFor="ch" refForName="compNode" op="equ" fact="0.25"/>
+          <dgm:constr type="primFontSz" for="des" ptType="node" op="equ" val="40"/>
+          <dgm:constr type="h" for="des" forName="compNode" op="equ"/>
+          <dgm:constr type="h" for="des" forName="textRect" op="equ"/>
+        </dgm:constrLst>
+      </dgm:if>
+      <dgm:if name="Name6" axis="ch" ptType="node" func="cnt" op="lte" val="4">
+        <dgm:constrLst>
+          <dgm:constr type="h" for="ch" forName="compNode" refType="h" fact="0.4"/>
+          <dgm:constr type="w" for="ch" forName="compNode" refType="w"/>
+          <dgm:constr type="w" for="ch" forName="sibTrans" refType="w" refFor="ch" refForName="compNode" fact="0.175"/>
+          <dgm:constr type="sp" refType="w" refFor="ch" refForName="compNode" op="equ" fact="0.25"/>
+          <dgm:constr type="primFontSz" for="des" ptType="node" op="equ" val="32"/>
+          <dgm:constr type="h" for="des" forName="compNode" op="equ"/>
+          <dgm:constr type="h" for="des" forName="textRect" op="equ"/>
+        </dgm:constrLst>
+      </dgm:if>
+      <dgm:else name="Name7">
+        <dgm:constrLst>
+          <dgm:constr type="h" for="ch" forName="compNode" refType="h" fact="0.4"/>
+          <dgm:constr type="w" for="ch" forName="compNode" refType="w"/>
+          <dgm:constr type="w" for="ch" forName="sibTrans" refType="w" refFor="ch" refForName="compNode" fact="0.175"/>
+          <dgm:constr type="sp" refType="w" refFor="ch" refForName="compNode" op="equ" fact="0.25"/>
+          <dgm:constr type="primFontSz" for="des" ptType="node" op="equ" val="24"/>
+          <dgm:constr type="h" for="des" forName="compNode" op="equ"/>
+          <dgm:constr type="h" for="des" forName="textRect" op="equ"/>
+        </dgm:constrLst>
+      </dgm:else>
+    </dgm:choose>
+    <dgm:ruleLst>
+      <dgm:rule type="w" for="ch" forName="compNode" val="50" fact="NaN" max="NaN"/>
+    </dgm:ruleLst>
+    <dgm:forEach name="Name8" axis="ch" ptType="node">
+      <dgm:layoutNode name="compNode">
+        <dgm:alg type="composite"/>
+        <dgm:shape xmlns:r="http://schemas.openxmlformats.org/officeDocument/2006/relationships" r:blip="">
+          <dgm:adjLst/>
+        </dgm:shape>
+        <dgm:presOf axis="self"/>
+        <dgm:constrLst>
+          <dgm:constr type="w" for="ch" forName="iconBgRect" refType="w" fact="0.61"/>
+          <dgm:constr type="h" for="ch" forName="iconBgRect" refType="w" refFor="ch" refForName="iconBgRect"/>
+          <dgm:constr type="t" for="ch" forName="iconBgRect"/>
+          <dgm:constr type="ctrX" for="ch" forName="iconBgRect" refType="w" fact="0.5"/>
+          <dgm:constr type="w" for="ch" forName="iconRect" refType="w" fact="0.35"/>
+          <dgm:constr type="h" for="ch" forName="iconRect" refType="w" refFor="ch" refForName="iconRect"/>
+          <dgm:constr type="ctrX" for="ch" forName="iconRect" refType="ctrX" refFor="ch" refForName="iconBgRect"/>
+          <dgm:constr type="ctrY" for="ch" forName="iconRect" refType="ctrY" refFor="ch" refForName="iconBgRect"/>
+          <dgm:constr type="h" for="ch" forName="spaceRect" refType="w" fact="0.19"/>
+          <dgm:constr type="w" for="ch" forName="spaceRect" refType="w"/>
+          <dgm:constr type="l" for="ch" forName="spaceRect"/>
+          <dgm:constr type="t" for="ch" forName="spaceRect" refType="b" refFor="ch" refForName="iconBgRect"/>
+          <dgm:constr type="h" for="ch" forName="textRect" val="20"/>
+          <dgm:constr type="w" for="ch" forName="textRect" refType="w"/>
+          <dgm:constr type="l" for="ch" forName="textRect"/>
+          <dgm:constr type="t" for="ch" forName="textRect" refType="b" refFor="ch" refForName="spaceRect"/>
+        </dgm:constrLst>
+        <dgm:ruleLst>
+          <dgm:rule type="h" val="INF" fact="NaN" max="NaN"/>
+        </dgm:ruleLst>
+        <dgm:layoutNode name="iconBgRect" styleLbl="bgShp">
+          <dgm:alg type="sp"/>
+          <dgm:shape xmlns:r="http://schemas.openxmlformats.org/officeDocument/2006/relationships" type="round2DiagRect" r:blip="">
+            <dgm:adjLst/>
+            <dgm:extLst>
+              <a:ext uri="{B698B0E9-8C71-41B9-8309-B3DCBF30829C}">
+                <dgm1612:spPr xmlns:dgm1612="http://schemas.microsoft.com/office/drawing/2016/12/diagram">
+                  <a:prstGeom prst="round2DiagRect">
+                    <a:avLst>
+                      <a:gd name="adj1" fmla="val 29727"/>
+                      <a:gd name="adj2" fmla="val 0"/>
+                    </a:avLst>
+                  </a:prstGeom>
+                </dgm1612:spPr>
+              </a:ext>
+            </dgm:extLst>
+          </dgm:shape>
+          <dgm:presOf/>
+          <dgm:constrLst/>
+          <dgm:ruleLst/>
+        </dgm:layoutNode>
+        <dgm:layoutNode name="iconRect" styleLbl="node1">
+          <dgm:alg type="sp"/>
+          <dgm:shape xmlns:r="http://schemas.openxmlformats.org/officeDocument/2006/relationships" type="rect" r:blip="" blipPhldr="1">
+            <dgm:adjLst/>
+          </dgm:shape>
+          <dgm:presOf/>
+          <dgm:constrLst/>
+          <dgm:ruleLst/>
+        </dgm:layoutNode>
+        <dgm:layoutNode name="spaceRect">
+          <dgm:alg type="sp"/>
+          <dgm:shape xmlns:r="http://schemas.openxmlformats.org/officeDocument/2006/relationships" r:blip="">
+            <dgm:adjLst/>
+          </dgm:shape>
+          <dgm:presOf/>
+          <dgm:constrLst/>
+          <dgm:ruleLst/>
+        </dgm:layoutNode>
+        <dgm:layoutNode name="textRect" styleLbl="revTx">
+          <dgm:varLst>
+            <dgm:chMax val="1"/>
+            <dgm:chPref val="1"/>
+          </dgm:varLst>
+          <dgm:alg type="tx">
+            <dgm:param type="txAnchorVert" val="t"/>
+          </dgm:alg>
+          <dgm:shape xmlns:r="http://schemas.openxmlformats.org/officeDocument/2006/relationships" type="rect" r:blip="">
+            <dgm:adjLst/>
+          </dgm:shape>
+          <dgm:presOf axis="self" ptType="node"/>
+          <dgm:constrLst>
+            <dgm:constr type="lMarg"/>
+            <dgm:constr type="rMarg"/>
+            <dgm:constr type="tMarg"/>
+            <dgm:constr type="bMarg"/>
+          </dgm:constrLst>
+          <dgm:ruleLst>
+            <dgm:rule type="primFontSz" val="11" fact="NaN" max="NaN"/>
+            <dgm:rule type="h" val="INF" fact="NaN" max="NaN"/>
+          </dgm:ruleLst>
+        </dgm:layoutNode>
+      </dgm:layoutNode>
+      <dgm:forEach name="Name9" axis="followSib" ptType="sibTrans" cnt="1">
+        <dgm:layoutNode name="sibTrans">
+          <dgm:alg type="sp"/>
+          <dgm:shape xmlns:r="http://schemas.openxmlformats.org/officeDocument/2006/relationships" r:blip="">
+            <dgm:adjLst/>
+          </dgm:shape>
+          <dgm:presOf axis="self"/>
+          <dgm:constrLst/>
+          <dgm:ruleLst/>
+        </dgm:layoutNode>
+      </dgm:forEach>
+    </dgm:forEach>
+  </dgm:layoutNode>
+  <dgm:extLst>
+    <a:ext uri="{68A01E43-0DF5-4B5B-8FA6-DAF915123BFB}">
+      <dgm1612:lstStyle xmlns:dgm1612="http://schemas.microsoft.com/office/drawing/2016/12/diagram">
+        <a:lvl1pPr>
+          <a:lnSpc>
+            <a:spcPct val="100000"/>
+          </a:lnSpc>
+          <a:defRPr cap="all"/>
+        </a:lvl1pPr>
+      </dgm1612:lstStyle>
+    </a:ext>
+  </dgm:extLst>
+</dgm:layoutDef>
+</file>
+
+<file path=ppt/diagrams/quickStyle1.xml><?xml version="1.0" encoding="utf-8"?>
+<dgm:styleDef xmlns:dgm="http://schemas.openxmlformats.org/drawingml/2006/diagram" xmlns:a="http://schemas.openxmlformats.org/drawingml/2006/main" uniqueId="urn:microsoft.com/office/officeart/2005/8/quickstyle/simple1">
+  <dgm:title val=""/>
+  <dgm:desc val=""/>
+  <dgm:catLst>
+    <dgm:cat type="simple" pri="10100"/>
+  </dgm:catLst>
+  <dgm:scene3d>
+    <a:camera prst="orthographicFront"/>
+    <a:lightRig rig="threePt" dir="t"/>
+  </dgm:scene3d>
+  <dgm:styleLbl name="node0">
+    <dgm:scene3d>
+      <a:camera prst="orthographicFront"/>
+      <a:lightRig rig="threePt" dir="t"/>
+    </dgm:scene3d>
+    <dgm:sp3d/>
+    <dgm:txPr/>
+    <dgm:style>
+      <a:lnRef idx="2">
+        <a:scrgbClr r="0" g="0" b="0"/>
+      </a:lnRef>
+      <a:fillRef idx="1">
+        <a:scrgbClr r="0" g="0" b="0"/>
+      </a:fillRef>
+      <a:effectRef idx="0">
+        <a:scrgbClr r="0" g="0" b="0"/>
+      </a:effectRef>
+      <a:fontRef idx="minor">
+        <a:schemeClr val="lt1"/>
+      </a:fontRef>
+    </dgm:style>
+  </dgm:styleLbl>
+  <dgm:styleLbl name="lnNode1">
+    <dgm:scene3d>
+      <a:camera prst="orthographicFront"/>
+      <a:lightRig rig="threePt" dir="t"/>
+    </dgm:scene3d>
+    <dgm:sp3d/>
+    <dgm:txPr/>
+    <dgm:style>
+      <a:lnRef idx="2">
+        <a:scrgbClr r="0" g="0" b="0"/>
+      </a:lnRef>
+      <a:fillRef idx="1">
+        <a:scrgbClr r="0" g="0" b="0"/>
+      </a:fillRef>
+      <a:effectRef idx="0">
+        <a:scrgbClr r="0" g="0" b="0"/>
+      </a:effectRef>
+      <a:fontRef idx="minor">
+        <a:schemeClr val="lt1"/>
+      </a:fontRef>
+    </dgm:style>
+  </dgm:styleLbl>
+  <dgm:styleLbl name="vennNode1">
+    <dgm:scene3d>
+      <a:camera prst="orthographicFront"/>
+      <a:lightRig rig="threePt" dir="t"/>
+    </dgm:scene3d>
+    <dgm:sp3d/>
+    <dgm:txPr/>
+    <dgm:style>
+      <a:lnRef idx="2">
+        <a:scrgbClr r="0" g="0" b="0"/>
+      </a:lnRef>
+      <a:fillRef idx="1">
+        <a:scrgbClr r="0" g="0" b="0"/>
+      </a:fillRef>
+      <a:effectRef idx="0">
+        <a:scrgbClr r="0" g="0" b="0"/>
+      </a:effectRef>
+      <a:fontRef idx="minor">
+        <a:schemeClr val="tx1"/>
+      </a:fontRef>
+    </dgm:style>
+  </dgm:styleLbl>
+  <dgm:styleLbl name="alignNode1">
+    <dgm:scene3d>
+      <a:camera prst="orthographicFront"/>
+      <a:lightRig rig="threePt" dir="t"/>
+    </dgm:scene3d>
+    <dgm:sp3d/>
+    <dgm:txPr/>
+    <dgm:style>
+      <a:lnRef idx="2">
+        <a:scrgbClr r="0" g="0" b="0"/>
+      </a:lnRef>
+      <a:fillRef idx="1">
+        <a:scrgbClr r="0" g="0" b="0"/>
+      </a:fillRef>
+      <a:effectRef idx="0">
+        <a:scrgbClr r="0" g="0" b="0"/>
+      </a:effectRef>
+      <a:fontRef idx="minor">
+        <a:schemeClr val="lt1"/>
+      </a:fontRef>
+    </dgm:style>
+  </dgm:styleLbl>
+  <dgm:styleLbl name="node1">
+    <dgm:scene3d>
+      <a:camera prst="orthographicFront"/>
+      <a:lightRig rig="threePt" dir="t"/>
+    </dgm:scene3d>
+    <dgm:sp3d/>
+    <dgm:txPr/>
+    <dgm:style>
+      <a:lnRef idx="2">
+        <a:scrgbClr r="0" g="0" b="0"/>
+      </a:lnRef>
+      <a:fillRef idx="1">
+        <a:scrgbClr r="0" g="0" b="0"/>
+      </a:fillRef>
+      <a:effectRef idx="0">
+        <a:scrgbClr r="0" g="0" b="0"/>
+      </a:effectRef>
+      <a:fontRef idx="minor">
+        <a:schemeClr val="lt1"/>
+      </a:fontRef>
+    </dgm:style>
+  </dgm:styleLbl>
+  <dgm:styleLbl name="node2">
+    <dgm:scene3d>
+      <a:camera prst="orthographicFront"/>
+      <a:lightRig rig="threePt" dir="t"/>
+    </dgm:scene3d>
+    <dgm:sp3d/>
+    <dgm:txPr/>
+    <dgm:style>
+      <a:lnRef idx="2">
+        <a:scrgbClr r="0" g="0" b="0"/>
+      </a:lnRef>
+      <a:fillRef idx="1">
+        <a:scrgbClr r="0" g="0" b="0"/>
+      </a:fillRef>
+      <a:effectRef idx="0">
+        <a:scrgbClr r="0" g="0" b="0"/>
+      </a:effectRef>
+      <a:fontRef idx="minor">
+        <a:schemeClr val="lt1"/>
+      </a:fontRef>
+    </dgm:style>
+  </dgm:styleLbl>
+  <dgm:styleLbl name="node3">
+    <dgm:scene3d>
+      <a:camera prst="orthographicFront"/>
+      <a:lightRig rig="threePt" dir="t"/>
+    </dgm:scene3d>
+    <dgm:sp3d/>
+    <dgm:txPr/>
+    <dgm:style>
+      <a:lnRef idx="2">
+        <a:scrgbClr r="0" g="0" b="0"/>
+      </a:lnRef>
+      <a:fillRef idx="1">
+        <a:scrgbClr r="0" g="0" b="0"/>
+      </a:fillRef>
+      <a:effectRef idx="0">
+        <a:scrgbClr r="0" g="0" b="0"/>
+      </a:effectRef>
+      <a:fontRef idx="minor">
+        <a:schemeClr val="lt1"/>
+      </a:fontRef>
+    </dgm:style>
+  </dgm:styleLbl>
+  <dgm:styleLbl name="node4">
+    <dgm:scene3d>
+      <a:camera prst="orthographicFront"/>
+      <a:lightRig rig="threePt" dir="t"/>
+    </dgm:scene3d>
+    <dgm:sp3d/>
+    <dgm:txPr/>
+    <dgm:style>
+      <a:lnRef idx="2">
+        <a:scrgbClr r="0" g="0" b="0"/>
+      </a:lnRef>
+      <a:fillRef idx="1">
+        <a:scrgbClr r="0" g="0" b="0"/>
+      </a:fillRef>
+      <a:effectRef idx="0">
+        <a:scrgbClr r="0" g="0" b="0"/>
+      </a:effectRef>
+      <a:fontRef idx="minor">
+        <a:schemeClr val="lt1"/>
+      </a:fontRef>
+    </dgm:style>
+  </dgm:styleLbl>
+  <dgm:styleLbl name="fgImgPlace1">
+    <dgm:scene3d>
+      <a:camera prst="orthographicFront"/>
+      <a:lightRig rig="threePt" dir="t"/>
+    </dgm:scene3d>
+    <dgm:sp3d/>
+    <dgm:txPr/>
+    <dgm:style>
+      <a:lnRef idx="2">
+        <a:scrgbClr r="0" g="0" b="0"/>
+      </a:lnRef>
+      <a:fillRef idx="1">
+        <a:scrgbClr r="0" g="0" b="0"/>
+      </a:fillRef>
+      <a:effectRef idx="0">
+        <a:scrgbClr r="0" g="0" b="0"/>
+      </a:effectRef>
+      <a:fontRef idx="minor"/>
+    </dgm:style>
+  </dgm:styleLbl>
+  <dgm:styleLbl name="alignImgPlace1">
+    <dgm:scene3d>
+      <a:camera prst="orthographicFront"/>
+      <a:lightRig rig="threePt" dir="t"/>
+    </dgm:scene3d>
+    <dgm:sp3d/>
+    <dgm:txPr/>
+    <dgm:style>
+      <a:lnRef idx="2">
+        <a:scrgbClr r="0" g="0" b="0"/>
+      </a:lnRef>
+      <a:fillRef idx="1">
+        <a:scrgbClr r="0" g="0" b="0"/>
+      </a:fillRef>
+      <a:effectRef idx="0">
+        <a:scrgbClr r="0" g="0" b="0"/>
+      </a:effectRef>
+      <a:fontRef idx="minor"/>
+    </dgm:style>
+  </dgm:styleLbl>
+  <dgm:styleLbl name="bgImgPlace1">
+    <dgm:scene3d>
+      <a:camera prst="orthographicFront"/>
+      <a:lightRig rig="threePt" dir="t"/>
+    </dgm:scene3d>
+    <dgm:sp3d/>
+    <dgm:txPr/>
+    <dgm:style>
+      <a:lnRef idx="2">
+        <a:scrgbClr r="0" g="0" b="0"/>
+      </a:lnRef>
+      <a:fillRef idx="1">
+        <a:scrgbClr r="0" g="0" b="0"/>
+      </a:fillRef>
+      <a:effectRef idx="0">
+        <a:scrgbClr r="0" g="0" b="0"/>
+      </a:effectRef>
+      <a:fontRef idx="minor"/>
+    </dgm:style>
+  </dgm:styleLbl>
+  <dgm:styleLbl name="sibTrans2D1">
+    <dgm:scene3d>
+      <a:camera prst="orthographicFront"/>
+      <a:lightRig rig="threePt" dir="t"/>
+    </dgm:scene3d>
+    <dgm:sp3d/>
+    <dgm:txPr/>
+    <dgm:style>
+      <a:lnRef idx="0">
+        <a:scrgbClr r="0" g="0" b="0"/>
+      </a:lnRef>
+      <a:fillRef idx="1">
+        <a:scrgbClr r="0" g="0" b="0"/>
+      </a:fillRef>
+      <a:effectRef idx="0">
+        <a:scrgbClr r="0" g="0" b="0"/>
+      </a:effectRef>
+      <a:fontRef idx="minor">
+        <a:schemeClr val="lt1"/>
+      </a:fontRef>
+    </dgm:style>
+  </dgm:styleLbl>
+  <dgm:styleLbl name="fgSibTrans2D1">
+    <dgm:scene3d>
+      <a:camera prst="orthographicFront"/>
+      <a:lightRig rig="threePt" dir="t"/>
+    </dgm:scene3d>
+    <dgm:sp3d/>
+    <dgm:txPr/>
+    <dgm:style>
+      <a:lnRef idx="0">
+        <a:scrgbClr r="0" g="0" b="0"/>
+      </a:lnRef>
+      <a:fillRef idx="1">
+        <a:scrgbClr r="0" g="0" b="0"/>
+      </a:fillRef>
+      <a:effectRef idx="0">
+        <a:scrgbClr r="0" g="0" b="0"/>
+      </a:effectRef>
+      <a:fontRef idx="minor">
+        <a:schemeClr val="lt1"/>
+      </a:fontRef>
+    </dgm:style>
+  </dgm:styleLbl>
+  <dgm:styleLbl name="bgSibTrans2D1">
+    <dgm:scene3d>
+      <a:camera prst="orthographicFront"/>
+      <a:lightRig rig="threePt" dir="t"/>
+    </dgm:scene3d>
+    <dgm:sp3d/>
+    <dgm:txPr/>
+    <dgm:style>
+      <a:lnRef idx="0">
+        <a:scrgbClr r="0" g="0" b="0"/>
+      </a:lnRef>
+      <a:fillRef idx="1">
+        <a:scrgbClr r="0" g="0" b="0"/>
+      </a:fillRef>
+      <a:effectRef idx="0">
+        <a:scrgbClr r="0" g="0" b="0"/>
+      </a:effectRef>
+      <a:fontRef idx="minor">
+        <a:schemeClr val="lt1"/>
+      </a:fontRef>
+    </dgm:style>
+  </dgm:styleLbl>
+  <dgm:styleLbl name="sibTrans1D1">
+    <dgm:scene3d>
+      <a:camera prst="orthographicFront"/>
+      <a:lightRig rig="threePt" dir="t"/>
+    </dgm:scene3d>
+    <dgm:sp3d/>
+    <dgm:txPr/>
+    <dgm:style>
+      <a:lnRef idx="1">
+        <a:scrgbClr r="0" g="0" b="0"/>
+      </a:lnRef>
+      <a:fillRef idx="0">
+        <a:scrgbClr r="0" g="0" b="0"/>
+      </a:fillRef>
+      <a:effectRef idx="0">
+        <a:scrgbClr r="0" g="0" b="0"/>
+      </a:effectRef>
+      <a:fontRef idx="minor"/>
+    </dgm:style>
+  </dgm:styleLbl>
+  <dgm:styleLbl name="callout">
+    <dgm:scene3d>
+      <a:camera prst="orthographicFront"/>
+      <a:lightRig rig="threePt" dir="t"/>
+    </dgm:scene3d>
+    <dgm:sp3d/>
+    <dgm:txPr/>
+    <dgm:style>
+      <a:lnRef idx="2">
+        <a:scrgbClr r="0" g="0" b="0"/>
+      </a:lnRef>
+      <a:fillRef idx="1">
+        <a:scrgbClr r="0" g="0" b="0"/>
+      </a:fillRef>
+      <a:effectRef idx="0">
+        <a:scrgbClr r="0" g="0" b="0"/>
+      </a:effectRef>
+      <a:fontRef idx="minor"/>
+    </dgm:style>
+  </dgm:styleLbl>
+  <dgm:styleLbl name="asst0">
+    <dgm:scene3d>
+      <a:camera prst="orthographicFront"/>
+      <a:lightRig rig="threePt" dir="t"/>
+    </dgm:scene3d>
+    <dgm:sp3d/>
+    <dgm:txPr/>
+    <dgm:style>
+      <a:lnRef idx="2">
+        <a:scrgbClr r="0" g="0" b="0"/>
+      </a:lnRef>
+      <a:fillRef idx="1">
+        <a:scrgbClr r="0" g="0" b="0"/>
+      </a:fillRef>
+      <a:effectRef idx="0">
+        <a:scrgbClr r="0" g="0" b="0"/>
+      </a:effectRef>
+      <a:fontRef idx="minor">
+        <a:schemeClr val="lt1"/>
+      </a:fontRef>
+    </dgm:style>
+  </dgm:styleLbl>
+  <dgm:styleLbl name="asst1">
+    <dgm:scene3d>
+      <a:camera prst="orthographicFront"/>
+      <a:lightRig rig="threePt" dir="t"/>
+    </dgm:scene3d>
+    <dgm:sp3d/>
+    <dgm:txPr/>
+    <dgm:style>
+      <a:lnRef idx="2">
+        <a:scrgbClr r="0" g="0" b="0"/>
+      </a:lnRef>
+      <a:fillRef idx="1">
+        <a:scrgbClr r="0" g="0" b="0"/>
+      </a:fillRef>
+      <a:effectRef idx="0">
+        <a:scrgbClr r="0" g="0" b="0"/>
+      </a:effectRef>
+      <a:fontRef idx="minor">
+        <a:schemeClr val="lt1"/>
+      </a:fontRef>
+    </dgm:style>
+  </dgm:styleLbl>
+  <dgm:styleLbl name="asst2">
+    <dgm:scene3d>
+      <a:camera prst="orthographicFront"/>
+      <a:lightRig rig="threePt" dir="t"/>
+    </dgm:scene3d>
+    <dgm:sp3d/>
+    <dgm:txPr/>
+    <dgm:style>
+      <a:lnRef idx="2">
+        <a:scrgbClr r="0" g="0" b="0"/>
+      </a:lnRef>
+      <a:fillRef idx="1">
+        <a:scrgbClr r="0" g="0" b="0"/>
+      </a:fillRef>
+      <a:effectRef idx="0">
+        <a:scrgbClr r="0" g="0" b="0"/>
+      </a:effectRef>
+      <a:fontRef idx="minor">
+        <a:schemeClr val="lt1"/>
+      </a:fontRef>
+    </dgm:style>
+  </dgm:styleLbl>
+  <dgm:styleLbl name="asst3">
+    <dgm:scene3d>
+      <a:camera prst="orthographicFront"/>
+      <a:lightRig rig="threePt" dir="t"/>
+    </dgm:scene3d>
+    <dgm:sp3d/>
+    <dgm:txPr/>
+    <dgm:style>
+      <a:lnRef idx="2">
+        <a:scrgbClr r="0" g="0" b="0"/>
+      </a:lnRef>
+      <a:fillRef idx="1">
+        <a:scrgbClr r="0" g="0" b="0"/>
+      </a:fillRef>
+      <a:effectRef idx="0">
+        <a:scrgbClr r="0" g="0" b="0"/>
+      </a:effectRef>
+      <a:fontRef idx="minor">
+        <a:schemeClr val="lt1"/>
+      </a:fontRef>
+    </dgm:style>
+  </dgm:styleLbl>
+  <dgm:styleLbl name="asst4">
+    <dgm:scene3d>
+      <a:camera prst="orthographicFront"/>
+      <a:lightRig rig="threePt" dir="t"/>
+    </dgm:scene3d>
+    <dgm:sp3d/>
+    <dgm:txPr/>
+    <dgm:style>
+      <a:lnRef idx="2">
+        <a:scrgbClr r="0" g="0" b="0"/>
+      </a:lnRef>
+      <a:fillRef idx="1">
+        <a:scrgbClr r="0" g="0" b="0"/>
+      </a:fillRef>
+      <a:effectRef idx="0">
+        <a:scrgbClr r="0" g="0" b="0"/>
+      </a:effectRef>
+      <a:fontRef idx="minor">
+        <a:schemeClr val="lt1"/>
+      </a:fontRef>
+    </dgm:style>
+  </dgm:styleLbl>
+  <dgm:styleLbl name="parChTrans2D1">
+    <dgm:scene3d>
+      <a:camera prst="orthographicFront"/>
+      <a:lightRig rig="threePt" dir="t"/>
+    </dgm:scene3d>
+    <dgm:sp3d/>
+    <dgm:txPr/>
+    <dgm:style>
+      <a:lnRef idx="2">
+        <a:scrgbClr r="0" g="0" b="0"/>
+      </a:lnRef>
+      <a:fillRef idx="1">
+        <a:scrgbClr r="0" g="0" b="0"/>
+      </a:fillRef>
+      <a:effectRef idx="0">
+        <a:scrgbClr r="0" g="0" b="0"/>
+      </a:effectRef>
+      <a:fontRef idx="minor">
+        <a:schemeClr val="lt1"/>
+      </a:fontRef>
+    </dgm:style>
+  </dgm:styleLbl>
+  <dgm:styleLbl name="parChTrans2D2">
+    <dgm:scene3d>
+      <a:camera prst="orthographicFront"/>
+      <a:lightRig rig="threePt" dir="t"/>
+    </dgm:scene3d>
+    <dgm:sp3d/>
+    <dgm:txPr/>
+    <dgm:style>
+      <a:lnRef idx="2">
+        <a:scrgbClr r="0" g="0" b="0"/>
+      </a:lnRef>
+      <a:fillRef idx="1">
+        <a:scrgbClr r="0" g="0" b="0"/>
+      </a:fillRef>
+      <a:effectRef idx="0">
+        <a:scrgbClr r="0" g="0" b="0"/>
+      </a:effectRef>
+      <a:fontRef idx="minor">
+        <a:schemeClr val="lt1"/>
+      </a:fontRef>
+    </dgm:style>
+  </dgm:styleLbl>
+  <dgm:styleLbl name="parChTrans2D3">
+    <dgm:scene3d>
+      <a:camera prst="orthographicFront"/>
+      <a:lightRig rig="threePt" dir="t"/>
+    </dgm:scene3d>
+    <dgm:sp3d/>
+    <dgm:txPr/>
+    <dgm:style>
+      <a:lnRef idx="2">
+        <a:scrgbClr r="0" g="0" b="0"/>
+      </a:lnRef>
+      <a:fillRef idx="1">
+        <a:scrgbClr r="0" g="0" b="0"/>
+      </a:fillRef>
+      <a:effectRef idx="0">
+        <a:scrgbClr r="0" g="0" b="0"/>
+      </a:effectRef>
+      <a:fontRef idx="minor">
+        <a:schemeClr val="lt1"/>
+      </a:fontRef>
+    </dgm:style>
+  </dgm:styleLbl>
+  <dgm:styleLbl name="parChTrans2D4">
+    <dgm:scene3d>
+      <a:camera prst="orthographicFront"/>
+      <a:lightRig rig="threePt" dir="t"/>
+    </dgm:scene3d>
+    <dgm:sp3d/>
+    <dgm:txPr/>
+    <dgm:style>
+      <a:lnRef idx="2">
+        <a:scrgbClr r="0" g="0" b="0"/>
+      </a:lnRef>
+      <a:fillRef idx="1">
+        <a:scrgbClr r="0" g="0" b="0"/>
+      </a:fillRef>
+      <a:effectRef idx="0">
+        <a:scrgbClr r="0" g="0" b="0"/>
+      </a:effectRef>
+      <a:fontRef idx="minor">
+        <a:schemeClr val="lt1"/>
+      </a:fontRef>
+    </dgm:style>
+  </dgm:styleLbl>
+  <dgm:styleLbl name="parChTrans1D1">
+    <dgm:scene3d>
+      <a:camera prst="orthographicFront"/>
+      <a:lightRig rig="threePt" dir="t"/>
+    </dgm:scene3d>
+    <dgm:sp3d/>
+    <dgm:txPr/>
+    <dgm:style>
+      <a:lnRef idx="2">
+        <a:scrgbClr r="0" g="0" b="0"/>
+      </a:lnRef>
+      <a:fillRef idx="0">
+        <a:scrgbClr r="0" g="0" b="0"/>
+      </a:fillRef>
+      <a:effectRef idx="0">
+        <a:scrgbClr r="0" g="0" b="0"/>
+      </a:effectRef>
+      <a:fontRef idx="minor"/>
+    </dgm:style>
+  </dgm:styleLbl>
+  <dgm:styleLbl name="parChTrans1D2">
+    <dgm:scene3d>
+      <a:camera prst="orthographicFront"/>
+      <a:lightRig rig="threePt" dir="t"/>
+    </dgm:scene3d>
+    <dgm:sp3d/>
+    <dgm:txPr/>
+    <dgm:style>
+      <a:lnRef idx="2">
+        <a:scrgbClr r="0" g="0" b="0"/>
+      </a:lnRef>
+      <a:fillRef idx="0">
+        <a:scrgbClr r="0" g="0" b="0"/>
+      </a:fillRef>
+      <a:effectRef idx="0">
+        <a:scrgbClr r="0" g="0" b="0"/>
+      </a:effectRef>
+      <a:fontRef idx="minor"/>
+    </dgm:style>
+  </dgm:styleLbl>
+  <dgm:styleLbl name="parChTrans1D3">
+    <dgm:scene3d>
+      <a:camera prst="orthographicFront"/>
+      <a:lightRig rig="threePt" dir="t"/>
+    </dgm:scene3d>
+    <dgm:sp3d/>
+    <dgm:txPr/>
+    <dgm:style>
+      <a:lnRef idx="2">
+        <a:scrgbClr r="0" g="0" b="0"/>
+      </a:lnRef>
+      <a:fillRef idx="0">
+        <a:scrgbClr r="0" g="0" b="0"/>
+      </a:fillRef>
+      <a:effectRef idx="0">
+        <a:scrgbClr r="0" g="0" b="0"/>
+      </a:effectRef>
+      <a:fontRef idx="minor"/>
+    </dgm:style>
+  </dgm:styleLbl>
+  <dgm:styleLbl name="parChTrans1D4">
+    <dgm:scene3d>
+      <a:camera prst="orthographicFront"/>
+      <a:lightRig rig="threePt" dir="t"/>
+    </dgm:scene3d>
+    <dgm:sp3d/>
+    <dgm:txPr/>
+    <dgm:style>
+      <a:lnRef idx="2">
+        <a:scrgbClr r="0" g="0" b="0"/>
+      </a:lnRef>
+      <a:fillRef idx="0">
+        <a:scrgbClr r="0" g="0" b="0"/>
+      </a:fillRef>
+      <a:effectRef idx="0">
+        <a:scrgbClr r="0" g="0" b="0"/>
+      </a:effectRef>
+      <a:fontRef idx="minor"/>
+    </dgm:style>
+  </dgm:styleLbl>
+  <dgm:styleLbl name="fgAcc1">
+    <dgm:scene3d>
+      <a:camera prst="orthographicFront"/>
+      <a:lightRig rig="threePt" dir="t"/>
+    </dgm:scene3d>
+    <dgm:sp3d/>
+    <dgm:txPr/>
+    <dgm:style>
+      <a:lnRef idx="2">
+        <a:scrgbClr r="0" g="0" b="0"/>
+      </a:lnRef>
+      <a:fillRef idx="1">
+        <a:scrgbClr r="0" g="0" b="0"/>
+      </a:fillRef>
+      <a:effectRef idx="0">
+        <a:scrgbClr r="0" g="0" b="0"/>
+      </a:effectRef>
+      <a:fontRef idx="minor"/>
+    </dgm:style>
+  </dgm:styleLbl>
+  <dgm:styleLbl name="conFgAcc1">
+    <dgm:scene3d>
+      <a:camera prst="orthographicFront"/>
+      <a:lightRig rig="threePt" dir="t"/>
+    </dgm:scene3d>
+    <dgm:sp3d/>
+    <dgm:txPr/>
+    <dgm:style>
+      <a:lnRef idx="2">
+        <a:scrgbClr r="0" g="0" b="0"/>
+      </a:lnRef>
+      <a:fillRef idx="1">
+        <a:scrgbClr r="0" g="0" b="0"/>
+      </a:fillRef>
+      <a:effectRef idx="0">
+        <a:scrgbClr r="0" g="0" b="0"/>
+      </a:effectRef>
+      <a:fontRef idx="minor"/>
+    </dgm:style>
+  </dgm:styleLbl>
+  <dgm:styleLbl name="alignAcc1">
+    <dgm:scene3d>
+      <a:camera prst="orthographicFront"/>
+      <a:lightRig rig="threePt" dir="t"/>
+    </dgm:scene3d>
+    <dgm:sp3d/>
+    <dgm:txPr/>
+    <dgm:style>
+      <a:lnRef idx="2">
+        <a:scrgbClr r="0" g="0" b="0"/>
+      </a:lnRef>
+      <a:fillRef idx="1">
+        <a:scrgbClr r="0" g="0" b="0"/>
+      </a:fillRef>
+      <a:effectRef idx="0">
+        <a:scrgbClr r="0" g="0" b="0"/>
+      </a:effectRef>
+      <a:fontRef idx="minor"/>
+    </dgm:style>
+  </dgm:styleLbl>
+  <dgm:styleLbl name="trAlignAcc1">
+    <dgm:scene3d>
+      <a:camera prst="orthographicFront"/>
+      <a:lightRig rig="threePt" dir="t"/>
+    </dgm:scene3d>
+    <dgm:sp3d/>
+    <dgm:txPr/>
+    <dgm:style>
+      <a:lnRef idx="1">
+        <a:scrgbClr r="0" g="0" b="0"/>
+      </a:lnRef>
+      <a:fillRef idx="1">
+        <a:scrgbClr r="0" g="0" b="0"/>
+      </a:fillRef>
+      <a:effectRef idx="0">
+        <a:scrgbClr r="0" g="0" b="0"/>
+      </a:effectRef>
+      <a:fontRef idx="minor"/>
+    </dgm:style>
+  </dgm:styleLbl>
+  <dgm:styleLbl name="bgAcc1">
+    <dgm:scene3d>
+      <a:camera prst="orthographicFront"/>
+      <a:lightRig rig="threePt" dir="t"/>
+    </dgm:scene3d>
+    <dgm:sp3d/>
+    <dgm:txPr/>
+    <dgm:style>
+      <a:lnRef idx="2">
+        <a:scrgbClr r="0" g="0" b="0"/>
+      </a:lnRef>
+      <a:fillRef idx="1">
+        <a:scrgbClr r="0" g="0" b="0"/>
+      </a:fillRef>
+      <a:effectRef idx="0">
+        <a:scrgbClr r="0" g="0" b="0"/>
+      </a:effectRef>
+      <a:fontRef idx="minor"/>
+    </dgm:style>
+  </dgm:styleLbl>
+  <dgm:styleLbl name="solidFgAcc1">
+    <dgm:scene3d>
+      <a:camera prst="orthographicFront"/>
+      <a:lightRig rig="threePt" dir="t"/>
+    </dgm:scene3d>
+    <dgm:sp3d/>
+    <dgm:txPr/>
+    <dgm:style>
+      <a:lnRef idx="2">
+        <a:scrgbClr r="0" g="0" b="0"/>
+      </a:lnRef>
+      <a:fillRef idx="1">
+        <a:scrgbClr r="0" g="0" b="0"/>
+      </a:fillRef>
+      <a:effectRef idx="0">
+        <a:scrgbClr r="0" g="0" b="0"/>
+      </a:effectRef>
+      <a:fontRef idx="minor"/>
+    </dgm:style>
+  </dgm:styleLbl>
+  <dgm:styleLbl name="solidAlignAcc1">
+    <dgm:scene3d>
+      <a:camera prst="orthographicFront"/>
+      <a:lightRig rig="threePt" dir="t"/>
+    </dgm:scene3d>
+    <dgm:sp3d/>
+    <dgm:txPr/>
+    <dgm:style>
+      <a:lnRef idx="2">
+        <a:scrgbClr r="0" g="0" b="0"/>
+      </a:lnRef>
+      <a:fillRef idx="1">
+        <a:scrgbClr r="0" g="0" b="0"/>
+      </a:fillRef>
+      <a:effectRef idx="0">
+        <a:scrgbClr r="0" g="0" b="0"/>
+      </a:effectRef>
+      <a:fontRef idx="minor"/>
+    </dgm:style>
+  </dgm:styleLbl>
+  <dgm:styleLbl name="solidBgAcc1">
+    <dgm:scene3d>
+      <a:camera prst="orthographicFront"/>
+      <a:lightRig rig="threePt" dir="t"/>
+    </dgm:scene3d>
+    <dgm:sp3d/>
+    <dgm:txPr/>
+    <dgm:style>
+      <a:lnRef idx="2">
+        <a:scrgbClr r="0" g="0" b="0"/>
+      </a:lnRef>
+      <a:fillRef idx="1">
+        <a:scrgbClr r="0" g="0" b="0"/>
+      </a:fillRef>
+      <a:effectRef idx="0">
+        <a:scrgbClr r="0" g="0" b="0"/>
+      </a:effectRef>
+      <a:fontRef idx="minor"/>
+    </dgm:style>
+  </dgm:styleLbl>
+  <dgm:styleLbl name="fgAccFollowNode1">
+    <dgm:scene3d>
+      <a:camera prst="orthographicFront"/>
+      <a:lightRig rig="threePt" dir="t"/>
+    </dgm:scene3d>
+    <dgm:sp3d/>
+    <dgm:txPr/>
+    <dgm:style>
+      <a:lnRef idx="2">
+        <a:scrgbClr r="0" g="0" b="0"/>
+      </a:lnRef>
+      <a:fillRef idx="1">
+        <a:scrgbClr r="0" g="0" b="0"/>
+      </a:fillRef>
+      <a:effectRef idx="0">
+        <a:scrgbClr r="0" g="0" b="0"/>
+      </a:effectRef>
+      <a:fontRef idx="minor"/>
+    </dgm:style>
+  </dgm:styleLbl>
+  <dgm:styleLbl name="alignAccFollowNode1">
+    <dgm:scene3d>
+      <a:camera prst="orthographicFront"/>
+      <a:lightRig rig="threePt" dir="t"/>
+    </dgm:scene3d>
+    <dgm:sp3d/>
+    <dgm:txPr/>
+    <dgm:style>
+      <a:lnRef idx="2">
+        <a:scrgbClr r="0" g="0" b="0"/>
+      </a:lnRef>
+      <a:fillRef idx="1">
+        <a:scrgbClr r="0" g="0" b="0"/>
+      </a:fillRef>
+      <a:effectRef idx="0">
+        <a:scrgbClr r="0" g="0" b="0"/>
+      </a:effectRef>
+      <a:fontRef idx="minor"/>
+    </dgm:style>
+  </dgm:styleLbl>
+  <dgm:styleLbl name="bgAccFollowNode1">
+    <dgm:scene3d>
+      <a:camera prst="orthographicFront"/>
+      <a:lightRig rig="threePt" dir="t"/>
+    </dgm:scene3d>
+    <dgm:sp3d/>
+    <dgm:txPr/>
+    <dgm:style>
+      <a:lnRef idx="2">
+        <a:scrgbClr r="0" g="0" b="0"/>
+      </a:lnRef>
+      <a:fillRef idx="1">
+        <a:scrgbClr r="0" g="0" b="0"/>
+      </a:fillRef>
+      <a:effectRef idx="0">
+        <a:scrgbClr r="0" g="0" b="0"/>
+      </a:effectRef>
+      <a:fontRef idx="minor"/>
+    </dgm:style>
+  </dgm:styleLbl>
+  <dgm:styleLbl name="fgAcc0">
+    <dgm:scene3d>
+      <a:camera prst="orthographicFront"/>
+      <a:lightRig rig="threePt" dir="t"/>
+    </dgm:scene3d>
+    <dgm:sp3d/>
+    <dgm:txPr/>
+    <dgm:style>
+      <a:lnRef idx="2">
+        <a:scrgbClr r="0" g="0" b="0"/>
+      </a:lnRef>
+      <a:fillRef idx="1">
+        <a:scrgbClr r="0" g="0" b="0"/>
+      </a:fillRef>
+      <a:effectRef idx="0">
+        <a:scrgbClr r="0" g="0" b="0"/>
+      </a:effectRef>
+      <a:fontRef idx="minor"/>
+    </dgm:style>
+  </dgm:styleLbl>
+  <dgm:styleLbl name="fgAcc2">
+    <dgm:scene3d>
+      <a:camera prst="orthographicFront"/>
+      <a:lightRig rig="threePt" dir="t"/>
+    </dgm:scene3d>
+    <dgm:sp3d/>
+    <dgm:txPr/>
+    <dgm:style>
+      <a:lnRef idx="2">
+        <a:scrgbClr r="0" g="0" b="0"/>
+      </a:lnRef>
+      <a:fillRef idx="1">
+        <a:scrgbClr r="0" g="0" b="0"/>
+      </a:fillRef>
+      <a:effectRef idx="0">
+        <a:scrgbClr r="0" g="0" b="0"/>
+      </a:effectRef>
+      <a:fontRef idx="minor"/>
+    </dgm:style>
+  </dgm:styleLbl>
+  <dgm:styleLbl name="fgAcc3">
+    <dgm:scene3d>
+      <a:camera prst="orthographicFront"/>
+      <a:lightRig rig="threePt" dir="t"/>
+    </dgm:scene3d>
+    <dgm:sp3d/>
+    <dgm:txPr/>
+    <dgm:style>
+      <a:lnRef idx="2">
+        <a:scrgbClr r="0" g="0" b="0"/>
+      </a:lnRef>
+      <a:fillRef idx="1">
+        <a:scrgbClr r="0" g="0" b="0"/>
+      </a:fillRef>
+      <a:effectRef idx="0">
+        <a:scrgbClr r="0" g="0" b="0"/>
+      </a:effectRef>
+      <a:fontRef idx="minor"/>
+    </dgm:style>
+  </dgm:styleLbl>
+  <dgm:styleLbl name="fgAcc4">
+    <dgm:scene3d>
+      <a:camera prst="orthographicFront"/>
+      <a:lightRig rig="threePt" dir="t"/>
+    </dgm:scene3d>
+    <dgm:sp3d/>
+    <dgm:txPr/>
+    <dgm:style>
+      <a:lnRef idx="2">
+        <a:scrgbClr r="0" g="0" b="0"/>
+      </a:lnRef>
+      <a:fillRef idx="1">
+        <a:scrgbClr r="0" g="0" b="0"/>
+      </a:fillRef>
+      <a:effectRef idx="0">
+        <a:scrgbClr r="0" g="0" b="0"/>
+      </a:effectRef>
+      <a:fontRef idx="minor"/>
+    </dgm:style>
+  </dgm:styleLbl>
+  <dgm:styleLbl name="bgShp">
+    <dgm:scene3d>
+      <a:camera prst="orthographicFront"/>
+      <a:lightRig rig="threePt" dir="t"/>
+    </dgm:scene3d>
+    <dgm:sp3d/>
+    <dgm:txPr/>
+    <dgm:style>
+      <a:lnRef idx="0">
+        <a:scrgbClr r="0" g="0" b="0"/>
+      </a:lnRef>
+      <a:fillRef idx="1">
+        <a:scrgbClr r="0" g="0" b="0"/>
+      </a:fillRef>
+      <a:effectRef idx="0">
+        <a:scrgbClr r="0" g="0" b="0"/>
+      </a:effectRef>
+      <a:fontRef idx="minor"/>
+    </dgm:style>
+  </dgm:styleLbl>
+  <dgm:styleLbl name="dkBgShp">
+    <dgm:scene3d>
+      <a:camera prst="orthographicFront"/>
+      <a:lightRig rig="threePt" dir="t"/>
+    </dgm:scene3d>
+    <dgm:sp3d/>
+    <dgm:txPr/>
+    <dgm:style>
+      <a:lnRef idx="0">
+        <a:scrgbClr r="0" g="0" b="0"/>
+      </a:lnRef>
+      <a:fillRef idx="1">
+        <a:scrgbClr r="0" g="0" b="0"/>
+      </a:fillRef>
+      <a:effectRef idx="0">
+        <a:scrgbClr r="0" g="0" b="0"/>
+      </a:effectRef>
+      <a:fontRef idx="minor"/>
+    </dgm:style>
+  </dgm:styleLbl>
+  <dgm:styleLbl name="trBgShp">
+    <dgm:scene3d>
+      <a:camera prst="orthographicFront"/>
+      <a:lightRig rig="threePt" dir="t"/>
+    </dgm:scene3d>
+    <dgm:sp3d/>
+    <dgm:txPr/>
+    <dgm:style>
+      <a:lnRef idx="0">
+        <a:scrgbClr r="0" g="0" b="0"/>
+      </a:lnRef>
+      <a:fillRef idx="1">
+        <a:scrgbClr r="0" g="0" b="0"/>
+      </a:fillRef>
+      <a:effectRef idx="0">
+        <a:scrgbClr r="0" g="0" b="0"/>
+      </a:effectRef>
+      <a:fontRef idx="minor"/>
+    </dgm:style>
+  </dgm:styleLbl>
+  <dgm:styleLbl name="fgShp">
+    <dgm:scene3d>
+      <a:camera prst="orthographicFront"/>
+      <a:lightRig rig="threePt" dir="t"/>
+    </dgm:scene3d>
+    <dgm:sp3d/>
+    <dgm:txPr/>
+    <dgm:style>
+      <a:lnRef idx="2">
+        <a:scrgbClr r="0" g="0" b="0"/>
+      </a:lnRef>
+      <a:fillRef idx="1">
+        <a:scrgbClr r="0" g="0" b="0"/>
+      </a:fillRef>
+      <a:effectRef idx="0">
+        <a:scrgbClr r="0" g="0" b="0"/>
+      </a:effectRef>
+      <a:fontRef idx="minor"/>
+    </dgm:style>
+  </dgm:styleLbl>
+  <dgm:styleLbl name="revTx">
+    <dgm:scene3d>
+      <a:camera prst="orthographicFront"/>
+      <a:lightRig rig="threePt" dir="t"/>
+    </dgm:scene3d>
+    <dgm:sp3d/>
+    <dgm:txPr/>
+    <dgm:style>
+      <a:lnRef idx="0">
+        <a:scrgbClr r="0" g="0" b="0"/>
+      </a:lnRef>
+      <a:fillRef idx="0">
+        <a:scrgbClr r="0" g="0" b="0"/>
+      </a:fillRef>
+      <a:effectRef idx="0">
+        <a:scrgbClr r="0" g="0" b="0"/>
+      </a:effectRef>
+      <a:fontRef idx="minor"/>
+    </dgm:style>
+  </dgm:styleLbl>
+</dgm:styleDef>
+</file>
+
 <file path=ppt/notesMasters/notesMaster1.xml><?xml version="1.0" encoding="utf-8"?>
 <p:notesMaster xmlns:a="http://schemas.openxmlformats.org/drawingml/2006/main" xmlns:r="http://schemas.openxmlformats.org/officeDocument/2006/relationships" xmlns:p="http://schemas.openxmlformats.org/presentationml/2006/main">
   <p:cSld>
@@ -239,7 +3016,7 @@
             <a:fld id="{66C520B4-85AA-9542-8CF7-3D2DDCE6041D}" type="datetimeFigureOut">
               <a:rPr lang="en-US" smtClean="0"/>
               <a:pPr/>
-              <a:t>10/1/2025</a:t>
+              <a:t>10/2/2025</a:t>
             </a:fld>
             <a:endParaRPr lang="en-US"/>
           </a:p>
@@ -969,7 +3746,7 @@
           <a:bodyPr/>
           <a:lstStyle/>
           <a:p>
-            <a:endParaRPr lang="en-US" dirty="0"/>
+            <a:endParaRPr lang="zh-CN" altLang="en-US" dirty="0"/>
           </a:p>
         </p:txBody>
       </p:sp>
@@ -988,19 +3765,78 @@
           <a:bodyPr/>
           <a:lstStyle/>
           <a:p>
+            <a:pPr marL="0" marR="0" lvl="0" indent="0" algn="r" defTabSz="914400" rtl="0" eaLnBrk="1" fontAlgn="auto" latinLnBrk="0" hangingPunct="1">
+              <a:lnSpc>
+                <a:spcPct val="100000"/>
+              </a:lnSpc>
+              <a:spcBef>
+                <a:spcPts val="0"/>
+              </a:spcBef>
+              <a:spcAft>
+                <a:spcPts val="0"/>
+              </a:spcAft>
+              <a:buClrTx/>
+              <a:buSzTx/>
+              <a:buFontTx/>
+              <a:buNone/>
+              <a:tabLst/>
+              <a:defRPr/>
+            </a:pPr>
             <a:fld id="{56507943-197E-CE46-82F0-5A323A24AE7A}" type="slidenum">
-              <a:rPr lang="en-US" smtClean="0"/>
-              <a:pPr/>
-              <a:t>27</a:t>
+              <a:rPr kumimoji="0" lang="en-US" sz="1200" b="0" i="0" u="none" strike="noStrike" kern="1200" cap="none" spc="0" normalizeH="0" baseline="0" noProof="0" smtClean="0">
+                <a:ln>
+                  <a:noFill/>
+                </a:ln>
+                <a:solidFill>
+                  <a:prstClr val="black"/>
+                </a:solidFill>
+                <a:effectLst/>
+                <a:uLnTx/>
+                <a:uFillTx/>
+                <a:latin typeface="Calibri"/>
+                <a:ea typeface="+mn-ea"/>
+                <a:cs typeface="+mn-cs"/>
+              </a:rPr>
+              <a:pPr marL="0" marR="0" lvl="0" indent="0" algn="r" defTabSz="914400" rtl="0" eaLnBrk="1" fontAlgn="auto" latinLnBrk="0" hangingPunct="1">
+                <a:lnSpc>
+                  <a:spcPct val="100000"/>
+                </a:lnSpc>
+                <a:spcBef>
+                  <a:spcPts val="0"/>
+                </a:spcBef>
+                <a:spcAft>
+                  <a:spcPts val="0"/>
+                </a:spcAft>
+                <a:buClrTx/>
+                <a:buSzTx/>
+                <a:buFontTx/>
+                <a:buNone/>
+                <a:tabLst/>
+                <a:defRPr/>
+              </a:pPr>
+              <a:t>28</a:t>
             </a:fld>
-            <a:endParaRPr lang="en-US"/>
+            <a:endParaRPr kumimoji="0" lang="en-US" sz="1200" b="0" i="0" u="none" strike="noStrike" kern="1200" cap="none" spc="0" normalizeH="0" baseline="0" noProof="0">
+              <a:ln>
+                <a:noFill/>
+              </a:ln>
+              <a:solidFill>
+                <a:prstClr val="black"/>
+              </a:solidFill>
+              <a:effectLst/>
+              <a:uLnTx/>
+              <a:uFillTx/>
+              <a:latin typeface="Calibri"/>
+              <a:ea typeface="+mn-ea"/>
+              <a:cs typeface="+mn-cs"/>
+            </a:endParaRPr>
           </a:p>
         </p:txBody>
       </p:sp>
     </p:spTree>
     <p:extLst>
       <p:ext uri="{BB962C8B-B14F-4D97-AF65-F5344CB8AC3E}">
-        <p14:creationId xmlns:p14="http://schemas.microsoft.com/office/powerpoint/2010/main" val="2956007665"/>
+        <p14:creationId xmlns:p14="http://schemas.microsoft.com/office/powerpoint/2010/main" val="2089123374"/>
       </p:ext>
     </p:extLst>
   </p:cSld>
@@ -1248,7 +4084,7 @@
           <a:p>
             <a:fld id="{06A0FD2F-556E-43A6-BD1A-AE05D71D5ACE}" type="datetime1">
               <a:rPr lang="en-US" smtClean="0"/>
-              <a:t>10/1/2025</a:t>
+              <a:t>10/2/2025</a:t>
             </a:fld>
             <a:endParaRPr lang="en-US"/>
           </a:p>
@@ -1452,7 +4288,7 @@
           <a:p>
             <a:fld id="{A0F15864-78C5-4237-8A12-0D1FD4E5F0BD}" type="datetime1">
               <a:rPr lang="en-US" smtClean="0"/>
-              <a:t>10/1/2025</a:t>
+              <a:t>10/2/2025</a:t>
             </a:fld>
             <a:endParaRPr lang="en-US"/>
           </a:p>
@@ -1815,7 +4651,7 @@
           <a:p>
             <a:fld id="{AB9BBA17-EAD5-43A8-9481-F99B1E8564DB}" type="datetime1">
               <a:rPr lang="en-US" smtClean="0"/>
-              <a:t>10/1/2025</a:t>
+              <a:t>10/2/2025</a:t>
             </a:fld>
             <a:endParaRPr lang="en-US"/>
           </a:p>
@@ -2127,7 +4963,7 @@
           <a:p>
             <a:fld id="{C6B0FEA4-C6CA-4262-94C7-989766AA3A47}" type="datetime1">
               <a:rPr lang="en-US" smtClean="0"/>
-              <a:t>10/1/2025</a:t>
+              <a:t>10/2/2025</a:t>
             </a:fld>
             <a:endParaRPr lang="en-US"/>
           </a:p>
@@ -2326,7 +5162,7 @@
           <a:p>
             <a:fld id="{6F65A5F7-BE7B-4360-B821-FCDB8E9197AC}" type="datetime1">
               <a:rPr lang="en-US" smtClean="0"/>
-              <a:t>10/1/2025</a:t>
+              <a:t>10/2/2025</a:t>
             </a:fld>
             <a:endParaRPr lang="en-US"/>
           </a:p>
@@ -2639,7 +5475,7 @@
           <a:p>
             <a:fld id="{6145D492-0F60-495A-BAAC-3C877C1D64A2}" type="datetime1">
               <a:rPr lang="en-US" smtClean="0"/>
-              <a:t>10/1/2025</a:t>
+              <a:t>10/2/2025</a:t>
             </a:fld>
             <a:endParaRPr lang="en-US"/>
           </a:p>
@@ -2893,7 +5729,7 @@
           <a:p>
             <a:fld id="{4A322FED-C97B-4E3C-B05B-1278829CCA0F}" type="datetime1">
               <a:rPr lang="en-US" smtClean="0"/>
-              <a:t>10/1/2025</a:t>
+              <a:t>10/2/2025</a:t>
             </a:fld>
             <a:endParaRPr lang="en-US"/>
           </a:p>
@@ -3316,7 +6152,7 @@
           <a:p>
             <a:fld id="{1BBF91E7-DD27-45EE-9FAC-A58839C2E3FB}" type="datetime1">
               <a:rPr lang="en-US" smtClean="0"/>
-              <a:t>10/1/2025</a:t>
+              <a:t>10/2/2025</a:t>
             </a:fld>
             <a:endParaRPr lang="en-US"/>
           </a:p>
@@ -3440,7 +6276,7 @@
           <a:p>
             <a:fld id="{470DB943-D34E-498D-BB5B-1BC0D01A4C3C}" type="datetime1">
               <a:rPr lang="en-US" smtClean="0"/>
-              <a:t>10/1/2025</a:t>
+              <a:t>10/2/2025</a:t>
             </a:fld>
             <a:endParaRPr lang="en-US"/>
           </a:p>
@@ -3536,7 +6372,7 @@
           <a:p>
             <a:fld id="{0EF88AC7-A362-47DE-B037-3A7E785BA73D}" type="datetime1">
               <a:rPr lang="en-US" smtClean="0"/>
-              <a:t>10/1/2025</a:t>
+              <a:t>10/2/2025</a:t>
             </a:fld>
             <a:endParaRPr lang="en-US"/>
           </a:p>
@@ -3914,7 +6750,7 @@
           <a:p>
             <a:fld id="{1E09BAED-B7FC-4220-8037-60663F890984}" type="datetime1">
               <a:rPr lang="en-US" smtClean="0"/>
-              <a:t>10/1/2025</a:t>
+              <a:t>10/2/2025</a:t>
             </a:fld>
             <a:endParaRPr lang="en-US"/>
           </a:p>
@@ -4123,7 +6959,7 @@
           <a:p>
             <a:fld id="{C4CA2D96-DD5E-4EE6-BA39-19B5C56AF1F2}" type="datetime1">
               <a:rPr lang="en-US" smtClean="0"/>
-              <a:t>10/1/2025</a:t>
+              <a:t>10/2/2025</a:t>
             </a:fld>
             <a:endParaRPr lang="en-US"/>
           </a:p>
@@ -4406,7 +7242,7 @@
           <a:p>
             <a:fld id="{BB3C0B96-D43B-410F-A514-3967CACDF6C4}" type="datetime1">
               <a:rPr lang="en-US" smtClean="0"/>
-              <a:t>10/1/2025</a:t>
+              <a:t>10/2/2025</a:t>
             </a:fld>
             <a:endParaRPr lang="en-US"/>
           </a:p>
@@ -4598,7 +7434,7 @@
           <a:p>
             <a:fld id="{C63DFB46-027F-4778-8182-714012A6E051}" type="datetime1">
               <a:rPr lang="en-US" smtClean="0"/>
-              <a:t>10/1/2025</a:t>
+              <a:t>10/2/2025</a:t>
             </a:fld>
             <a:endParaRPr lang="en-US"/>
           </a:p>
@@ -4961,7 +7797,7 @@
           <a:p>
             <a:fld id="{770FD05A-9631-4BEE-9AA4-5575ADA850E9}" type="datetime1">
               <a:rPr lang="en-US" smtClean="0"/>
-              <a:t>10/1/2025</a:t>
+              <a:t>10/2/2025</a:t>
             </a:fld>
             <a:endParaRPr lang="en-US"/>
           </a:p>
@@ -5273,7 +8109,7 @@
           <a:p>
             <a:fld id="{ED291B17-9318-49DB-B28B-6E5994AE9581}" type="datetime1">
               <a:rPr lang="en-US" smtClean="0"/>
-              <a:t>10/1/2025</a:t>
+              <a:t>10/2/2025</a:t>
             </a:fld>
             <a:endParaRPr lang="en-US" dirty="0"/>
           </a:p>
@@ -5471,7 +8307,7 @@
           <a:p>
             <a:fld id="{78DD82B9-B8EE-4375-B6FF-88FA6ABB15D9}" type="datetime1">
               <a:rPr lang="en-US" smtClean="0"/>
-              <a:t>10/1/2025</a:t>
+              <a:t>10/2/2025</a:t>
             </a:fld>
             <a:endParaRPr lang="en-US" dirty="0"/>
           </a:p>
@@ -5783,7 +8619,7 @@
           <a:p>
             <a:fld id="{B2497495-0637-405E-AE64-5CC7506D51F5}" type="datetime1">
               <a:rPr lang="en-US" smtClean="0"/>
-              <a:t>10/1/2025</a:t>
+              <a:t>10/2/2025</a:t>
             </a:fld>
             <a:endParaRPr lang="en-US" dirty="0"/>
           </a:p>
@@ -6036,7 +8872,7 @@
           <a:p>
             <a:fld id="{7BFFD690-9426-415D-8B65-26881E07B2D4}" type="datetime1">
               <a:rPr lang="en-US" smtClean="0"/>
-              <a:t>10/1/2025</a:t>
+              <a:t>10/2/2025</a:t>
             </a:fld>
             <a:endParaRPr lang="en-US" dirty="0"/>
           </a:p>
@@ -6458,7 +9294,7 @@
           <a:p>
             <a:fld id="{04C4989A-474C-40DE-95B9-011C28B71673}" type="datetime1">
               <a:rPr lang="en-US" smtClean="0"/>
-              <a:t>10/1/2025</a:t>
+              <a:t>10/2/2025</a:t>
             </a:fld>
             <a:endParaRPr lang="en-US" dirty="0"/>
           </a:p>
@@ -6581,7 +9417,7 @@
           <a:p>
             <a:fld id="{5DB4ED54-5B5E-4A04-93D3-5772E3CE3818}" type="datetime1">
               <a:rPr lang="en-US" smtClean="0"/>
-              <a:t>10/1/2025</a:t>
+              <a:t>10/2/2025</a:t>
             </a:fld>
             <a:endParaRPr lang="en-US" dirty="0"/>
           </a:p>
@@ -6676,7 +9512,7 @@
           <a:p>
             <a:fld id="{4EDE50D6-574B-40AF-946F-D52A04ADE379}" type="datetime1">
               <a:rPr lang="en-US" smtClean="0"/>
-              <a:t>10/1/2025</a:t>
+              <a:t>10/2/2025</a:t>
             </a:fld>
             <a:endParaRPr lang="en-US" dirty="0"/>
           </a:p>
@@ -6976,7 +9812,7 @@
           <a:p>
             <a:fld id="{2C2D4BC3-0B93-4E0B-AE53-3E432262C0E4}" type="datetime1">
               <a:rPr lang="en-US" smtClean="0"/>
-              <a:t>10/1/2025</a:t>
+              <a:t>10/2/2025</a:t>
             </a:fld>
             <a:endParaRPr lang="en-US"/>
           </a:p>
@@ -7366,7 +10202,7 @@
           <a:p>
             <a:fld id="{D82884F1-FFEA-405F-9602-3DCA865EDA4E}" type="datetime1">
               <a:rPr lang="en-US" smtClean="0"/>
-              <a:t>10/1/2025</a:t>
+              <a:t>10/2/2025</a:t>
             </a:fld>
             <a:endParaRPr lang="en-US" dirty="0"/>
           </a:p>
@@ -7659,7 +10495,7 @@
           <a:p>
             <a:fld id="{7E18DB4A-8810-4A10-AD5C-D5E2C667F5B3}" type="datetime1">
               <a:rPr lang="en-US" smtClean="0"/>
-              <a:t>10/1/2025</a:t>
+              <a:t>10/2/2025</a:t>
             </a:fld>
             <a:endParaRPr lang="en-US" dirty="0"/>
           </a:p>
@@ -7851,7 +10687,7 @@
           <a:p>
             <a:fld id="{2CED4963-E985-44C4-B8C4-FDD613B7C2F8}" type="datetime1">
               <a:rPr lang="en-US" smtClean="0"/>
-              <a:t>10/1/2025</a:t>
+              <a:t>10/2/2025</a:t>
             </a:fld>
             <a:endParaRPr lang="en-US" dirty="0"/>
           </a:p>
@@ -8213,7 +11049,7 @@
           <a:p>
             <a:fld id="{ED291B17-9318-49DB-B28B-6E5994AE9581}" type="datetime1">
               <a:rPr lang="en-US" smtClean="0"/>
-              <a:t>10/1/2025</a:t>
+              <a:t>10/2/2025</a:t>
             </a:fld>
             <a:endParaRPr lang="en-US" dirty="0"/>
           </a:p>
@@ -8700,7 +11536,7 @@
           <a:p>
             <a:fld id="{ED291B17-9318-49DB-B28B-6E5994AE9581}" type="datetime1">
               <a:rPr lang="en-US" smtClean="0"/>
-              <a:t>10/1/2025</a:t>
+              <a:t>10/2/2025</a:t>
             </a:fld>
             <a:endParaRPr lang="en-US" dirty="0"/>
           </a:p>
@@ -8896,7 +11732,7 @@
           <a:p>
             <a:fld id="{78DD82B9-B8EE-4375-B6FF-88FA6ABB15D9}" type="datetime1">
               <a:rPr lang="en-US" smtClean="0"/>
-              <a:t>10/1/2025</a:t>
+              <a:t>10/2/2025</a:t>
             </a:fld>
             <a:endParaRPr lang="en-US" dirty="0"/>
           </a:p>
@@ -9207,7 +12043,7 @@
           <a:p>
             <a:fld id="{B2497495-0637-405E-AE64-5CC7506D51F5}" type="datetime1">
               <a:rPr lang="en-US" smtClean="0"/>
-              <a:t>10/1/2025</a:t>
+              <a:t>10/2/2025</a:t>
             </a:fld>
             <a:endParaRPr lang="en-US" dirty="0"/>
           </a:p>
@@ -9458,7 +12294,7 @@
           <a:p>
             <a:fld id="{7BFFD690-9426-415D-8B65-26881E07B2D4}" type="datetime1">
               <a:rPr lang="en-US" smtClean="0"/>
-              <a:t>10/1/2025</a:t>
+              <a:t>10/2/2025</a:t>
             </a:fld>
             <a:endParaRPr lang="en-US" dirty="0"/>
           </a:p>
@@ -9878,7 +12714,7 @@
           <a:p>
             <a:fld id="{04C4989A-474C-40DE-95B9-011C28B71673}" type="datetime1">
               <a:rPr lang="en-US" smtClean="0"/>
-              <a:t>10/1/2025</a:t>
+              <a:t>10/2/2025</a:t>
             </a:fld>
             <a:endParaRPr lang="en-US" dirty="0"/>
           </a:p>
@@ -10119,7 +12955,7 @@
           <a:p>
             <a:fld id="{A5CEA080-6A29-4A4D-90B1-4C73660CABD5}" type="datetime1">
               <a:rPr lang="en-US" smtClean="0"/>
-              <a:t>10/1/2025</a:t>
+              <a:t>10/2/2025</a:t>
             </a:fld>
             <a:endParaRPr lang="en-US"/>
           </a:p>
@@ -10243,7 +13079,7 @@
           <a:p>
             <a:fld id="{5DB4ED54-5B5E-4A04-93D3-5772E3CE3818}" type="datetime1">
               <a:rPr lang="en-US" smtClean="0"/>
-              <a:t>10/1/2025</a:t>
+              <a:t>10/2/2025</a:t>
             </a:fld>
             <a:endParaRPr lang="en-US" dirty="0"/>
           </a:p>
@@ -10338,7 +13174,7 @@
           <a:p>
             <a:fld id="{4EDE50D6-574B-40AF-946F-D52A04ADE379}" type="datetime1">
               <a:rPr lang="en-US" smtClean="0"/>
-              <a:t>10/1/2025</a:t>
+              <a:t>10/2/2025</a:t>
             </a:fld>
             <a:endParaRPr lang="en-US" dirty="0"/>
           </a:p>
@@ -10714,7 +13550,7 @@
           <a:p>
             <a:fld id="{D82884F1-FFEA-405F-9602-3DCA865EDA4E}" type="datetime1">
               <a:rPr lang="en-US" smtClean="0"/>
-              <a:t>10/1/2025</a:t>
+              <a:t>10/2/2025</a:t>
             </a:fld>
             <a:endParaRPr lang="en-US" dirty="0"/>
           </a:p>
@@ -11007,7 +13843,7 @@
           <a:p>
             <a:fld id="{7E18DB4A-8810-4A10-AD5C-D5E2C667F5B3}" type="datetime1">
               <a:rPr lang="en-US" smtClean="0"/>
-              <a:t>10/1/2025</a:t>
+              <a:t>10/2/2025</a:t>
             </a:fld>
             <a:endParaRPr lang="en-US" dirty="0"/>
           </a:p>
@@ -11199,7 +14035,7 @@
           <a:p>
             <a:fld id="{2CED4963-E985-44C4-B8C4-FDD613B7C2F8}" type="datetime1">
               <a:rPr lang="en-US" smtClean="0"/>
-              <a:t>10/1/2025</a:t>
+              <a:t>10/2/2025</a:t>
             </a:fld>
             <a:endParaRPr lang="en-US" dirty="0"/>
           </a:p>
@@ -11561,7 +14397,7 @@
           <a:p>
             <a:fld id="{ED291B17-9318-49DB-B28B-6E5994AE9581}" type="datetime1">
               <a:rPr lang="en-US" smtClean="0"/>
-              <a:t>10/1/2025</a:t>
+              <a:t>10/2/2025</a:t>
             </a:fld>
             <a:endParaRPr lang="en-US" dirty="0"/>
           </a:p>
@@ -11872,7 +14708,7 @@
           <a:p>
             <a:fld id="{ED291B17-9318-49DB-B28B-6E5994AE9581}" type="datetime1">
               <a:rPr lang="en-US" smtClean="0"/>
-              <a:t>10/1/2025</a:t>
+              <a:t>10/2/2025</a:t>
             </a:fld>
             <a:endParaRPr lang="en-US" dirty="0"/>
           </a:p>
@@ -12070,7 +14906,7 @@
           <a:p>
             <a:fld id="{78DD82B9-B8EE-4375-B6FF-88FA6ABB15D9}" type="datetime1">
               <a:rPr lang="en-US" smtClean="0"/>
-              <a:t>10/1/2025</a:t>
+              <a:t>10/2/2025</a:t>
             </a:fld>
             <a:endParaRPr lang="en-US" dirty="0"/>
           </a:p>
@@ -12382,7 +15218,7 @@
           <a:p>
             <a:fld id="{B2497495-0637-405E-AE64-5CC7506D51F5}" type="datetime1">
               <a:rPr lang="en-US" smtClean="0"/>
-              <a:t>10/1/2025</a:t>
+              <a:t>10/2/2025</a:t>
             </a:fld>
             <a:endParaRPr lang="en-US" dirty="0"/>
           </a:p>
@@ -12635,7 +15471,7 @@
           <a:p>
             <a:fld id="{7BFFD690-9426-415D-8B65-26881E07B2D4}" type="datetime1">
               <a:rPr lang="en-US" smtClean="0"/>
-              <a:t>10/1/2025</a:t>
+              <a:t>10/2/2025</a:t>
             </a:fld>
             <a:endParaRPr lang="en-US" dirty="0"/>
           </a:p>
@@ -13057,7 +15893,7 @@
           <a:p>
             <a:fld id="{4EFF1D62-0785-460A-9888-5F5908AD45F7}" type="datetime1">
               <a:rPr lang="en-US" smtClean="0"/>
-              <a:t>10/1/2025</a:t>
+              <a:t>10/2/2025</a:t>
             </a:fld>
             <a:endParaRPr lang="en-US"/>
           </a:p>
@@ -13480,7 +16316,7 @@
           <a:p>
             <a:fld id="{04C4989A-474C-40DE-95B9-011C28B71673}" type="datetime1">
               <a:rPr lang="en-US" smtClean="0"/>
-              <a:t>10/1/2025</a:t>
+              <a:t>10/2/2025</a:t>
             </a:fld>
             <a:endParaRPr lang="en-US" dirty="0"/>
           </a:p>
@@ -13603,7 +16439,7 @@
           <a:p>
             <a:fld id="{5DB4ED54-5B5E-4A04-93D3-5772E3CE3818}" type="datetime1">
               <a:rPr lang="en-US" smtClean="0"/>
-              <a:t>10/1/2025</a:t>
+              <a:t>10/2/2025</a:t>
             </a:fld>
             <a:endParaRPr lang="en-US" dirty="0"/>
           </a:p>
@@ -13698,7 +16534,7 @@
           <a:p>
             <a:fld id="{4EDE50D6-574B-40AF-946F-D52A04ADE379}" type="datetime1">
               <a:rPr lang="en-US" smtClean="0"/>
-              <a:t>10/1/2025</a:t>
+              <a:t>10/2/2025</a:t>
             </a:fld>
             <a:endParaRPr lang="en-US" dirty="0"/>
           </a:p>
@@ -14075,7 +16911,7 @@
           <a:p>
             <a:fld id="{D82884F1-FFEA-405F-9602-3DCA865EDA4E}" type="datetime1">
               <a:rPr lang="en-US" smtClean="0"/>
-              <a:t>10/1/2025</a:t>
+              <a:t>10/2/2025</a:t>
             </a:fld>
             <a:endParaRPr lang="en-US" dirty="0"/>
           </a:p>
@@ -14368,7 +17204,7 @@
           <a:p>
             <a:fld id="{7E18DB4A-8810-4A10-AD5C-D5E2C667F5B3}" type="datetime1">
               <a:rPr lang="en-US" smtClean="0"/>
-              <a:t>10/1/2025</a:t>
+              <a:t>10/2/2025</a:t>
             </a:fld>
             <a:endParaRPr lang="en-US" dirty="0"/>
           </a:p>
@@ -14560,7 +17396,7 @@
           <a:p>
             <a:fld id="{2CED4963-E985-44C4-B8C4-FDD613B7C2F8}" type="datetime1">
               <a:rPr lang="en-US" smtClean="0"/>
-              <a:t>10/1/2025</a:t>
+              <a:t>10/2/2025</a:t>
             </a:fld>
             <a:endParaRPr lang="en-US" dirty="0"/>
           </a:p>
@@ -14922,7 +17758,7 @@
           <a:p>
             <a:fld id="{ED291B17-9318-49DB-B28B-6E5994AE9581}" type="datetime1">
               <a:rPr lang="en-US" smtClean="0"/>
-              <a:t>10/1/2025</a:t>
+              <a:t>10/2/2025</a:t>
             </a:fld>
             <a:endParaRPr lang="en-US" dirty="0"/>
           </a:p>
@@ -15226,7 +18062,7 @@
           <a:p>
             <a:fld id="{4603F5A6-4790-4338-AC59-416730A16F3C}" type="datetime1">
               <a:rPr lang="en-US" smtClean="0"/>
-              <a:t>10/1/2025</a:t>
+              <a:t>10/2/2025</a:t>
             </a:fld>
             <a:endParaRPr lang="en-US"/>
           </a:p>
@@ -15322,7 +18158,7 @@
           <a:p>
             <a:fld id="{FAF331C8-E8D8-438B-B699-9ACE625F3A09}" type="datetime1">
               <a:rPr lang="en-US" smtClean="0"/>
-              <a:t>10/1/2025</a:t>
+              <a:t>10/2/2025</a:t>
             </a:fld>
             <a:endParaRPr lang="en-US"/>
           </a:p>
@@ -15700,7 +18536,7 @@
           <a:p>
             <a:fld id="{610C12D3-F429-42CB-9467-4C3AFEEA173C}" type="datetime1">
               <a:rPr lang="en-US" smtClean="0"/>
-              <a:t>10/1/2025</a:t>
+              <a:t>10/2/2025</a:t>
             </a:fld>
             <a:endParaRPr lang="en-US"/>
           </a:p>
@@ -15993,7 +18829,7 @@
           <a:p>
             <a:fld id="{283F426E-E29E-4D2E-B32D-412D98F7FC2F}" type="datetime1">
               <a:rPr lang="en-US" smtClean="0"/>
-              <a:t>10/1/2025</a:t>
+              <a:t>10/2/2025</a:t>
             </a:fld>
             <a:endParaRPr lang="en-US"/>
           </a:p>
@@ -16208,7 +19044,7 @@
           <a:p>
             <a:fld id="{3E7733A4-5D18-4D09-8F94-45F71EE3C7C2}" type="datetime1">
               <a:rPr lang="en-US" smtClean="0"/>
-              <a:t>10/1/2025</a:t>
+              <a:t>10/2/2025</a:t>
             </a:fld>
             <a:endParaRPr lang="en-US"/>
           </a:p>
@@ -17010,7 +19846,7 @@
           <a:p>
             <a:fld id="{8234BEC2-5A9D-42E1-9C16-1E9F257755B7}" type="datetime1">
               <a:rPr lang="en-US" smtClean="0"/>
-              <a:t>10/1/2025</a:t>
+              <a:t>10/2/2025</a:t>
             </a:fld>
             <a:endParaRPr lang="en-US"/>
           </a:p>
@@ -17812,7 +20648,7 @@
           <a:p>
             <a:fld id="{ED291B17-9318-49DB-B28B-6E5994AE9581}" type="datetime1">
               <a:rPr lang="en-US" smtClean="0"/>
-              <a:t>10/1/2025</a:t>
+              <a:t>10/2/2025</a:t>
             </a:fld>
             <a:endParaRPr lang="en-US" dirty="0"/>
           </a:p>
@@ -18614,7 +21450,7 @@
           <a:p>
             <a:fld id="{ED291B17-9318-49DB-B28B-6E5994AE9581}" type="datetime1">
               <a:rPr lang="en-US" smtClean="0"/>
-              <a:t>10/1/2025</a:t>
+              <a:t>10/2/2025</a:t>
             </a:fld>
             <a:endParaRPr lang="en-US" dirty="0"/>
           </a:p>
@@ -19415,7 +22251,7 @@
           <a:p>
             <a:fld id="{ED291B17-9318-49DB-B28B-6E5994AE9581}" type="datetime1">
               <a:rPr lang="en-US" smtClean="0"/>
-              <a:t>10/1/2025</a:t>
+              <a:t>10/2/2025</a:t>
             </a:fld>
             <a:endParaRPr lang="en-US" dirty="0"/>
           </a:p>
@@ -24484,11 +27320,152 @@
           </a:p>
         </p:txBody>
       </p:sp>
+      <p:sp>
+        <p:nvSpPr>
+          <p:cNvPr id="3" name="Rectangle 2">
+            <a:extLst>
+              <a:ext uri="{FF2B5EF4-FFF2-40B4-BE49-F238E27FC236}">
+                <a16:creationId xmlns:a16="http://schemas.microsoft.com/office/drawing/2014/main" id="{ADB8A000-4339-FB78-1F80-6D8BCBE15667}"/>
+              </a:ext>
+            </a:extLst>
+          </p:cNvPr>
+          <p:cNvSpPr/>
+          <p:nvPr/>
+        </p:nvSpPr>
+        <p:spPr>
+          <a:xfrm>
+            <a:off x="6895475" y="3567659"/>
+            <a:ext cx="87134" cy="861934"/>
+          </a:xfrm>
+          <a:prstGeom prst="rect">
+            <a:avLst/>
+          </a:prstGeom>
+          <a:solidFill>
+            <a:schemeClr val="bg1"/>
+          </a:solidFill>
+          <a:ln>
+            <a:solidFill>
+              <a:schemeClr val="bg1"/>
+            </a:solidFill>
+          </a:ln>
+        </p:spPr>
+        <p:style>
+          <a:lnRef idx="2">
+            <a:schemeClr val="accent1">
+              <a:shade val="15000"/>
+            </a:schemeClr>
+          </a:lnRef>
+          <a:fillRef idx="1">
+            <a:schemeClr val="accent1"/>
+          </a:fillRef>
+          <a:effectRef idx="0">
+            <a:schemeClr val="accent1"/>
+          </a:effectRef>
+          <a:fontRef idx="minor">
+            <a:schemeClr val="lt1"/>
+          </a:fontRef>
+        </p:style>
+        <p:txBody>
+          <a:bodyPr rtlCol="0" anchor="ctr"/>
+          <a:lstStyle/>
+          <a:p>
+            <a:pPr algn="ctr"/>
+            <a:endParaRPr lang="zh-CN" altLang="en-US">
+              <a:ln>
+                <a:solidFill>
+                  <a:schemeClr val="bg1"/>
+                </a:solidFill>
+              </a:ln>
+              <a:solidFill>
+                <a:schemeClr val="bg1"/>
+              </a:solidFill>
+            </a:endParaRPr>
+          </a:p>
+        </p:txBody>
+      </p:sp>
     </p:spTree>
   </p:cSld>
   <p:clrMapOvr>
     <a:masterClrMapping/>
   </p:clrMapOvr>
+  <p:timing>
+    <p:tnLst>
+      <p:par>
+        <p:cTn id="1" dur="indefinite" restart="never" nodeType="tmRoot">
+          <p:childTnLst>
+            <p:seq concurrent="1" nextAc="seek">
+              <p:cTn id="2" dur="indefinite" nodeType="mainSeq">
+                <p:childTnLst>
+                  <p:par>
+                    <p:cTn id="3" fill="hold">
+                      <p:stCondLst>
+                        <p:cond delay="indefinite"/>
+                      </p:stCondLst>
+                      <p:childTnLst>
+                        <p:par>
+                          <p:cTn id="4" fill="hold">
+                            <p:stCondLst>
+                              <p:cond delay="0"/>
+                            </p:stCondLst>
+                            <p:childTnLst>
+                              <p:par>
+                                <p:cTn id="5" presetID="1" presetClass="entr" presetSubtype="0" fill="hold" grpId="0" nodeType="clickEffect">
+                                  <p:stCondLst>
+                                    <p:cond delay="0"/>
+                                  </p:stCondLst>
+                                  <p:childTnLst>
+                                    <p:set>
+                                      <p:cBhvr>
+                                        <p:cTn id="6" dur="1" fill="hold">
+                                          <p:stCondLst>
+                                            <p:cond delay="0"/>
+                                          </p:stCondLst>
+                                        </p:cTn>
+                                        <p:tgtEl>
+                                          <p:spTgt spid="3"/>
+                                        </p:tgtEl>
+                                        <p:attrNameLst>
+                                          <p:attrName>style.visibility</p:attrName>
+                                        </p:attrNameLst>
+                                      </p:cBhvr>
+                                      <p:to>
+                                        <p:strVal val="visible"/>
+                                      </p:to>
+                                    </p:set>
+                                  </p:childTnLst>
+                                </p:cTn>
+                              </p:par>
+                            </p:childTnLst>
+                          </p:cTn>
+                        </p:par>
+                      </p:childTnLst>
+                    </p:cTn>
+                  </p:par>
+                </p:childTnLst>
+              </p:cTn>
+              <p:prevCondLst>
+                <p:cond evt="onPrev" delay="0">
+                  <p:tgtEl>
+                    <p:sldTgt/>
+                  </p:tgtEl>
+                </p:cond>
+              </p:prevCondLst>
+              <p:nextCondLst>
+                <p:cond evt="onNext" delay="0">
+                  <p:tgtEl>
+                    <p:sldTgt/>
+                  </p:tgtEl>
+                </p:cond>
+              </p:nextCondLst>
+            </p:seq>
+          </p:childTnLst>
+        </p:cTn>
+      </p:par>
+    </p:tnLst>
+    <p:bldLst>
+      <p:bldP spid="3" grpId="0" animBg="1"/>
+    </p:bldLst>
+  </p:timing>
 </p:sld>
 </file>
 
@@ -27088,6 +30065,14 @@
 <file path=ppt/slides/slide27.xml><?xml version="1.0" encoding="utf-8"?>
 <p:sld xmlns:a="http://schemas.openxmlformats.org/drawingml/2006/main" xmlns:r="http://schemas.openxmlformats.org/officeDocument/2006/relationships" xmlns:p="http://schemas.openxmlformats.org/presentationml/2006/main">
   <p:cSld>
+    <p:bg>
+      <p:bgPr>
+        <a:solidFill>
+          <a:schemeClr val="bg1"/>
+        </a:solidFill>
+        <a:effectLst/>
+      </p:bgPr>
+    </p:bg>
     <p:spTree>
       <p:nvGrpSpPr>
         <p:cNvPr id="1" name=""/>
@@ -27104,163 +30089,1387 @@
       </p:grpSpPr>
       <p:sp>
         <p:nvSpPr>
-          <p:cNvPr id="2" name="Rectangle 1"/>
-          <p:cNvSpPr/>
-          <p:nvPr/>
+          <p:cNvPr id="36" name="Rectangle 35">
+            <a:extLst>
+              <a:ext uri="{FF2B5EF4-FFF2-40B4-BE49-F238E27FC236}">
+                <a16:creationId xmlns:a16="http://schemas.microsoft.com/office/drawing/2014/main" id="{DCF4EB5C-ED25-4675-8255-2F5B12CFFCF0}"/>
+              </a:ext>
+              <a:ext uri="{C183D7F6-B498-43B3-948B-1728B52AA6E4}">
+                <adec:decorative xmlns:adec="http://schemas.microsoft.com/office/drawing/2017/decorative" val="1"/>
+              </a:ext>
+            </a:extLst>
+          </p:cNvPr>
+          <p:cNvSpPr>
+            <a:spLocks noGrp="1" noRot="1" noChangeAspect="1" noMove="1" noResize="1" noEditPoints="1" noAdjustHandles="1" noChangeArrowheads="1" noChangeShapeType="1" noTextEdit="1"/>
+          </p:cNvSpPr>
+          <p:nvPr>
+            <p:extLst>
+              <p:ext uri="{386F3935-93C4-4BCD-93E2-E3B085C9AB24}">
+                <p16:designElem xmlns:p16="http://schemas.microsoft.com/office/powerpoint/2015/main" val="1"/>
+              </p:ext>
+            </p:extLst>
+          </p:nvPr>
         </p:nvSpPr>
         <p:spPr>
           <a:xfrm>
-            <a:off x="2471305" y="1325254"/>
-            <a:ext cx="3286989" cy="830997"/>
+            <a:off x="301410" y="565785"/>
+            <a:ext cx="2499741" cy="64123"/>
           </a:xfrm>
           <a:prstGeom prst="rect">
             <a:avLst/>
           </a:prstGeom>
-          <a:noFill/>
-        </p:spPr>
-        <p:txBody>
-          <a:bodyPr wrap="none" lIns="82296" tIns="41148" rIns="82296" bIns="41148">
-            <a:spAutoFit/>
-          </a:bodyPr>
-          <a:lstStyle/>
-          <a:p>
-            <a:pPr algn="ctr"/>
-            <a:r>
-              <a:rPr lang="en-US" sz="4860" b="1" spc="180" dirty="0">
-                <a:ln w="29210">
-                  <a:solidFill>
-                    <a:schemeClr val="accent3">
-                      <a:tint val="10000"/>
-                    </a:schemeClr>
-                  </a:solidFill>
-                </a:ln>
-                <a:solidFill>
-                  <a:srgbClr val="008000">
-                    <a:alpha val="50000"/>
-                  </a:srgbClr>
-                </a:solidFill>
-                <a:effectLst>
-                  <a:innerShdw blurRad="50800" dist="50800" dir="8100000">
-                    <a:srgbClr val="7D7D7D">
-                      <a:alpha val="73000"/>
-                    </a:srgbClr>
-                  </a:innerShdw>
-                </a:effectLst>
-              </a:rPr>
-              <a:t>Thank you!</a:t>
-            </a:r>
-          </a:p>
-        </p:txBody>
-      </p:sp>
-      <p:sp>
-        <p:nvSpPr>
-          <p:cNvPr id="3" name="Slide Number Placeholder 2">
+          <a:solidFill>
+            <a:srgbClr val="465359"/>
+          </a:solidFill>
+          <a:ln>
+            <a:noFill/>
+          </a:ln>
+          <a:effectLst/>
+        </p:spPr>
+        <p:style>
+          <a:lnRef idx="1">
+            <a:schemeClr val="accent1"/>
+          </a:lnRef>
+          <a:fillRef idx="3">
+            <a:schemeClr val="accent1"/>
+          </a:fillRef>
+          <a:effectRef idx="2">
+            <a:schemeClr val="accent1"/>
+          </a:effectRef>
+          <a:fontRef idx="minor">
+            <a:schemeClr val="lt1"/>
+          </a:fontRef>
+        </p:style>
+        <p:txBody>
+          <a:bodyPr/>
+          <a:lstStyle/>
+          <a:p>
+            <a:pPr marL="0" marR="0" lvl="0" indent="0" algn="l" defTabSz="308610" rtl="0" eaLnBrk="1" fontAlgn="auto" latinLnBrk="0" hangingPunct="1">
+              <a:lnSpc>
+                <a:spcPct val="100000"/>
+              </a:lnSpc>
+              <a:spcBef>
+                <a:spcPts val="0"/>
+              </a:spcBef>
+              <a:spcAft>
+                <a:spcPts val="0"/>
+              </a:spcAft>
+              <a:buClrTx/>
+              <a:buSzTx/>
+              <a:buFontTx/>
+              <a:buNone/>
+              <a:tabLst/>
+              <a:defRPr/>
+            </a:pPr>
+            <a:endParaRPr kumimoji="0" lang="en-US" sz="1215" b="0" i="0" u="none" strike="noStrike" kern="1200" cap="none" spc="0" normalizeH="0" baseline="0" noProof="0">
+              <a:ln>
+                <a:noFill/>
+              </a:ln>
+              <a:solidFill>
+                <a:srgbClr val="FFFFFF"/>
+              </a:solidFill>
+              <a:effectLst/>
+              <a:uLnTx/>
+              <a:uFillTx/>
+              <a:latin typeface="Calibri"/>
+              <a:ea typeface="+mn-ea"/>
+              <a:cs typeface="+mn-cs"/>
+            </a:endParaRPr>
+          </a:p>
+        </p:txBody>
+      </p:sp>
+      <p:sp>
+        <p:nvSpPr>
+          <p:cNvPr id="38" name="Rectangle 37">
             <a:extLst>
               <a:ext uri="{FF2B5EF4-FFF2-40B4-BE49-F238E27FC236}">
-                <a16:creationId xmlns:a16="http://schemas.microsoft.com/office/drawing/2014/main" id="{863C9EAE-E5B7-4784-94CD-D062E17813E3}"/>
+                <a16:creationId xmlns:a16="http://schemas.microsoft.com/office/drawing/2014/main" id="{9514EC6E-A557-42A2-BCDC-3ABFFC5E564D}"/>
+              </a:ext>
+              <a:ext uri="{C183D7F6-B498-43B3-948B-1728B52AA6E4}">
+                <adec:decorative xmlns:adec="http://schemas.microsoft.com/office/drawing/2017/decorative" val="1"/>
               </a:ext>
             </a:extLst>
           </p:cNvPr>
           <p:cNvSpPr>
-            <a:spLocks noGrp="1"/>
-          </p:cNvSpPr>
-          <p:nvPr>
-            <p:ph type="sldNum" sz="quarter" idx="12"/>
-          </p:nvPr>
-        </p:nvSpPr>
-        <p:spPr/>
+            <a:spLocks noGrp="1" noRot="1" noChangeAspect="1" noMove="1" noResize="1" noEditPoints="1" noAdjustHandles="1" noChangeArrowheads="1" noChangeShapeType="1" noTextEdit="1"/>
+          </p:cNvSpPr>
+          <p:nvPr>
+            <p:extLst>
+              <p:ext uri="{386F3935-93C4-4BCD-93E2-E3B085C9AB24}">
+                <p16:designElem xmlns:p16="http://schemas.microsoft.com/office/powerpoint/2015/main" val="1"/>
+              </p:ext>
+            </p:extLst>
+          </p:nvPr>
+        </p:nvSpPr>
+        <p:spPr>
+          <a:xfrm>
+            <a:off x="5428449" y="563384"/>
+            <a:ext cx="2499741" cy="66524"/>
+          </a:xfrm>
+          <a:prstGeom prst="rect">
+            <a:avLst/>
+          </a:prstGeom>
+          <a:solidFill>
+            <a:srgbClr val="969FA7"/>
+          </a:solidFill>
+          <a:ln>
+            <a:noFill/>
+          </a:ln>
+          <a:effectLst/>
+        </p:spPr>
+        <p:style>
+          <a:lnRef idx="1">
+            <a:schemeClr val="accent1"/>
+          </a:lnRef>
+          <a:fillRef idx="3">
+            <a:schemeClr val="accent1"/>
+          </a:fillRef>
+          <a:effectRef idx="2">
+            <a:schemeClr val="accent1"/>
+          </a:effectRef>
+          <a:fontRef idx="minor">
+            <a:schemeClr val="lt1"/>
+          </a:fontRef>
+        </p:style>
         <p:txBody>
           <a:bodyPr/>
           <a:lstStyle/>
           <a:p>
-            <a:fld id="{127DDC20-79C9-9647-820E-6D40A3D210C3}" type="slidenum">
-              <a:rPr lang="en-US" smtClean="0"/>
-              <a:pPr/>
-              <a:t>27</a:t>
-            </a:fld>
-            <a:endParaRPr lang="en-US"/>
-          </a:p>
-        </p:txBody>
-      </p:sp>
-      <p:pic>
-        <p:nvPicPr>
-          <p:cNvPr id="6" name="Picture 5">
+            <a:pPr marL="0" marR="0" lvl="0" indent="0" algn="l" defTabSz="308610" rtl="0" eaLnBrk="1" fontAlgn="auto" latinLnBrk="0" hangingPunct="1">
+              <a:lnSpc>
+                <a:spcPct val="100000"/>
+              </a:lnSpc>
+              <a:spcBef>
+                <a:spcPts val="0"/>
+              </a:spcBef>
+              <a:spcAft>
+                <a:spcPts val="0"/>
+              </a:spcAft>
+              <a:buClrTx/>
+              <a:buSzTx/>
+              <a:buFontTx/>
+              <a:buNone/>
+              <a:tabLst/>
+              <a:defRPr/>
+            </a:pPr>
+            <a:endParaRPr kumimoji="0" lang="en-US" sz="1215" b="0" i="0" u="none" strike="noStrike" kern="1200" cap="none" spc="0" normalizeH="0" baseline="0" noProof="0">
+              <a:ln>
+                <a:noFill/>
+              </a:ln>
+              <a:solidFill>
+                <a:srgbClr val="FFFFFF"/>
+              </a:solidFill>
+              <a:effectLst/>
+              <a:uLnTx/>
+              <a:uFillTx/>
+              <a:latin typeface="Calibri"/>
+              <a:ea typeface="+mn-ea"/>
+              <a:cs typeface="+mn-cs"/>
+            </a:endParaRPr>
+          </a:p>
+        </p:txBody>
+      </p:sp>
+      <p:sp>
+        <p:nvSpPr>
+          <p:cNvPr id="40" name="Rectangle 39">
             <a:extLst>
               <a:ext uri="{FF2B5EF4-FFF2-40B4-BE49-F238E27FC236}">
-                <a16:creationId xmlns:a16="http://schemas.microsoft.com/office/drawing/2014/main" id="{32DE135F-68C6-4911-85BA-92ABB3F9F85C}"/>
+                <a16:creationId xmlns:a16="http://schemas.microsoft.com/office/drawing/2014/main" id="{905482C9-EB42-4BFE-95BF-7FD661F07657}"/>
+              </a:ext>
+              <a:ext uri="{C183D7F6-B498-43B3-948B-1728B52AA6E4}">
+                <adec:decorative xmlns:adec="http://schemas.microsoft.com/office/drawing/2017/decorative" val="1"/>
               </a:ext>
             </a:extLst>
           </p:cNvPr>
-          <p:cNvPicPr/>
-          <p:nvPr/>
-        </p:nvPicPr>
-        <p:blipFill>
-          <a:blip r:embed="rId3"/>
-          <a:stretch>
-            <a:fillRect/>
-          </a:stretch>
-        </p:blipFill>
+          <p:cNvSpPr>
+            <a:spLocks noGrp="1" noRot="1" noChangeAspect="1" noMove="1" noResize="1" noEditPoints="1" noAdjustHandles="1" noChangeArrowheads="1" noChangeShapeType="1" noTextEdit="1"/>
+          </p:cNvSpPr>
+          <p:nvPr>
+            <p:extLst>
+              <p:ext uri="{386F3935-93C4-4BCD-93E2-E3B085C9AB24}">
+                <p16:designElem xmlns:p16="http://schemas.microsoft.com/office/powerpoint/2015/main" val="1"/>
+              </p:ext>
+            </p:extLst>
+          </p:nvPr>
+        </p:nvSpPr>
         <p:spPr>
           <a:xfrm>
-            <a:off x="152400" y="4275667"/>
-            <a:ext cx="5915025" cy="758190"/>
+            <a:off x="2863235" y="565785"/>
+            <a:ext cx="2499741" cy="61722"/>
           </a:xfrm>
           <a:prstGeom prst="rect">
             <a:avLst/>
           </a:prstGeom>
-        </p:spPr>
-      </p:pic>
-      <p:cxnSp>
-        <p:nvCxnSpPr>
-          <p:cNvPr id="7" name="Straight Connector 6">
+          <a:solidFill>
+            <a:schemeClr val="accent1"/>
+          </a:solidFill>
+          <a:ln>
+            <a:noFill/>
+          </a:ln>
+          <a:effectLst/>
+        </p:spPr>
+        <p:style>
+          <a:lnRef idx="1">
+            <a:schemeClr val="accent1"/>
+          </a:lnRef>
+          <a:fillRef idx="3">
+            <a:schemeClr val="accent1"/>
+          </a:fillRef>
+          <a:effectRef idx="2">
+            <a:schemeClr val="accent1"/>
+          </a:effectRef>
+          <a:fontRef idx="minor">
+            <a:schemeClr val="lt1"/>
+          </a:fontRef>
+        </p:style>
+        <p:txBody>
+          <a:bodyPr/>
+          <a:lstStyle/>
+          <a:p>
+            <a:pPr marL="0" marR="0" lvl="0" indent="0" algn="l" defTabSz="308610" rtl="0" eaLnBrk="1" fontAlgn="auto" latinLnBrk="0" hangingPunct="1">
+              <a:lnSpc>
+                <a:spcPct val="100000"/>
+              </a:lnSpc>
+              <a:spcBef>
+                <a:spcPts val="0"/>
+              </a:spcBef>
+              <a:spcAft>
+                <a:spcPts val="0"/>
+              </a:spcAft>
+              <a:buClrTx/>
+              <a:buSzTx/>
+              <a:buFontTx/>
+              <a:buNone/>
+              <a:tabLst/>
+              <a:defRPr/>
+            </a:pPr>
+            <a:endParaRPr kumimoji="0" lang="en-US" sz="1215" b="0" i="0" u="none" strike="noStrike" kern="1200" cap="none" spc="0" normalizeH="0" baseline="0" noProof="0">
+              <a:ln>
+                <a:noFill/>
+              </a:ln>
+              <a:solidFill>
+                <a:srgbClr val="FFFFFF"/>
+              </a:solidFill>
+              <a:effectLst/>
+              <a:uLnTx/>
+              <a:uFillTx/>
+              <a:latin typeface="Calibri"/>
+              <a:ea typeface="+mn-ea"/>
+              <a:cs typeface="+mn-cs"/>
+            </a:endParaRPr>
+          </a:p>
+        </p:txBody>
+      </p:sp>
+      <p:sp>
+        <p:nvSpPr>
+          <p:cNvPr id="42" name="Rectangle 41">
             <a:extLst>
               <a:ext uri="{FF2B5EF4-FFF2-40B4-BE49-F238E27FC236}">
-                <a16:creationId xmlns:a16="http://schemas.microsoft.com/office/drawing/2014/main" id="{5ADF13BC-3A5F-4415-94E6-85FAF42998C9}"/>
+                <a16:creationId xmlns:a16="http://schemas.microsoft.com/office/drawing/2014/main" id="{7539E646-A625-4A26-86ED-BD90EDD329F7}"/>
+              </a:ext>
+              <a:ext uri="{C183D7F6-B498-43B3-948B-1728B52AA6E4}">
+                <adec:decorative xmlns:adec="http://schemas.microsoft.com/office/drawing/2017/decorative" val="1"/>
               </a:ext>
             </a:extLst>
           </p:cNvPr>
-          <p:cNvCxnSpPr/>
-          <p:nvPr/>
-        </p:nvCxnSpPr>
+          <p:cNvSpPr>
+            <a:spLocks noGrp="1" noRot="1" noChangeAspect="1" noMove="1" noResize="1" noEditPoints="1" noAdjustHandles="1" noChangeArrowheads="1" noChangeShapeType="1" noTextEdit="1"/>
+          </p:cNvSpPr>
+          <p:nvPr>
+            <p:extLst>
+              <p:ext uri="{386F3935-93C4-4BCD-93E2-E3B085C9AB24}">
+                <p16:designElem xmlns:p16="http://schemas.microsoft.com/office/powerpoint/2015/main" val="1"/>
+              </p:ext>
+            </p:extLst>
+          </p:nvPr>
+        </p:nvSpPr>
         <p:spPr>
           <a:xfrm>
-            <a:off x="152400" y="4182575"/>
-            <a:ext cx="8001000" cy="0"/>
-          </a:xfrm>
-          <a:prstGeom prst="line">
+            <a:off x="301411" y="2340066"/>
+            <a:ext cx="7626779" cy="2253251"/>
+          </a:xfrm>
+          <a:prstGeom prst="rect">
+            <a:avLst/>
+          </a:prstGeom>
+          <a:solidFill>
+            <a:srgbClr val="465359"/>
+          </a:solidFill>
+          <a:ln>
+            <a:noFill/>
+          </a:ln>
+          <a:effectLst/>
+        </p:spPr>
+        <p:style>
+          <a:lnRef idx="1">
+            <a:schemeClr val="accent1"/>
+          </a:lnRef>
+          <a:fillRef idx="3">
+            <a:schemeClr val="accent1"/>
+          </a:fillRef>
+          <a:effectRef idx="2">
+            <a:schemeClr val="accent1"/>
+          </a:effectRef>
+          <a:fontRef idx="minor">
+            <a:schemeClr val="lt1"/>
+          </a:fontRef>
+        </p:style>
+        <p:txBody>
+          <a:bodyPr/>
+          <a:lstStyle/>
+          <a:p>
+            <a:pPr marL="0" marR="0" lvl="0" indent="0" algn="l" defTabSz="308610" rtl="0" eaLnBrk="1" fontAlgn="auto" latinLnBrk="0" hangingPunct="1">
+              <a:lnSpc>
+                <a:spcPct val="100000"/>
+              </a:lnSpc>
+              <a:spcBef>
+                <a:spcPts val="0"/>
+              </a:spcBef>
+              <a:spcAft>
+                <a:spcPts val="0"/>
+              </a:spcAft>
+              <a:buClrTx/>
+              <a:buSzTx/>
+              <a:buFontTx/>
+              <a:buNone/>
+              <a:tabLst/>
+              <a:defRPr/>
+            </a:pPr>
+            <a:endParaRPr kumimoji="0" lang="en-US" sz="1215" b="0" i="0" u="none" strike="noStrike" kern="1200" cap="none" spc="0" normalizeH="0" baseline="0" noProof="0">
+              <a:ln>
+                <a:noFill/>
+              </a:ln>
+              <a:solidFill>
+                <a:srgbClr val="FFFFFF"/>
+              </a:solidFill>
+              <a:effectLst/>
+              <a:uLnTx/>
+              <a:uFillTx/>
+              <a:latin typeface="Calibri"/>
+              <a:ea typeface="+mn-ea"/>
+              <a:cs typeface="+mn-cs"/>
+            </a:endParaRPr>
+          </a:p>
+        </p:txBody>
+      </p:sp>
+      <p:sp useBgFill="1">
+        <p:nvSpPr>
+          <p:cNvPr id="44" name="Rectangle 43">
+            <a:extLst>
+              <a:ext uri="{FF2B5EF4-FFF2-40B4-BE49-F238E27FC236}">
+                <a16:creationId xmlns:a16="http://schemas.microsoft.com/office/drawing/2014/main" id="{39171204-6A50-40E1-B631-84CEDFC9396A}"/>
+              </a:ext>
+              <a:ext uri="{C183D7F6-B498-43B3-948B-1728B52AA6E4}">
+                <adec:decorative xmlns:adec="http://schemas.microsoft.com/office/drawing/2017/decorative" val="1"/>
+              </a:ext>
+            </a:extLst>
+          </p:cNvPr>
+          <p:cNvSpPr>
+            <a:spLocks noGrp="1" noRot="1" noChangeAspect="1" noMove="1" noResize="1" noEditPoints="1" noAdjustHandles="1" noChangeArrowheads="1" noChangeShapeType="1" noTextEdit="1"/>
+          </p:cNvSpPr>
+          <p:nvPr>
+            <p:extLst>
+              <p:ext uri="{386F3935-93C4-4BCD-93E2-E3B085C9AB24}">
+                <p16:designElem xmlns:p16="http://schemas.microsoft.com/office/powerpoint/2015/main" val="1"/>
+              </p:ext>
+            </p:extLst>
+          </p:nvPr>
+        </p:nvSpPr>
+        <p:spPr>
+          <a:xfrm>
+            <a:off x="0" y="257175"/>
+            <a:ext cx="8229600" cy="4629150"/>
+          </a:xfrm>
+          <a:prstGeom prst="rect">
             <a:avLst/>
           </a:prstGeom>
           <a:ln>
-            <a:solidFill>
-              <a:schemeClr val="tx1"/>
-            </a:solidFill>
+            <a:noFill/>
           </a:ln>
-          <a:effectLst/>
         </p:spPr>
         <p:style>
           <a:lnRef idx="2">
-            <a:schemeClr val="accent1"/>
+            <a:schemeClr val="accent1">
+              <a:shade val="50000"/>
+            </a:schemeClr>
           </a:lnRef>
-          <a:fillRef idx="0">
+          <a:fillRef idx="1">
             <a:schemeClr val="accent1"/>
           </a:fillRef>
-          <a:effectRef idx="1">
+          <a:effectRef idx="0">
             <a:schemeClr val="accent1"/>
           </a:effectRef>
           <a:fontRef idx="minor">
-            <a:schemeClr val="tx1"/>
+            <a:schemeClr val="lt1"/>
           </a:fontRef>
         </p:style>
-      </p:cxnSp>
+        <p:txBody>
+          <a:bodyPr rtlCol="0" anchor="ctr"/>
+          <a:lstStyle/>
+          <a:p>
+            <a:pPr marL="0" marR="0" lvl="0" indent="0" algn="ctr" defTabSz="308610" rtl="0" eaLnBrk="1" fontAlgn="auto" latinLnBrk="0" hangingPunct="1">
+              <a:lnSpc>
+                <a:spcPct val="100000"/>
+              </a:lnSpc>
+              <a:spcBef>
+                <a:spcPts val="0"/>
+              </a:spcBef>
+              <a:spcAft>
+                <a:spcPts val="0"/>
+              </a:spcAft>
+              <a:buClrTx/>
+              <a:buSzTx/>
+              <a:buFontTx/>
+              <a:buNone/>
+              <a:tabLst/>
+              <a:defRPr/>
+            </a:pPr>
+            <a:endParaRPr kumimoji="0" lang="en-US" sz="1215" b="0" i="0" u="none" strike="noStrike" kern="1200" cap="none" spc="0" normalizeH="0" baseline="0" noProof="0">
+              <a:ln>
+                <a:noFill/>
+              </a:ln>
+              <a:solidFill>
+                <a:srgbClr val="FFFFFF"/>
+              </a:solidFill>
+              <a:effectLst/>
+              <a:uLnTx/>
+              <a:uFillTx/>
+              <a:latin typeface="Calibri"/>
+              <a:ea typeface="+mn-ea"/>
+              <a:cs typeface="+mn-cs"/>
+            </a:endParaRPr>
+          </a:p>
+        </p:txBody>
+      </p:sp>
+      <p:sp>
+        <p:nvSpPr>
+          <p:cNvPr id="46" name="Rectangle 45">
+            <a:extLst>
+              <a:ext uri="{FF2B5EF4-FFF2-40B4-BE49-F238E27FC236}">
+                <a16:creationId xmlns:a16="http://schemas.microsoft.com/office/drawing/2014/main" id="{06C973F6-5187-412F-AACC-6E3FF8A6A12C}"/>
+              </a:ext>
+              <a:ext uri="{C183D7F6-B498-43B3-948B-1728B52AA6E4}">
+                <adec:decorative xmlns:adec="http://schemas.microsoft.com/office/drawing/2017/decorative" val="1"/>
+              </a:ext>
+            </a:extLst>
+          </p:cNvPr>
+          <p:cNvSpPr>
+            <a:spLocks noGrp="1" noRot="1" noChangeAspect="1" noMove="1" noResize="1" noEditPoints="1" noAdjustHandles="1" noChangeArrowheads="1" noChangeShapeType="1" noTextEdit="1"/>
+          </p:cNvSpPr>
+          <p:nvPr>
+            <p:extLst>
+              <p:ext uri="{386F3935-93C4-4BCD-93E2-E3B085C9AB24}">
+                <p16:designElem xmlns:p16="http://schemas.microsoft.com/office/powerpoint/2015/main" val="1"/>
+              </p:ext>
+            </p:extLst>
+          </p:nvPr>
+        </p:nvSpPr>
+        <p:spPr>
+          <a:xfrm>
+            <a:off x="343999" y="592623"/>
+            <a:ext cx="746661" cy="3955321"/>
+          </a:xfrm>
+          <a:prstGeom prst="rect">
+            <a:avLst/>
+          </a:prstGeom>
+          <a:solidFill>
+            <a:srgbClr val="465359"/>
+          </a:solidFill>
+          <a:ln>
+            <a:noFill/>
+          </a:ln>
+          <a:effectLst/>
+        </p:spPr>
+        <p:style>
+          <a:lnRef idx="1">
+            <a:schemeClr val="accent1"/>
+          </a:lnRef>
+          <a:fillRef idx="3">
+            <a:schemeClr val="accent1"/>
+          </a:fillRef>
+          <a:effectRef idx="2">
+            <a:schemeClr val="accent1"/>
+          </a:effectRef>
+          <a:fontRef idx="minor">
+            <a:schemeClr val="lt1"/>
+          </a:fontRef>
+        </p:style>
+        <p:txBody>
+          <a:bodyPr/>
+          <a:lstStyle/>
+          <a:p>
+            <a:pPr marL="0" marR="0" lvl="0" indent="0" algn="l" defTabSz="308610" rtl="0" eaLnBrk="1" fontAlgn="auto" latinLnBrk="0" hangingPunct="1">
+              <a:lnSpc>
+                <a:spcPct val="100000"/>
+              </a:lnSpc>
+              <a:spcBef>
+                <a:spcPts val="0"/>
+              </a:spcBef>
+              <a:spcAft>
+                <a:spcPts val="0"/>
+              </a:spcAft>
+              <a:buClrTx/>
+              <a:buSzTx/>
+              <a:buFontTx/>
+              <a:buNone/>
+              <a:tabLst/>
+              <a:defRPr/>
+            </a:pPr>
+            <a:endParaRPr kumimoji="0" lang="en-US" sz="1215" b="0" i="0" u="none" strike="noStrike" kern="1200" cap="none" spc="0" normalizeH="0" baseline="0" noProof="0">
+              <a:ln>
+                <a:noFill/>
+              </a:ln>
+              <a:solidFill>
+                <a:srgbClr val="FFFFFF"/>
+              </a:solidFill>
+              <a:effectLst/>
+              <a:uLnTx/>
+              <a:uFillTx/>
+              <a:latin typeface="Calibri"/>
+              <a:ea typeface="+mn-ea"/>
+              <a:cs typeface="+mn-cs"/>
+            </a:endParaRPr>
+          </a:p>
+        </p:txBody>
+      </p:sp>
+      <p:sp>
+        <p:nvSpPr>
+          <p:cNvPr id="48" name="Rectangle 47">
+            <a:extLst>
+              <a:ext uri="{FF2B5EF4-FFF2-40B4-BE49-F238E27FC236}">
+                <a16:creationId xmlns:a16="http://schemas.microsoft.com/office/drawing/2014/main" id="{D11AE14F-1B7E-41E6-B579-2F71D135036C}"/>
+              </a:ext>
+              <a:ext uri="{C183D7F6-B498-43B3-948B-1728B52AA6E4}">
+                <adec:decorative xmlns:adec="http://schemas.microsoft.com/office/drawing/2017/decorative" val="1"/>
+              </a:ext>
+            </a:extLst>
+          </p:cNvPr>
+          <p:cNvSpPr>
+            <a:spLocks noGrp="1" noRot="1" noChangeAspect="1" noMove="1" noResize="1" noEditPoints="1" noAdjustHandles="1" noChangeArrowheads="1" noChangeShapeType="1" noTextEdit="1"/>
+          </p:cNvSpPr>
+          <p:nvPr>
+            <p:extLst>
+              <p:ext uri="{386F3935-93C4-4BCD-93E2-E3B085C9AB24}">
+                <p16:designElem xmlns:p16="http://schemas.microsoft.com/office/powerpoint/2015/main" val="1"/>
+              </p:ext>
+            </p:extLst>
+          </p:nvPr>
+        </p:nvSpPr>
+        <p:spPr>
+          <a:xfrm>
+            <a:off x="1156178" y="592621"/>
+            <a:ext cx="6723707" cy="2482699"/>
+          </a:xfrm>
+          <a:prstGeom prst="rect">
+            <a:avLst/>
+          </a:prstGeom>
+          <a:solidFill>
+            <a:schemeClr val="accent1"/>
+          </a:solidFill>
+          <a:ln>
+            <a:noFill/>
+          </a:ln>
+          <a:effectLst/>
+        </p:spPr>
+        <p:style>
+          <a:lnRef idx="1">
+            <a:schemeClr val="accent1"/>
+          </a:lnRef>
+          <a:fillRef idx="3">
+            <a:schemeClr val="accent1"/>
+          </a:fillRef>
+          <a:effectRef idx="2">
+            <a:schemeClr val="accent1"/>
+          </a:effectRef>
+          <a:fontRef idx="minor">
+            <a:schemeClr val="lt1"/>
+          </a:fontRef>
+        </p:style>
+        <p:txBody>
+          <a:bodyPr/>
+          <a:lstStyle/>
+          <a:p>
+            <a:pPr marL="0" marR="0" lvl="0" indent="0" algn="l" defTabSz="308610" rtl="0" eaLnBrk="1" fontAlgn="auto" latinLnBrk="0" hangingPunct="1">
+              <a:lnSpc>
+                <a:spcPct val="100000"/>
+              </a:lnSpc>
+              <a:spcBef>
+                <a:spcPts val="0"/>
+              </a:spcBef>
+              <a:spcAft>
+                <a:spcPts val="0"/>
+              </a:spcAft>
+              <a:buClrTx/>
+              <a:buSzTx/>
+              <a:buFontTx/>
+              <a:buNone/>
+              <a:tabLst/>
+              <a:defRPr/>
+            </a:pPr>
+            <a:endParaRPr kumimoji="0" lang="en-US" sz="1215" b="0" i="0" u="none" strike="noStrike" kern="1200" cap="none" spc="0" normalizeH="0" baseline="0" noProof="0">
+              <a:ln>
+                <a:noFill/>
+              </a:ln>
+              <a:solidFill>
+                <a:srgbClr val="FFFFFF"/>
+              </a:solidFill>
+              <a:effectLst/>
+              <a:uLnTx/>
+              <a:uFillTx/>
+              <a:latin typeface="Calibri"/>
+              <a:ea typeface="+mn-ea"/>
+              <a:cs typeface="+mn-cs"/>
+            </a:endParaRPr>
+          </a:p>
+        </p:txBody>
+      </p:sp>
+      <p:sp>
+        <p:nvSpPr>
+          <p:cNvPr id="2" name="Title 1">
+            <a:extLst>
+              <a:ext uri="{FF2B5EF4-FFF2-40B4-BE49-F238E27FC236}">
+                <a16:creationId xmlns:a16="http://schemas.microsoft.com/office/drawing/2014/main" id="{3778BAB5-C1DE-8DAD-E76F-BECA6F24C1F4}"/>
+              </a:ext>
+            </a:extLst>
+          </p:cNvPr>
+          <p:cNvSpPr>
+            <a:spLocks noGrp="1"/>
+          </p:cNvSpPr>
+          <p:nvPr>
+            <p:ph type="title"/>
+          </p:nvPr>
+        </p:nvSpPr>
+        <p:spPr>
+          <a:xfrm>
+            <a:off x="1278258" y="735412"/>
+            <a:ext cx="6492542" cy="2247787"/>
+          </a:xfrm>
+        </p:spPr>
+        <p:txBody>
+          <a:bodyPr vert="horz" lIns="61722" tIns="30861" rIns="61722" bIns="30861" rtlCol="0" anchor="ctr">
+            <a:normAutofit/>
+          </a:bodyPr>
+          <a:lstStyle/>
+          <a:p>
+            <a:r>
+              <a:rPr lang="en-US" sz="4050" dirty="0">
+                <a:solidFill>
+                  <a:srgbClr val="FFFFFF"/>
+                </a:solidFill>
+              </a:rPr>
+              <a:t>7.2 </a:t>
+            </a:r>
+            <a:br>
+              <a:rPr lang="en-US" sz="4050" dirty="0">
+                <a:solidFill>
+                  <a:srgbClr val="FFFFFF"/>
+                </a:solidFill>
+              </a:rPr>
+            </a:br>
+            <a:r>
+              <a:rPr lang="en-US" sz="4050" dirty="0">
+                <a:solidFill>
+                  <a:srgbClr val="FFFFFF"/>
+                </a:solidFill>
+              </a:rPr>
+              <a:t>Lab session</a:t>
+            </a:r>
+          </a:p>
+        </p:txBody>
+      </p:sp>
+      <p:sp>
+        <p:nvSpPr>
+          <p:cNvPr id="50" name="Rectangle 49">
+            <a:extLst>
+              <a:ext uri="{FF2B5EF4-FFF2-40B4-BE49-F238E27FC236}">
+                <a16:creationId xmlns:a16="http://schemas.microsoft.com/office/drawing/2014/main" id="{752BB805-F7B7-4B80-A1C5-385D4DAF74D0}"/>
+              </a:ext>
+              <a:ext uri="{C183D7F6-B498-43B3-948B-1728B52AA6E4}">
+                <adec:decorative xmlns:adec="http://schemas.microsoft.com/office/drawing/2017/decorative" val="1"/>
+              </a:ext>
+            </a:extLst>
+          </p:cNvPr>
+          <p:cNvSpPr>
+            <a:spLocks noGrp="1" noRot="1" noChangeAspect="1" noMove="1" noResize="1" noEditPoints="1" noAdjustHandles="1" noChangeArrowheads="1" noChangeShapeType="1" noTextEdit="1"/>
+          </p:cNvSpPr>
+          <p:nvPr>
+            <p:extLst>
+              <p:ext uri="{386F3935-93C4-4BCD-93E2-E3B085C9AB24}">
+                <p16:designElem xmlns:p16="http://schemas.microsoft.com/office/powerpoint/2015/main" val="1"/>
+              </p:ext>
+            </p:extLst>
+          </p:nvPr>
+        </p:nvSpPr>
+        <p:spPr>
+          <a:xfrm>
+            <a:off x="1156133" y="3149018"/>
+            <a:ext cx="6723753" cy="1398925"/>
+          </a:xfrm>
+          <a:prstGeom prst="rect">
+            <a:avLst/>
+          </a:prstGeom>
+          <a:solidFill>
+            <a:srgbClr val="6C7781">
+              <a:alpha val="80000"/>
+            </a:srgbClr>
+          </a:solidFill>
+          <a:ln>
+            <a:noFill/>
+          </a:ln>
+          <a:effectLst/>
+        </p:spPr>
+        <p:style>
+          <a:lnRef idx="1">
+            <a:schemeClr val="accent1"/>
+          </a:lnRef>
+          <a:fillRef idx="3">
+            <a:schemeClr val="accent1"/>
+          </a:fillRef>
+          <a:effectRef idx="2">
+            <a:schemeClr val="accent1"/>
+          </a:effectRef>
+          <a:fontRef idx="minor">
+            <a:schemeClr val="lt1"/>
+          </a:fontRef>
+        </p:style>
+        <p:txBody>
+          <a:bodyPr/>
+          <a:lstStyle/>
+          <a:p>
+            <a:pPr marL="0" marR="0" lvl="0" indent="0" algn="l" defTabSz="308610" rtl="0" eaLnBrk="1" fontAlgn="auto" latinLnBrk="0" hangingPunct="1">
+              <a:lnSpc>
+                <a:spcPct val="100000"/>
+              </a:lnSpc>
+              <a:spcBef>
+                <a:spcPts val="0"/>
+              </a:spcBef>
+              <a:spcAft>
+                <a:spcPts val="0"/>
+              </a:spcAft>
+              <a:buClrTx/>
+              <a:buSzTx/>
+              <a:buFontTx/>
+              <a:buNone/>
+              <a:tabLst/>
+              <a:defRPr/>
+            </a:pPr>
+            <a:endParaRPr kumimoji="0" lang="en-US" sz="1215" b="0" i="0" u="none" strike="noStrike" kern="1200" cap="none" spc="0" normalizeH="0" baseline="0" noProof="0">
+              <a:ln>
+                <a:noFill/>
+              </a:ln>
+              <a:solidFill>
+                <a:srgbClr val="FFFFFF"/>
+              </a:solidFill>
+              <a:effectLst/>
+              <a:uLnTx/>
+              <a:uFillTx/>
+              <a:latin typeface="Calibri"/>
+              <a:ea typeface="+mn-ea"/>
+              <a:cs typeface="+mn-cs"/>
+            </a:endParaRPr>
+          </a:p>
+        </p:txBody>
+      </p:sp>
     </p:spTree>
     <p:extLst>
       <p:ext uri="{BB962C8B-B14F-4D97-AF65-F5344CB8AC3E}">
-        <p14:creationId xmlns:p14="http://schemas.microsoft.com/office/powerpoint/2010/main" val="2635223018"/>
+        <p14:creationId xmlns:p14="http://schemas.microsoft.com/office/powerpoint/2010/main" val="2268424521"/>
       </p:ext>
     </p:extLst>
   </p:cSld>
   <p:clrMapOvr>
     <a:masterClrMapping/>
+  </p:clrMapOvr>
+  <p:timing>
+    <p:tnLst>
+      <p:par>
+        <p:cTn id="1" dur="indefinite" restart="never" nodeType="tmRoot">
+          <p:childTnLst>
+            <p:seq concurrent="1" nextAc="seek">
+              <p:cTn id="2" dur="indefinite" nodeType="mainSeq">
+                <p:childTnLst>
+                  <p:par>
+                    <p:cTn id="3" fill="hold">
+                      <p:stCondLst>
+                        <p:cond delay="indefinite"/>
+                        <p:cond evt="onBegin" delay="0">
+                          <p:tn val="2"/>
+                        </p:cond>
+                      </p:stCondLst>
+                      <p:childTnLst>
+                        <p:par>
+                          <p:cTn id="4" fill="hold">
+                            <p:stCondLst>
+                              <p:cond delay="0"/>
+                            </p:stCondLst>
+                            <p:childTnLst>
+                              <p:par>
+                                <p:cTn id="5" presetID="10" presetClass="entr" presetSubtype="0" fill="hold" grpId="0" nodeType="withEffect">
+                                  <p:stCondLst>
+                                    <p:cond delay="500"/>
+                                  </p:stCondLst>
+                                  <p:iterate type="wd">
+                                    <p:tmPct val="15000"/>
+                                  </p:iterate>
+                                  <p:childTnLst>
+                                    <p:set>
+                                      <p:cBhvr>
+                                        <p:cTn id="6" dur="1" fill="hold">
+                                          <p:stCondLst>
+                                            <p:cond delay="0"/>
+                                          </p:stCondLst>
+                                        </p:cTn>
+                                        <p:tgtEl>
+                                          <p:spTgt spid="2"/>
+                                        </p:tgtEl>
+                                        <p:attrNameLst>
+                                          <p:attrName>style.visibility</p:attrName>
+                                        </p:attrNameLst>
+                                      </p:cBhvr>
+                                      <p:to>
+                                        <p:strVal val="visible"/>
+                                      </p:to>
+                                    </p:set>
+                                    <p:animEffect transition="in" filter="fade">
+                                      <p:cBhvr>
+                                        <p:cTn id="7" dur="1000"/>
+                                        <p:tgtEl>
+                                          <p:spTgt spid="2"/>
+                                        </p:tgtEl>
+                                      </p:cBhvr>
+                                    </p:animEffect>
+                                  </p:childTnLst>
+                                </p:cTn>
+                              </p:par>
+                            </p:childTnLst>
+                          </p:cTn>
+                        </p:par>
+                      </p:childTnLst>
+                    </p:cTn>
+                  </p:par>
+                </p:childTnLst>
+              </p:cTn>
+              <p:prevCondLst>
+                <p:cond evt="onPrev" delay="0">
+                  <p:tgtEl>
+                    <p:sldTgt/>
+                  </p:tgtEl>
+                </p:cond>
+              </p:prevCondLst>
+              <p:nextCondLst>
+                <p:cond evt="onNext" delay="0">
+                  <p:tgtEl>
+                    <p:sldTgt/>
+                  </p:tgtEl>
+                </p:cond>
+              </p:nextCondLst>
+            </p:seq>
+          </p:childTnLst>
+        </p:cTn>
+      </p:par>
+    </p:tnLst>
+    <p:bldLst>
+      <p:bldP spid="2" grpId="0"/>
+    </p:bldLst>
+  </p:timing>
+</p:sld>
+</file>
+
+<file path=ppt/slides/slide28.xml><?xml version="1.0" encoding="utf-8"?>
+<p:sld xmlns:a="http://schemas.openxmlformats.org/drawingml/2006/main" xmlns:r="http://schemas.openxmlformats.org/officeDocument/2006/relationships" xmlns:p="http://schemas.openxmlformats.org/presentationml/2006/main">
+  <p:cSld>
+    <p:bg>
+      <p:bgPr>
+        <a:solidFill>
+          <a:schemeClr val="bg1"/>
+        </a:solidFill>
+        <a:effectLst/>
+      </p:bgPr>
+    </p:bg>
+    <p:spTree>
+      <p:nvGrpSpPr>
+        <p:cNvPr id="1" name=""/>
+        <p:cNvGrpSpPr/>
+        <p:nvPr/>
+      </p:nvGrpSpPr>
+      <p:grpSpPr>
+        <a:xfrm>
+          <a:off x="0" y="0"/>
+          <a:ext cx="0" cy="0"/>
+          <a:chOff x="0" y="0"/>
+          <a:chExt cx="0" cy="0"/>
+        </a:xfrm>
+      </p:grpSpPr>
+      <p:sp>
+        <p:nvSpPr>
+          <p:cNvPr id="9" name="Rectangle 8">
+            <a:extLst>
+              <a:ext uri="{FF2B5EF4-FFF2-40B4-BE49-F238E27FC236}">
+                <a16:creationId xmlns:a16="http://schemas.microsoft.com/office/drawing/2014/main" id="{BFABBCE0-E08C-4BBE-9FD2-E2B253D4D5F2}"/>
+              </a:ext>
+              <a:ext uri="{C183D7F6-B498-43B3-948B-1728B52AA6E4}">
+                <adec:decorative xmlns:adec="http://schemas.microsoft.com/office/drawing/2017/decorative" val="1"/>
+              </a:ext>
+            </a:extLst>
+          </p:cNvPr>
+          <p:cNvSpPr>
+            <a:spLocks noGrp="1" noRot="1" noChangeAspect="1" noMove="1" noResize="1" noEditPoints="1" noAdjustHandles="1" noChangeArrowheads="1" noChangeShapeType="1" noTextEdit="1"/>
+          </p:cNvSpPr>
+          <p:nvPr>
+            <p:extLst>
+              <p:ext uri="{386F3935-93C4-4BCD-93E2-E3B085C9AB24}">
+                <p16:designElem xmlns:p16="http://schemas.microsoft.com/office/powerpoint/2015/main" val="1"/>
+              </p:ext>
+            </p:extLst>
+          </p:nvPr>
+        </p:nvSpPr>
+        <p:spPr>
+          <a:xfrm>
+            <a:off x="0" y="257176"/>
+            <a:ext cx="8229600" cy="4629149"/>
+          </a:xfrm>
+          <a:prstGeom prst="rect">
+            <a:avLst/>
+          </a:prstGeom>
+          <a:solidFill>
+            <a:schemeClr val="bg1">
+              <a:lumMod val="75000"/>
+              <a:lumOff val="25000"/>
+            </a:schemeClr>
+          </a:solidFill>
+          <a:ln>
+            <a:noFill/>
+          </a:ln>
+        </p:spPr>
+        <p:style>
+          <a:lnRef idx="2">
+            <a:schemeClr val="accent1">
+              <a:shade val="50000"/>
+            </a:schemeClr>
+          </a:lnRef>
+          <a:fillRef idx="1">
+            <a:schemeClr val="accent1"/>
+          </a:fillRef>
+          <a:effectRef idx="0">
+            <a:schemeClr val="accent1"/>
+          </a:effectRef>
+          <a:fontRef idx="minor">
+            <a:schemeClr val="lt1"/>
+          </a:fontRef>
+        </p:style>
+        <p:txBody>
+          <a:bodyPr rtlCol="0" anchor="ctr"/>
+          <a:lstStyle/>
+          <a:p>
+            <a:pPr marL="0" marR="0" lvl="0" indent="0" algn="ctr" defTabSz="308610" rtl="0" eaLnBrk="1" fontAlgn="auto" latinLnBrk="0" hangingPunct="1">
+              <a:lnSpc>
+                <a:spcPct val="100000"/>
+              </a:lnSpc>
+              <a:spcBef>
+                <a:spcPts val="0"/>
+              </a:spcBef>
+              <a:spcAft>
+                <a:spcPts val="0"/>
+              </a:spcAft>
+              <a:buClrTx/>
+              <a:buSzTx/>
+              <a:buFontTx/>
+              <a:buNone/>
+              <a:tabLst/>
+              <a:defRPr/>
+            </a:pPr>
+            <a:endParaRPr kumimoji="0" lang="en-US" sz="1215" b="0" i="0" u="none" strike="noStrike" kern="1200" cap="none" spc="0" normalizeH="0" baseline="0" noProof="0">
+              <a:ln>
+                <a:noFill/>
+              </a:ln>
+              <a:solidFill>
+                <a:prstClr val="white"/>
+              </a:solidFill>
+              <a:effectLst/>
+              <a:uLnTx/>
+              <a:uFillTx/>
+              <a:latin typeface="Gill Sans MT" panose="020B0502020104020203"/>
+              <a:ea typeface="+mn-ea"/>
+              <a:cs typeface="+mn-cs"/>
+            </a:endParaRPr>
+          </a:p>
+        </p:txBody>
+      </p:sp>
+      <p:sp>
+        <p:nvSpPr>
+          <p:cNvPr id="2" name="Title 1">
+            <a:extLst>
+              <a:ext uri="{FF2B5EF4-FFF2-40B4-BE49-F238E27FC236}">
+                <a16:creationId xmlns:a16="http://schemas.microsoft.com/office/drawing/2014/main" id="{500F975A-F937-77A1-413D-F51FF137F9AD}"/>
+              </a:ext>
+            </a:extLst>
+          </p:cNvPr>
+          <p:cNvSpPr>
+            <a:spLocks noGrp="1"/>
+          </p:cNvSpPr>
+          <p:nvPr>
+            <p:ph type="title"/>
+          </p:nvPr>
+        </p:nvSpPr>
+        <p:spPr>
+          <a:xfrm>
+            <a:off x="392417" y="865356"/>
+            <a:ext cx="7444991" cy="462049"/>
+          </a:xfrm>
+        </p:spPr>
+        <p:txBody>
+          <a:bodyPr>
+            <a:normAutofit/>
+          </a:bodyPr>
+          <a:lstStyle/>
+          <a:p>
+            <a:pPr algn="ctr">
+              <a:spcBef>
+                <a:spcPts val="0"/>
+              </a:spcBef>
+              <a:spcAft>
+                <a:spcPts val="398"/>
+              </a:spcAft>
+            </a:pPr>
+            <a:r>
+              <a:rPr lang="en-US" sz="2160" b="1" dirty="0">
+                <a:solidFill>
+                  <a:schemeClr val="tx1">
+                    <a:lumMod val="85000"/>
+                    <a:lumOff val="15000"/>
+                  </a:schemeClr>
+                </a:solidFill>
+                <a:latin typeface="+mn-lt"/>
+                <a:ea typeface="Calibri" panose="020F0502020204030204" pitchFamily="34" charset="0"/>
+                <a:cs typeface="Calibri" panose="020F0502020204030204" pitchFamily="34" charset="0"/>
+              </a:rPr>
+              <a:t>Lab 05: </a:t>
+            </a:r>
+            <a:r>
+              <a:rPr lang="en-US" b="1" dirty="0"/>
+              <a:t>standardization and classification</a:t>
+            </a:r>
+            <a:endParaRPr lang="en-US" sz="2160" dirty="0">
+              <a:solidFill>
+                <a:schemeClr val="tx1">
+                  <a:lumMod val="85000"/>
+                  <a:lumOff val="15000"/>
+                </a:schemeClr>
+              </a:solidFill>
+              <a:latin typeface="+mn-lt"/>
+              <a:ea typeface="Calibri" panose="020F0502020204030204" pitchFamily="34" charset="0"/>
+              <a:cs typeface="Calibri" panose="020F0502020204030204" pitchFamily="34" charset="0"/>
+            </a:endParaRPr>
+          </a:p>
+        </p:txBody>
+      </p:sp>
+      <p:sp>
+        <p:nvSpPr>
+          <p:cNvPr id="11" name="Rectangle 10">
+            <a:extLst>
+              <a:ext uri="{FF2B5EF4-FFF2-40B4-BE49-F238E27FC236}">
+                <a16:creationId xmlns:a16="http://schemas.microsoft.com/office/drawing/2014/main" id="{FF426BAC-43D6-468E-B6FF-167034D5CE43}"/>
+              </a:ext>
+              <a:ext uri="{C183D7F6-B498-43B3-948B-1728B52AA6E4}">
+                <adec:decorative xmlns:adec="http://schemas.microsoft.com/office/drawing/2017/decorative" val="1"/>
+              </a:ext>
+            </a:extLst>
+          </p:cNvPr>
+          <p:cNvSpPr>
+            <a:spLocks noGrp="1" noRot="1" noChangeAspect="1" noMove="1" noResize="1" noEditPoints="1" noAdjustHandles="1" noChangeArrowheads="1" noChangeShapeType="1" noTextEdit="1"/>
+          </p:cNvSpPr>
+          <p:nvPr>
+            <p:extLst>
+              <p:ext uri="{386F3935-93C4-4BCD-93E2-E3B085C9AB24}">
+                <p16:designElem xmlns:p16="http://schemas.microsoft.com/office/powerpoint/2015/main" val="1"/>
+              </p:ext>
+            </p:extLst>
+          </p:nvPr>
+        </p:nvSpPr>
+        <p:spPr>
+          <a:xfrm>
+            <a:off x="301410" y="565785"/>
+            <a:ext cx="2499741" cy="64123"/>
+          </a:xfrm>
+          <a:prstGeom prst="rect">
+            <a:avLst/>
+          </a:prstGeom>
+          <a:solidFill>
+            <a:srgbClr val="60727A"/>
+          </a:solidFill>
+          <a:ln>
+            <a:noFill/>
+          </a:ln>
+          <a:effectLst/>
+        </p:spPr>
+        <p:style>
+          <a:lnRef idx="1">
+            <a:schemeClr val="accent1"/>
+          </a:lnRef>
+          <a:fillRef idx="3">
+            <a:schemeClr val="accent1"/>
+          </a:fillRef>
+          <a:effectRef idx="2">
+            <a:schemeClr val="accent1"/>
+          </a:effectRef>
+          <a:fontRef idx="minor">
+            <a:schemeClr val="lt1"/>
+          </a:fontRef>
+        </p:style>
+        <p:txBody>
+          <a:bodyPr/>
+          <a:lstStyle/>
+          <a:p>
+            <a:pPr marL="0" marR="0" lvl="0" indent="0" algn="l" defTabSz="617220" rtl="0" eaLnBrk="1" fontAlgn="auto" latinLnBrk="0" hangingPunct="1">
+              <a:lnSpc>
+                <a:spcPct val="100000"/>
+              </a:lnSpc>
+              <a:spcBef>
+                <a:spcPts val="0"/>
+              </a:spcBef>
+              <a:spcAft>
+                <a:spcPts val="0"/>
+              </a:spcAft>
+              <a:buClrTx/>
+              <a:buSzTx/>
+              <a:buFontTx/>
+              <a:buNone/>
+              <a:tabLst/>
+              <a:defRPr/>
+            </a:pPr>
+            <a:endParaRPr kumimoji="0" lang="en-US" sz="1215" b="0" i="0" u="none" strike="noStrike" kern="1200" cap="none" spc="0" normalizeH="0" baseline="0" noProof="0">
+              <a:ln>
+                <a:noFill/>
+              </a:ln>
+              <a:solidFill>
+                <a:srgbClr val="FFFFFF"/>
+              </a:solidFill>
+              <a:effectLst/>
+              <a:uLnTx/>
+              <a:uFillTx/>
+              <a:latin typeface="Calibri"/>
+              <a:ea typeface="+mn-ea"/>
+              <a:cs typeface="+mn-cs"/>
+            </a:endParaRPr>
+          </a:p>
+        </p:txBody>
+      </p:sp>
+      <p:sp>
+        <p:nvSpPr>
+          <p:cNvPr id="13" name="Rectangle 12">
+            <a:extLst>
+              <a:ext uri="{FF2B5EF4-FFF2-40B4-BE49-F238E27FC236}">
+                <a16:creationId xmlns:a16="http://schemas.microsoft.com/office/drawing/2014/main" id="{FB02D80E-5995-4C54-8387-5893C2C89473}"/>
+              </a:ext>
+              <a:ext uri="{C183D7F6-B498-43B3-948B-1728B52AA6E4}">
+                <adec:decorative xmlns:adec="http://schemas.microsoft.com/office/drawing/2017/decorative" val="1"/>
+              </a:ext>
+            </a:extLst>
+          </p:cNvPr>
+          <p:cNvSpPr>
+            <a:spLocks noGrp="1" noRot="1" noChangeAspect="1" noMove="1" noResize="1" noEditPoints="1" noAdjustHandles="1" noChangeArrowheads="1" noChangeShapeType="1" noTextEdit="1"/>
+          </p:cNvSpPr>
+          <p:nvPr>
+            <p:extLst>
+              <p:ext uri="{386F3935-93C4-4BCD-93E2-E3B085C9AB24}">
+                <p16:designElem xmlns:p16="http://schemas.microsoft.com/office/powerpoint/2015/main" val="1"/>
+              </p:ext>
+            </p:extLst>
+          </p:nvPr>
+        </p:nvSpPr>
+        <p:spPr>
+          <a:xfrm>
+            <a:off x="2863235" y="565785"/>
+            <a:ext cx="2499741" cy="61722"/>
+          </a:xfrm>
+          <a:prstGeom prst="rect">
+            <a:avLst/>
+          </a:prstGeom>
+          <a:solidFill>
+            <a:schemeClr val="accent1"/>
+          </a:solidFill>
+          <a:ln>
+            <a:noFill/>
+          </a:ln>
+          <a:effectLst/>
+        </p:spPr>
+        <p:style>
+          <a:lnRef idx="1">
+            <a:schemeClr val="accent1"/>
+          </a:lnRef>
+          <a:fillRef idx="3">
+            <a:schemeClr val="accent1"/>
+          </a:fillRef>
+          <a:effectRef idx="2">
+            <a:schemeClr val="accent1"/>
+          </a:effectRef>
+          <a:fontRef idx="minor">
+            <a:schemeClr val="lt1"/>
+          </a:fontRef>
+        </p:style>
+        <p:txBody>
+          <a:bodyPr/>
+          <a:lstStyle/>
+          <a:p>
+            <a:pPr marL="0" marR="0" lvl="0" indent="0" algn="l" defTabSz="617220" rtl="0" eaLnBrk="1" fontAlgn="auto" latinLnBrk="0" hangingPunct="1">
+              <a:lnSpc>
+                <a:spcPct val="100000"/>
+              </a:lnSpc>
+              <a:spcBef>
+                <a:spcPts val="0"/>
+              </a:spcBef>
+              <a:spcAft>
+                <a:spcPts val="0"/>
+              </a:spcAft>
+              <a:buClrTx/>
+              <a:buSzTx/>
+              <a:buFontTx/>
+              <a:buNone/>
+              <a:tabLst/>
+              <a:defRPr/>
+            </a:pPr>
+            <a:endParaRPr kumimoji="0" lang="en-US" sz="1215" b="0" i="0" u="none" strike="noStrike" kern="1200" cap="none" spc="0" normalizeH="0" baseline="0" noProof="0">
+              <a:ln>
+                <a:noFill/>
+              </a:ln>
+              <a:solidFill>
+                <a:srgbClr val="FFFFFF"/>
+              </a:solidFill>
+              <a:effectLst/>
+              <a:uLnTx/>
+              <a:uFillTx/>
+              <a:latin typeface="Calibri"/>
+              <a:ea typeface="+mn-ea"/>
+              <a:cs typeface="+mn-cs"/>
+            </a:endParaRPr>
+          </a:p>
+        </p:txBody>
+      </p:sp>
+      <p:sp>
+        <p:nvSpPr>
+          <p:cNvPr id="15" name="Rectangle 14">
+            <a:extLst>
+              <a:ext uri="{FF2B5EF4-FFF2-40B4-BE49-F238E27FC236}">
+                <a16:creationId xmlns:a16="http://schemas.microsoft.com/office/drawing/2014/main" id="{896083C8-1401-4950-AF56-E2FAFE42D656}"/>
+              </a:ext>
+              <a:ext uri="{C183D7F6-B498-43B3-948B-1728B52AA6E4}">
+                <adec:decorative xmlns:adec="http://schemas.microsoft.com/office/drawing/2017/decorative" val="1"/>
+              </a:ext>
+            </a:extLst>
+          </p:cNvPr>
+          <p:cNvSpPr>
+            <a:spLocks noGrp="1" noRot="1" noChangeAspect="1" noMove="1" noResize="1" noEditPoints="1" noAdjustHandles="1" noChangeArrowheads="1" noChangeShapeType="1" noTextEdit="1"/>
+          </p:cNvSpPr>
+          <p:nvPr>
+            <p:extLst>
+              <p:ext uri="{386F3935-93C4-4BCD-93E2-E3B085C9AB24}">
+                <p16:designElem xmlns:p16="http://schemas.microsoft.com/office/powerpoint/2015/main" val="1"/>
+              </p:ext>
+            </p:extLst>
+          </p:nvPr>
+        </p:nvSpPr>
+        <p:spPr>
+          <a:xfrm>
+            <a:off x="5428449" y="563384"/>
+            <a:ext cx="2499741" cy="66524"/>
+          </a:xfrm>
+          <a:prstGeom prst="rect">
+            <a:avLst/>
+          </a:prstGeom>
+          <a:solidFill>
+            <a:srgbClr val="969FA7"/>
+          </a:solidFill>
+          <a:ln>
+            <a:noFill/>
+          </a:ln>
+          <a:effectLst/>
+        </p:spPr>
+        <p:style>
+          <a:lnRef idx="1">
+            <a:schemeClr val="accent1"/>
+          </a:lnRef>
+          <a:fillRef idx="3">
+            <a:schemeClr val="accent1"/>
+          </a:fillRef>
+          <a:effectRef idx="2">
+            <a:schemeClr val="accent1"/>
+          </a:effectRef>
+          <a:fontRef idx="minor">
+            <a:schemeClr val="lt1"/>
+          </a:fontRef>
+        </p:style>
+        <p:txBody>
+          <a:bodyPr/>
+          <a:lstStyle/>
+          <a:p>
+            <a:pPr marL="0" marR="0" lvl="0" indent="0" algn="l" defTabSz="617220" rtl="0" eaLnBrk="1" fontAlgn="auto" latinLnBrk="0" hangingPunct="1">
+              <a:lnSpc>
+                <a:spcPct val="100000"/>
+              </a:lnSpc>
+              <a:spcBef>
+                <a:spcPts val="0"/>
+              </a:spcBef>
+              <a:spcAft>
+                <a:spcPts val="0"/>
+              </a:spcAft>
+              <a:buClrTx/>
+              <a:buSzTx/>
+              <a:buFontTx/>
+              <a:buNone/>
+              <a:tabLst/>
+              <a:defRPr/>
+            </a:pPr>
+            <a:endParaRPr kumimoji="0" lang="en-US" sz="1215" b="0" i="0" u="none" strike="noStrike" kern="1200" cap="none" spc="0" normalizeH="0" baseline="0" noProof="0">
+              <a:ln>
+                <a:noFill/>
+              </a:ln>
+              <a:solidFill>
+                <a:srgbClr val="FFFFFF"/>
+              </a:solidFill>
+              <a:effectLst/>
+              <a:uLnTx/>
+              <a:uFillTx/>
+              <a:latin typeface="Calibri"/>
+              <a:ea typeface="+mn-ea"/>
+              <a:cs typeface="+mn-cs"/>
+            </a:endParaRPr>
+          </a:p>
+        </p:txBody>
+      </p:sp>
+      <p:graphicFrame>
+        <p:nvGraphicFramePr>
+          <p:cNvPr id="5" name="Content Placeholder 2">
+            <a:extLst>
+              <a:ext uri="{FF2B5EF4-FFF2-40B4-BE49-F238E27FC236}">
+                <a16:creationId xmlns:a16="http://schemas.microsoft.com/office/drawing/2014/main" id="{F61B7E67-130C-FD82-8132-74DBD62B80A6}"/>
+              </a:ext>
+            </a:extLst>
+          </p:cNvPr>
+          <p:cNvGraphicFramePr>
+            <a:graphicFrameLocks noGrp="1"/>
+          </p:cNvGraphicFramePr>
+          <p:nvPr>
+            <p:ph idx="1"/>
+          </p:nvPr>
+        </p:nvGraphicFramePr>
+        <p:xfrm>
+          <a:off x="392192" y="1837730"/>
+          <a:ext cx="7445216" cy="2574640"/>
+        </p:xfrm>
+        <a:graphic>
+          <a:graphicData uri="http://schemas.openxmlformats.org/drawingml/2006/diagram">
+            <dgm:relIds xmlns:dgm="http://schemas.openxmlformats.org/drawingml/2006/diagram" xmlns:r="http://schemas.openxmlformats.org/officeDocument/2006/relationships" r:dm="rId3" r:lo="rId4" r:qs="rId5" r:cs="rId6"/>
+          </a:graphicData>
+        </a:graphic>
+      </p:graphicFrame>
+    </p:spTree>
+    <p:extLst>
+      <p:ext uri="{BB962C8B-B14F-4D97-AF65-F5344CB8AC3E}">
+        <p14:creationId xmlns:p14="http://schemas.microsoft.com/office/powerpoint/2010/main" val="18827850"/>
+      </p:ext>
+    </p:extLst>
+  </p:cSld>
+  <p:clrMapOvr>
+    <a:overrideClrMapping bg1="dk1" tx1="lt1" bg2="dk2" tx2="lt2" accent1="accent1" accent2="accent2" accent3="accent3" accent4="accent4" accent5="accent5" accent6="accent6" hlink="hlink" folHlink="folHlink"/>
   </p:clrMapOvr>
 </p:sld>
 </file>
